--- a/report/20260826_KRAFTON_DB_Benchmark_v2.pptx
+++ b/report/20260826_KRAFTON_DB_Benchmark_v2.pptx
@@ -5,32 +5,32 @@
     <p:sldMasterId id="2147483648" r:id="rId1"/>
   </p:sldMasterIdLst>
   <p:sldIdLst>
-    <p:sldId id="256" r:id="rId7"/>
-    <p:sldId id="257" r:id="rId8"/>
-    <p:sldId id="258" r:id="rId9"/>
-    <p:sldId id="259" r:id="rId10"/>
-    <p:sldId id="260" r:id="rId11"/>
-    <p:sldId id="261" r:id="rId12"/>
-    <p:sldId id="262" r:id="rId13"/>
-    <p:sldId id="263" r:id="rId14"/>
-    <p:sldId id="264" r:id="rId15"/>
-    <p:sldId id="265" r:id="rId16"/>
-    <p:sldId id="266" r:id="rId17"/>
-    <p:sldId id="267" r:id="rId18"/>
-    <p:sldId id="268" r:id="rId19"/>
-    <p:sldId id="269" r:id="rId20"/>
-    <p:sldId id="270" r:id="rId21"/>
-    <p:sldId id="271" r:id="rId22"/>
-    <p:sldId id="272" r:id="rId23"/>
-    <p:sldId id="273" r:id="rId24"/>
-    <p:sldId id="274" r:id="rId25"/>
-    <p:sldId id="275" r:id="rId26"/>
-    <p:sldId id="276" r:id="rId27"/>
-    <p:sldId id="277" r:id="rId28"/>
-    <p:sldId id="278" r:id="rId29"/>
-    <p:sldId id="279" r:id="rId30"/>
+    <p:sldId id="256" r:id="rId2"/>
+    <p:sldId id="257" r:id="rId3"/>
+    <p:sldId id="258" r:id="rId4"/>
+    <p:sldId id="259" r:id="rId5"/>
+    <p:sldId id="260" r:id="rId6"/>
+    <p:sldId id="261" r:id="rId7"/>
+    <p:sldId id="262" r:id="rId8"/>
+    <p:sldId id="263" r:id="rId9"/>
+    <p:sldId id="264" r:id="rId10"/>
+    <p:sldId id="265" r:id="rId11"/>
+    <p:sldId id="266" r:id="rId12"/>
+    <p:sldId id="267" r:id="rId13"/>
+    <p:sldId id="268" r:id="rId14"/>
+    <p:sldId id="269" r:id="rId15"/>
+    <p:sldId id="270" r:id="rId16"/>
+    <p:sldId id="271" r:id="rId17"/>
+    <p:sldId id="272" r:id="rId18"/>
+    <p:sldId id="273" r:id="rId19"/>
+    <p:sldId id="274" r:id="rId20"/>
+    <p:sldId id="275" r:id="rId21"/>
+    <p:sldId id="276" r:id="rId22"/>
+    <p:sldId id="277" r:id="rId23"/>
+    <p:sldId id="278" r:id="rId24"/>
+    <p:sldId id="279" r:id="rId25"/>
   </p:sldIdLst>
-  <p:sldSz cx="12191695" cy="6858000" type="screen4x3"/>
+  <p:sldSz cx="12192000" cy="6858000"/>
   <p:notesSz cx="6858000" cy="9144000"/>
   <p:defaultTextStyle>
     <a:defPPr>
@@ -127,6 +127,22 @@
       </a:defRPr>
     </a:lvl9pPr>
   </p:defaultTextStyle>
+  <p:extLst>
+    <p:ext uri="{EFAFB233-063F-42B5-8137-9DF3F51BA10A}">
+      <p15:sldGuideLst xmlns:p15="http://schemas.microsoft.com/office/powerpoint/2012/main">
+        <p15:guide id="1" orient="horz" pos="2160">
+          <p15:clr>
+            <a:srgbClr val="A4A3A4"/>
+          </p15:clr>
+        </p15:guide>
+        <p15:guide id="2" pos="2880">
+          <p15:clr>
+            <a:srgbClr val="A4A3A4"/>
+          </p15:clr>
+        </p15:guide>
+      </p15:sldGuideLst>
+    </p:ext>
+  </p:extLst>
 </p:presentation>
 </file>
 
@@ -168,10 +184,9 @@
           <a:lstStyle/>
           <a:p>
             <a:r>
-              <a:rPr lang="en-US" smtClean="0"/>
+              <a:rPr lang="en-US"/>
               <a:t>Click to edit Master title style</a:t>
             </a:r>
-            <a:endParaRPr lang="en-US"/>
           </a:p>
         </p:txBody>
       </p:sp>
@@ -287,10 +302,9 @@
           </a:lstStyle>
           <a:p>
             <a:r>
-              <a:rPr lang="en-US" smtClean="0"/>
+              <a:rPr lang="en-US"/>
               <a:t>Click to edit Master subtitle style</a:t>
             </a:r>
-            <a:endParaRPr lang="en-US"/>
           </a:p>
         </p:txBody>
       </p:sp>
@@ -311,7 +325,7 @@
           <a:p>
             <a:fld id="{5BCAD085-E8A6-8845-BD4E-CB4CCA059FC4}" type="datetimeFigureOut">
               <a:rPr lang="en-US" smtClean="0"/>
-              <a:t>1/27/13</a:t>
+              <a:t>9/2/2026</a:t>
             </a:fld>
             <a:endParaRPr lang="en-US"/>
           </a:p>
@@ -405,10 +419,9 @@
           <a:lstStyle/>
           <a:p>
             <a:r>
-              <a:rPr lang="en-US" smtClean="0"/>
+              <a:rPr lang="en-US"/>
               <a:t>Click to edit Master title style</a:t>
             </a:r>
-            <a:endParaRPr lang="en-US"/>
           </a:p>
         </p:txBody>
       </p:sp>
@@ -429,38 +442,37 @@
           <a:p>
             <a:pPr lvl="0"/>
             <a:r>
-              <a:rPr lang="en-US" smtClean="0"/>
+              <a:rPr lang="en-US"/>
               <a:t>Click to edit Master text styles</a:t>
             </a:r>
           </a:p>
           <a:p>
             <a:pPr lvl="1"/>
             <a:r>
-              <a:rPr lang="en-US" smtClean="0"/>
+              <a:rPr lang="en-US"/>
               <a:t>Second level</a:t>
             </a:r>
           </a:p>
           <a:p>
             <a:pPr lvl="2"/>
             <a:r>
-              <a:rPr lang="en-US" smtClean="0"/>
+              <a:rPr lang="en-US"/>
               <a:t>Third level</a:t>
             </a:r>
           </a:p>
           <a:p>
             <a:pPr lvl="3"/>
             <a:r>
-              <a:rPr lang="en-US" smtClean="0"/>
+              <a:rPr lang="en-US"/>
               <a:t>Fourth level</a:t>
             </a:r>
           </a:p>
           <a:p>
             <a:pPr lvl="4"/>
             <a:r>
-              <a:rPr lang="en-US" smtClean="0"/>
+              <a:rPr lang="en-US"/>
               <a:t>Fifth level</a:t>
             </a:r>
-            <a:endParaRPr lang="en-US"/>
           </a:p>
         </p:txBody>
       </p:sp>
@@ -481,7 +493,7 @@
           <a:p>
             <a:fld id="{5BCAD085-E8A6-8845-BD4E-CB4CCA059FC4}" type="datetimeFigureOut">
               <a:rPr lang="en-US" smtClean="0"/>
-              <a:t>1/27/13</a:t>
+              <a:t>9/2/2026</a:t>
             </a:fld>
             <a:endParaRPr lang="en-US"/>
           </a:p>
@@ -580,10 +592,9 @@
           <a:lstStyle/>
           <a:p>
             <a:r>
-              <a:rPr lang="en-US" smtClean="0"/>
+              <a:rPr lang="en-US"/>
               <a:t>Click to edit Master title style</a:t>
             </a:r>
-            <a:endParaRPr lang="en-US"/>
           </a:p>
         </p:txBody>
       </p:sp>
@@ -609,38 +620,37 @@
           <a:p>
             <a:pPr lvl="0"/>
             <a:r>
-              <a:rPr lang="en-US" smtClean="0"/>
+              <a:rPr lang="en-US"/>
               <a:t>Click to edit Master text styles</a:t>
             </a:r>
           </a:p>
           <a:p>
             <a:pPr lvl="1"/>
             <a:r>
-              <a:rPr lang="en-US" smtClean="0"/>
+              <a:rPr lang="en-US"/>
               <a:t>Second level</a:t>
             </a:r>
           </a:p>
           <a:p>
             <a:pPr lvl="2"/>
             <a:r>
-              <a:rPr lang="en-US" smtClean="0"/>
+              <a:rPr lang="en-US"/>
               <a:t>Third level</a:t>
             </a:r>
           </a:p>
           <a:p>
             <a:pPr lvl="3"/>
             <a:r>
-              <a:rPr lang="en-US" smtClean="0"/>
+              <a:rPr lang="en-US"/>
               <a:t>Fourth level</a:t>
             </a:r>
           </a:p>
           <a:p>
             <a:pPr lvl="4"/>
             <a:r>
-              <a:rPr lang="en-US" smtClean="0"/>
+              <a:rPr lang="en-US"/>
               <a:t>Fifth level</a:t>
             </a:r>
-            <a:endParaRPr lang="en-US"/>
           </a:p>
         </p:txBody>
       </p:sp>
@@ -661,7 +671,7 @@
           <a:p>
             <a:fld id="{5BCAD085-E8A6-8845-BD4E-CB4CCA059FC4}" type="datetimeFigureOut">
               <a:rPr lang="en-US" smtClean="0"/>
-              <a:t>1/27/13</a:t>
+              <a:t>9/2/2026</a:t>
             </a:fld>
             <a:endParaRPr lang="en-US"/>
           </a:p>
@@ -755,10 +765,9 @@
           <a:lstStyle/>
           <a:p>
             <a:r>
-              <a:rPr lang="en-US" smtClean="0"/>
+              <a:rPr lang="en-US"/>
               <a:t>Click to edit Master title style</a:t>
             </a:r>
-            <a:endParaRPr lang="en-US"/>
           </a:p>
         </p:txBody>
       </p:sp>
@@ -779,38 +788,37 @@
           <a:p>
             <a:pPr lvl="0"/>
             <a:r>
-              <a:rPr lang="en-US" smtClean="0"/>
+              <a:rPr lang="en-US"/>
               <a:t>Click to edit Master text styles</a:t>
             </a:r>
           </a:p>
           <a:p>
             <a:pPr lvl="1"/>
             <a:r>
-              <a:rPr lang="en-US" smtClean="0"/>
+              <a:rPr lang="en-US"/>
               <a:t>Second level</a:t>
             </a:r>
           </a:p>
           <a:p>
             <a:pPr lvl="2"/>
             <a:r>
-              <a:rPr lang="en-US" smtClean="0"/>
+              <a:rPr lang="en-US"/>
               <a:t>Third level</a:t>
             </a:r>
           </a:p>
           <a:p>
             <a:pPr lvl="3"/>
             <a:r>
-              <a:rPr lang="en-US" smtClean="0"/>
+              <a:rPr lang="en-US"/>
               <a:t>Fourth level</a:t>
             </a:r>
           </a:p>
           <a:p>
             <a:pPr lvl="4"/>
             <a:r>
-              <a:rPr lang="en-US" smtClean="0"/>
+              <a:rPr lang="en-US"/>
               <a:t>Fifth level</a:t>
             </a:r>
-            <a:endParaRPr lang="en-US"/>
           </a:p>
         </p:txBody>
       </p:sp>
@@ -831,7 +839,7 @@
           <a:p>
             <a:fld id="{5BCAD085-E8A6-8845-BD4E-CB4CCA059FC4}" type="datetimeFigureOut">
               <a:rPr lang="en-US" smtClean="0"/>
-              <a:t>1/27/13</a:t>
+              <a:t>9/2/2026</a:t>
             </a:fld>
             <a:endParaRPr lang="en-US"/>
           </a:p>
@@ -934,10 +942,9 @@
           </a:lstStyle>
           <a:p>
             <a:r>
-              <a:rPr lang="en-US" smtClean="0"/>
+              <a:rPr lang="en-US"/>
               <a:t>Click to edit Master title style</a:t>
             </a:r>
-            <a:endParaRPr lang="en-US"/>
           </a:p>
         </p:txBody>
       </p:sp>
@@ -1054,7 +1061,7 @@
           <a:p>
             <a:pPr lvl="0"/>
             <a:r>
-              <a:rPr lang="en-US" smtClean="0"/>
+              <a:rPr lang="en-US"/>
               <a:t>Click to edit Master text styles</a:t>
             </a:r>
           </a:p>
@@ -1077,7 +1084,7 @@
           <a:p>
             <a:fld id="{5BCAD085-E8A6-8845-BD4E-CB4CCA059FC4}" type="datetimeFigureOut">
               <a:rPr lang="en-US" smtClean="0"/>
-              <a:t>1/27/13</a:t>
+              <a:t>9/2/2026</a:t>
             </a:fld>
             <a:endParaRPr lang="en-US"/>
           </a:p>
@@ -1171,10 +1178,9 @@
           <a:lstStyle/>
           <a:p>
             <a:r>
-              <a:rPr lang="en-US" smtClean="0"/>
+              <a:rPr lang="en-US"/>
               <a:t>Click to edit Master title style</a:t>
             </a:r>
-            <a:endParaRPr lang="en-US"/>
           </a:p>
         </p:txBody>
       </p:sp>
@@ -1228,38 +1234,37 @@
           <a:p>
             <a:pPr lvl="0"/>
             <a:r>
-              <a:rPr lang="en-US" smtClean="0"/>
+              <a:rPr lang="en-US"/>
               <a:t>Click to edit Master text styles</a:t>
             </a:r>
           </a:p>
           <a:p>
             <a:pPr lvl="1"/>
             <a:r>
-              <a:rPr lang="en-US" smtClean="0"/>
+              <a:rPr lang="en-US"/>
               <a:t>Second level</a:t>
             </a:r>
           </a:p>
           <a:p>
             <a:pPr lvl="2"/>
             <a:r>
-              <a:rPr lang="en-US" smtClean="0"/>
+              <a:rPr lang="en-US"/>
               <a:t>Third level</a:t>
             </a:r>
           </a:p>
           <a:p>
             <a:pPr lvl="3"/>
             <a:r>
-              <a:rPr lang="en-US" smtClean="0"/>
+              <a:rPr lang="en-US"/>
               <a:t>Fourth level</a:t>
             </a:r>
           </a:p>
           <a:p>
             <a:pPr lvl="4"/>
             <a:r>
-              <a:rPr lang="en-US" smtClean="0"/>
+              <a:rPr lang="en-US"/>
               <a:t>Fifth level</a:t>
             </a:r>
-            <a:endParaRPr lang="en-US"/>
           </a:p>
         </p:txBody>
       </p:sp>
@@ -1313,38 +1318,37 @@
           <a:p>
             <a:pPr lvl="0"/>
             <a:r>
-              <a:rPr lang="en-US" smtClean="0"/>
+              <a:rPr lang="en-US"/>
               <a:t>Click to edit Master text styles</a:t>
             </a:r>
           </a:p>
           <a:p>
             <a:pPr lvl="1"/>
             <a:r>
-              <a:rPr lang="en-US" smtClean="0"/>
+              <a:rPr lang="en-US"/>
               <a:t>Second level</a:t>
             </a:r>
           </a:p>
           <a:p>
             <a:pPr lvl="2"/>
             <a:r>
-              <a:rPr lang="en-US" smtClean="0"/>
+              <a:rPr lang="en-US"/>
               <a:t>Third level</a:t>
             </a:r>
           </a:p>
           <a:p>
             <a:pPr lvl="3"/>
             <a:r>
-              <a:rPr lang="en-US" smtClean="0"/>
+              <a:rPr lang="en-US"/>
               <a:t>Fourth level</a:t>
             </a:r>
           </a:p>
           <a:p>
             <a:pPr lvl="4"/>
             <a:r>
-              <a:rPr lang="en-US" smtClean="0"/>
+              <a:rPr lang="en-US"/>
               <a:t>Fifth level</a:t>
             </a:r>
-            <a:endParaRPr lang="en-US"/>
           </a:p>
         </p:txBody>
       </p:sp>
@@ -1365,7 +1369,7 @@
           <a:p>
             <a:fld id="{5BCAD085-E8A6-8845-BD4E-CB4CCA059FC4}" type="datetimeFigureOut">
               <a:rPr lang="en-US" smtClean="0"/>
-              <a:t>1/27/13</a:t>
+              <a:t>9/2/2026</a:t>
             </a:fld>
             <a:endParaRPr lang="en-US"/>
           </a:p>
@@ -1463,10 +1467,9 @@
           </a:lstStyle>
           <a:p>
             <a:r>
-              <a:rPr lang="en-US" smtClean="0"/>
+              <a:rPr lang="en-US"/>
               <a:t>Click to edit Master title style</a:t>
             </a:r>
-            <a:endParaRPr lang="en-US"/>
           </a:p>
         </p:txBody>
       </p:sp>
@@ -1529,7 +1532,7 @@
           <a:p>
             <a:pPr lvl="0"/>
             <a:r>
-              <a:rPr lang="en-US" smtClean="0"/>
+              <a:rPr lang="en-US"/>
               <a:t>Click to edit Master text styles</a:t>
             </a:r>
           </a:p>
@@ -1585,38 +1588,37 @@
           <a:p>
             <a:pPr lvl="0"/>
             <a:r>
-              <a:rPr lang="en-US" smtClean="0"/>
+              <a:rPr lang="en-US"/>
               <a:t>Click to edit Master text styles</a:t>
             </a:r>
           </a:p>
           <a:p>
             <a:pPr lvl="1"/>
             <a:r>
-              <a:rPr lang="en-US" smtClean="0"/>
+              <a:rPr lang="en-US"/>
               <a:t>Second level</a:t>
             </a:r>
           </a:p>
           <a:p>
             <a:pPr lvl="2"/>
             <a:r>
-              <a:rPr lang="en-US" smtClean="0"/>
+              <a:rPr lang="en-US"/>
               <a:t>Third level</a:t>
             </a:r>
           </a:p>
           <a:p>
             <a:pPr lvl="3"/>
             <a:r>
-              <a:rPr lang="en-US" smtClean="0"/>
+              <a:rPr lang="en-US"/>
               <a:t>Fourth level</a:t>
             </a:r>
           </a:p>
           <a:p>
             <a:pPr lvl="4"/>
             <a:r>
-              <a:rPr lang="en-US" smtClean="0"/>
+              <a:rPr lang="en-US"/>
               <a:t>Fifth level</a:t>
             </a:r>
-            <a:endParaRPr lang="en-US"/>
           </a:p>
         </p:txBody>
       </p:sp>
@@ -1679,7 +1681,7 @@
           <a:p>
             <a:pPr lvl="0"/>
             <a:r>
-              <a:rPr lang="en-US" smtClean="0"/>
+              <a:rPr lang="en-US"/>
               <a:t>Click to edit Master text styles</a:t>
             </a:r>
           </a:p>
@@ -1735,38 +1737,37 @@
           <a:p>
             <a:pPr lvl="0"/>
             <a:r>
-              <a:rPr lang="en-US" smtClean="0"/>
+              <a:rPr lang="en-US"/>
               <a:t>Click to edit Master text styles</a:t>
             </a:r>
           </a:p>
           <a:p>
             <a:pPr lvl="1"/>
             <a:r>
-              <a:rPr lang="en-US" smtClean="0"/>
+              <a:rPr lang="en-US"/>
               <a:t>Second level</a:t>
             </a:r>
           </a:p>
           <a:p>
             <a:pPr lvl="2"/>
             <a:r>
-              <a:rPr lang="en-US" smtClean="0"/>
+              <a:rPr lang="en-US"/>
               <a:t>Third level</a:t>
             </a:r>
           </a:p>
           <a:p>
             <a:pPr lvl="3"/>
             <a:r>
-              <a:rPr lang="en-US" smtClean="0"/>
+              <a:rPr lang="en-US"/>
               <a:t>Fourth level</a:t>
             </a:r>
           </a:p>
           <a:p>
             <a:pPr lvl="4"/>
             <a:r>
-              <a:rPr lang="en-US" smtClean="0"/>
+              <a:rPr lang="en-US"/>
               <a:t>Fifth level</a:t>
             </a:r>
-            <a:endParaRPr lang="en-US"/>
           </a:p>
         </p:txBody>
       </p:sp>
@@ -1787,7 +1788,7 @@
           <a:p>
             <a:fld id="{5BCAD085-E8A6-8845-BD4E-CB4CCA059FC4}" type="datetimeFigureOut">
               <a:rPr lang="en-US" smtClean="0"/>
-              <a:t>1/27/13</a:t>
+              <a:t>9/2/2026</a:t>
             </a:fld>
             <a:endParaRPr lang="en-US"/>
           </a:p>
@@ -1881,10 +1882,9 @@
           <a:lstStyle/>
           <a:p>
             <a:r>
-              <a:rPr lang="en-US" smtClean="0"/>
+              <a:rPr lang="en-US"/>
               <a:t>Click to edit Master title style</a:t>
             </a:r>
-            <a:endParaRPr lang="en-US"/>
           </a:p>
         </p:txBody>
       </p:sp>
@@ -1905,7 +1905,7 @@
           <a:p>
             <a:fld id="{5BCAD085-E8A6-8845-BD4E-CB4CCA059FC4}" type="datetimeFigureOut">
               <a:rPr lang="en-US" smtClean="0"/>
-              <a:t>1/27/13</a:t>
+              <a:t>9/2/2026</a:t>
             </a:fld>
             <a:endParaRPr lang="en-US"/>
           </a:p>
@@ -2000,7 +2000,7 @@
           <a:p>
             <a:fld id="{5BCAD085-E8A6-8845-BD4E-CB4CCA059FC4}" type="datetimeFigureOut">
               <a:rPr lang="en-US" smtClean="0"/>
-              <a:t>1/27/13</a:t>
+              <a:t>9/2/2026</a:t>
             </a:fld>
             <a:endParaRPr lang="en-US"/>
           </a:p>
@@ -2103,10 +2103,9 @@
           </a:lstStyle>
           <a:p>
             <a:r>
-              <a:rPr lang="en-US" smtClean="0"/>
+              <a:rPr lang="en-US"/>
               <a:t>Click to edit Master title style</a:t>
             </a:r>
-            <a:endParaRPr lang="en-US"/>
           </a:p>
         </p:txBody>
       </p:sp>
@@ -2160,38 +2159,37 @@
           <a:p>
             <a:pPr lvl="0"/>
             <a:r>
-              <a:rPr lang="en-US" smtClean="0"/>
+              <a:rPr lang="en-US"/>
               <a:t>Click to edit Master text styles</a:t>
             </a:r>
           </a:p>
           <a:p>
             <a:pPr lvl="1"/>
             <a:r>
-              <a:rPr lang="en-US" smtClean="0"/>
+              <a:rPr lang="en-US"/>
               <a:t>Second level</a:t>
             </a:r>
           </a:p>
           <a:p>
             <a:pPr lvl="2"/>
             <a:r>
-              <a:rPr lang="en-US" smtClean="0"/>
+              <a:rPr lang="en-US"/>
               <a:t>Third level</a:t>
             </a:r>
           </a:p>
           <a:p>
             <a:pPr lvl="3"/>
             <a:r>
-              <a:rPr lang="en-US" smtClean="0"/>
+              <a:rPr lang="en-US"/>
               <a:t>Fourth level</a:t>
             </a:r>
           </a:p>
           <a:p>
             <a:pPr lvl="4"/>
             <a:r>
-              <a:rPr lang="en-US" smtClean="0"/>
+              <a:rPr lang="en-US"/>
               <a:t>Fifth level</a:t>
             </a:r>
-            <a:endParaRPr lang="en-US"/>
           </a:p>
         </p:txBody>
       </p:sp>
@@ -2254,7 +2252,7 @@
           <a:p>
             <a:pPr lvl="0"/>
             <a:r>
-              <a:rPr lang="en-US" smtClean="0"/>
+              <a:rPr lang="en-US"/>
               <a:t>Click to edit Master text styles</a:t>
             </a:r>
           </a:p>
@@ -2277,7 +2275,7 @@
           <a:p>
             <a:fld id="{5BCAD085-E8A6-8845-BD4E-CB4CCA059FC4}" type="datetimeFigureOut">
               <a:rPr lang="en-US" smtClean="0"/>
-              <a:t>1/27/13</a:t>
+              <a:t>9/2/2026</a:t>
             </a:fld>
             <a:endParaRPr lang="en-US"/>
           </a:p>
@@ -2380,10 +2378,9 @@
           </a:lstStyle>
           <a:p>
             <a:r>
-              <a:rPr lang="en-US" smtClean="0"/>
+              <a:rPr lang="en-US"/>
               <a:t>Click to edit Master title style</a:t>
             </a:r>
-            <a:endParaRPr lang="en-US"/>
           </a:p>
         </p:txBody>
       </p:sp>
@@ -2507,7 +2504,7 @@
           <a:p>
             <a:pPr lvl="0"/>
             <a:r>
-              <a:rPr lang="en-US" smtClean="0"/>
+              <a:rPr lang="en-US"/>
               <a:t>Click to edit Master text styles</a:t>
             </a:r>
           </a:p>
@@ -2530,7 +2527,7 @@
           <a:p>
             <a:fld id="{5BCAD085-E8A6-8845-BD4E-CB4CCA059FC4}" type="datetimeFigureOut">
               <a:rPr lang="en-US" smtClean="0"/>
-              <a:t>1/27/13</a:t>
+              <a:t>9/2/2026</a:t>
             </a:fld>
             <a:endParaRPr lang="en-US"/>
           </a:p>
@@ -2639,10 +2636,9 @@
           <a:lstStyle/>
           <a:p>
             <a:r>
-              <a:rPr lang="en-US" smtClean="0"/>
+              <a:rPr lang="en-US"/>
               <a:t>Click to edit Master title style</a:t>
             </a:r>
-            <a:endParaRPr lang="en-US"/>
           </a:p>
         </p:txBody>
       </p:sp>
@@ -2673,38 +2669,37 @@
           <a:p>
             <a:pPr lvl="0"/>
             <a:r>
-              <a:rPr lang="en-US" smtClean="0"/>
+              <a:rPr lang="en-US"/>
               <a:t>Click to edit Master text styles</a:t>
             </a:r>
           </a:p>
           <a:p>
             <a:pPr lvl="1"/>
             <a:r>
-              <a:rPr lang="en-US" smtClean="0"/>
+              <a:rPr lang="en-US"/>
               <a:t>Second level</a:t>
             </a:r>
           </a:p>
           <a:p>
             <a:pPr lvl="2"/>
             <a:r>
-              <a:rPr lang="en-US" smtClean="0"/>
+              <a:rPr lang="en-US"/>
               <a:t>Third level</a:t>
             </a:r>
           </a:p>
           <a:p>
             <a:pPr lvl="3"/>
             <a:r>
-              <a:rPr lang="en-US" smtClean="0"/>
+              <a:rPr lang="en-US"/>
               <a:t>Fourth level</a:t>
             </a:r>
           </a:p>
           <a:p>
             <a:pPr lvl="4"/>
             <a:r>
-              <a:rPr lang="en-US" smtClean="0"/>
+              <a:rPr lang="en-US"/>
               <a:t>Fifth level</a:t>
             </a:r>
-            <a:endParaRPr lang="en-US"/>
           </a:p>
         </p:txBody>
       </p:sp>
@@ -2743,7 +2738,7 @@
           <a:p>
             <a:fld id="{5BCAD085-E8A6-8845-BD4E-CB4CCA059FC4}" type="datetimeFigureOut">
               <a:rPr lang="en-US" smtClean="0"/>
-              <a:t>1/27/13</a:t>
+              <a:t>9/2/2026</a:t>
             </a:fld>
             <a:endParaRPr lang="en-US"/>
           </a:p>
@@ -3102,7 +3097,7 @@
 </file>
 
 <file path=ppt/slides/slide1.xml><?xml version="1.0" encoding="utf-8"?>
-<p:sld xmlns:a="http://schemas.openxmlformats.org/drawingml/2006/main" xmlns:p="http://schemas.openxmlformats.org/presentationml/2006/main" xmlns:r="http://schemas.openxmlformats.org/officeDocument/2006/relationships">
+<p:sld xmlns:a="http://schemas.openxmlformats.org/drawingml/2006/main" xmlns:r="http://schemas.openxmlformats.org/officeDocument/2006/relationships" xmlns:p="http://schemas.openxmlformats.org/presentationml/2006/main">
   <p:cSld>
     <p:bg>
       <p:bgPr>
@@ -3118,7 +3113,14 @@
         <p:cNvGrpSpPr/>
         <p:nvPr/>
       </p:nvGrpSpPr>
-      <p:grpSpPr/>
+      <p:grpSpPr>
+        <a:xfrm>
+          <a:off x="0" y="0"/>
+          <a:ext cx="0" cy="0"/>
+          <a:chOff x="0" y="0"/>
+          <a:chExt cx="0" cy="0"/>
+        </a:xfrm>
+      </p:grpSpPr>
       <p:sp>
         <p:nvSpPr>
           <p:cNvPr id="2" name="Rectangle 1"/>
@@ -3160,6 +3162,7 @@
           <a:lstStyle/>
           <a:p>
             <a:pPr algn="ctr"/>
+            <a:endParaRPr/>
           </a:p>
         </p:txBody>
       </p:sp>
@@ -3204,6 +3207,7 @@
           <a:lstStyle/>
           <a:p>
             <a:pPr algn="ctr"/>
+            <a:endParaRPr/>
           </a:p>
         </p:txBody>
       </p:sp>
@@ -3248,6 +3252,7 @@
           <a:lstStyle/>
           <a:p>
             <a:pPr algn="ctr"/>
+            <a:endParaRPr/>
           </a:p>
         </p:txBody>
       </p:sp>
@@ -3268,7 +3273,7 @@
           <a:noFill/>
         </p:spPr>
         <p:txBody>
-          <a:bodyPr wrap="square" anchor="t" lIns="27432" rIns="27432" tIns="18288" bIns="18288">
+          <a:bodyPr wrap="square" lIns="27432" tIns="18288" rIns="27432" bIns="18288" anchor="t">
             <a:spAutoFit/>
           </a:bodyPr>
           <a:lstStyle/>
@@ -3307,7 +3312,7 @@
           <a:noFill/>
         </p:spPr>
         <p:txBody>
-          <a:bodyPr wrap="square" anchor="t" lIns="27432" rIns="27432" tIns="18288" bIns="18288">
+          <a:bodyPr wrap="square" lIns="27432" tIns="18288" rIns="27432" bIns="18288" anchor="t">
             <a:spAutoFit/>
           </a:bodyPr>
           <a:lstStyle/>
@@ -3370,6 +3375,7 @@
           <a:lstStyle/>
           <a:p>
             <a:pPr algn="ctr"/>
+            <a:endParaRPr/>
           </a:p>
         </p:txBody>
       </p:sp>
@@ -3390,7 +3396,7 @@
           <a:noFill/>
         </p:spPr>
         <p:txBody>
-          <a:bodyPr wrap="square" anchor="t" lIns="27432" rIns="27432" tIns="18288" bIns="18288">
+          <a:bodyPr wrap="square" lIns="27432" tIns="18288" rIns="27432" bIns="18288" anchor="t">
             <a:spAutoFit/>
           </a:bodyPr>
           <a:lstStyle/>
@@ -3429,7 +3435,7 @@
           <a:noFill/>
         </p:spPr>
         <p:txBody>
-          <a:bodyPr wrap="square" anchor="t" lIns="27432" rIns="27432" tIns="18288" bIns="18288">
+          <a:bodyPr wrap="square" lIns="27432" tIns="18288" rIns="27432" bIns="18288" anchor="t">
             <a:spAutoFit/>
           </a:bodyPr>
           <a:lstStyle/>
@@ -3468,7 +3474,7 @@
           <a:noFill/>
         </p:spPr>
         <p:txBody>
-          <a:bodyPr wrap="square" anchor="t" lIns="27432" rIns="27432" tIns="18288" bIns="18288">
+          <a:bodyPr wrap="square" lIns="27432" tIns="18288" rIns="27432" bIns="18288" anchor="t">
             <a:spAutoFit/>
           </a:bodyPr>
           <a:lstStyle/>
@@ -3507,7 +3513,7 @@
           <a:noFill/>
         </p:spPr>
         <p:txBody>
-          <a:bodyPr wrap="square" anchor="t" lIns="27432" rIns="27432" tIns="18288" bIns="18288">
+          <a:bodyPr wrap="square" lIns="27432" tIns="18288" rIns="27432" bIns="18288" anchor="t">
             <a:spAutoFit/>
           </a:bodyPr>
           <a:lstStyle/>
@@ -3583,7 +3589,7 @@
 </file>
 
 <file path=ppt/slides/slide10.xml><?xml version="1.0" encoding="utf-8"?>
-<p:sld xmlns:a="http://schemas.openxmlformats.org/drawingml/2006/main" xmlns:p="http://schemas.openxmlformats.org/presentationml/2006/main" xmlns:r="http://schemas.openxmlformats.org/officeDocument/2006/relationships">
+<p:sld xmlns:a="http://schemas.openxmlformats.org/drawingml/2006/main" xmlns:r="http://schemas.openxmlformats.org/officeDocument/2006/relationships" xmlns:p="http://schemas.openxmlformats.org/presentationml/2006/main">
   <p:cSld>
     <p:bg>
       <p:bgPr>
@@ -3599,7 +3605,14 @@
         <p:cNvGrpSpPr/>
         <p:nvPr/>
       </p:nvGrpSpPr>
-      <p:grpSpPr/>
+      <p:grpSpPr>
+        <a:xfrm>
+          <a:off x="0" y="0"/>
+          <a:ext cx="0" cy="0"/>
+          <a:chOff x="0" y="0"/>
+          <a:chExt cx="0" cy="0"/>
+        </a:xfrm>
+      </p:grpSpPr>
       <p:sp>
         <p:nvSpPr>
           <p:cNvPr id="2" name="Rectangle 1"/>
@@ -3641,6 +3654,7 @@
           <a:lstStyle/>
           <a:p>
             <a:pPr algn="ctr"/>
+            <a:endParaRPr/>
           </a:p>
         </p:txBody>
       </p:sp>
@@ -3685,6 +3699,7 @@
           <a:lstStyle/>
           <a:p>
             <a:pPr algn="ctr"/>
+            <a:endParaRPr/>
           </a:p>
         </p:txBody>
       </p:sp>
@@ -3705,7 +3720,7 @@
           <a:noFill/>
         </p:spPr>
         <p:txBody>
-          <a:bodyPr wrap="square" anchor="t" lIns="27432" rIns="27432" tIns="18288" bIns="18288">
+          <a:bodyPr wrap="square" lIns="27432" tIns="18288" rIns="27432" bIns="18288" anchor="t">
             <a:spAutoFit/>
           </a:bodyPr>
           <a:lstStyle/>
@@ -3744,7 +3759,7 @@
           <a:noFill/>
         </p:spPr>
         <p:txBody>
-          <a:bodyPr wrap="square" anchor="t" lIns="27432" rIns="27432" tIns="18288" bIns="18288">
+          <a:bodyPr wrap="square" lIns="27432" tIns="18288" rIns="27432" bIns="18288" anchor="t">
             <a:spAutoFit/>
           </a:bodyPr>
           <a:lstStyle/>
@@ -3807,7 +3822,7 @@
           <a:noFill/>
         </p:spPr>
         <p:txBody>
-          <a:bodyPr wrap="square" anchor="t" lIns="27432" rIns="27432" tIns="18288" bIns="18288">
+          <a:bodyPr wrap="square" lIns="27432" tIns="18288" rIns="27432" bIns="18288" anchor="t">
             <a:spAutoFit/>
           </a:bodyPr>
           <a:lstStyle/>
@@ -3846,7 +3861,7 @@
           <a:noFill/>
         </p:spPr>
         <p:txBody>
-          <a:bodyPr wrap="square" anchor="t" lIns="27432" rIns="27432" tIns="18288" bIns="18288">
+          <a:bodyPr wrap="square" lIns="27432" tIns="18288" rIns="27432" bIns="18288" anchor="t">
             <a:spAutoFit/>
           </a:bodyPr>
           <a:lstStyle/>
@@ -3885,7 +3900,7 @@
           <a:noFill/>
         </p:spPr>
         <p:txBody>
-          <a:bodyPr wrap="square" anchor="t" lIns="27432" rIns="27432" tIns="18288" bIns="18288">
+          <a:bodyPr wrap="square" lIns="27432" tIns="18288" rIns="27432" bIns="18288" anchor="t">
             <a:spAutoFit/>
           </a:bodyPr>
           <a:lstStyle/>
@@ -3916,7 +3931,7 @@
 </file>
 
 <file path=ppt/slides/slide11.xml><?xml version="1.0" encoding="utf-8"?>
-<p:sld xmlns:a="http://schemas.openxmlformats.org/drawingml/2006/main" xmlns:p="http://schemas.openxmlformats.org/presentationml/2006/main" xmlns:r="http://schemas.openxmlformats.org/officeDocument/2006/relationships">
+<p:sld xmlns:a="http://schemas.openxmlformats.org/drawingml/2006/main" xmlns:r="http://schemas.openxmlformats.org/officeDocument/2006/relationships" xmlns:p="http://schemas.openxmlformats.org/presentationml/2006/main">
   <p:cSld>
     <p:bg>
       <p:bgPr>
@@ -3932,7 +3947,14 @@
         <p:cNvGrpSpPr/>
         <p:nvPr/>
       </p:nvGrpSpPr>
-      <p:grpSpPr/>
+      <p:grpSpPr>
+        <a:xfrm>
+          <a:off x="0" y="0"/>
+          <a:ext cx="0" cy="0"/>
+          <a:chOff x="0" y="0"/>
+          <a:chExt cx="0" cy="0"/>
+        </a:xfrm>
+      </p:grpSpPr>
       <p:sp>
         <p:nvSpPr>
           <p:cNvPr id="2" name="Rectangle 1"/>
@@ -3974,6 +3996,7 @@
           <a:lstStyle/>
           <a:p>
             <a:pPr algn="ctr"/>
+            <a:endParaRPr/>
           </a:p>
         </p:txBody>
       </p:sp>
@@ -4018,6 +4041,7 @@
           <a:lstStyle/>
           <a:p>
             <a:pPr algn="ctr"/>
+            <a:endParaRPr/>
           </a:p>
         </p:txBody>
       </p:sp>
@@ -4038,7 +4062,7 @@
           <a:noFill/>
         </p:spPr>
         <p:txBody>
-          <a:bodyPr wrap="square" anchor="t" lIns="27432" rIns="27432" tIns="18288" bIns="18288">
+          <a:bodyPr wrap="square" lIns="27432" tIns="18288" rIns="27432" bIns="18288" anchor="t">
             <a:spAutoFit/>
           </a:bodyPr>
           <a:lstStyle/>
@@ -4077,7 +4101,7 @@
           <a:noFill/>
         </p:spPr>
         <p:txBody>
-          <a:bodyPr wrap="square" anchor="t" lIns="27432" rIns="27432" tIns="18288" bIns="18288">
+          <a:bodyPr wrap="square" lIns="27432" tIns="18288" rIns="27432" bIns="18288" anchor="t">
             <a:spAutoFit/>
           </a:bodyPr>
           <a:lstStyle/>
@@ -4140,6 +4164,7 @@
           <a:lstStyle/>
           <a:p>
             <a:pPr algn="ctr"/>
+            <a:endParaRPr/>
           </a:p>
         </p:txBody>
       </p:sp>
@@ -4184,6 +4209,7 @@
           <a:lstStyle/>
           <a:p>
             <a:pPr algn="ctr"/>
+            <a:endParaRPr/>
           </a:p>
         </p:txBody>
       </p:sp>
@@ -4204,7 +4230,7 @@
           <a:noFill/>
         </p:spPr>
         <p:txBody>
-          <a:bodyPr wrap="square" anchor="t" lIns="27432" rIns="27432" tIns="18288" bIns="18288">
+          <a:bodyPr wrap="square" lIns="27432" tIns="18288" rIns="27432" bIns="18288" anchor="t">
             <a:spAutoFit/>
           </a:bodyPr>
           <a:lstStyle/>
@@ -4243,7 +4269,7 @@
           <a:noFill/>
         </p:spPr>
         <p:txBody>
-          <a:bodyPr wrap="square" anchor="t" lIns="27432" rIns="27432" tIns="18288" bIns="18288">
+          <a:bodyPr wrap="square" lIns="27432" tIns="18288" rIns="27432" bIns="18288" anchor="t">
             <a:spAutoFit/>
           </a:bodyPr>
           <a:lstStyle/>
@@ -4338,6 +4364,7 @@
           <a:lstStyle/>
           <a:p>
             <a:pPr algn="ctr"/>
+            <a:endParaRPr/>
           </a:p>
         </p:txBody>
       </p:sp>
@@ -4382,6 +4409,7 @@
           <a:lstStyle/>
           <a:p>
             <a:pPr algn="ctr"/>
+            <a:endParaRPr/>
           </a:p>
         </p:txBody>
       </p:sp>
@@ -4402,7 +4430,7 @@
           <a:noFill/>
         </p:spPr>
         <p:txBody>
-          <a:bodyPr wrap="square" anchor="t" lIns="27432" rIns="27432" tIns="18288" bIns="18288">
+          <a:bodyPr wrap="square" lIns="27432" tIns="18288" rIns="27432" bIns="18288" anchor="t">
             <a:spAutoFit/>
           </a:bodyPr>
           <a:lstStyle/>
@@ -4441,7 +4469,7 @@
           <a:noFill/>
         </p:spPr>
         <p:txBody>
-          <a:bodyPr wrap="square" anchor="t" lIns="27432" rIns="27432" tIns="18288" bIns="18288">
+          <a:bodyPr wrap="square" lIns="27432" tIns="18288" rIns="27432" bIns="18288" anchor="t">
             <a:spAutoFit/>
           </a:bodyPr>
           <a:lstStyle/>
@@ -4536,6 +4564,7 @@
           <a:lstStyle/>
           <a:p>
             <a:pPr algn="ctr"/>
+            <a:endParaRPr/>
           </a:p>
         </p:txBody>
       </p:sp>
@@ -4580,6 +4609,7 @@
           <a:lstStyle/>
           <a:p>
             <a:pPr algn="ctr"/>
+            <a:endParaRPr/>
           </a:p>
         </p:txBody>
       </p:sp>
@@ -4600,7 +4630,7 @@
           <a:noFill/>
         </p:spPr>
         <p:txBody>
-          <a:bodyPr wrap="square" anchor="t" lIns="27432" rIns="27432" tIns="18288" bIns="18288">
+          <a:bodyPr wrap="square" lIns="27432" tIns="18288" rIns="27432" bIns="18288" anchor="t">
             <a:spAutoFit/>
           </a:bodyPr>
           <a:lstStyle/>
@@ -4639,7 +4669,7 @@
           <a:noFill/>
         </p:spPr>
         <p:txBody>
-          <a:bodyPr wrap="square" anchor="t" lIns="27432" rIns="27432" tIns="18288" bIns="18288">
+          <a:bodyPr wrap="square" lIns="27432" tIns="18288" rIns="27432" bIns="18288" anchor="t">
             <a:spAutoFit/>
           </a:bodyPr>
           <a:lstStyle/>
@@ -4710,7 +4740,7 @@
           <a:noFill/>
         </p:spPr>
         <p:txBody>
-          <a:bodyPr wrap="square" anchor="t" lIns="27432" rIns="27432" tIns="18288" bIns="18288">
+          <a:bodyPr wrap="square" lIns="27432" tIns="18288" rIns="27432" bIns="18288" anchor="t">
             <a:spAutoFit/>
           </a:bodyPr>
           <a:lstStyle/>
@@ -4749,7 +4779,7 @@
           <a:noFill/>
         </p:spPr>
         <p:txBody>
-          <a:bodyPr wrap="square" anchor="t" lIns="27432" rIns="27432" tIns="18288" bIns="18288">
+          <a:bodyPr wrap="square" lIns="27432" tIns="18288" rIns="27432" bIns="18288" anchor="t">
             <a:spAutoFit/>
           </a:bodyPr>
           <a:lstStyle/>
@@ -4780,7 +4810,7 @@
 </file>
 
 <file path=ppt/slides/slide12.xml><?xml version="1.0" encoding="utf-8"?>
-<p:sld xmlns:a="http://schemas.openxmlformats.org/drawingml/2006/main" xmlns:p="http://schemas.openxmlformats.org/presentationml/2006/main" xmlns:r="http://schemas.openxmlformats.org/officeDocument/2006/relationships">
+<p:sld xmlns:a="http://schemas.openxmlformats.org/drawingml/2006/main" xmlns:r="http://schemas.openxmlformats.org/officeDocument/2006/relationships" xmlns:p="http://schemas.openxmlformats.org/presentationml/2006/main">
   <p:cSld>
     <p:bg>
       <p:bgPr>
@@ -4796,7 +4826,14 @@
         <p:cNvGrpSpPr/>
         <p:nvPr/>
       </p:nvGrpSpPr>
-      <p:grpSpPr/>
+      <p:grpSpPr>
+        <a:xfrm>
+          <a:off x="0" y="0"/>
+          <a:ext cx="0" cy="0"/>
+          <a:chOff x="0" y="0"/>
+          <a:chExt cx="0" cy="0"/>
+        </a:xfrm>
+      </p:grpSpPr>
       <p:sp>
         <p:nvSpPr>
           <p:cNvPr id="2" name="Rectangle 1"/>
@@ -4838,6 +4875,7 @@
           <a:lstStyle/>
           <a:p>
             <a:pPr algn="ctr"/>
+            <a:endParaRPr/>
           </a:p>
         </p:txBody>
       </p:sp>
@@ -4882,6 +4920,7 @@
           <a:lstStyle/>
           <a:p>
             <a:pPr algn="ctr"/>
+            <a:endParaRPr/>
           </a:p>
         </p:txBody>
       </p:sp>
@@ -4902,7 +4941,7 @@
           <a:noFill/>
         </p:spPr>
         <p:txBody>
-          <a:bodyPr wrap="square" anchor="t" lIns="27432" rIns="27432" tIns="18288" bIns="18288">
+          <a:bodyPr wrap="square" lIns="27432" tIns="18288" rIns="27432" bIns="18288" anchor="t">
             <a:spAutoFit/>
           </a:bodyPr>
           <a:lstStyle/>
@@ -4965,6 +5004,7 @@
           <a:lstStyle/>
           <a:p>
             <a:pPr algn="ctr"/>
+            <a:endParaRPr/>
           </a:p>
         </p:txBody>
       </p:sp>
@@ -4985,7 +5025,7 @@
           <a:noFill/>
         </p:spPr>
         <p:txBody>
-          <a:bodyPr wrap="square" anchor="t" lIns="27432" rIns="27432" tIns="18288" bIns="18288">
+          <a:bodyPr wrap="square" lIns="27432" tIns="18288" rIns="27432" bIns="18288" anchor="t">
             <a:spAutoFit/>
           </a:bodyPr>
           <a:lstStyle/>
@@ -5024,7 +5064,7 @@
           <a:noFill/>
         </p:spPr>
         <p:txBody>
-          <a:bodyPr wrap="square" anchor="t" lIns="27432" rIns="27432" tIns="18288" bIns="18288">
+          <a:bodyPr wrap="square" lIns="27432" tIns="18288" rIns="27432" bIns="18288" anchor="t">
             <a:spAutoFit/>
           </a:bodyPr>
           <a:lstStyle/>
@@ -5063,7 +5103,7 @@
           <a:noFill/>
         </p:spPr>
         <p:txBody>
-          <a:bodyPr wrap="square" anchor="t" lIns="27432" rIns="27432" tIns="18288" bIns="18288">
+          <a:bodyPr wrap="square" lIns="27432" tIns="18288" rIns="27432" bIns="18288" anchor="t">
             <a:spAutoFit/>
           </a:bodyPr>
           <a:lstStyle/>
@@ -5126,6 +5166,7 @@
           <a:lstStyle/>
           <a:p>
             <a:pPr algn="ctr"/>
+            <a:endParaRPr/>
           </a:p>
         </p:txBody>
       </p:sp>
@@ -5146,7 +5187,7 @@
           <a:noFill/>
         </p:spPr>
         <p:txBody>
-          <a:bodyPr wrap="square" anchor="t" lIns="27432" rIns="27432" tIns="18288" bIns="18288">
+          <a:bodyPr wrap="square" lIns="27432" tIns="18288" rIns="27432" bIns="18288" anchor="t">
             <a:spAutoFit/>
           </a:bodyPr>
           <a:lstStyle/>
@@ -5209,6 +5250,7 @@
           <a:lstStyle/>
           <a:p>
             <a:pPr algn="ctr"/>
+            <a:endParaRPr/>
           </a:p>
         </p:txBody>
       </p:sp>
@@ -5229,7 +5271,7 @@
           <a:noFill/>
         </p:spPr>
         <p:txBody>
-          <a:bodyPr wrap="square" anchor="t" lIns="27432" rIns="27432" tIns="18288" bIns="18288">
+          <a:bodyPr wrap="square" lIns="27432" tIns="18288" rIns="27432" bIns="18288" anchor="t">
             <a:spAutoFit/>
           </a:bodyPr>
           <a:lstStyle/>
@@ -5292,6 +5334,7 @@
           <a:lstStyle/>
           <a:p>
             <a:pPr algn="ctr"/>
+            <a:endParaRPr/>
           </a:p>
         </p:txBody>
       </p:sp>
@@ -5312,7 +5355,7 @@
           <a:noFill/>
         </p:spPr>
         <p:txBody>
-          <a:bodyPr wrap="square" anchor="t" lIns="27432" rIns="27432" tIns="18288" bIns="18288">
+          <a:bodyPr wrap="square" lIns="27432" tIns="18288" rIns="27432" bIns="18288" anchor="t">
             <a:spAutoFit/>
           </a:bodyPr>
           <a:lstStyle/>
@@ -5351,7 +5394,7 @@
           <a:noFill/>
         </p:spPr>
         <p:txBody>
-          <a:bodyPr wrap="square" anchor="t" lIns="27432" rIns="27432" tIns="18288" bIns="18288">
+          <a:bodyPr wrap="square" lIns="27432" tIns="18288" rIns="27432" bIns="18288" anchor="t">
             <a:spAutoFit/>
           </a:bodyPr>
           <a:lstStyle/>
@@ -5390,7 +5433,7 @@
           <a:noFill/>
         </p:spPr>
         <p:txBody>
-          <a:bodyPr wrap="square" anchor="t" lIns="27432" rIns="27432" tIns="18288" bIns="18288">
+          <a:bodyPr wrap="square" lIns="27432" tIns="18288" rIns="27432" bIns="18288" anchor="t">
             <a:spAutoFit/>
           </a:bodyPr>
           <a:lstStyle/>
@@ -5421,7 +5464,7 @@
 </file>
 
 <file path=ppt/slides/slide13.xml><?xml version="1.0" encoding="utf-8"?>
-<p:sld xmlns:a="http://schemas.openxmlformats.org/drawingml/2006/main" xmlns:p="http://schemas.openxmlformats.org/presentationml/2006/main" xmlns:r="http://schemas.openxmlformats.org/officeDocument/2006/relationships">
+<p:sld xmlns:a="http://schemas.openxmlformats.org/drawingml/2006/main" xmlns:r="http://schemas.openxmlformats.org/officeDocument/2006/relationships" xmlns:p="http://schemas.openxmlformats.org/presentationml/2006/main">
   <p:cSld>
     <p:bg>
       <p:bgPr>
@@ -5437,7 +5480,14 @@
         <p:cNvGrpSpPr/>
         <p:nvPr/>
       </p:nvGrpSpPr>
-      <p:grpSpPr/>
+      <p:grpSpPr>
+        <a:xfrm>
+          <a:off x="0" y="0"/>
+          <a:ext cx="0" cy="0"/>
+          <a:chOff x="0" y="0"/>
+          <a:chExt cx="0" cy="0"/>
+        </a:xfrm>
+      </p:grpSpPr>
       <p:sp>
         <p:nvSpPr>
           <p:cNvPr id="2" name="Rectangle 1"/>
@@ -5479,6 +5529,7 @@
           <a:lstStyle/>
           <a:p>
             <a:pPr algn="ctr"/>
+            <a:endParaRPr/>
           </a:p>
         </p:txBody>
       </p:sp>
@@ -5523,6 +5574,7 @@
           <a:lstStyle/>
           <a:p>
             <a:pPr algn="ctr"/>
+            <a:endParaRPr/>
           </a:p>
         </p:txBody>
       </p:sp>
@@ -5543,7 +5595,7 @@
           <a:noFill/>
         </p:spPr>
         <p:txBody>
-          <a:bodyPr wrap="square" anchor="t" lIns="27432" rIns="27432" tIns="18288" bIns="18288">
+          <a:bodyPr wrap="square" lIns="27432" tIns="18288" rIns="27432" bIns="18288" anchor="t">
             <a:spAutoFit/>
           </a:bodyPr>
           <a:lstStyle/>
@@ -5582,7 +5634,7 @@
           <a:noFill/>
         </p:spPr>
         <p:txBody>
-          <a:bodyPr wrap="square" anchor="t" lIns="27432" rIns="27432" tIns="18288" bIns="18288">
+          <a:bodyPr wrap="square" lIns="27432" tIns="18288" rIns="27432" bIns="18288" anchor="t">
             <a:spAutoFit/>
           </a:bodyPr>
           <a:lstStyle/>
@@ -5623,10 +5675,34 @@
                 <a:tableStyleId>{5C22544A-7EE6-4342-B048-85BDC9FD1C3A}</a:tableStyleId>
               </a:tblPr>
               <a:tblGrid>
-                <a:gridCol w="1554480"/>
-                <a:gridCol w="3566160"/>
-                <a:gridCol w="3291840"/>
-                <a:gridCol w="2651760"/>
+                <a:gridCol w="1554480">
+                  <a:extLst>
+                    <a:ext uri="{9D8B030D-6E8A-4147-A177-3AD203B41FA5}">
+                      <a16:colId xmlns:a16="http://schemas.microsoft.com/office/drawing/2014/main" val="20000"/>
+                    </a:ext>
+                  </a:extLst>
+                </a:gridCol>
+                <a:gridCol w="3566160">
+                  <a:extLst>
+                    <a:ext uri="{9D8B030D-6E8A-4147-A177-3AD203B41FA5}">
+                      <a16:colId xmlns:a16="http://schemas.microsoft.com/office/drawing/2014/main" val="20001"/>
+                    </a:ext>
+                  </a:extLst>
+                </a:gridCol>
+                <a:gridCol w="3291840">
+                  <a:extLst>
+                    <a:ext uri="{9D8B030D-6E8A-4147-A177-3AD203B41FA5}">
+                      <a16:colId xmlns:a16="http://schemas.microsoft.com/office/drawing/2014/main" val="20002"/>
+                    </a:ext>
+                  </a:extLst>
+                </a:gridCol>
+                <a:gridCol w="2651760">
+                  <a:extLst>
+                    <a:ext uri="{9D8B030D-6E8A-4147-A177-3AD203B41FA5}">
+                      <a16:colId xmlns:a16="http://schemas.microsoft.com/office/drawing/2014/main" val="20003"/>
+                    </a:ext>
+                  </a:extLst>
+                </a:gridCol>
               </a:tblGrid>
               <a:tr h="475488">
                 <a:tc>
@@ -5721,6 +5797,11 @@
                     </a:solidFill>
                   </a:tcPr>
                 </a:tc>
+                <a:extLst>
+                  <a:ext uri="{0D108BD9-81ED-4DB2-BD59-A6C34878D82A}">
+                    <a16:rowId xmlns:a16="http://schemas.microsoft.com/office/drawing/2014/main" val="10000"/>
+                  </a:ext>
+                </a:extLst>
               </a:tr>
               <a:tr h="475488">
                 <a:tc>
@@ -5815,6 +5896,11 @@
                     </a:solidFill>
                   </a:tcPr>
                 </a:tc>
+                <a:extLst>
+                  <a:ext uri="{0D108BD9-81ED-4DB2-BD59-A6C34878D82A}">
+                    <a16:rowId xmlns:a16="http://schemas.microsoft.com/office/drawing/2014/main" val="10001"/>
+                  </a:ext>
+                </a:extLst>
               </a:tr>
               <a:tr h="475488">
                 <a:tc>
@@ -5909,6 +5995,11 @@
                     </a:solidFill>
                   </a:tcPr>
                 </a:tc>
+                <a:extLst>
+                  <a:ext uri="{0D108BD9-81ED-4DB2-BD59-A6C34878D82A}">
+                    <a16:rowId xmlns:a16="http://schemas.microsoft.com/office/drawing/2014/main" val="10002"/>
+                  </a:ext>
+                </a:extLst>
               </a:tr>
               <a:tr h="475488">
                 <a:tc>
@@ -6003,6 +6094,11 @@
                     </a:solidFill>
                   </a:tcPr>
                 </a:tc>
+                <a:extLst>
+                  <a:ext uri="{0D108BD9-81ED-4DB2-BD59-A6C34878D82A}">
+                    <a16:rowId xmlns:a16="http://schemas.microsoft.com/office/drawing/2014/main" val="10003"/>
+                  </a:ext>
+                </a:extLst>
               </a:tr>
               <a:tr h="475488">
                 <a:tc>
@@ -6097,6 +6193,11 @@
                     </a:solidFill>
                   </a:tcPr>
                 </a:tc>
+                <a:extLst>
+                  <a:ext uri="{0D108BD9-81ED-4DB2-BD59-A6C34878D82A}">
+                    <a16:rowId xmlns:a16="http://schemas.microsoft.com/office/drawing/2014/main" val="10004"/>
+                  </a:ext>
+                </a:extLst>
               </a:tr>
               <a:tr h="475488">
                 <a:tc>
@@ -6191,6 +6292,11 @@
                     </a:solidFill>
                   </a:tcPr>
                 </a:tc>
+                <a:extLst>
+                  <a:ext uri="{0D108BD9-81ED-4DB2-BD59-A6C34878D82A}">
+                    <a16:rowId xmlns:a16="http://schemas.microsoft.com/office/drawing/2014/main" val="10005"/>
+                  </a:ext>
+                </a:extLst>
               </a:tr>
             </a:tbl>
           </a:graphicData>
@@ -6237,6 +6343,7 @@
           <a:lstStyle/>
           <a:p>
             <a:pPr algn="ctr"/>
+            <a:endParaRPr/>
           </a:p>
         </p:txBody>
       </p:sp>
@@ -6281,6 +6388,7 @@
           <a:lstStyle/>
           <a:p>
             <a:pPr algn="ctr"/>
+            <a:endParaRPr/>
           </a:p>
         </p:txBody>
       </p:sp>
@@ -6301,7 +6409,7 @@
           <a:noFill/>
         </p:spPr>
         <p:txBody>
-          <a:bodyPr wrap="square" anchor="t" lIns="27432" rIns="27432" tIns="18288" bIns="18288">
+          <a:bodyPr wrap="square" lIns="27432" tIns="18288" rIns="27432" bIns="18288" anchor="t">
             <a:spAutoFit/>
           </a:bodyPr>
           <a:lstStyle/>
@@ -6340,7 +6448,7 @@
           <a:noFill/>
         </p:spPr>
         <p:txBody>
-          <a:bodyPr wrap="square" anchor="t" lIns="27432" rIns="27432" tIns="18288" bIns="18288">
+          <a:bodyPr wrap="square" lIns="27432" tIns="18288" rIns="27432" bIns="18288" anchor="t">
             <a:spAutoFit/>
           </a:bodyPr>
           <a:lstStyle/>
@@ -6395,7 +6503,7 @@
           <a:noFill/>
         </p:spPr>
         <p:txBody>
-          <a:bodyPr wrap="square" anchor="t" lIns="27432" rIns="27432" tIns="18288" bIns="18288">
+          <a:bodyPr wrap="square" lIns="27432" tIns="18288" rIns="27432" bIns="18288" anchor="t">
             <a:spAutoFit/>
           </a:bodyPr>
           <a:lstStyle/>
@@ -6434,7 +6542,7 @@
           <a:noFill/>
         </p:spPr>
         <p:txBody>
-          <a:bodyPr wrap="square" anchor="t" lIns="27432" rIns="27432" tIns="18288" bIns="18288">
+          <a:bodyPr wrap="square" lIns="27432" tIns="18288" rIns="27432" bIns="18288" anchor="t">
             <a:spAutoFit/>
           </a:bodyPr>
           <a:lstStyle/>
@@ -6465,7 +6573,7 @@
 </file>
 
 <file path=ppt/slides/slide14.xml><?xml version="1.0" encoding="utf-8"?>
-<p:sld xmlns:a="http://schemas.openxmlformats.org/drawingml/2006/main" xmlns:p="http://schemas.openxmlformats.org/presentationml/2006/main" xmlns:r="http://schemas.openxmlformats.org/officeDocument/2006/relationships">
+<p:sld xmlns:a="http://schemas.openxmlformats.org/drawingml/2006/main" xmlns:r="http://schemas.openxmlformats.org/officeDocument/2006/relationships" xmlns:p="http://schemas.openxmlformats.org/presentationml/2006/main">
   <p:cSld>
     <p:bg>
       <p:bgPr>
@@ -6481,7 +6589,14 @@
         <p:cNvGrpSpPr/>
         <p:nvPr/>
       </p:nvGrpSpPr>
-      <p:grpSpPr/>
+      <p:grpSpPr>
+        <a:xfrm>
+          <a:off x="0" y="0"/>
+          <a:ext cx="0" cy="0"/>
+          <a:chOff x="0" y="0"/>
+          <a:chExt cx="0" cy="0"/>
+        </a:xfrm>
+      </p:grpSpPr>
       <p:sp>
         <p:nvSpPr>
           <p:cNvPr id="2" name="Rectangle 1"/>
@@ -6523,6 +6638,7 @@
           <a:lstStyle/>
           <a:p>
             <a:pPr algn="ctr"/>
+            <a:endParaRPr/>
           </a:p>
         </p:txBody>
       </p:sp>
@@ -6567,6 +6683,7 @@
           <a:lstStyle/>
           <a:p>
             <a:pPr algn="ctr"/>
+            <a:endParaRPr/>
           </a:p>
         </p:txBody>
       </p:sp>
@@ -6587,7 +6704,7 @@
           <a:noFill/>
         </p:spPr>
         <p:txBody>
-          <a:bodyPr wrap="square" anchor="t" lIns="27432" rIns="27432" tIns="18288" bIns="18288">
+          <a:bodyPr wrap="square" lIns="27432" tIns="18288" rIns="27432" bIns="18288" anchor="t">
             <a:spAutoFit/>
           </a:bodyPr>
           <a:lstStyle/>
@@ -6626,7 +6743,7 @@
           <a:noFill/>
         </p:spPr>
         <p:txBody>
-          <a:bodyPr wrap="square" anchor="t" lIns="27432" rIns="27432" tIns="18288" bIns="18288">
+          <a:bodyPr wrap="square" lIns="27432" tIns="18288" rIns="27432" bIns="18288" anchor="t">
             <a:spAutoFit/>
           </a:bodyPr>
           <a:lstStyle/>
@@ -6667,12 +6784,48 @@
                 <a:tableStyleId>{5C22544A-7EE6-4342-B048-85BDC9FD1C3A}</a:tableStyleId>
               </a:tblPr>
               <a:tblGrid>
-                <a:gridCol w="3108960"/>
-                <a:gridCol w="1371600"/>
-                <a:gridCol w="914400"/>
-                <a:gridCol w="1737360"/>
-                <a:gridCol w="2743200"/>
-                <a:gridCol w="1188720"/>
+                <a:gridCol w="3108960">
+                  <a:extLst>
+                    <a:ext uri="{9D8B030D-6E8A-4147-A177-3AD203B41FA5}">
+                      <a16:colId xmlns:a16="http://schemas.microsoft.com/office/drawing/2014/main" val="20000"/>
+                    </a:ext>
+                  </a:extLst>
+                </a:gridCol>
+                <a:gridCol w="1371600">
+                  <a:extLst>
+                    <a:ext uri="{9D8B030D-6E8A-4147-A177-3AD203B41FA5}">
+                      <a16:colId xmlns:a16="http://schemas.microsoft.com/office/drawing/2014/main" val="20001"/>
+                    </a:ext>
+                  </a:extLst>
+                </a:gridCol>
+                <a:gridCol w="914400">
+                  <a:extLst>
+                    <a:ext uri="{9D8B030D-6E8A-4147-A177-3AD203B41FA5}">
+                      <a16:colId xmlns:a16="http://schemas.microsoft.com/office/drawing/2014/main" val="20002"/>
+                    </a:ext>
+                  </a:extLst>
+                </a:gridCol>
+                <a:gridCol w="1737360">
+                  <a:extLst>
+                    <a:ext uri="{9D8B030D-6E8A-4147-A177-3AD203B41FA5}">
+                      <a16:colId xmlns:a16="http://schemas.microsoft.com/office/drawing/2014/main" val="20003"/>
+                    </a:ext>
+                  </a:extLst>
+                </a:gridCol>
+                <a:gridCol w="2743200">
+                  <a:extLst>
+                    <a:ext uri="{9D8B030D-6E8A-4147-A177-3AD203B41FA5}">
+                      <a16:colId xmlns:a16="http://schemas.microsoft.com/office/drawing/2014/main" val="20004"/>
+                    </a:ext>
+                  </a:extLst>
+                </a:gridCol>
+                <a:gridCol w="1188720">
+                  <a:extLst>
+                    <a:ext uri="{9D8B030D-6E8A-4147-A177-3AD203B41FA5}">
+                      <a16:colId xmlns:a16="http://schemas.microsoft.com/office/drawing/2014/main" val="20005"/>
+                    </a:ext>
+                  </a:extLst>
+                </a:gridCol>
               </a:tblGrid>
               <a:tr h="457200">
                 <a:tc>
@@ -6813,6 +6966,11 @@
                     </a:solidFill>
                   </a:tcPr>
                 </a:tc>
+                <a:extLst>
+                  <a:ext uri="{0D108BD9-81ED-4DB2-BD59-A6C34878D82A}">
+                    <a16:rowId xmlns:a16="http://schemas.microsoft.com/office/drawing/2014/main" val="10000"/>
+                  </a:ext>
+                </a:extLst>
               </a:tr>
               <a:tr h="457200">
                 <a:tc>
@@ -6953,6 +7111,11 @@
                     </a:solidFill>
                   </a:tcPr>
                 </a:tc>
+                <a:extLst>
+                  <a:ext uri="{0D108BD9-81ED-4DB2-BD59-A6C34878D82A}">
+                    <a16:rowId xmlns:a16="http://schemas.microsoft.com/office/drawing/2014/main" val="10001"/>
+                  </a:ext>
+                </a:extLst>
               </a:tr>
               <a:tr h="457200">
                 <a:tc>
@@ -7093,6 +7256,11 @@
                     </a:solidFill>
                   </a:tcPr>
                 </a:tc>
+                <a:extLst>
+                  <a:ext uri="{0D108BD9-81ED-4DB2-BD59-A6C34878D82A}">
+                    <a16:rowId xmlns:a16="http://schemas.microsoft.com/office/drawing/2014/main" val="10002"/>
+                  </a:ext>
+                </a:extLst>
               </a:tr>
               <a:tr h="457200">
                 <a:tc>
@@ -7233,6 +7401,11 @@
                     </a:solidFill>
                   </a:tcPr>
                 </a:tc>
+                <a:extLst>
+                  <a:ext uri="{0D108BD9-81ED-4DB2-BD59-A6C34878D82A}">
+                    <a16:rowId xmlns:a16="http://schemas.microsoft.com/office/drawing/2014/main" val="10003"/>
+                  </a:ext>
+                </a:extLst>
               </a:tr>
               <a:tr h="457200">
                 <a:tc>
@@ -7373,6 +7546,11 @@
                     </a:solidFill>
                   </a:tcPr>
                 </a:tc>
+                <a:extLst>
+                  <a:ext uri="{0D108BD9-81ED-4DB2-BD59-A6C34878D82A}">
+                    <a16:rowId xmlns:a16="http://schemas.microsoft.com/office/drawing/2014/main" val="10004"/>
+                  </a:ext>
+                </a:extLst>
               </a:tr>
               <a:tr h="457200">
                 <a:tc>
@@ -7513,6 +7691,11 @@
                     </a:solidFill>
                   </a:tcPr>
                 </a:tc>
+                <a:extLst>
+                  <a:ext uri="{0D108BD9-81ED-4DB2-BD59-A6C34878D82A}">
+                    <a16:rowId xmlns:a16="http://schemas.microsoft.com/office/drawing/2014/main" val="10005"/>
+                  </a:ext>
+                </a:extLst>
               </a:tr>
               <a:tr h="457200">
                 <a:tc>
@@ -7653,6 +7836,11 @@
                     </a:solidFill>
                   </a:tcPr>
                 </a:tc>
+                <a:extLst>
+                  <a:ext uri="{0D108BD9-81ED-4DB2-BD59-A6C34878D82A}">
+                    <a16:rowId xmlns:a16="http://schemas.microsoft.com/office/drawing/2014/main" val="10006"/>
+                  </a:ext>
+                </a:extLst>
               </a:tr>
             </a:tbl>
           </a:graphicData>
@@ -7675,7 +7863,7 @@
           <a:noFill/>
         </p:spPr>
         <p:txBody>
-          <a:bodyPr wrap="square" anchor="t" lIns="27432" rIns="27432" tIns="18288" bIns="18288">
+          <a:bodyPr wrap="square" lIns="27432" tIns="18288" rIns="27432" bIns="18288" anchor="t">
             <a:spAutoFit/>
           </a:bodyPr>
           <a:lstStyle/>
@@ -7748,7 +7936,7 @@
           <a:noFill/>
         </p:spPr>
         <p:txBody>
-          <a:bodyPr wrap="square" anchor="t" lIns="27432" rIns="27432" tIns="18288" bIns="18288">
+          <a:bodyPr wrap="square" lIns="27432" tIns="18288" rIns="27432" bIns="18288" anchor="t">
             <a:spAutoFit/>
           </a:bodyPr>
           <a:lstStyle/>
@@ -7787,7 +7975,7 @@
           <a:noFill/>
         </p:spPr>
         <p:txBody>
-          <a:bodyPr wrap="square" anchor="t" lIns="27432" rIns="27432" tIns="18288" bIns="18288">
+          <a:bodyPr wrap="square" lIns="27432" tIns="18288" rIns="27432" bIns="18288" anchor="t">
             <a:spAutoFit/>
           </a:bodyPr>
           <a:lstStyle/>
@@ -7818,7 +8006,7 @@
 </file>
 
 <file path=ppt/slides/slide15.xml><?xml version="1.0" encoding="utf-8"?>
-<p:sld xmlns:a="http://schemas.openxmlformats.org/drawingml/2006/main" xmlns:p="http://schemas.openxmlformats.org/presentationml/2006/main" xmlns:r="http://schemas.openxmlformats.org/officeDocument/2006/relationships">
+<p:sld xmlns:a="http://schemas.openxmlformats.org/drawingml/2006/main" xmlns:r="http://schemas.openxmlformats.org/officeDocument/2006/relationships" xmlns:p="http://schemas.openxmlformats.org/presentationml/2006/main">
   <p:cSld>
     <p:bg>
       <p:bgPr>
@@ -7834,7 +8022,14 @@
         <p:cNvGrpSpPr/>
         <p:nvPr/>
       </p:nvGrpSpPr>
-      <p:grpSpPr/>
+      <p:grpSpPr>
+        <a:xfrm>
+          <a:off x="0" y="0"/>
+          <a:ext cx="0" cy="0"/>
+          <a:chOff x="0" y="0"/>
+          <a:chExt cx="0" cy="0"/>
+        </a:xfrm>
+      </p:grpSpPr>
       <p:sp>
         <p:nvSpPr>
           <p:cNvPr id="2" name="Rectangle 1"/>
@@ -7876,6 +8071,7 @@
           <a:lstStyle/>
           <a:p>
             <a:pPr algn="ctr"/>
+            <a:endParaRPr/>
           </a:p>
         </p:txBody>
       </p:sp>
@@ -7920,6 +8116,7 @@
           <a:lstStyle/>
           <a:p>
             <a:pPr algn="ctr"/>
+            <a:endParaRPr/>
           </a:p>
         </p:txBody>
       </p:sp>
@@ -7940,7 +8137,7 @@
           <a:noFill/>
         </p:spPr>
         <p:txBody>
-          <a:bodyPr wrap="square" anchor="t" lIns="27432" rIns="27432" tIns="18288" bIns="18288">
+          <a:bodyPr wrap="square" lIns="27432" tIns="18288" rIns="27432" bIns="18288" anchor="t">
             <a:spAutoFit/>
           </a:bodyPr>
           <a:lstStyle/>
@@ -7979,7 +8176,7 @@
           <a:noFill/>
         </p:spPr>
         <p:txBody>
-          <a:bodyPr wrap="square" anchor="t" lIns="27432" rIns="27432" tIns="18288" bIns="18288">
+          <a:bodyPr wrap="square" lIns="27432" tIns="18288" rIns="27432" bIns="18288" anchor="t">
             <a:spAutoFit/>
           </a:bodyPr>
           <a:lstStyle/>
@@ -8042,7 +8239,7 @@
           <a:noFill/>
         </p:spPr>
         <p:txBody>
-          <a:bodyPr wrap="square" anchor="t" lIns="27432" rIns="27432" tIns="18288" bIns="18288">
+          <a:bodyPr wrap="square" lIns="27432" tIns="18288" rIns="27432" bIns="18288" anchor="t">
             <a:spAutoFit/>
           </a:bodyPr>
           <a:lstStyle/>
@@ -8081,7 +8278,7 @@
           <a:noFill/>
         </p:spPr>
         <p:txBody>
-          <a:bodyPr wrap="square" anchor="t" lIns="27432" rIns="27432" tIns="18288" bIns="18288">
+          <a:bodyPr wrap="square" lIns="27432" tIns="18288" rIns="27432" bIns="18288" anchor="t">
             <a:spAutoFit/>
           </a:bodyPr>
           <a:lstStyle/>
@@ -8120,7 +8317,7 @@
           <a:noFill/>
         </p:spPr>
         <p:txBody>
-          <a:bodyPr wrap="square" anchor="t" lIns="27432" rIns="27432" tIns="18288" bIns="18288">
+          <a:bodyPr wrap="square" lIns="27432" tIns="18288" rIns="27432" bIns="18288" anchor="t">
             <a:spAutoFit/>
           </a:bodyPr>
           <a:lstStyle/>
@@ -8151,7 +8348,7 @@
 </file>
 
 <file path=ppt/slides/slide16.xml><?xml version="1.0" encoding="utf-8"?>
-<p:sld xmlns:a="http://schemas.openxmlformats.org/drawingml/2006/main" xmlns:p="http://schemas.openxmlformats.org/presentationml/2006/main" xmlns:r="http://schemas.openxmlformats.org/officeDocument/2006/relationships">
+<p:sld xmlns:a="http://schemas.openxmlformats.org/drawingml/2006/main" xmlns:r="http://schemas.openxmlformats.org/officeDocument/2006/relationships" xmlns:p="http://schemas.openxmlformats.org/presentationml/2006/main">
   <p:cSld>
     <p:bg>
       <p:bgPr>
@@ -8167,7 +8364,14 @@
         <p:cNvGrpSpPr/>
         <p:nvPr/>
       </p:nvGrpSpPr>
-      <p:grpSpPr/>
+      <p:grpSpPr>
+        <a:xfrm>
+          <a:off x="0" y="0"/>
+          <a:ext cx="0" cy="0"/>
+          <a:chOff x="0" y="0"/>
+          <a:chExt cx="0" cy="0"/>
+        </a:xfrm>
+      </p:grpSpPr>
       <p:sp>
         <p:nvSpPr>
           <p:cNvPr id="2" name="Rectangle 1"/>
@@ -8209,6 +8413,7 @@
           <a:lstStyle/>
           <a:p>
             <a:pPr algn="ctr"/>
+            <a:endParaRPr/>
           </a:p>
         </p:txBody>
       </p:sp>
@@ -8253,6 +8458,7 @@
           <a:lstStyle/>
           <a:p>
             <a:pPr algn="ctr"/>
+            <a:endParaRPr/>
           </a:p>
         </p:txBody>
       </p:sp>
@@ -8273,7 +8479,7 @@
           <a:noFill/>
         </p:spPr>
         <p:txBody>
-          <a:bodyPr wrap="square" anchor="t" lIns="27432" rIns="27432" tIns="18288" bIns="18288">
+          <a:bodyPr wrap="square" lIns="27432" tIns="18288" rIns="27432" bIns="18288" anchor="t">
             <a:spAutoFit/>
           </a:bodyPr>
           <a:lstStyle/>
@@ -8312,7 +8518,7 @@
           <a:noFill/>
         </p:spPr>
         <p:txBody>
-          <a:bodyPr wrap="square" anchor="t" lIns="27432" rIns="27432" tIns="18288" bIns="18288">
+          <a:bodyPr wrap="square" lIns="27432" tIns="18288" rIns="27432" bIns="18288" anchor="t">
             <a:spAutoFit/>
           </a:bodyPr>
           <a:lstStyle/>
@@ -8375,6 +8581,7 @@
           <a:lstStyle/>
           <a:p>
             <a:pPr algn="ctr"/>
+            <a:endParaRPr/>
           </a:p>
         </p:txBody>
       </p:sp>
@@ -8419,6 +8626,7 @@
           <a:lstStyle/>
           <a:p>
             <a:pPr algn="ctr"/>
+            <a:endParaRPr/>
           </a:p>
         </p:txBody>
       </p:sp>
@@ -8439,7 +8647,7 @@
           <a:noFill/>
         </p:spPr>
         <p:txBody>
-          <a:bodyPr wrap="square" anchor="t" lIns="27432" rIns="27432" tIns="18288" bIns="18288">
+          <a:bodyPr wrap="square" lIns="27432" tIns="18288" rIns="27432" bIns="18288" anchor="t">
             <a:spAutoFit/>
           </a:bodyPr>
           <a:lstStyle/>
@@ -8478,7 +8686,7 @@
           <a:noFill/>
         </p:spPr>
         <p:txBody>
-          <a:bodyPr wrap="square" anchor="t" lIns="27432" rIns="27432" tIns="18288" bIns="18288">
+          <a:bodyPr wrap="square" lIns="27432" tIns="18288" rIns="27432" bIns="18288" anchor="t">
             <a:spAutoFit/>
           </a:bodyPr>
           <a:lstStyle/>
@@ -8573,6 +8781,7 @@
           <a:lstStyle/>
           <a:p>
             <a:pPr algn="ctr"/>
+            <a:endParaRPr/>
           </a:p>
         </p:txBody>
       </p:sp>
@@ -8617,6 +8826,7 @@
           <a:lstStyle/>
           <a:p>
             <a:pPr algn="ctr"/>
+            <a:endParaRPr/>
           </a:p>
         </p:txBody>
       </p:sp>
@@ -8637,7 +8847,7 @@
           <a:noFill/>
         </p:spPr>
         <p:txBody>
-          <a:bodyPr wrap="square" anchor="t" lIns="27432" rIns="27432" tIns="18288" bIns="18288">
+          <a:bodyPr wrap="square" lIns="27432" tIns="18288" rIns="27432" bIns="18288" anchor="t">
             <a:spAutoFit/>
           </a:bodyPr>
           <a:lstStyle/>
@@ -8676,7 +8886,7 @@
           <a:noFill/>
         </p:spPr>
         <p:txBody>
-          <a:bodyPr wrap="square" anchor="t" lIns="27432" rIns="27432" tIns="18288" bIns="18288">
+          <a:bodyPr wrap="square" lIns="27432" tIns="18288" rIns="27432" bIns="18288" anchor="t">
             <a:spAutoFit/>
           </a:bodyPr>
           <a:lstStyle/>
@@ -8771,6 +8981,7 @@
           <a:lstStyle/>
           <a:p>
             <a:pPr algn="ctr"/>
+            <a:endParaRPr/>
           </a:p>
         </p:txBody>
       </p:sp>
@@ -8815,6 +9026,7 @@
           <a:lstStyle/>
           <a:p>
             <a:pPr algn="ctr"/>
+            <a:endParaRPr/>
           </a:p>
         </p:txBody>
       </p:sp>
@@ -8835,7 +9047,7 @@
           <a:noFill/>
         </p:spPr>
         <p:txBody>
-          <a:bodyPr wrap="square" anchor="t" lIns="27432" rIns="27432" tIns="18288" bIns="18288">
+          <a:bodyPr wrap="square" lIns="27432" tIns="18288" rIns="27432" bIns="18288" anchor="t">
             <a:spAutoFit/>
           </a:bodyPr>
           <a:lstStyle/>
@@ -8874,7 +9086,7 @@
           <a:noFill/>
         </p:spPr>
         <p:txBody>
-          <a:bodyPr wrap="square" anchor="t" lIns="27432" rIns="27432" tIns="18288" bIns="18288">
+          <a:bodyPr wrap="square" lIns="27432" tIns="18288" rIns="27432" bIns="18288" anchor="t">
             <a:spAutoFit/>
           </a:bodyPr>
           <a:lstStyle/>
@@ -8929,7 +9141,7 @@
           <a:noFill/>
         </p:spPr>
         <p:txBody>
-          <a:bodyPr wrap="square" anchor="t" lIns="27432" rIns="27432" tIns="18288" bIns="18288">
+          <a:bodyPr wrap="square" lIns="27432" tIns="18288" rIns="27432" bIns="18288" anchor="t">
             <a:spAutoFit/>
           </a:bodyPr>
           <a:lstStyle/>
@@ -8968,7 +9180,7 @@
           <a:noFill/>
         </p:spPr>
         <p:txBody>
-          <a:bodyPr wrap="square" anchor="t" lIns="27432" rIns="27432" tIns="18288" bIns="18288">
+          <a:bodyPr wrap="square" lIns="27432" tIns="18288" rIns="27432" bIns="18288" anchor="t">
             <a:spAutoFit/>
           </a:bodyPr>
           <a:lstStyle/>
@@ -8999,7 +9211,7 @@
 </file>
 
 <file path=ppt/slides/slide17.xml><?xml version="1.0" encoding="utf-8"?>
-<p:sld xmlns:a="http://schemas.openxmlformats.org/drawingml/2006/main" xmlns:p="http://schemas.openxmlformats.org/presentationml/2006/main" xmlns:r="http://schemas.openxmlformats.org/officeDocument/2006/relationships">
+<p:sld xmlns:a="http://schemas.openxmlformats.org/drawingml/2006/main" xmlns:r="http://schemas.openxmlformats.org/officeDocument/2006/relationships" xmlns:p="http://schemas.openxmlformats.org/presentationml/2006/main">
   <p:cSld>
     <p:bg>
       <p:bgPr>
@@ -9015,7 +9227,14 @@
         <p:cNvGrpSpPr/>
         <p:nvPr/>
       </p:nvGrpSpPr>
-      <p:grpSpPr/>
+      <p:grpSpPr>
+        <a:xfrm>
+          <a:off x="0" y="0"/>
+          <a:ext cx="0" cy="0"/>
+          <a:chOff x="0" y="0"/>
+          <a:chExt cx="0" cy="0"/>
+        </a:xfrm>
+      </p:grpSpPr>
       <p:sp>
         <p:nvSpPr>
           <p:cNvPr id="2" name="Rectangle 1"/>
@@ -9057,6 +9276,7 @@
           <a:lstStyle/>
           <a:p>
             <a:pPr algn="ctr"/>
+            <a:endParaRPr/>
           </a:p>
         </p:txBody>
       </p:sp>
@@ -9101,6 +9321,7 @@
           <a:lstStyle/>
           <a:p>
             <a:pPr algn="ctr"/>
+            <a:endParaRPr/>
           </a:p>
         </p:txBody>
       </p:sp>
@@ -9121,7 +9342,7 @@
           <a:noFill/>
         </p:spPr>
         <p:txBody>
-          <a:bodyPr wrap="square" anchor="t" lIns="27432" rIns="27432" tIns="18288" bIns="18288">
+          <a:bodyPr wrap="square" lIns="27432" tIns="18288" rIns="27432" bIns="18288" anchor="t">
             <a:spAutoFit/>
           </a:bodyPr>
           <a:lstStyle/>
@@ -9184,6 +9405,7 @@
           <a:lstStyle/>
           <a:p>
             <a:pPr algn="ctr"/>
+            <a:endParaRPr/>
           </a:p>
         </p:txBody>
       </p:sp>
@@ -9204,7 +9426,7 @@
           <a:noFill/>
         </p:spPr>
         <p:txBody>
-          <a:bodyPr wrap="square" anchor="t" lIns="27432" rIns="27432" tIns="18288" bIns="18288">
+          <a:bodyPr wrap="square" lIns="27432" tIns="18288" rIns="27432" bIns="18288" anchor="t">
             <a:spAutoFit/>
           </a:bodyPr>
           <a:lstStyle/>
@@ -9243,7 +9465,7 @@
           <a:noFill/>
         </p:spPr>
         <p:txBody>
-          <a:bodyPr wrap="square" anchor="t" lIns="27432" rIns="27432" tIns="18288" bIns="18288">
+          <a:bodyPr wrap="square" lIns="27432" tIns="18288" rIns="27432" bIns="18288" anchor="t">
             <a:spAutoFit/>
           </a:bodyPr>
           <a:lstStyle/>
@@ -9282,7 +9504,7 @@
           <a:noFill/>
         </p:spPr>
         <p:txBody>
-          <a:bodyPr wrap="square" anchor="t" lIns="27432" rIns="27432" tIns="18288" bIns="18288">
+          <a:bodyPr wrap="square" lIns="27432" tIns="18288" rIns="27432" bIns="18288" anchor="t">
             <a:spAutoFit/>
           </a:bodyPr>
           <a:lstStyle/>
@@ -9345,6 +9567,7 @@
           <a:lstStyle/>
           <a:p>
             <a:pPr algn="ctr"/>
+            <a:endParaRPr/>
           </a:p>
         </p:txBody>
       </p:sp>
@@ -9365,7 +9588,7 @@
           <a:noFill/>
         </p:spPr>
         <p:txBody>
-          <a:bodyPr wrap="square" anchor="t" lIns="27432" rIns="27432" tIns="18288" bIns="18288">
+          <a:bodyPr wrap="square" lIns="27432" tIns="18288" rIns="27432" bIns="18288" anchor="t">
             <a:spAutoFit/>
           </a:bodyPr>
           <a:lstStyle/>
@@ -9428,6 +9651,7 @@
           <a:lstStyle/>
           <a:p>
             <a:pPr algn="ctr"/>
+            <a:endParaRPr/>
           </a:p>
         </p:txBody>
       </p:sp>
@@ -9448,7 +9672,7 @@
           <a:noFill/>
         </p:spPr>
         <p:txBody>
-          <a:bodyPr wrap="square" anchor="t" lIns="27432" rIns="27432" tIns="18288" bIns="18288">
+          <a:bodyPr wrap="square" lIns="27432" tIns="18288" rIns="27432" bIns="18288" anchor="t">
             <a:spAutoFit/>
           </a:bodyPr>
           <a:lstStyle/>
@@ -9511,6 +9735,7 @@
           <a:lstStyle/>
           <a:p>
             <a:pPr algn="ctr"/>
+            <a:endParaRPr/>
           </a:p>
         </p:txBody>
       </p:sp>
@@ -9531,7 +9756,7 @@
           <a:noFill/>
         </p:spPr>
         <p:txBody>
-          <a:bodyPr wrap="square" anchor="t" lIns="27432" rIns="27432" tIns="18288" bIns="18288">
+          <a:bodyPr wrap="square" lIns="27432" tIns="18288" rIns="27432" bIns="18288" anchor="t">
             <a:spAutoFit/>
           </a:bodyPr>
           <a:lstStyle/>
@@ -9570,7 +9795,7 @@
           <a:noFill/>
         </p:spPr>
         <p:txBody>
-          <a:bodyPr wrap="square" anchor="t" lIns="27432" rIns="27432" tIns="18288" bIns="18288">
+          <a:bodyPr wrap="square" lIns="27432" tIns="18288" rIns="27432" bIns="18288" anchor="t">
             <a:spAutoFit/>
           </a:bodyPr>
           <a:lstStyle/>
@@ -9609,7 +9834,7 @@
           <a:noFill/>
         </p:spPr>
         <p:txBody>
-          <a:bodyPr wrap="square" anchor="t" lIns="27432" rIns="27432" tIns="18288" bIns="18288">
+          <a:bodyPr wrap="square" lIns="27432" tIns="18288" rIns="27432" bIns="18288" anchor="t">
             <a:spAutoFit/>
           </a:bodyPr>
           <a:lstStyle/>
@@ -9640,7 +9865,7 @@
 </file>
 
 <file path=ppt/slides/slide18.xml><?xml version="1.0" encoding="utf-8"?>
-<p:sld xmlns:a="http://schemas.openxmlformats.org/drawingml/2006/main" xmlns:p="http://schemas.openxmlformats.org/presentationml/2006/main" xmlns:r="http://schemas.openxmlformats.org/officeDocument/2006/relationships">
+<p:sld xmlns:a="http://schemas.openxmlformats.org/drawingml/2006/main" xmlns:r="http://schemas.openxmlformats.org/officeDocument/2006/relationships" xmlns:p="http://schemas.openxmlformats.org/presentationml/2006/main">
   <p:cSld>
     <p:bg>
       <p:bgPr>
@@ -9656,7 +9881,14 @@
         <p:cNvGrpSpPr/>
         <p:nvPr/>
       </p:nvGrpSpPr>
-      <p:grpSpPr/>
+      <p:grpSpPr>
+        <a:xfrm>
+          <a:off x="0" y="0"/>
+          <a:ext cx="0" cy="0"/>
+          <a:chOff x="0" y="0"/>
+          <a:chExt cx="0" cy="0"/>
+        </a:xfrm>
+      </p:grpSpPr>
       <p:sp>
         <p:nvSpPr>
           <p:cNvPr id="2" name="Rectangle 1"/>
@@ -9698,6 +9930,7 @@
           <a:lstStyle/>
           <a:p>
             <a:pPr algn="ctr"/>
+            <a:endParaRPr/>
           </a:p>
         </p:txBody>
       </p:sp>
@@ -9742,6 +9975,7 @@
           <a:lstStyle/>
           <a:p>
             <a:pPr algn="ctr"/>
+            <a:endParaRPr/>
           </a:p>
         </p:txBody>
       </p:sp>
@@ -9762,7 +9996,7 @@
           <a:noFill/>
         </p:spPr>
         <p:txBody>
-          <a:bodyPr wrap="square" anchor="t" lIns="27432" rIns="27432" tIns="18288" bIns="18288">
+          <a:bodyPr wrap="square" lIns="27432" tIns="18288" rIns="27432" bIns="18288" anchor="t">
             <a:spAutoFit/>
           </a:bodyPr>
           <a:lstStyle/>
@@ -9801,7 +10035,7 @@
           <a:noFill/>
         </p:spPr>
         <p:txBody>
-          <a:bodyPr wrap="square" anchor="t" lIns="27432" rIns="27432" tIns="18288" bIns="18288">
+          <a:bodyPr wrap="square" lIns="27432" tIns="18288" rIns="27432" bIns="18288" anchor="t">
             <a:spAutoFit/>
           </a:bodyPr>
           <a:lstStyle/>
@@ -9842,10 +10076,34 @@
                 <a:tableStyleId>{5C22544A-7EE6-4342-B048-85BDC9FD1C3A}</a:tableStyleId>
               </a:tblPr>
               <a:tblGrid>
-                <a:gridCol w="3657600"/>
-                <a:gridCol w="2011680"/>
-                <a:gridCol w="2011680"/>
-                <a:gridCol w="3383280"/>
+                <a:gridCol w="3657600">
+                  <a:extLst>
+                    <a:ext uri="{9D8B030D-6E8A-4147-A177-3AD203B41FA5}">
+                      <a16:colId xmlns:a16="http://schemas.microsoft.com/office/drawing/2014/main" val="20000"/>
+                    </a:ext>
+                  </a:extLst>
+                </a:gridCol>
+                <a:gridCol w="2011680">
+                  <a:extLst>
+                    <a:ext uri="{9D8B030D-6E8A-4147-A177-3AD203B41FA5}">
+                      <a16:colId xmlns:a16="http://schemas.microsoft.com/office/drawing/2014/main" val="20001"/>
+                    </a:ext>
+                  </a:extLst>
+                </a:gridCol>
+                <a:gridCol w="2011680">
+                  <a:extLst>
+                    <a:ext uri="{9D8B030D-6E8A-4147-A177-3AD203B41FA5}">
+                      <a16:colId xmlns:a16="http://schemas.microsoft.com/office/drawing/2014/main" val="20002"/>
+                    </a:ext>
+                  </a:extLst>
+                </a:gridCol>
+                <a:gridCol w="3383280">
+                  <a:extLst>
+                    <a:ext uri="{9D8B030D-6E8A-4147-A177-3AD203B41FA5}">
+                      <a16:colId xmlns:a16="http://schemas.microsoft.com/office/drawing/2014/main" val="20003"/>
+                    </a:ext>
+                  </a:extLst>
+                </a:gridCol>
               </a:tblGrid>
               <a:tr h="475488">
                 <a:tc>
@@ -9940,6 +10198,11 @@
                     </a:solidFill>
                   </a:tcPr>
                 </a:tc>
+                <a:extLst>
+                  <a:ext uri="{0D108BD9-81ED-4DB2-BD59-A6C34878D82A}">
+                    <a16:rowId xmlns:a16="http://schemas.microsoft.com/office/drawing/2014/main" val="10000"/>
+                  </a:ext>
+                </a:extLst>
               </a:tr>
               <a:tr h="475488">
                 <a:tc>
@@ -10034,6 +10297,11 @@
                     </a:solidFill>
                   </a:tcPr>
                 </a:tc>
+                <a:extLst>
+                  <a:ext uri="{0D108BD9-81ED-4DB2-BD59-A6C34878D82A}">
+                    <a16:rowId xmlns:a16="http://schemas.microsoft.com/office/drawing/2014/main" val="10001"/>
+                  </a:ext>
+                </a:extLst>
               </a:tr>
               <a:tr h="475488">
                 <a:tc>
@@ -10128,6 +10396,11 @@
                     </a:solidFill>
                   </a:tcPr>
                 </a:tc>
+                <a:extLst>
+                  <a:ext uri="{0D108BD9-81ED-4DB2-BD59-A6C34878D82A}">
+                    <a16:rowId xmlns:a16="http://schemas.microsoft.com/office/drawing/2014/main" val="10002"/>
+                  </a:ext>
+                </a:extLst>
               </a:tr>
               <a:tr h="475488">
                 <a:tc>
@@ -10222,6 +10495,11 @@
                     </a:solidFill>
                   </a:tcPr>
                 </a:tc>
+                <a:extLst>
+                  <a:ext uri="{0D108BD9-81ED-4DB2-BD59-A6C34878D82A}">
+                    <a16:rowId xmlns:a16="http://schemas.microsoft.com/office/drawing/2014/main" val="10003"/>
+                  </a:ext>
+                </a:extLst>
               </a:tr>
               <a:tr h="475488">
                 <a:tc>
@@ -10316,6 +10594,11 @@
                     </a:solidFill>
                   </a:tcPr>
                 </a:tc>
+                <a:extLst>
+                  <a:ext uri="{0D108BD9-81ED-4DB2-BD59-A6C34878D82A}">
+                    <a16:rowId xmlns:a16="http://schemas.microsoft.com/office/drawing/2014/main" val="10004"/>
+                  </a:ext>
+                </a:extLst>
               </a:tr>
               <a:tr h="475488">
                 <a:tc>
@@ -10410,6 +10693,11 @@
                     </a:solidFill>
                   </a:tcPr>
                 </a:tc>
+                <a:extLst>
+                  <a:ext uri="{0D108BD9-81ED-4DB2-BD59-A6C34878D82A}">
+                    <a16:rowId xmlns:a16="http://schemas.microsoft.com/office/drawing/2014/main" val="10005"/>
+                  </a:ext>
+                </a:extLst>
               </a:tr>
             </a:tbl>
           </a:graphicData>
@@ -10456,6 +10744,7 @@
           <a:lstStyle/>
           <a:p>
             <a:pPr algn="ctr"/>
+            <a:endParaRPr/>
           </a:p>
         </p:txBody>
       </p:sp>
@@ -10500,6 +10789,7 @@
           <a:lstStyle/>
           <a:p>
             <a:pPr algn="ctr"/>
+            <a:endParaRPr/>
           </a:p>
         </p:txBody>
       </p:sp>
@@ -10520,7 +10810,7 @@
           <a:noFill/>
         </p:spPr>
         <p:txBody>
-          <a:bodyPr wrap="square" anchor="t" lIns="27432" rIns="27432" tIns="18288" bIns="18288">
+          <a:bodyPr wrap="square" lIns="27432" tIns="18288" rIns="27432" bIns="18288" anchor="t">
             <a:spAutoFit/>
           </a:bodyPr>
           <a:lstStyle/>
@@ -10559,7 +10849,7 @@
           <a:noFill/>
         </p:spPr>
         <p:txBody>
-          <a:bodyPr wrap="square" anchor="t" lIns="27432" rIns="27432" tIns="18288" bIns="18288">
+          <a:bodyPr wrap="square" lIns="27432" tIns="18288" rIns="27432" bIns="18288" anchor="t">
             <a:spAutoFit/>
           </a:bodyPr>
           <a:lstStyle/>
@@ -10614,7 +10904,7 @@
           <a:noFill/>
         </p:spPr>
         <p:txBody>
-          <a:bodyPr wrap="square" anchor="t" lIns="27432" rIns="27432" tIns="18288" bIns="18288">
+          <a:bodyPr wrap="square" lIns="27432" tIns="18288" rIns="27432" bIns="18288" anchor="t">
             <a:spAutoFit/>
           </a:bodyPr>
           <a:lstStyle/>
@@ -10653,7 +10943,7 @@
           <a:noFill/>
         </p:spPr>
         <p:txBody>
-          <a:bodyPr wrap="square" anchor="t" lIns="27432" rIns="27432" tIns="18288" bIns="18288">
+          <a:bodyPr wrap="square" lIns="27432" tIns="18288" rIns="27432" bIns="18288" anchor="t">
             <a:spAutoFit/>
           </a:bodyPr>
           <a:lstStyle/>
@@ -10684,7 +10974,7 @@
 </file>
 
 <file path=ppt/slides/slide19.xml><?xml version="1.0" encoding="utf-8"?>
-<p:sld xmlns:a="http://schemas.openxmlformats.org/drawingml/2006/main" xmlns:p="http://schemas.openxmlformats.org/presentationml/2006/main" xmlns:r="http://schemas.openxmlformats.org/officeDocument/2006/relationships">
+<p:sld xmlns:a="http://schemas.openxmlformats.org/drawingml/2006/main" xmlns:r="http://schemas.openxmlformats.org/officeDocument/2006/relationships" xmlns:p="http://schemas.openxmlformats.org/presentationml/2006/main">
   <p:cSld>
     <p:bg>
       <p:bgPr>
@@ -10700,7 +10990,14 @@
         <p:cNvGrpSpPr/>
         <p:nvPr/>
       </p:nvGrpSpPr>
-      <p:grpSpPr/>
+      <p:grpSpPr>
+        <a:xfrm>
+          <a:off x="0" y="0"/>
+          <a:ext cx="0" cy="0"/>
+          <a:chOff x="0" y="0"/>
+          <a:chExt cx="0" cy="0"/>
+        </a:xfrm>
+      </p:grpSpPr>
       <p:sp>
         <p:nvSpPr>
           <p:cNvPr id="2" name="Rectangle 1"/>
@@ -10742,6 +11039,7 @@
           <a:lstStyle/>
           <a:p>
             <a:pPr algn="ctr"/>
+            <a:endParaRPr/>
           </a:p>
         </p:txBody>
       </p:sp>
@@ -10786,6 +11084,7 @@
           <a:lstStyle/>
           <a:p>
             <a:pPr algn="ctr"/>
+            <a:endParaRPr/>
           </a:p>
         </p:txBody>
       </p:sp>
@@ -10806,7 +11105,7 @@
           <a:noFill/>
         </p:spPr>
         <p:txBody>
-          <a:bodyPr wrap="square" anchor="t" lIns="27432" rIns="27432" tIns="18288" bIns="18288">
+          <a:bodyPr wrap="square" lIns="27432" tIns="18288" rIns="27432" bIns="18288" anchor="t">
             <a:spAutoFit/>
           </a:bodyPr>
           <a:lstStyle/>
@@ -10845,7 +11144,7 @@
           <a:noFill/>
         </p:spPr>
         <p:txBody>
-          <a:bodyPr wrap="square" anchor="t" lIns="27432" rIns="27432" tIns="18288" bIns="18288">
+          <a:bodyPr wrap="square" lIns="27432" tIns="18288" rIns="27432" bIns="18288" anchor="t">
             <a:spAutoFit/>
           </a:bodyPr>
           <a:lstStyle/>
@@ -10886,9 +11185,27 @@
                 <a:tableStyleId>{5C22544A-7EE6-4342-B048-85BDC9FD1C3A}</a:tableStyleId>
               </a:tblPr>
               <a:tblGrid>
-                <a:gridCol w="2377440"/>
-                <a:gridCol w="4846320"/>
-                <a:gridCol w="3840480"/>
+                <a:gridCol w="2377440">
+                  <a:extLst>
+                    <a:ext uri="{9D8B030D-6E8A-4147-A177-3AD203B41FA5}">
+                      <a16:colId xmlns:a16="http://schemas.microsoft.com/office/drawing/2014/main" val="20000"/>
+                    </a:ext>
+                  </a:extLst>
+                </a:gridCol>
+                <a:gridCol w="4846320">
+                  <a:extLst>
+                    <a:ext uri="{9D8B030D-6E8A-4147-A177-3AD203B41FA5}">
+                      <a16:colId xmlns:a16="http://schemas.microsoft.com/office/drawing/2014/main" val="20001"/>
+                    </a:ext>
+                  </a:extLst>
+                </a:gridCol>
+                <a:gridCol w="3840480">
+                  <a:extLst>
+                    <a:ext uri="{9D8B030D-6E8A-4147-A177-3AD203B41FA5}">
+                      <a16:colId xmlns:a16="http://schemas.microsoft.com/office/drawing/2014/main" val="20002"/>
+                    </a:ext>
+                  </a:extLst>
+                </a:gridCol>
               </a:tblGrid>
               <a:tr h="475488">
                 <a:tc>
@@ -10960,6 +11277,11 @@
                     </a:solidFill>
                   </a:tcPr>
                 </a:tc>
+                <a:extLst>
+                  <a:ext uri="{0D108BD9-81ED-4DB2-BD59-A6C34878D82A}">
+                    <a16:rowId xmlns:a16="http://schemas.microsoft.com/office/drawing/2014/main" val="10000"/>
+                  </a:ext>
+                </a:extLst>
               </a:tr>
               <a:tr h="475488">
                 <a:tc>
@@ -11031,6 +11353,11 @@
                     </a:solidFill>
                   </a:tcPr>
                 </a:tc>
+                <a:extLst>
+                  <a:ext uri="{0D108BD9-81ED-4DB2-BD59-A6C34878D82A}">
+                    <a16:rowId xmlns:a16="http://schemas.microsoft.com/office/drawing/2014/main" val="10001"/>
+                  </a:ext>
+                </a:extLst>
               </a:tr>
               <a:tr h="475488">
                 <a:tc>
@@ -11102,6 +11429,11 @@
                     </a:solidFill>
                   </a:tcPr>
                 </a:tc>
+                <a:extLst>
+                  <a:ext uri="{0D108BD9-81ED-4DB2-BD59-A6C34878D82A}">
+                    <a16:rowId xmlns:a16="http://schemas.microsoft.com/office/drawing/2014/main" val="10002"/>
+                  </a:ext>
+                </a:extLst>
               </a:tr>
               <a:tr h="475488">
                 <a:tc>
@@ -11173,6 +11505,11 @@
                     </a:solidFill>
                   </a:tcPr>
                 </a:tc>
+                <a:extLst>
+                  <a:ext uri="{0D108BD9-81ED-4DB2-BD59-A6C34878D82A}">
+                    <a16:rowId xmlns:a16="http://schemas.microsoft.com/office/drawing/2014/main" val="10003"/>
+                  </a:ext>
+                </a:extLst>
               </a:tr>
               <a:tr h="475488">
                 <a:tc>
@@ -11244,6 +11581,11 @@
                     </a:solidFill>
                   </a:tcPr>
                 </a:tc>
+                <a:extLst>
+                  <a:ext uri="{0D108BD9-81ED-4DB2-BD59-A6C34878D82A}">
+                    <a16:rowId xmlns:a16="http://schemas.microsoft.com/office/drawing/2014/main" val="10004"/>
+                  </a:ext>
+                </a:extLst>
               </a:tr>
             </a:tbl>
           </a:graphicData>
@@ -11290,6 +11632,7 @@
           <a:lstStyle/>
           <a:p>
             <a:pPr algn="ctr"/>
+            <a:endParaRPr/>
           </a:p>
         </p:txBody>
       </p:sp>
@@ -11334,6 +11677,7 @@
           <a:lstStyle/>
           <a:p>
             <a:pPr algn="ctr"/>
+            <a:endParaRPr/>
           </a:p>
         </p:txBody>
       </p:sp>
@@ -11354,7 +11698,7 @@
           <a:noFill/>
         </p:spPr>
         <p:txBody>
-          <a:bodyPr wrap="square" anchor="t" lIns="27432" rIns="27432" tIns="18288" bIns="18288">
+          <a:bodyPr wrap="square" lIns="27432" tIns="18288" rIns="27432" bIns="18288" anchor="t">
             <a:spAutoFit/>
           </a:bodyPr>
           <a:lstStyle/>
@@ -11393,7 +11737,7 @@
           <a:noFill/>
         </p:spPr>
         <p:txBody>
-          <a:bodyPr wrap="square" anchor="t" lIns="27432" rIns="27432" tIns="18288" bIns="18288">
+          <a:bodyPr wrap="square" lIns="27432" tIns="18288" rIns="27432" bIns="18288" anchor="t">
             <a:spAutoFit/>
           </a:bodyPr>
           <a:lstStyle/>
@@ -11464,7 +11808,7 @@
           <a:noFill/>
         </p:spPr>
         <p:txBody>
-          <a:bodyPr wrap="square" anchor="t" lIns="27432" rIns="27432" tIns="18288" bIns="18288">
+          <a:bodyPr wrap="square" lIns="27432" tIns="18288" rIns="27432" bIns="18288" anchor="t">
             <a:spAutoFit/>
           </a:bodyPr>
           <a:lstStyle/>
@@ -11503,7 +11847,7 @@
           <a:noFill/>
         </p:spPr>
         <p:txBody>
-          <a:bodyPr wrap="square" anchor="t" lIns="27432" rIns="27432" tIns="18288" bIns="18288">
+          <a:bodyPr wrap="square" lIns="27432" tIns="18288" rIns="27432" bIns="18288" anchor="t">
             <a:spAutoFit/>
           </a:bodyPr>
           <a:lstStyle/>
@@ -11534,7 +11878,7 @@
 </file>
 
 <file path=ppt/slides/slide2.xml><?xml version="1.0" encoding="utf-8"?>
-<p:sld xmlns:a="http://schemas.openxmlformats.org/drawingml/2006/main" xmlns:p="http://schemas.openxmlformats.org/presentationml/2006/main" xmlns:r="http://schemas.openxmlformats.org/officeDocument/2006/relationships">
+<p:sld xmlns:a="http://schemas.openxmlformats.org/drawingml/2006/main" xmlns:r="http://schemas.openxmlformats.org/officeDocument/2006/relationships" xmlns:p="http://schemas.openxmlformats.org/presentationml/2006/main">
   <p:cSld>
     <p:bg>
       <p:bgPr>
@@ -11550,7 +11894,14 @@
         <p:cNvGrpSpPr/>
         <p:nvPr/>
       </p:nvGrpSpPr>
-      <p:grpSpPr/>
+      <p:grpSpPr>
+        <a:xfrm>
+          <a:off x="0" y="0"/>
+          <a:ext cx="0" cy="0"/>
+          <a:chOff x="0" y="0"/>
+          <a:chExt cx="0" cy="0"/>
+        </a:xfrm>
+      </p:grpSpPr>
       <p:sp>
         <p:nvSpPr>
           <p:cNvPr id="2" name="Rectangle 1"/>
@@ -11592,6 +11943,7 @@
           <a:lstStyle/>
           <a:p>
             <a:pPr algn="ctr"/>
+            <a:endParaRPr/>
           </a:p>
         </p:txBody>
       </p:sp>
@@ -11636,6 +11988,7 @@
           <a:lstStyle/>
           <a:p>
             <a:pPr algn="ctr"/>
+            <a:endParaRPr/>
           </a:p>
         </p:txBody>
       </p:sp>
@@ -11656,7 +12009,7 @@
           <a:noFill/>
         </p:spPr>
         <p:txBody>
-          <a:bodyPr wrap="square" anchor="t" lIns="27432" rIns="27432" tIns="18288" bIns="18288">
+          <a:bodyPr wrap="square" lIns="27432" tIns="18288" rIns="27432" bIns="18288" anchor="t">
             <a:spAutoFit/>
           </a:bodyPr>
           <a:lstStyle/>
@@ -11695,7 +12048,7 @@
           <a:noFill/>
         </p:spPr>
         <p:txBody>
-          <a:bodyPr wrap="square" anchor="t" lIns="27432" rIns="27432" tIns="18288" bIns="18288">
+          <a:bodyPr wrap="square" lIns="27432" tIns="18288" rIns="27432" bIns="18288" anchor="t">
             <a:spAutoFit/>
           </a:bodyPr>
           <a:lstStyle/>
@@ -11758,6 +12111,7 @@
           <a:lstStyle/>
           <a:p>
             <a:pPr algn="ctr"/>
+            <a:endParaRPr/>
           </a:p>
         </p:txBody>
       </p:sp>
@@ -11802,6 +12156,7 @@
           <a:lstStyle/>
           <a:p>
             <a:pPr algn="ctr"/>
+            <a:endParaRPr/>
           </a:p>
         </p:txBody>
       </p:sp>
@@ -11822,7 +12177,7 @@
           <a:noFill/>
         </p:spPr>
         <p:txBody>
-          <a:bodyPr wrap="square" anchor="ctr" lIns="27432" rIns="27432" tIns="18288" bIns="18288">
+          <a:bodyPr wrap="square" lIns="27432" tIns="18288" rIns="27432" bIns="18288" anchor="ctr">
             <a:spAutoFit/>
           </a:bodyPr>
           <a:lstStyle/>
@@ -11861,7 +12216,7 @@
           <a:noFill/>
         </p:spPr>
         <p:txBody>
-          <a:bodyPr wrap="square" anchor="t" lIns="27432" rIns="27432" tIns="18288" bIns="18288">
+          <a:bodyPr wrap="square" lIns="27432" tIns="18288" rIns="27432" bIns="18288" anchor="t">
             <a:spAutoFit/>
           </a:bodyPr>
           <a:lstStyle/>
@@ -11900,7 +12255,7 @@
           <a:noFill/>
         </p:spPr>
         <p:txBody>
-          <a:bodyPr wrap="square" anchor="t" lIns="27432" rIns="27432" tIns="18288" bIns="18288">
+          <a:bodyPr wrap="square" lIns="27432" tIns="18288" rIns="27432" bIns="18288" anchor="t">
             <a:spAutoFit/>
           </a:bodyPr>
           <a:lstStyle/>
@@ -11963,6 +12318,7 @@
           <a:lstStyle/>
           <a:p>
             <a:pPr algn="ctr"/>
+            <a:endParaRPr/>
           </a:p>
         </p:txBody>
       </p:sp>
@@ -12007,6 +12363,7 @@
           <a:lstStyle/>
           <a:p>
             <a:pPr algn="ctr"/>
+            <a:endParaRPr/>
           </a:p>
         </p:txBody>
       </p:sp>
@@ -12027,7 +12384,7 @@
           <a:noFill/>
         </p:spPr>
         <p:txBody>
-          <a:bodyPr wrap="square" anchor="ctr" lIns="27432" rIns="27432" tIns="18288" bIns="18288">
+          <a:bodyPr wrap="square" lIns="27432" tIns="18288" rIns="27432" bIns="18288" anchor="ctr">
             <a:spAutoFit/>
           </a:bodyPr>
           <a:lstStyle/>
@@ -12058,7 +12415,7 @@
         <p:spPr>
           <a:xfrm>
             <a:off x="2514600" y="2779776"/>
-            <a:ext cx="8595360" cy="457200"/>
+            <a:ext cx="8595360" cy="313932"/>
           </a:xfrm>
           <a:prstGeom prst="rect">
             <a:avLst/>
@@ -12066,7 +12423,7 @@
           <a:noFill/>
         </p:spPr>
         <p:txBody>
-          <a:bodyPr wrap="square" anchor="t" lIns="27432" rIns="27432" tIns="18288" bIns="18288">
+          <a:bodyPr wrap="square" lIns="27432" tIns="18288" rIns="27432" bIns="18288" anchor="t">
             <a:spAutoFit/>
           </a:bodyPr>
           <a:lstStyle/>
@@ -12077,13 +12434,40 @@
               </a:spcAft>
             </a:pPr>
             <a:r>
-              <a:rPr sz="1800" b="1">
+              <a:rPr lang="en-US" sz="1800" b="1" dirty="0">
                 <a:solidFill>
                   <a:srgbClr val="12233A"/>
                 </a:solidFill>
                 <a:latin typeface="Malgun Gothic"/>
               </a:rPr>
-              <a:t>MySQL — Premium SSD v1 vs v2</a:t>
+              <a:t>Azure </a:t>
+            </a:r>
+            <a:r>
+              <a:rPr sz="1800" b="1" dirty="0">
+                <a:solidFill>
+                  <a:srgbClr val="12233A"/>
+                </a:solidFill>
+                <a:latin typeface="Malgun Gothic"/>
+              </a:rPr>
+              <a:t>MySQL</a:t>
+            </a:r>
+            <a:r>
+              <a:rPr lang="en-US" sz="1800" b="1" dirty="0">
+                <a:solidFill>
+                  <a:srgbClr val="12233A"/>
+                </a:solidFill>
+                <a:latin typeface="Malgun Gothic"/>
+              </a:rPr>
+              <a:t> Flexible</a:t>
+            </a:r>
+            <a:r>
+              <a:rPr sz="1800" b="1" dirty="0">
+                <a:solidFill>
+                  <a:srgbClr val="12233A"/>
+                </a:solidFill>
+                <a:latin typeface="Malgun Gothic"/>
+              </a:rPr>
+              <a:t> — Premium SSD v1 vs v2</a:t>
             </a:r>
           </a:p>
         </p:txBody>
@@ -12097,7 +12481,7 @@
         <p:spPr>
           <a:xfrm>
             <a:off x="2514600" y="3227832"/>
-            <a:ext cx="8595360" cy="411480"/>
+            <a:ext cx="8595360" cy="213905"/>
           </a:xfrm>
           <a:prstGeom prst="rect">
             <a:avLst/>
@@ -12105,7 +12489,7 @@
           <a:noFill/>
         </p:spPr>
         <p:txBody>
-          <a:bodyPr wrap="square" anchor="t" lIns="27432" rIns="27432" tIns="18288" bIns="18288">
+          <a:bodyPr wrap="square" lIns="27432" tIns="18288" rIns="27432" bIns="18288" anchor="t">
             <a:spAutoFit/>
           </a:bodyPr>
           <a:lstStyle/>
@@ -12116,14 +12500,128 @@
               </a:spcAft>
             </a:pPr>
             <a:r>
-              <a:rPr sz="1150" b="0">
+              <a:rPr sz="1150" b="0" dirty="0" err="1">
                 <a:solidFill>
                   <a:srgbClr val="5A6B82"/>
                 </a:solidFill>
                 <a:latin typeface="Malgun Gothic"/>
               </a:rPr>
-              <a:t>같은 IOPS 조건에서 스토리지 세대만 바꿨을 때의 차이</a:t>
-            </a:r>
+              <a:t>같은</a:t>
+            </a:r>
+            <a:r>
+              <a:rPr sz="1150" b="0" dirty="0">
+                <a:solidFill>
+                  <a:srgbClr val="5A6B82"/>
+                </a:solidFill>
+                <a:latin typeface="Malgun Gothic"/>
+              </a:rPr>
+              <a:t> IOPS </a:t>
+            </a:r>
+            <a:r>
+              <a:rPr sz="1150" b="0" dirty="0" err="1">
+                <a:solidFill>
+                  <a:srgbClr val="5A6B82"/>
+                </a:solidFill>
+                <a:latin typeface="Malgun Gothic"/>
+              </a:rPr>
+              <a:t>조건에서</a:t>
+            </a:r>
+            <a:r>
+              <a:rPr sz="1150" b="0" dirty="0">
+                <a:solidFill>
+                  <a:srgbClr val="5A6B82"/>
+                </a:solidFill>
+                <a:latin typeface="Malgun Gothic"/>
+              </a:rPr>
+              <a:t> </a:t>
+            </a:r>
+            <a:r>
+              <a:rPr sz="1150" b="0" dirty="0" err="1">
+                <a:solidFill>
+                  <a:srgbClr val="5A6B82"/>
+                </a:solidFill>
+                <a:latin typeface="Malgun Gothic"/>
+              </a:rPr>
+              <a:t>스토리지</a:t>
+            </a:r>
+            <a:r>
+              <a:rPr sz="1150" b="0" dirty="0">
+                <a:solidFill>
+                  <a:srgbClr val="5A6B82"/>
+                </a:solidFill>
+                <a:latin typeface="Malgun Gothic"/>
+              </a:rPr>
+              <a:t> </a:t>
+            </a:r>
+            <a:r>
+              <a:rPr lang="ko-KR" altLang="en-US" sz="1150" dirty="0">
+                <a:solidFill>
+                  <a:srgbClr val="5A6B82"/>
+                </a:solidFill>
+                <a:latin typeface="Malgun Gothic"/>
+              </a:rPr>
+              <a:t>버전이</a:t>
+            </a:r>
+            <a:r>
+              <a:rPr sz="1150" b="0" dirty="0">
+                <a:solidFill>
+                  <a:srgbClr val="5A6B82"/>
+                </a:solidFill>
+                <a:latin typeface="Malgun Gothic"/>
+              </a:rPr>
+              <a:t> </a:t>
+            </a:r>
+            <a:r>
+              <a:rPr sz="1150" b="0" dirty="0" err="1">
+                <a:solidFill>
+                  <a:srgbClr val="5A6B82"/>
+                </a:solidFill>
+                <a:latin typeface="Malgun Gothic"/>
+              </a:rPr>
+              <a:t>바꿨을</a:t>
+            </a:r>
+            <a:r>
+              <a:rPr sz="1150" b="0" dirty="0">
+                <a:solidFill>
+                  <a:srgbClr val="5A6B82"/>
+                </a:solidFill>
+                <a:latin typeface="Malgun Gothic"/>
+              </a:rPr>
+              <a:t> </a:t>
+            </a:r>
+            <a:r>
+              <a:rPr sz="1150" b="0" dirty="0" err="1">
+                <a:solidFill>
+                  <a:srgbClr val="5A6B82"/>
+                </a:solidFill>
+                <a:latin typeface="Malgun Gothic"/>
+              </a:rPr>
+              <a:t>때의</a:t>
+            </a:r>
+            <a:r>
+              <a:rPr sz="1150" b="0" dirty="0">
+                <a:solidFill>
+                  <a:srgbClr val="5A6B82"/>
+                </a:solidFill>
+                <a:latin typeface="Malgun Gothic"/>
+              </a:rPr>
+              <a:t> </a:t>
+            </a:r>
+            <a:r>
+              <a:rPr sz="1150" b="0" dirty="0" err="1">
+                <a:solidFill>
+                  <a:srgbClr val="5A6B82"/>
+                </a:solidFill>
+                <a:latin typeface="Malgun Gothic"/>
+              </a:rPr>
+              <a:t>차이</a:t>
+            </a:r>
+            <a:endParaRPr sz="1150" b="0" dirty="0">
+              <a:solidFill>
+                <a:srgbClr val="5A6B82"/>
+              </a:solidFill>
+              <a:latin typeface="Malgun Gothic"/>
+            </a:endParaRPr>
           </a:p>
         </p:txBody>
       </p:sp>
@@ -12168,6 +12666,7 @@
           <a:lstStyle/>
           <a:p>
             <a:pPr algn="ctr"/>
+            <a:endParaRPr/>
           </a:p>
         </p:txBody>
       </p:sp>
@@ -12212,6 +12711,7 @@
           <a:lstStyle/>
           <a:p>
             <a:pPr algn="ctr"/>
+            <a:endParaRPr/>
           </a:p>
         </p:txBody>
       </p:sp>
@@ -12232,7 +12732,7 @@
           <a:noFill/>
         </p:spPr>
         <p:txBody>
-          <a:bodyPr wrap="square" anchor="ctr" lIns="27432" rIns="27432" tIns="18288" bIns="18288">
+          <a:bodyPr wrap="square" lIns="27432" tIns="18288" rIns="27432" bIns="18288" anchor="ctr">
             <a:spAutoFit/>
           </a:bodyPr>
           <a:lstStyle/>
@@ -12263,7 +12763,7 @@
         <p:spPr>
           <a:xfrm>
             <a:off x="2514600" y="3986784"/>
-            <a:ext cx="8595360" cy="457200"/>
+            <a:ext cx="8595360" cy="313932"/>
           </a:xfrm>
           <a:prstGeom prst="rect">
             <a:avLst/>
@@ -12271,7 +12771,7 @@
           <a:noFill/>
         </p:spPr>
         <p:txBody>
-          <a:bodyPr wrap="square" anchor="t" lIns="27432" rIns="27432" tIns="18288" bIns="18288">
+          <a:bodyPr wrap="square" lIns="27432" tIns="18288" rIns="27432" bIns="18288" anchor="t">
             <a:spAutoFit/>
           </a:bodyPr>
           <a:lstStyle/>
@@ -12282,14 +12782,56 @@
               </a:spcAft>
             </a:pPr>
             <a:r>
-              <a:rPr sz="1800" b="1">
+              <a:rPr lang="en-US" sz="1800" b="1" dirty="0">
                 <a:solidFill>
                   <a:srgbClr val="12233A"/>
                 </a:solidFill>
                 <a:latin typeface="Malgun Gothic"/>
               </a:rPr>
-              <a:t>PostgreSQL vs Azure HorizonDB</a:t>
-            </a:r>
+              <a:t>Azure </a:t>
+            </a:r>
+            <a:r>
+              <a:rPr sz="1800" b="1" dirty="0">
+                <a:solidFill>
+                  <a:srgbClr val="12233A"/>
+                </a:solidFill>
+                <a:latin typeface="Malgun Gothic"/>
+              </a:rPr>
+              <a:t>PostgreSQL</a:t>
+            </a:r>
+            <a:r>
+              <a:rPr lang="en-US" sz="1800" b="1" dirty="0">
+                <a:solidFill>
+                  <a:srgbClr val="12233A"/>
+                </a:solidFill>
+                <a:latin typeface="Malgun Gothic"/>
+              </a:rPr>
+              <a:t> Flexible</a:t>
+            </a:r>
+            <a:r>
+              <a:rPr sz="1800" b="1" dirty="0">
+                <a:solidFill>
+                  <a:srgbClr val="12233A"/>
+                </a:solidFill>
+                <a:latin typeface="Malgun Gothic"/>
+              </a:rPr>
+              <a:t> vs Azure </a:t>
+            </a:r>
+            <a:r>
+              <a:rPr sz="1800" b="1" dirty="0" err="1">
+                <a:solidFill>
+                  <a:srgbClr val="12233A"/>
+                </a:solidFill>
+                <a:latin typeface="Malgun Gothic"/>
+              </a:rPr>
+              <a:t>HorizonDB</a:t>
+            </a:r>
+            <a:endParaRPr sz="1800" b="1" dirty="0">
+              <a:solidFill>
+                <a:srgbClr val="12233A"/>
+              </a:solidFill>
+              <a:latin typeface="Malgun Gothic"/>
+            </a:endParaRPr>
           </a:p>
         </p:txBody>
       </p:sp>
@@ -12310,7 +12852,7 @@
           <a:noFill/>
         </p:spPr>
         <p:txBody>
-          <a:bodyPr wrap="square" anchor="t" lIns="27432" rIns="27432" tIns="18288" bIns="18288">
+          <a:bodyPr wrap="square" lIns="27432" tIns="18288" rIns="27432" bIns="18288" anchor="t">
             <a:spAutoFit/>
           </a:bodyPr>
           <a:lstStyle/>
@@ -12373,6 +12915,7 @@
           <a:lstStyle/>
           <a:p>
             <a:pPr algn="ctr"/>
+            <a:endParaRPr/>
           </a:p>
         </p:txBody>
       </p:sp>
@@ -12417,6 +12960,7 @@
           <a:lstStyle/>
           <a:p>
             <a:pPr algn="ctr"/>
+            <a:endParaRPr/>
           </a:p>
         </p:txBody>
       </p:sp>
@@ -12437,7 +12981,7 @@
           <a:noFill/>
         </p:spPr>
         <p:txBody>
-          <a:bodyPr wrap="square" anchor="ctr" lIns="27432" rIns="27432" tIns="18288" bIns="18288">
+          <a:bodyPr wrap="square" lIns="27432" tIns="18288" rIns="27432" bIns="18288" anchor="ctr">
             <a:spAutoFit/>
           </a:bodyPr>
           <a:lstStyle/>
@@ -12476,7 +13020,7 @@
           <a:noFill/>
         </p:spPr>
         <p:txBody>
-          <a:bodyPr wrap="square" anchor="t" lIns="27432" rIns="27432" tIns="18288" bIns="18288">
+          <a:bodyPr wrap="square" lIns="27432" tIns="18288" rIns="27432" bIns="18288" anchor="t">
             <a:spAutoFit/>
           </a:bodyPr>
           <a:lstStyle/>
@@ -12515,7 +13059,7 @@
           <a:noFill/>
         </p:spPr>
         <p:txBody>
-          <a:bodyPr wrap="square" anchor="t" lIns="27432" rIns="27432" tIns="18288" bIns="18288">
+          <a:bodyPr wrap="square" lIns="27432" tIns="18288" rIns="27432" bIns="18288" anchor="t">
             <a:spAutoFit/>
           </a:bodyPr>
           <a:lstStyle/>
@@ -12554,7 +13098,7 @@
           <a:noFill/>
         </p:spPr>
         <p:txBody>
-          <a:bodyPr wrap="square" anchor="t" lIns="27432" rIns="27432" tIns="18288" bIns="18288">
+          <a:bodyPr wrap="square" lIns="27432" tIns="18288" rIns="27432" bIns="18288" anchor="t">
             <a:spAutoFit/>
           </a:bodyPr>
           <a:lstStyle/>
@@ -12593,7 +13137,7 @@
           <a:noFill/>
         </p:spPr>
         <p:txBody>
-          <a:bodyPr wrap="square" anchor="t" lIns="27432" rIns="27432" tIns="18288" bIns="18288">
+          <a:bodyPr wrap="square" lIns="27432" tIns="18288" rIns="27432" bIns="18288" anchor="t">
             <a:spAutoFit/>
           </a:bodyPr>
           <a:lstStyle/>
@@ -12624,7 +13168,7 @@
 </file>
 
 <file path=ppt/slides/slide20.xml><?xml version="1.0" encoding="utf-8"?>
-<p:sld xmlns:a="http://schemas.openxmlformats.org/drawingml/2006/main" xmlns:p="http://schemas.openxmlformats.org/presentationml/2006/main" xmlns:r="http://schemas.openxmlformats.org/officeDocument/2006/relationships">
+<p:sld xmlns:a="http://schemas.openxmlformats.org/drawingml/2006/main" xmlns:r="http://schemas.openxmlformats.org/officeDocument/2006/relationships" xmlns:p="http://schemas.openxmlformats.org/presentationml/2006/main">
   <p:cSld>
     <p:bg>
       <p:bgPr>
@@ -12640,7 +13184,14 @@
         <p:cNvGrpSpPr/>
         <p:nvPr/>
       </p:nvGrpSpPr>
-      <p:grpSpPr/>
+      <p:grpSpPr>
+        <a:xfrm>
+          <a:off x="0" y="0"/>
+          <a:ext cx="0" cy="0"/>
+          <a:chOff x="0" y="0"/>
+          <a:chExt cx="0" cy="0"/>
+        </a:xfrm>
+      </p:grpSpPr>
       <p:sp>
         <p:nvSpPr>
           <p:cNvPr id="2" name="Rectangle 1"/>
@@ -12682,6 +13233,7 @@
           <a:lstStyle/>
           <a:p>
             <a:pPr algn="ctr"/>
+            <a:endParaRPr/>
           </a:p>
         </p:txBody>
       </p:sp>
@@ -12726,6 +13278,7 @@
           <a:lstStyle/>
           <a:p>
             <a:pPr algn="ctr"/>
+            <a:endParaRPr/>
           </a:p>
         </p:txBody>
       </p:sp>
@@ -12746,7 +13299,7 @@
           <a:noFill/>
         </p:spPr>
         <p:txBody>
-          <a:bodyPr wrap="square" anchor="t" lIns="27432" rIns="27432" tIns="18288" bIns="18288">
+          <a:bodyPr wrap="square" lIns="27432" tIns="18288" rIns="27432" bIns="18288" anchor="t">
             <a:spAutoFit/>
           </a:bodyPr>
           <a:lstStyle/>
@@ -12785,7 +13338,7 @@
           <a:noFill/>
         </p:spPr>
         <p:txBody>
-          <a:bodyPr wrap="square" anchor="t" lIns="27432" rIns="27432" tIns="18288" bIns="18288">
+          <a:bodyPr wrap="square" lIns="27432" tIns="18288" rIns="27432" bIns="18288" anchor="t">
             <a:spAutoFit/>
           </a:bodyPr>
           <a:lstStyle/>
@@ -12826,10 +13379,34 @@
                 <a:tableStyleId>{5C22544A-7EE6-4342-B048-85BDC9FD1C3A}</a:tableStyleId>
               </a:tblPr>
               <a:tblGrid>
-                <a:gridCol w="2743200"/>
-                <a:gridCol w="2743200"/>
-                <a:gridCol w="3108960"/>
-                <a:gridCol w="2468880"/>
+                <a:gridCol w="2743200">
+                  <a:extLst>
+                    <a:ext uri="{9D8B030D-6E8A-4147-A177-3AD203B41FA5}">
+                      <a16:colId xmlns:a16="http://schemas.microsoft.com/office/drawing/2014/main" val="20000"/>
+                    </a:ext>
+                  </a:extLst>
+                </a:gridCol>
+                <a:gridCol w="2743200">
+                  <a:extLst>
+                    <a:ext uri="{9D8B030D-6E8A-4147-A177-3AD203B41FA5}">
+                      <a16:colId xmlns:a16="http://schemas.microsoft.com/office/drawing/2014/main" val="20001"/>
+                    </a:ext>
+                  </a:extLst>
+                </a:gridCol>
+                <a:gridCol w="3108960">
+                  <a:extLst>
+                    <a:ext uri="{9D8B030D-6E8A-4147-A177-3AD203B41FA5}">
+                      <a16:colId xmlns:a16="http://schemas.microsoft.com/office/drawing/2014/main" val="20002"/>
+                    </a:ext>
+                  </a:extLst>
+                </a:gridCol>
+                <a:gridCol w="2468880">
+                  <a:extLst>
+                    <a:ext uri="{9D8B030D-6E8A-4147-A177-3AD203B41FA5}">
+                      <a16:colId xmlns:a16="http://schemas.microsoft.com/office/drawing/2014/main" val="20003"/>
+                    </a:ext>
+                  </a:extLst>
+                </a:gridCol>
               </a:tblGrid>
               <a:tr h="475488">
                 <a:tc>
@@ -12924,6 +13501,11 @@
                     </a:solidFill>
                   </a:tcPr>
                 </a:tc>
+                <a:extLst>
+                  <a:ext uri="{0D108BD9-81ED-4DB2-BD59-A6C34878D82A}">
+                    <a16:rowId xmlns:a16="http://schemas.microsoft.com/office/drawing/2014/main" val="10000"/>
+                  </a:ext>
+                </a:extLst>
               </a:tr>
               <a:tr h="475488">
                 <a:tc>
@@ -13018,6 +13600,11 @@
                     </a:solidFill>
                   </a:tcPr>
                 </a:tc>
+                <a:extLst>
+                  <a:ext uri="{0D108BD9-81ED-4DB2-BD59-A6C34878D82A}">
+                    <a16:rowId xmlns:a16="http://schemas.microsoft.com/office/drawing/2014/main" val="10001"/>
+                  </a:ext>
+                </a:extLst>
               </a:tr>
               <a:tr h="475488">
                 <a:tc>
@@ -13112,6 +13699,11 @@
                     </a:solidFill>
                   </a:tcPr>
                 </a:tc>
+                <a:extLst>
+                  <a:ext uri="{0D108BD9-81ED-4DB2-BD59-A6C34878D82A}">
+                    <a16:rowId xmlns:a16="http://schemas.microsoft.com/office/drawing/2014/main" val="10002"/>
+                  </a:ext>
+                </a:extLst>
               </a:tr>
               <a:tr h="475488">
                 <a:tc>
@@ -13206,6 +13798,11 @@
                     </a:solidFill>
                   </a:tcPr>
                 </a:tc>
+                <a:extLst>
+                  <a:ext uri="{0D108BD9-81ED-4DB2-BD59-A6C34878D82A}">
+                    <a16:rowId xmlns:a16="http://schemas.microsoft.com/office/drawing/2014/main" val="10003"/>
+                  </a:ext>
+                </a:extLst>
               </a:tr>
               <a:tr h="475488">
                 <a:tc>
@@ -13300,6 +13897,11 @@
                     </a:solidFill>
                   </a:tcPr>
                 </a:tc>
+                <a:extLst>
+                  <a:ext uri="{0D108BD9-81ED-4DB2-BD59-A6C34878D82A}">
+                    <a16:rowId xmlns:a16="http://schemas.microsoft.com/office/drawing/2014/main" val="10004"/>
+                  </a:ext>
+                </a:extLst>
               </a:tr>
             </a:tbl>
           </a:graphicData>
@@ -13346,6 +13948,7 @@
           <a:lstStyle/>
           <a:p>
             <a:pPr algn="ctr"/>
+            <a:endParaRPr/>
           </a:p>
         </p:txBody>
       </p:sp>
@@ -13390,6 +13993,7 @@
           <a:lstStyle/>
           <a:p>
             <a:pPr algn="ctr"/>
+            <a:endParaRPr/>
           </a:p>
         </p:txBody>
       </p:sp>
@@ -13410,7 +14014,7 @@
           <a:noFill/>
         </p:spPr>
         <p:txBody>
-          <a:bodyPr wrap="square" anchor="t" lIns="27432" rIns="27432" tIns="18288" bIns="18288">
+          <a:bodyPr wrap="square" lIns="27432" tIns="18288" rIns="27432" bIns="18288" anchor="t">
             <a:spAutoFit/>
           </a:bodyPr>
           <a:lstStyle/>
@@ -13449,7 +14053,7 @@
           <a:noFill/>
         </p:spPr>
         <p:txBody>
-          <a:bodyPr wrap="square" anchor="t" lIns="27432" rIns="27432" tIns="18288" bIns="18288">
+          <a:bodyPr wrap="square" lIns="27432" tIns="18288" rIns="27432" bIns="18288" anchor="t">
             <a:spAutoFit/>
           </a:bodyPr>
           <a:lstStyle/>
@@ -13520,7 +14124,7 @@
           <a:noFill/>
         </p:spPr>
         <p:txBody>
-          <a:bodyPr wrap="square" anchor="t" lIns="27432" rIns="27432" tIns="18288" bIns="18288">
+          <a:bodyPr wrap="square" lIns="27432" tIns="18288" rIns="27432" bIns="18288" anchor="t">
             <a:spAutoFit/>
           </a:bodyPr>
           <a:lstStyle/>
@@ -13559,7 +14163,7 @@
           <a:noFill/>
         </p:spPr>
         <p:txBody>
-          <a:bodyPr wrap="square" anchor="t" lIns="27432" rIns="27432" tIns="18288" bIns="18288">
+          <a:bodyPr wrap="square" lIns="27432" tIns="18288" rIns="27432" bIns="18288" anchor="t">
             <a:spAutoFit/>
           </a:bodyPr>
           <a:lstStyle/>
@@ -13590,7 +14194,7 @@
 </file>
 
 <file path=ppt/slides/slide21.xml><?xml version="1.0" encoding="utf-8"?>
-<p:sld xmlns:a="http://schemas.openxmlformats.org/drawingml/2006/main" xmlns:p="http://schemas.openxmlformats.org/presentationml/2006/main" xmlns:r="http://schemas.openxmlformats.org/officeDocument/2006/relationships">
+<p:sld xmlns:a="http://schemas.openxmlformats.org/drawingml/2006/main" xmlns:r="http://schemas.openxmlformats.org/officeDocument/2006/relationships" xmlns:p="http://schemas.openxmlformats.org/presentationml/2006/main">
   <p:cSld>
     <p:bg>
       <p:bgPr>
@@ -13606,7 +14210,14 @@
         <p:cNvGrpSpPr/>
         <p:nvPr/>
       </p:nvGrpSpPr>
-      <p:grpSpPr/>
+      <p:grpSpPr>
+        <a:xfrm>
+          <a:off x="0" y="0"/>
+          <a:ext cx="0" cy="0"/>
+          <a:chOff x="0" y="0"/>
+          <a:chExt cx="0" cy="0"/>
+        </a:xfrm>
+      </p:grpSpPr>
       <p:sp>
         <p:nvSpPr>
           <p:cNvPr id="2" name="Rectangle 1"/>
@@ -13648,6 +14259,7 @@
           <a:lstStyle/>
           <a:p>
             <a:pPr algn="ctr"/>
+            <a:endParaRPr/>
           </a:p>
         </p:txBody>
       </p:sp>
@@ -13692,6 +14304,7 @@
           <a:lstStyle/>
           <a:p>
             <a:pPr algn="ctr"/>
+            <a:endParaRPr/>
           </a:p>
         </p:txBody>
       </p:sp>
@@ -13712,7 +14325,7 @@
           <a:noFill/>
         </p:spPr>
         <p:txBody>
-          <a:bodyPr wrap="square" anchor="t" lIns="27432" rIns="27432" tIns="18288" bIns="18288">
+          <a:bodyPr wrap="square" lIns="27432" tIns="18288" rIns="27432" bIns="18288" anchor="t">
             <a:spAutoFit/>
           </a:bodyPr>
           <a:lstStyle/>
@@ -13775,6 +14388,7 @@
           <a:lstStyle/>
           <a:p>
             <a:pPr algn="ctr"/>
+            <a:endParaRPr/>
           </a:p>
         </p:txBody>
       </p:sp>
@@ -13795,7 +14409,7 @@
           <a:noFill/>
         </p:spPr>
         <p:txBody>
-          <a:bodyPr wrap="square" anchor="t" lIns="27432" rIns="27432" tIns="18288" bIns="18288">
+          <a:bodyPr wrap="square" lIns="27432" tIns="18288" rIns="27432" bIns="18288" anchor="t">
             <a:spAutoFit/>
           </a:bodyPr>
           <a:lstStyle/>
@@ -13834,7 +14448,7 @@
           <a:noFill/>
         </p:spPr>
         <p:txBody>
-          <a:bodyPr wrap="square" anchor="t" lIns="27432" rIns="27432" tIns="18288" bIns="18288">
+          <a:bodyPr wrap="square" lIns="27432" tIns="18288" rIns="27432" bIns="18288" anchor="t">
             <a:spAutoFit/>
           </a:bodyPr>
           <a:lstStyle/>
@@ -13873,7 +14487,7 @@
           <a:noFill/>
         </p:spPr>
         <p:txBody>
-          <a:bodyPr wrap="square" anchor="t" lIns="27432" rIns="27432" tIns="18288" bIns="18288">
+          <a:bodyPr wrap="square" lIns="27432" tIns="18288" rIns="27432" bIns="18288" anchor="t">
             <a:spAutoFit/>
           </a:bodyPr>
           <a:lstStyle/>
@@ -13936,6 +14550,7 @@
           <a:lstStyle/>
           <a:p>
             <a:pPr algn="ctr"/>
+            <a:endParaRPr/>
           </a:p>
         </p:txBody>
       </p:sp>
@@ -13956,7 +14571,7 @@
           <a:noFill/>
         </p:spPr>
         <p:txBody>
-          <a:bodyPr wrap="square" anchor="t" lIns="27432" rIns="27432" tIns="18288" bIns="18288">
+          <a:bodyPr wrap="square" lIns="27432" tIns="18288" rIns="27432" bIns="18288" anchor="t">
             <a:spAutoFit/>
           </a:bodyPr>
           <a:lstStyle/>
@@ -14019,6 +14634,7 @@
           <a:lstStyle/>
           <a:p>
             <a:pPr algn="ctr"/>
+            <a:endParaRPr/>
           </a:p>
         </p:txBody>
       </p:sp>
@@ -14039,7 +14655,7 @@
           <a:noFill/>
         </p:spPr>
         <p:txBody>
-          <a:bodyPr wrap="square" anchor="t" lIns="27432" rIns="27432" tIns="18288" bIns="18288">
+          <a:bodyPr wrap="square" lIns="27432" tIns="18288" rIns="27432" bIns="18288" anchor="t">
             <a:spAutoFit/>
           </a:bodyPr>
           <a:lstStyle/>
@@ -14102,6 +14718,7 @@
           <a:lstStyle/>
           <a:p>
             <a:pPr algn="ctr"/>
+            <a:endParaRPr/>
           </a:p>
         </p:txBody>
       </p:sp>
@@ -14122,7 +14739,7 @@
           <a:noFill/>
         </p:spPr>
         <p:txBody>
-          <a:bodyPr wrap="square" anchor="t" lIns="27432" rIns="27432" tIns="18288" bIns="18288">
+          <a:bodyPr wrap="square" lIns="27432" tIns="18288" rIns="27432" bIns="18288" anchor="t">
             <a:spAutoFit/>
           </a:bodyPr>
           <a:lstStyle/>
@@ -14161,7 +14778,7 @@
           <a:noFill/>
         </p:spPr>
         <p:txBody>
-          <a:bodyPr wrap="square" anchor="t" lIns="27432" rIns="27432" tIns="18288" bIns="18288">
+          <a:bodyPr wrap="square" lIns="27432" tIns="18288" rIns="27432" bIns="18288" anchor="t">
             <a:spAutoFit/>
           </a:bodyPr>
           <a:lstStyle/>
@@ -14200,7 +14817,7 @@
           <a:noFill/>
         </p:spPr>
         <p:txBody>
-          <a:bodyPr wrap="square" anchor="t" lIns="27432" rIns="27432" tIns="18288" bIns="18288">
+          <a:bodyPr wrap="square" lIns="27432" tIns="18288" rIns="27432" bIns="18288" anchor="t">
             <a:spAutoFit/>
           </a:bodyPr>
           <a:lstStyle/>
@@ -14231,7 +14848,7 @@
 </file>
 
 <file path=ppt/slides/slide22.xml><?xml version="1.0" encoding="utf-8"?>
-<p:sld xmlns:a="http://schemas.openxmlformats.org/drawingml/2006/main" xmlns:p="http://schemas.openxmlformats.org/presentationml/2006/main" xmlns:r="http://schemas.openxmlformats.org/officeDocument/2006/relationships">
+<p:sld xmlns:a="http://schemas.openxmlformats.org/drawingml/2006/main" xmlns:r="http://schemas.openxmlformats.org/officeDocument/2006/relationships" xmlns:p="http://schemas.openxmlformats.org/presentationml/2006/main">
   <p:cSld>
     <p:bg>
       <p:bgPr>
@@ -14247,7 +14864,14 @@
         <p:cNvGrpSpPr/>
         <p:nvPr/>
       </p:nvGrpSpPr>
-      <p:grpSpPr/>
+      <p:grpSpPr>
+        <a:xfrm>
+          <a:off x="0" y="0"/>
+          <a:ext cx="0" cy="0"/>
+          <a:chOff x="0" y="0"/>
+          <a:chExt cx="0" cy="0"/>
+        </a:xfrm>
+      </p:grpSpPr>
       <p:sp>
         <p:nvSpPr>
           <p:cNvPr id="2" name="Rectangle 1"/>
@@ -14289,6 +14913,7 @@
           <a:lstStyle/>
           <a:p>
             <a:pPr algn="ctr"/>
+            <a:endParaRPr/>
           </a:p>
         </p:txBody>
       </p:sp>
@@ -14333,6 +14958,7 @@
           <a:lstStyle/>
           <a:p>
             <a:pPr algn="ctr"/>
+            <a:endParaRPr/>
           </a:p>
         </p:txBody>
       </p:sp>
@@ -14353,7 +14979,7 @@
           <a:noFill/>
         </p:spPr>
         <p:txBody>
-          <a:bodyPr wrap="square" anchor="t" lIns="27432" rIns="27432" tIns="18288" bIns="18288">
+          <a:bodyPr wrap="square" lIns="27432" tIns="18288" rIns="27432" bIns="18288" anchor="t">
             <a:spAutoFit/>
           </a:bodyPr>
           <a:lstStyle/>
@@ -14392,7 +15018,7 @@
           <a:noFill/>
         </p:spPr>
         <p:txBody>
-          <a:bodyPr wrap="square" anchor="t" lIns="27432" rIns="27432" tIns="18288" bIns="18288">
+          <a:bodyPr wrap="square" lIns="27432" tIns="18288" rIns="27432" bIns="18288" anchor="t">
             <a:spAutoFit/>
           </a:bodyPr>
           <a:lstStyle/>
@@ -14433,9 +15059,27 @@
                 <a:tableStyleId>{5C22544A-7EE6-4342-B048-85BDC9FD1C3A}</a:tableStyleId>
               </a:tblPr>
               <a:tblGrid>
-                <a:gridCol w="3291840"/>
-                <a:gridCol w="5760720"/>
-                <a:gridCol w="2011680"/>
+                <a:gridCol w="3291840">
+                  <a:extLst>
+                    <a:ext uri="{9D8B030D-6E8A-4147-A177-3AD203B41FA5}">
+                      <a16:colId xmlns:a16="http://schemas.microsoft.com/office/drawing/2014/main" val="20000"/>
+                    </a:ext>
+                  </a:extLst>
+                </a:gridCol>
+                <a:gridCol w="5760720">
+                  <a:extLst>
+                    <a:ext uri="{9D8B030D-6E8A-4147-A177-3AD203B41FA5}">
+                      <a16:colId xmlns:a16="http://schemas.microsoft.com/office/drawing/2014/main" val="20001"/>
+                    </a:ext>
+                  </a:extLst>
+                </a:gridCol>
+                <a:gridCol w="2011680">
+                  <a:extLst>
+                    <a:ext uri="{9D8B030D-6E8A-4147-A177-3AD203B41FA5}">
+                      <a16:colId xmlns:a16="http://schemas.microsoft.com/office/drawing/2014/main" val="20002"/>
+                    </a:ext>
+                  </a:extLst>
+                </a:gridCol>
               </a:tblGrid>
               <a:tr h="658367">
                 <a:tc>
@@ -14507,6 +15151,11 @@
                     </a:solidFill>
                   </a:tcPr>
                 </a:tc>
+                <a:extLst>
+                  <a:ext uri="{0D108BD9-81ED-4DB2-BD59-A6C34878D82A}">
+                    <a16:rowId xmlns:a16="http://schemas.microsoft.com/office/drawing/2014/main" val="10000"/>
+                  </a:ext>
+                </a:extLst>
               </a:tr>
               <a:tr h="658367">
                 <a:tc>
@@ -14578,6 +15227,11 @@
                     </a:solidFill>
                   </a:tcPr>
                 </a:tc>
+                <a:extLst>
+                  <a:ext uri="{0D108BD9-81ED-4DB2-BD59-A6C34878D82A}">
+                    <a16:rowId xmlns:a16="http://schemas.microsoft.com/office/drawing/2014/main" val="10001"/>
+                  </a:ext>
+                </a:extLst>
               </a:tr>
               <a:tr h="658367">
                 <a:tc>
@@ -14649,6 +15303,11 @@
                     </a:solidFill>
                   </a:tcPr>
                 </a:tc>
+                <a:extLst>
+                  <a:ext uri="{0D108BD9-81ED-4DB2-BD59-A6C34878D82A}">
+                    <a16:rowId xmlns:a16="http://schemas.microsoft.com/office/drawing/2014/main" val="10002"/>
+                  </a:ext>
+                </a:extLst>
               </a:tr>
               <a:tr h="658367">
                 <a:tc>
@@ -14720,6 +15379,11 @@
                     </a:solidFill>
                   </a:tcPr>
                 </a:tc>
+                <a:extLst>
+                  <a:ext uri="{0D108BD9-81ED-4DB2-BD59-A6C34878D82A}">
+                    <a16:rowId xmlns:a16="http://schemas.microsoft.com/office/drawing/2014/main" val="10003"/>
+                  </a:ext>
+                </a:extLst>
               </a:tr>
               <a:tr h="658371">
                 <a:tc>
@@ -14791,6 +15455,11 @@
                     </a:solidFill>
                   </a:tcPr>
                 </a:tc>
+                <a:extLst>
+                  <a:ext uri="{0D108BD9-81ED-4DB2-BD59-A6C34878D82A}">
+                    <a16:rowId xmlns:a16="http://schemas.microsoft.com/office/drawing/2014/main" val="10004"/>
+                  </a:ext>
+                </a:extLst>
               </a:tr>
             </a:tbl>
           </a:graphicData>
@@ -14813,7 +15482,7 @@
           <a:noFill/>
         </p:spPr>
         <p:txBody>
-          <a:bodyPr wrap="square" anchor="t" lIns="27432" rIns="27432" tIns="18288" bIns="18288">
+          <a:bodyPr wrap="square" lIns="27432" tIns="18288" rIns="27432" bIns="18288" anchor="t">
             <a:spAutoFit/>
           </a:bodyPr>
           <a:lstStyle/>
@@ -14877,7 +15546,7 @@
           <a:noFill/>
         </p:spPr>
         <p:txBody>
-          <a:bodyPr wrap="square" anchor="t" lIns="27432" rIns="27432" tIns="18288" bIns="18288">
+          <a:bodyPr wrap="square" lIns="27432" tIns="18288" rIns="27432" bIns="18288" anchor="t">
             <a:spAutoFit/>
           </a:bodyPr>
           <a:lstStyle/>
@@ -14916,7 +15585,7 @@
           <a:noFill/>
         </p:spPr>
         <p:txBody>
-          <a:bodyPr wrap="square" anchor="t" lIns="27432" rIns="27432" tIns="18288" bIns="18288">
+          <a:bodyPr wrap="square" lIns="27432" tIns="18288" rIns="27432" bIns="18288" anchor="t">
             <a:spAutoFit/>
           </a:bodyPr>
           <a:lstStyle/>
@@ -14947,7 +15616,7 @@
 </file>
 
 <file path=ppt/slides/slide23.xml><?xml version="1.0" encoding="utf-8"?>
-<p:sld xmlns:a="http://schemas.openxmlformats.org/drawingml/2006/main" xmlns:p="http://schemas.openxmlformats.org/presentationml/2006/main" xmlns:r="http://schemas.openxmlformats.org/officeDocument/2006/relationships">
+<p:sld xmlns:a="http://schemas.openxmlformats.org/drawingml/2006/main" xmlns:r="http://schemas.openxmlformats.org/officeDocument/2006/relationships" xmlns:p="http://schemas.openxmlformats.org/presentationml/2006/main">
   <p:cSld>
     <p:bg>
       <p:bgPr>
@@ -14963,7 +15632,14 @@
         <p:cNvGrpSpPr/>
         <p:nvPr/>
       </p:nvGrpSpPr>
-      <p:grpSpPr/>
+      <p:grpSpPr>
+        <a:xfrm>
+          <a:off x="0" y="0"/>
+          <a:ext cx="0" cy="0"/>
+          <a:chOff x="0" y="0"/>
+          <a:chExt cx="0" cy="0"/>
+        </a:xfrm>
+      </p:grpSpPr>
       <p:sp>
         <p:nvSpPr>
           <p:cNvPr id="2" name="Rectangle 1"/>
@@ -15005,6 +15681,7 @@
           <a:lstStyle/>
           <a:p>
             <a:pPr algn="ctr"/>
+            <a:endParaRPr/>
           </a:p>
         </p:txBody>
       </p:sp>
@@ -15049,6 +15726,7 @@
           <a:lstStyle/>
           <a:p>
             <a:pPr algn="ctr"/>
+            <a:endParaRPr/>
           </a:p>
         </p:txBody>
       </p:sp>
@@ -15069,7 +15747,7 @@
           <a:noFill/>
         </p:spPr>
         <p:txBody>
-          <a:bodyPr wrap="square" anchor="t" lIns="27432" rIns="27432" tIns="18288" bIns="18288">
+          <a:bodyPr wrap="square" lIns="27432" tIns="18288" rIns="27432" bIns="18288" anchor="t">
             <a:spAutoFit/>
           </a:bodyPr>
           <a:lstStyle/>
@@ -15108,7 +15786,7 @@
           <a:noFill/>
         </p:spPr>
         <p:txBody>
-          <a:bodyPr wrap="square" anchor="t" lIns="27432" rIns="27432" tIns="18288" bIns="18288">
+          <a:bodyPr wrap="square" lIns="27432" tIns="18288" rIns="27432" bIns="18288" anchor="t">
             <a:spAutoFit/>
           </a:bodyPr>
           <a:lstStyle/>
@@ -15149,10 +15827,34 @@
                 <a:tableStyleId>{5C22544A-7EE6-4342-B048-85BDC9FD1C3A}</a:tableStyleId>
               </a:tblPr>
               <a:tblGrid>
-                <a:gridCol w="3108960"/>
-                <a:gridCol w="4937760"/>
-                <a:gridCol w="1828800"/>
-                <a:gridCol w="1188720"/>
+                <a:gridCol w="3108960">
+                  <a:extLst>
+                    <a:ext uri="{9D8B030D-6E8A-4147-A177-3AD203B41FA5}">
+                      <a16:colId xmlns:a16="http://schemas.microsoft.com/office/drawing/2014/main" val="20000"/>
+                    </a:ext>
+                  </a:extLst>
+                </a:gridCol>
+                <a:gridCol w="4937760">
+                  <a:extLst>
+                    <a:ext uri="{9D8B030D-6E8A-4147-A177-3AD203B41FA5}">
+                      <a16:colId xmlns:a16="http://schemas.microsoft.com/office/drawing/2014/main" val="20001"/>
+                    </a:ext>
+                  </a:extLst>
+                </a:gridCol>
+                <a:gridCol w="1828800">
+                  <a:extLst>
+                    <a:ext uri="{9D8B030D-6E8A-4147-A177-3AD203B41FA5}">
+                      <a16:colId xmlns:a16="http://schemas.microsoft.com/office/drawing/2014/main" val="20002"/>
+                    </a:ext>
+                  </a:extLst>
+                </a:gridCol>
+                <a:gridCol w="1188720">
+                  <a:extLst>
+                    <a:ext uri="{9D8B030D-6E8A-4147-A177-3AD203B41FA5}">
+                      <a16:colId xmlns:a16="http://schemas.microsoft.com/office/drawing/2014/main" val="20003"/>
+                    </a:ext>
+                  </a:extLst>
+                </a:gridCol>
               </a:tblGrid>
               <a:tr h="457200">
                 <a:tc>
@@ -15247,6 +15949,11 @@
                     </a:solidFill>
                   </a:tcPr>
                 </a:tc>
+                <a:extLst>
+                  <a:ext uri="{0D108BD9-81ED-4DB2-BD59-A6C34878D82A}">
+                    <a16:rowId xmlns:a16="http://schemas.microsoft.com/office/drawing/2014/main" val="10000"/>
+                  </a:ext>
+                </a:extLst>
               </a:tr>
               <a:tr h="457200">
                 <a:tc>
@@ -15341,6 +16048,11 @@
                     </a:solidFill>
                   </a:tcPr>
                 </a:tc>
+                <a:extLst>
+                  <a:ext uri="{0D108BD9-81ED-4DB2-BD59-A6C34878D82A}">
+                    <a16:rowId xmlns:a16="http://schemas.microsoft.com/office/drawing/2014/main" val="10001"/>
+                  </a:ext>
+                </a:extLst>
               </a:tr>
               <a:tr h="457200">
                 <a:tc>
@@ -15435,6 +16147,11 @@
                     </a:solidFill>
                   </a:tcPr>
                 </a:tc>
+                <a:extLst>
+                  <a:ext uri="{0D108BD9-81ED-4DB2-BD59-A6C34878D82A}">
+                    <a16:rowId xmlns:a16="http://schemas.microsoft.com/office/drawing/2014/main" val="10002"/>
+                  </a:ext>
+                </a:extLst>
               </a:tr>
               <a:tr h="457200">
                 <a:tc>
@@ -15529,6 +16246,11 @@
                     </a:solidFill>
                   </a:tcPr>
                 </a:tc>
+                <a:extLst>
+                  <a:ext uri="{0D108BD9-81ED-4DB2-BD59-A6C34878D82A}">
+                    <a16:rowId xmlns:a16="http://schemas.microsoft.com/office/drawing/2014/main" val="10003"/>
+                  </a:ext>
+                </a:extLst>
               </a:tr>
               <a:tr h="457200">
                 <a:tc>
@@ -15623,6 +16345,11 @@
                     </a:solidFill>
                   </a:tcPr>
                 </a:tc>
+                <a:extLst>
+                  <a:ext uri="{0D108BD9-81ED-4DB2-BD59-A6C34878D82A}">
+                    <a16:rowId xmlns:a16="http://schemas.microsoft.com/office/drawing/2014/main" val="10004"/>
+                  </a:ext>
+                </a:extLst>
               </a:tr>
               <a:tr h="457200">
                 <a:tc>
@@ -15717,6 +16444,11 @@
                     </a:solidFill>
                   </a:tcPr>
                 </a:tc>
+                <a:extLst>
+                  <a:ext uri="{0D108BD9-81ED-4DB2-BD59-A6C34878D82A}">
+                    <a16:rowId xmlns:a16="http://schemas.microsoft.com/office/drawing/2014/main" val="10005"/>
+                  </a:ext>
+                </a:extLst>
               </a:tr>
               <a:tr h="457200">
                 <a:tc>
@@ -15811,6 +16543,11 @@
                     </a:solidFill>
                   </a:tcPr>
                 </a:tc>
+                <a:extLst>
+                  <a:ext uri="{0D108BD9-81ED-4DB2-BD59-A6C34878D82A}">
+                    <a16:rowId xmlns:a16="http://schemas.microsoft.com/office/drawing/2014/main" val="10006"/>
+                  </a:ext>
+                </a:extLst>
               </a:tr>
             </a:tbl>
           </a:graphicData>
@@ -15833,7 +16570,7 @@
           <a:noFill/>
         </p:spPr>
         <p:txBody>
-          <a:bodyPr wrap="square" anchor="t" lIns="27432" rIns="27432" tIns="18288" bIns="18288">
+          <a:bodyPr wrap="square" lIns="27432" tIns="18288" rIns="27432" bIns="18288" anchor="t">
             <a:spAutoFit/>
           </a:bodyPr>
           <a:lstStyle/>
@@ -15881,7 +16618,7 @@
           <a:noFill/>
         </p:spPr>
         <p:txBody>
-          <a:bodyPr wrap="square" anchor="t" lIns="27432" rIns="27432" tIns="18288" bIns="18288">
+          <a:bodyPr wrap="square" lIns="27432" tIns="18288" rIns="27432" bIns="18288" anchor="t">
             <a:spAutoFit/>
           </a:bodyPr>
           <a:lstStyle/>
@@ -15920,7 +16657,7 @@
           <a:noFill/>
         </p:spPr>
         <p:txBody>
-          <a:bodyPr wrap="square" anchor="t" lIns="27432" rIns="27432" tIns="18288" bIns="18288">
+          <a:bodyPr wrap="square" lIns="27432" tIns="18288" rIns="27432" bIns="18288" anchor="t">
             <a:spAutoFit/>
           </a:bodyPr>
           <a:lstStyle/>
@@ -15951,7 +16688,7 @@
 </file>
 
 <file path=ppt/slides/slide24.xml><?xml version="1.0" encoding="utf-8"?>
-<p:sld xmlns:a="http://schemas.openxmlformats.org/drawingml/2006/main" xmlns:p="http://schemas.openxmlformats.org/presentationml/2006/main" xmlns:r="http://schemas.openxmlformats.org/officeDocument/2006/relationships">
+<p:sld xmlns:a="http://schemas.openxmlformats.org/drawingml/2006/main" xmlns:r="http://schemas.openxmlformats.org/officeDocument/2006/relationships" xmlns:p="http://schemas.openxmlformats.org/presentationml/2006/main">
   <p:cSld>
     <p:bg>
       <p:bgPr>
@@ -15967,7 +16704,14 @@
         <p:cNvGrpSpPr/>
         <p:nvPr/>
       </p:nvGrpSpPr>
-      <p:grpSpPr/>
+      <p:grpSpPr>
+        <a:xfrm>
+          <a:off x="0" y="0"/>
+          <a:ext cx="0" cy="0"/>
+          <a:chOff x="0" y="0"/>
+          <a:chExt cx="0" cy="0"/>
+        </a:xfrm>
+      </p:grpSpPr>
       <p:sp>
         <p:nvSpPr>
           <p:cNvPr id="2" name="Rectangle 1"/>
@@ -16009,6 +16753,7 @@
           <a:lstStyle/>
           <a:p>
             <a:pPr algn="ctr"/>
+            <a:endParaRPr/>
           </a:p>
         </p:txBody>
       </p:sp>
@@ -16053,6 +16798,7 @@
           <a:lstStyle/>
           <a:p>
             <a:pPr algn="ctr"/>
+            <a:endParaRPr/>
           </a:p>
         </p:txBody>
       </p:sp>
@@ -16073,7 +16819,7 @@
           <a:noFill/>
         </p:spPr>
         <p:txBody>
-          <a:bodyPr wrap="square" anchor="t" lIns="27432" rIns="27432" tIns="18288" bIns="18288">
+          <a:bodyPr wrap="square" lIns="27432" tIns="18288" rIns="27432" bIns="18288" anchor="t">
             <a:spAutoFit/>
           </a:bodyPr>
           <a:lstStyle/>
@@ -16112,7 +16858,7 @@
           <a:noFill/>
         </p:spPr>
         <p:txBody>
-          <a:bodyPr wrap="square" anchor="t" lIns="27432" rIns="27432" tIns="18288" bIns="18288">
+          <a:bodyPr wrap="square" lIns="27432" tIns="18288" rIns="27432" bIns="18288" anchor="t">
             <a:spAutoFit/>
           </a:bodyPr>
           <a:lstStyle/>
@@ -16175,6 +16921,7 @@
           <a:lstStyle/>
           <a:p>
             <a:pPr algn="ctr"/>
+            <a:endParaRPr/>
           </a:p>
         </p:txBody>
       </p:sp>
@@ -16219,6 +16966,7 @@
           <a:lstStyle/>
           <a:p>
             <a:pPr algn="ctr"/>
+            <a:endParaRPr/>
           </a:p>
         </p:txBody>
       </p:sp>
@@ -16239,7 +16987,7 @@
           <a:noFill/>
         </p:spPr>
         <p:txBody>
-          <a:bodyPr wrap="square" anchor="t" lIns="27432" rIns="27432" tIns="18288" bIns="18288">
+          <a:bodyPr wrap="square" lIns="27432" tIns="18288" rIns="27432" bIns="18288" anchor="t">
             <a:spAutoFit/>
           </a:bodyPr>
           <a:lstStyle/>
@@ -16278,7 +17026,7 @@
           <a:noFill/>
         </p:spPr>
         <p:txBody>
-          <a:bodyPr wrap="square" anchor="t" lIns="27432" rIns="27432" tIns="18288" bIns="18288">
+          <a:bodyPr wrap="square" lIns="27432" tIns="18288" rIns="27432" bIns="18288" anchor="t">
             <a:spAutoFit/>
           </a:bodyPr>
           <a:lstStyle/>
@@ -16421,6 +17169,7 @@
           <a:lstStyle/>
           <a:p>
             <a:pPr algn="ctr"/>
+            <a:endParaRPr/>
           </a:p>
         </p:txBody>
       </p:sp>
@@ -16465,6 +17214,7 @@
           <a:lstStyle/>
           <a:p>
             <a:pPr algn="ctr"/>
+            <a:endParaRPr/>
           </a:p>
         </p:txBody>
       </p:sp>
@@ -16485,7 +17235,7 @@
           <a:noFill/>
         </p:spPr>
         <p:txBody>
-          <a:bodyPr wrap="square" anchor="t" lIns="27432" rIns="27432" tIns="18288" bIns="18288">
+          <a:bodyPr wrap="square" lIns="27432" tIns="18288" rIns="27432" bIns="18288" anchor="t">
             <a:spAutoFit/>
           </a:bodyPr>
           <a:lstStyle/>
@@ -16524,7 +17274,7 @@
           <a:noFill/>
         </p:spPr>
         <p:txBody>
-          <a:bodyPr wrap="square" anchor="t" lIns="27432" rIns="27432" tIns="18288" bIns="18288">
+          <a:bodyPr wrap="square" lIns="27432" tIns="18288" rIns="27432" bIns="18288" anchor="t">
             <a:spAutoFit/>
           </a:bodyPr>
           <a:lstStyle/>
@@ -16651,6 +17401,7 @@
           <a:lstStyle/>
           <a:p>
             <a:pPr algn="ctr"/>
+            <a:endParaRPr/>
           </a:p>
         </p:txBody>
       </p:sp>
@@ -16695,6 +17446,7 @@
           <a:lstStyle/>
           <a:p>
             <a:pPr algn="ctr"/>
+            <a:endParaRPr/>
           </a:p>
         </p:txBody>
       </p:sp>
@@ -16715,7 +17467,7 @@
           <a:noFill/>
         </p:spPr>
         <p:txBody>
-          <a:bodyPr wrap="square" anchor="t" lIns="27432" rIns="27432" tIns="18288" bIns="18288">
+          <a:bodyPr wrap="square" lIns="27432" tIns="18288" rIns="27432" bIns="18288" anchor="t">
             <a:spAutoFit/>
           </a:bodyPr>
           <a:lstStyle/>
@@ -16754,7 +17506,7 @@
           <a:noFill/>
         </p:spPr>
         <p:txBody>
-          <a:bodyPr wrap="square" anchor="t" lIns="27432" rIns="27432" tIns="18288" bIns="18288">
+          <a:bodyPr wrap="square" lIns="27432" tIns="18288" rIns="27432" bIns="18288" anchor="t">
             <a:spAutoFit/>
           </a:bodyPr>
           <a:lstStyle/>
@@ -16793,7 +17545,7 @@
           <a:noFill/>
         </p:spPr>
         <p:txBody>
-          <a:bodyPr wrap="square" anchor="t" lIns="27432" rIns="27432" tIns="18288" bIns="18288">
+          <a:bodyPr wrap="square" lIns="27432" tIns="18288" rIns="27432" bIns="18288" anchor="t">
             <a:spAutoFit/>
           </a:bodyPr>
           <a:lstStyle/>
@@ -16832,7 +17584,7 @@
           <a:noFill/>
         </p:spPr>
         <p:txBody>
-          <a:bodyPr wrap="square" anchor="t" lIns="27432" rIns="27432" tIns="18288" bIns="18288">
+          <a:bodyPr wrap="square" lIns="27432" tIns="18288" rIns="27432" bIns="18288" anchor="t">
             <a:spAutoFit/>
           </a:bodyPr>
           <a:lstStyle/>
@@ -16863,7 +17615,7 @@
 </file>
 
 <file path=ppt/slides/slide3.xml><?xml version="1.0" encoding="utf-8"?>
-<p:sld xmlns:a="http://schemas.openxmlformats.org/drawingml/2006/main" xmlns:p="http://schemas.openxmlformats.org/presentationml/2006/main" xmlns:r="http://schemas.openxmlformats.org/officeDocument/2006/relationships">
+<p:sld xmlns:a="http://schemas.openxmlformats.org/drawingml/2006/main" xmlns:r="http://schemas.openxmlformats.org/officeDocument/2006/relationships" xmlns:p="http://schemas.openxmlformats.org/presentationml/2006/main">
   <p:cSld>
     <p:bg>
       <p:bgPr>
@@ -16879,7 +17631,14 @@
         <p:cNvGrpSpPr/>
         <p:nvPr/>
       </p:nvGrpSpPr>
-      <p:grpSpPr/>
+      <p:grpSpPr>
+        <a:xfrm>
+          <a:off x="0" y="0"/>
+          <a:ext cx="0" cy="0"/>
+          <a:chOff x="0" y="0"/>
+          <a:chExt cx="0" cy="0"/>
+        </a:xfrm>
+      </p:grpSpPr>
       <p:sp>
         <p:nvSpPr>
           <p:cNvPr id="2" name="Rectangle 1"/>
@@ -16921,6 +17680,7 @@
           <a:lstStyle/>
           <a:p>
             <a:pPr algn="ctr"/>
+            <a:endParaRPr/>
           </a:p>
         </p:txBody>
       </p:sp>
@@ -16965,6 +17725,7 @@
           <a:lstStyle/>
           <a:p>
             <a:pPr algn="ctr"/>
+            <a:endParaRPr/>
           </a:p>
         </p:txBody>
       </p:sp>
@@ -16985,7 +17746,7 @@
           <a:noFill/>
         </p:spPr>
         <p:txBody>
-          <a:bodyPr wrap="square" anchor="t" lIns="27432" rIns="27432" tIns="18288" bIns="18288">
+          <a:bodyPr wrap="square" lIns="27432" tIns="18288" rIns="27432" bIns="18288" anchor="t">
             <a:spAutoFit/>
           </a:bodyPr>
           <a:lstStyle/>
@@ -17024,7 +17785,7 @@
           <a:noFill/>
         </p:spPr>
         <p:txBody>
-          <a:bodyPr wrap="square" anchor="t" lIns="27432" rIns="27432" tIns="18288" bIns="18288">
+          <a:bodyPr wrap="square" lIns="27432" tIns="18288" rIns="27432" bIns="18288" anchor="t">
             <a:spAutoFit/>
           </a:bodyPr>
           <a:lstStyle/>
@@ -17087,6 +17848,7 @@
           <a:lstStyle/>
           <a:p>
             <a:pPr algn="ctr"/>
+            <a:endParaRPr/>
           </a:p>
         </p:txBody>
       </p:sp>
@@ -17131,6 +17893,7 @@
           <a:lstStyle/>
           <a:p>
             <a:pPr algn="ctr"/>
+            <a:endParaRPr/>
           </a:p>
         </p:txBody>
       </p:sp>
@@ -17151,7 +17914,7 @@
           <a:noFill/>
         </p:spPr>
         <p:txBody>
-          <a:bodyPr wrap="square" anchor="t" lIns="27432" rIns="27432" tIns="18288" bIns="18288">
+          <a:bodyPr wrap="square" lIns="27432" tIns="18288" rIns="27432" bIns="18288" anchor="t">
             <a:spAutoFit/>
           </a:bodyPr>
           <a:lstStyle/>
@@ -17190,7 +17953,7 @@
           <a:noFill/>
         </p:spPr>
         <p:txBody>
-          <a:bodyPr wrap="square" anchor="t" lIns="27432" rIns="27432" tIns="18288" bIns="18288">
+          <a:bodyPr wrap="square" lIns="27432" tIns="18288" rIns="27432" bIns="18288" anchor="t">
             <a:spAutoFit/>
           </a:bodyPr>
           <a:lstStyle/>
@@ -17201,13 +17964,139 @@
               </a:spcAft>
             </a:pPr>
             <a:r>
-              <a:rPr sz="1100" b="0">
+              <a:rPr sz="1100" b="0" dirty="0">
                 <a:solidFill>
                   <a:srgbClr val="34465C"/>
                 </a:solidFill>
                 <a:latin typeface="Malgun Gothic"/>
               </a:rPr>
-              <a:t>· 같은 IOPS(5,000) 조건에서 중앙값 응답시간이 모든 시나리오에서 v1보다 빠름 (−18 ~ −34%)</a:t>
+              <a:t>· </a:t>
+            </a:r>
+            <a:r>
+              <a:rPr sz="1100" b="0" dirty="0" err="1">
+                <a:solidFill>
+                  <a:srgbClr val="34465C"/>
+                </a:solidFill>
+                <a:latin typeface="Malgun Gothic"/>
+              </a:rPr>
+              <a:t>같은</a:t>
+            </a:r>
+            <a:r>
+              <a:rPr sz="1100" b="0" dirty="0">
+                <a:solidFill>
+                  <a:srgbClr val="34465C"/>
+                </a:solidFill>
+                <a:latin typeface="Malgun Gothic"/>
+              </a:rPr>
+              <a:t> IOPS(5,000) </a:t>
+            </a:r>
+            <a:r>
+              <a:rPr sz="1100" b="0" dirty="0" err="1">
+                <a:solidFill>
+                  <a:srgbClr val="34465C"/>
+                </a:solidFill>
+                <a:latin typeface="Malgun Gothic"/>
+              </a:rPr>
+              <a:t>조건에서</a:t>
+            </a:r>
+            <a:r>
+              <a:rPr sz="1100" b="0" dirty="0">
+                <a:solidFill>
+                  <a:srgbClr val="34465C"/>
+                </a:solidFill>
+                <a:latin typeface="Malgun Gothic"/>
+              </a:rPr>
+              <a:t> </a:t>
+            </a:r>
+            <a:r>
+              <a:rPr sz="1100" b="0" dirty="0" err="1">
+                <a:solidFill>
+                  <a:srgbClr val="34465C"/>
+                </a:solidFill>
+                <a:latin typeface="Malgun Gothic"/>
+              </a:rPr>
+              <a:t>중앙값</a:t>
+            </a:r>
+            <a:r>
+              <a:rPr sz="1100" b="0" dirty="0">
+                <a:solidFill>
+                  <a:srgbClr val="34465C"/>
+                </a:solidFill>
+                <a:latin typeface="Malgun Gothic"/>
+              </a:rPr>
+              <a:t> </a:t>
+            </a:r>
+            <a:r>
+              <a:rPr sz="1100" b="0" dirty="0" err="1">
+                <a:solidFill>
+                  <a:srgbClr val="34465C"/>
+                </a:solidFill>
+                <a:latin typeface="Malgun Gothic"/>
+              </a:rPr>
+              <a:t>응답시간이</a:t>
+            </a:r>
+            <a:r>
+              <a:rPr sz="1100" b="0" dirty="0">
+                <a:solidFill>
+                  <a:srgbClr val="34465C"/>
+                </a:solidFill>
+                <a:latin typeface="Malgun Gothic"/>
+              </a:rPr>
+              <a:t> </a:t>
+            </a:r>
+            <a:r>
+              <a:rPr sz="1100" b="0" dirty="0" err="1">
+                <a:solidFill>
+                  <a:srgbClr val="34465C"/>
+                </a:solidFill>
+                <a:latin typeface="Malgun Gothic"/>
+              </a:rPr>
+              <a:t>모든</a:t>
+            </a:r>
+            <a:r>
+              <a:rPr sz="1100" b="0" dirty="0">
+                <a:solidFill>
+                  <a:srgbClr val="34465C"/>
+                </a:solidFill>
+                <a:latin typeface="Malgun Gothic"/>
+              </a:rPr>
+              <a:t> </a:t>
+            </a:r>
+            <a:r>
+              <a:rPr sz="1100" b="0" dirty="0" err="1">
+                <a:solidFill>
+                  <a:srgbClr val="34465C"/>
+                </a:solidFill>
+                <a:latin typeface="Malgun Gothic"/>
+              </a:rPr>
+              <a:t>시나리오에서</a:t>
+            </a:r>
+            <a:r>
+              <a:rPr sz="1100" b="0" dirty="0">
+                <a:solidFill>
+                  <a:srgbClr val="34465C"/>
+                </a:solidFill>
+                <a:latin typeface="Malgun Gothic"/>
+              </a:rPr>
+              <a:t> v1보다 </a:t>
+            </a:r>
+            <a:r>
+              <a:rPr sz="1100" b="0" dirty="0" err="1">
+                <a:solidFill>
+                  <a:srgbClr val="34465C"/>
+                </a:solidFill>
+                <a:latin typeface="Malgun Gothic"/>
+              </a:rPr>
+              <a:t>빠름</a:t>
+            </a:r>
+            <a:r>
+              <a:rPr sz="1100" b="0" dirty="0">
+                <a:solidFill>
+                  <a:srgbClr val="34465C"/>
+                </a:solidFill>
+                <a:latin typeface="Malgun Gothic"/>
+              </a:rPr>
+              <a:t> (−18 ~ −34%)</a:t>
             </a:r>
           </a:p>
           <a:p>
@@ -17217,14 +18106,209 @@
               </a:spcAft>
             </a:pPr>
             <a:r>
-              <a:rPr sz="1100" b="0">
+              <a:rPr sz="1100" b="0" dirty="0">
                 <a:solidFill>
                   <a:srgbClr val="34465C"/>
                 </a:solidFill>
                 <a:latin typeface="Malgun Gothic"/>
               </a:rPr>
-              <a:t>· 쓰기 집중 부하에서는 상위 1% 느린 요청(p99)도 55% 개선 — 게임 결산·랭킹 갱신에 유리</a:t>
-            </a:r>
+              <a:t>· </a:t>
+            </a:r>
+            <a:r>
+              <a:rPr sz="1100" b="0" dirty="0" err="1">
+                <a:solidFill>
+                  <a:srgbClr val="34465C"/>
+                </a:solidFill>
+                <a:latin typeface="Malgun Gothic"/>
+              </a:rPr>
+              <a:t>쓰기</a:t>
+            </a:r>
+            <a:r>
+              <a:rPr sz="1100" b="0" dirty="0">
+                <a:solidFill>
+                  <a:srgbClr val="34465C"/>
+                </a:solidFill>
+                <a:latin typeface="Malgun Gothic"/>
+              </a:rPr>
+              <a:t> </a:t>
+            </a:r>
+            <a:r>
+              <a:rPr sz="1100" b="0" dirty="0" err="1">
+                <a:solidFill>
+                  <a:srgbClr val="34465C"/>
+                </a:solidFill>
+                <a:latin typeface="Malgun Gothic"/>
+              </a:rPr>
+              <a:t>집중</a:t>
+            </a:r>
+            <a:r>
+              <a:rPr sz="1100" b="0" dirty="0">
+                <a:solidFill>
+                  <a:srgbClr val="34465C"/>
+                </a:solidFill>
+                <a:latin typeface="Malgun Gothic"/>
+              </a:rPr>
+              <a:t> </a:t>
+            </a:r>
+            <a:r>
+              <a:rPr sz="1100" b="0" dirty="0" err="1">
+                <a:solidFill>
+                  <a:srgbClr val="34465C"/>
+                </a:solidFill>
+                <a:latin typeface="Malgun Gothic"/>
+              </a:rPr>
+              <a:t>부하에서는</a:t>
+            </a:r>
+            <a:r>
+              <a:rPr sz="1100" b="0" dirty="0">
+                <a:solidFill>
+                  <a:srgbClr val="34465C"/>
+                </a:solidFill>
+                <a:latin typeface="Malgun Gothic"/>
+              </a:rPr>
+              <a:t> </a:t>
+            </a:r>
+            <a:r>
+              <a:rPr sz="1100" b="0" dirty="0" err="1">
+                <a:solidFill>
+                  <a:srgbClr val="34465C"/>
+                </a:solidFill>
+                <a:latin typeface="Malgun Gothic"/>
+              </a:rPr>
+              <a:t>상위</a:t>
+            </a:r>
+            <a:r>
+              <a:rPr sz="1100" b="0" dirty="0">
+                <a:solidFill>
+                  <a:srgbClr val="34465C"/>
+                </a:solidFill>
+                <a:latin typeface="Malgun Gothic"/>
+              </a:rPr>
+              <a:t> 1% </a:t>
+            </a:r>
+            <a:r>
+              <a:rPr sz="1100" b="0" dirty="0" err="1">
+                <a:solidFill>
+                  <a:srgbClr val="34465C"/>
+                </a:solidFill>
+                <a:latin typeface="Malgun Gothic"/>
+              </a:rPr>
+              <a:t>느린</a:t>
+            </a:r>
+            <a:r>
+              <a:rPr sz="1100" b="0" dirty="0">
+                <a:solidFill>
+                  <a:srgbClr val="34465C"/>
+                </a:solidFill>
+                <a:latin typeface="Malgun Gothic"/>
+              </a:rPr>
+              <a:t> </a:t>
+            </a:r>
+            <a:r>
+              <a:rPr sz="1100" b="0" dirty="0" err="1">
+                <a:solidFill>
+                  <a:srgbClr val="34465C"/>
+                </a:solidFill>
+                <a:latin typeface="Malgun Gothic"/>
+              </a:rPr>
+              <a:t>요청</a:t>
+            </a:r>
+            <a:r>
+              <a:rPr sz="1100" b="0" dirty="0">
+                <a:solidFill>
+                  <a:srgbClr val="34465C"/>
+                </a:solidFill>
+                <a:latin typeface="Malgun Gothic"/>
+              </a:rPr>
+              <a:t>(p99)도 55% </a:t>
+            </a:r>
+            <a:r>
+              <a:rPr sz="1100" b="0" dirty="0" err="1">
+                <a:solidFill>
+                  <a:srgbClr val="34465C"/>
+                </a:solidFill>
+                <a:latin typeface="Malgun Gothic"/>
+              </a:rPr>
+              <a:t>개선</a:t>
+            </a:r>
+            <a:r>
+              <a:rPr sz="1100" b="0" dirty="0">
+                <a:solidFill>
+                  <a:srgbClr val="34465C"/>
+                </a:solidFill>
+                <a:latin typeface="Malgun Gothic"/>
+              </a:rPr>
+              <a:t> — </a:t>
+            </a:r>
+            <a:r>
+              <a:rPr sz="1100" b="0" dirty="0" err="1">
+                <a:solidFill>
+                  <a:srgbClr val="34465C"/>
+                </a:solidFill>
+                <a:latin typeface="Malgun Gothic"/>
+              </a:rPr>
+              <a:t>게임</a:t>
+            </a:r>
+            <a:r>
+              <a:rPr sz="1100" b="0" dirty="0">
+                <a:solidFill>
+                  <a:srgbClr val="34465C"/>
+                </a:solidFill>
+                <a:latin typeface="Malgun Gothic"/>
+              </a:rPr>
+              <a:t> </a:t>
+            </a:r>
+            <a:r>
+              <a:rPr sz="1100" b="0" dirty="0" err="1">
+                <a:solidFill>
+                  <a:srgbClr val="34465C"/>
+                </a:solidFill>
+                <a:latin typeface="Malgun Gothic"/>
+              </a:rPr>
+              <a:t>결산·랭킹</a:t>
+            </a:r>
+            <a:r>
+              <a:rPr sz="1100" b="0" dirty="0">
+                <a:solidFill>
+                  <a:srgbClr val="34465C"/>
+                </a:solidFill>
+                <a:latin typeface="Malgun Gothic"/>
+              </a:rPr>
+              <a:t> </a:t>
+            </a:r>
+            <a:r>
+              <a:rPr sz="1100" b="0" dirty="0" err="1">
+                <a:solidFill>
+                  <a:srgbClr val="34465C"/>
+                </a:solidFill>
+                <a:latin typeface="Malgun Gothic"/>
+              </a:rPr>
+              <a:t>갱신에</a:t>
+            </a:r>
+            <a:r>
+              <a:rPr sz="1100" b="0" dirty="0">
+                <a:solidFill>
+                  <a:srgbClr val="34465C"/>
+                </a:solidFill>
+                <a:latin typeface="Malgun Gothic"/>
+              </a:rPr>
+              <a:t> </a:t>
+            </a:r>
+            <a:r>
+              <a:rPr sz="1100" b="0" dirty="0" err="1">
+                <a:solidFill>
+                  <a:srgbClr val="34465C"/>
+                </a:solidFill>
+                <a:latin typeface="Malgun Gothic"/>
+              </a:rPr>
+              <a:t>유리</a:t>
+            </a:r>
+            <a:endParaRPr sz="1100" b="0" dirty="0">
+              <a:solidFill>
+                <a:srgbClr val="34465C"/>
+              </a:solidFill>
+              <a:latin typeface="Malgun Gothic"/>
+            </a:endParaRPr>
           </a:p>
         </p:txBody>
       </p:sp>
@@ -17269,6 +18353,7 @@
           <a:lstStyle/>
           <a:p>
             <a:pPr algn="ctr"/>
+            <a:endParaRPr/>
           </a:p>
         </p:txBody>
       </p:sp>
@@ -17313,6 +18398,7 @@
           <a:lstStyle/>
           <a:p>
             <a:pPr algn="ctr"/>
+            <a:endParaRPr/>
           </a:p>
         </p:txBody>
       </p:sp>
@@ -17333,7 +18419,7 @@
           <a:noFill/>
         </p:spPr>
         <p:txBody>
-          <a:bodyPr wrap="square" anchor="t" lIns="27432" rIns="27432" tIns="18288" bIns="18288">
+          <a:bodyPr wrap="square" lIns="27432" tIns="18288" rIns="27432" bIns="18288" anchor="t">
             <a:spAutoFit/>
           </a:bodyPr>
           <a:lstStyle/>
@@ -17372,7 +18458,7 @@
           <a:noFill/>
         </p:spPr>
         <p:txBody>
-          <a:bodyPr wrap="square" anchor="t" lIns="27432" rIns="27432" tIns="18288" bIns="18288">
+          <a:bodyPr wrap="square" lIns="27432" tIns="18288" rIns="27432" bIns="18288" anchor="t">
             <a:spAutoFit/>
           </a:bodyPr>
           <a:lstStyle/>
@@ -17451,6 +18537,7 @@
           <a:lstStyle/>
           <a:p>
             <a:pPr algn="ctr"/>
+            <a:endParaRPr/>
           </a:p>
         </p:txBody>
       </p:sp>
@@ -17495,6 +18582,7 @@
           <a:lstStyle/>
           <a:p>
             <a:pPr algn="ctr"/>
+            <a:endParaRPr/>
           </a:p>
         </p:txBody>
       </p:sp>
@@ -17515,7 +18603,7 @@
           <a:noFill/>
         </p:spPr>
         <p:txBody>
-          <a:bodyPr wrap="square" anchor="t" lIns="27432" rIns="27432" tIns="18288" bIns="18288">
+          <a:bodyPr wrap="square" lIns="27432" tIns="18288" rIns="27432" bIns="18288" anchor="t">
             <a:spAutoFit/>
           </a:bodyPr>
           <a:lstStyle/>
@@ -17554,7 +18642,7 @@
           <a:noFill/>
         </p:spPr>
         <p:txBody>
-          <a:bodyPr wrap="square" anchor="t" lIns="27432" rIns="27432" tIns="18288" bIns="18288">
+          <a:bodyPr wrap="square" lIns="27432" tIns="18288" rIns="27432" bIns="18288" anchor="t">
             <a:spAutoFit/>
           </a:bodyPr>
           <a:lstStyle/>
@@ -17633,6 +18721,7 @@
           <a:lstStyle/>
           <a:p>
             <a:pPr algn="ctr"/>
+            <a:endParaRPr/>
           </a:p>
         </p:txBody>
       </p:sp>
@@ -17677,6 +18766,7 @@
           <a:lstStyle/>
           <a:p>
             <a:pPr algn="ctr"/>
+            <a:endParaRPr/>
           </a:p>
         </p:txBody>
       </p:sp>
@@ -17697,7 +18787,7 @@
           <a:noFill/>
         </p:spPr>
         <p:txBody>
-          <a:bodyPr wrap="square" anchor="t" lIns="27432" rIns="27432" tIns="18288" bIns="18288">
+          <a:bodyPr wrap="square" lIns="27432" tIns="18288" rIns="27432" bIns="18288" anchor="t">
             <a:spAutoFit/>
           </a:bodyPr>
           <a:lstStyle/>
@@ -17736,7 +18826,7 @@
           <a:noFill/>
         </p:spPr>
         <p:txBody>
-          <a:bodyPr wrap="square" anchor="t" lIns="27432" rIns="27432" tIns="18288" bIns="18288">
+          <a:bodyPr wrap="square" lIns="27432" tIns="18288" rIns="27432" bIns="18288" anchor="t">
             <a:spAutoFit/>
           </a:bodyPr>
           <a:lstStyle/>
@@ -17791,7 +18881,7 @@
           <a:noFill/>
         </p:spPr>
         <p:txBody>
-          <a:bodyPr wrap="square" anchor="t" lIns="27432" rIns="27432" tIns="18288" bIns="18288">
+          <a:bodyPr wrap="square" lIns="27432" tIns="18288" rIns="27432" bIns="18288" anchor="t">
             <a:spAutoFit/>
           </a:bodyPr>
           <a:lstStyle/>
@@ -17830,7 +18920,7 @@
           <a:noFill/>
         </p:spPr>
         <p:txBody>
-          <a:bodyPr wrap="square" anchor="t" lIns="27432" rIns="27432" tIns="18288" bIns="18288">
+          <a:bodyPr wrap="square" lIns="27432" tIns="18288" rIns="27432" bIns="18288" anchor="t">
             <a:spAutoFit/>
           </a:bodyPr>
           <a:lstStyle/>
@@ -17869,7 +18959,7 @@
           <a:noFill/>
         </p:spPr>
         <p:txBody>
-          <a:bodyPr wrap="square" anchor="t" lIns="27432" rIns="27432" tIns="18288" bIns="18288">
+          <a:bodyPr wrap="square" lIns="27432" tIns="18288" rIns="27432" bIns="18288" anchor="t">
             <a:spAutoFit/>
           </a:bodyPr>
           <a:lstStyle/>
@@ -17900,7 +18990,7 @@
 </file>
 
 <file path=ppt/slides/slide4.xml><?xml version="1.0" encoding="utf-8"?>
-<p:sld xmlns:a="http://schemas.openxmlformats.org/drawingml/2006/main" xmlns:p="http://schemas.openxmlformats.org/presentationml/2006/main" xmlns:r="http://schemas.openxmlformats.org/officeDocument/2006/relationships">
+<p:sld xmlns:a="http://schemas.openxmlformats.org/drawingml/2006/main" xmlns:r="http://schemas.openxmlformats.org/officeDocument/2006/relationships" xmlns:p="http://schemas.openxmlformats.org/presentationml/2006/main">
   <p:cSld>
     <p:bg>
       <p:bgPr>
@@ -17916,7 +19006,14 @@
         <p:cNvGrpSpPr/>
         <p:nvPr/>
       </p:nvGrpSpPr>
-      <p:grpSpPr/>
+      <p:grpSpPr>
+        <a:xfrm>
+          <a:off x="0" y="0"/>
+          <a:ext cx="0" cy="0"/>
+          <a:chOff x="0" y="0"/>
+          <a:chExt cx="0" cy="0"/>
+        </a:xfrm>
+      </p:grpSpPr>
       <p:sp>
         <p:nvSpPr>
           <p:cNvPr id="2" name="Rectangle 1"/>
@@ -17958,6 +19055,7 @@
           <a:lstStyle/>
           <a:p>
             <a:pPr algn="ctr"/>
+            <a:endParaRPr/>
           </a:p>
         </p:txBody>
       </p:sp>
@@ -18002,6 +19100,7 @@
           <a:lstStyle/>
           <a:p>
             <a:pPr algn="ctr"/>
+            <a:endParaRPr/>
           </a:p>
         </p:txBody>
       </p:sp>
@@ -18022,7 +19121,7 @@
           <a:noFill/>
         </p:spPr>
         <p:txBody>
-          <a:bodyPr wrap="square" anchor="t" lIns="27432" rIns="27432" tIns="18288" bIns="18288">
+          <a:bodyPr wrap="square" lIns="27432" tIns="18288" rIns="27432" bIns="18288" anchor="t">
             <a:spAutoFit/>
           </a:bodyPr>
           <a:lstStyle/>
@@ -18061,7 +19160,7 @@
           <a:noFill/>
         </p:spPr>
         <p:txBody>
-          <a:bodyPr wrap="square" anchor="t" lIns="27432" rIns="27432" tIns="18288" bIns="18288">
+          <a:bodyPr wrap="square" lIns="27432" tIns="18288" rIns="27432" bIns="18288" anchor="t">
             <a:spAutoFit/>
           </a:bodyPr>
           <a:lstStyle/>
@@ -18100,7 +19199,7 @@
           <a:noFill/>
         </p:spPr>
         <p:txBody>
-          <a:bodyPr wrap="square" anchor="t" lIns="27432" rIns="27432" tIns="18288" bIns="18288">
+          <a:bodyPr wrap="square" lIns="27432" tIns="18288" rIns="27432" bIns="18288" anchor="t">
             <a:spAutoFit/>
           </a:bodyPr>
           <a:lstStyle/>
@@ -18163,6 +19262,7 @@
           <a:lstStyle/>
           <a:p>
             <a:pPr algn="ctr"/>
+            <a:endParaRPr/>
           </a:p>
         </p:txBody>
       </p:sp>
@@ -18207,6 +19307,7 @@
           <a:lstStyle/>
           <a:p>
             <a:pPr algn="ctr"/>
+            <a:endParaRPr/>
           </a:p>
         </p:txBody>
       </p:sp>
@@ -18227,7 +19328,7 @@
           <a:noFill/>
         </p:spPr>
         <p:txBody>
-          <a:bodyPr wrap="square" anchor="t" lIns="27432" rIns="27432" tIns="18288" bIns="18288">
+          <a:bodyPr wrap="square" lIns="27432" tIns="18288" rIns="27432" bIns="18288" anchor="t">
             <a:spAutoFit/>
           </a:bodyPr>
           <a:lstStyle/>
@@ -18266,7 +19367,7 @@
           <a:noFill/>
         </p:spPr>
         <p:txBody>
-          <a:bodyPr wrap="square" anchor="t" lIns="27432" rIns="27432" tIns="18288" bIns="18288">
+          <a:bodyPr wrap="square" lIns="27432" tIns="18288" rIns="27432" bIns="18288" anchor="t">
             <a:spAutoFit/>
           </a:bodyPr>
           <a:lstStyle/>
@@ -18345,6 +19446,7 @@
           <a:lstStyle/>
           <a:p>
             <a:pPr algn="ctr"/>
+            <a:endParaRPr/>
           </a:p>
         </p:txBody>
       </p:sp>
@@ -18389,6 +19491,7 @@
           <a:lstStyle/>
           <a:p>
             <a:pPr algn="ctr"/>
+            <a:endParaRPr/>
           </a:p>
         </p:txBody>
       </p:sp>
@@ -18409,7 +19512,7 @@
           <a:noFill/>
         </p:spPr>
         <p:txBody>
-          <a:bodyPr wrap="square" anchor="t" lIns="27432" rIns="27432" tIns="18288" bIns="18288">
+          <a:bodyPr wrap="square" lIns="27432" tIns="18288" rIns="27432" bIns="18288" anchor="t">
             <a:spAutoFit/>
           </a:bodyPr>
           <a:lstStyle/>
@@ -18448,7 +19551,7 @@
           <a:noFill/>
         </p:spPr>
         <p:txBody>
-          <a:bodyPr wrap="square" anchor="t" lIns="27432" rIns="27432" tIns="18288" bIns="18288">
+          <a:bodyPr wrap="square" lIns="27432" tIns="18288" rIns="27432" bIns="18288" anchor="t">
             <a:spAutoFit/>
           </a:bodyPr>
           <a:lstStyle/>
@@ -18527,6 +19630,7 @@
           <a:lstStyle/>
           <a:p>
             <a:pPr algn="ctr"/>
+            <a:endParaRPr/>
           </a:p>
         </p:txBody>
       </p:sp>
@@ -18571,6 +19675,7 @@
           <a:lstStyle/>
           <a:p>
             <a:pPr algn="ctr"/>
+            <a:endParaRPr/>
           </a:p>
         </p:txBody>
       </p:sp>
@@ -18591,7 +19696,7 @@
           <a:noFill/>
         </p:spPr>
         <p:txBody>
-          <a:bodyPr wrap="square" anchor="t" lIns="27432" rIns="27432" tIns="18288" bIns="18288">
+          <a:bodyPr wrap="square" lIns="27432" tIns="18288" rIns="27432" bIns="18288" anchor="t">
             <a:spAutoFit/>
           </a:bodyPr>
           <a:lstStyle/>
@@ -18630,7 +19735,7 @@
           <a:noFill/>
         </p:spPr>
         <p:txBody>
-          <a:bodyPr wrap="square" anchor="t" lIns="27432" rIns="27432" tIns="18288" bIns="18288">
+          <a:bodyPr wrap="square" lIns="27432" tIns="18288" rIns="27432" bIns="18288" anchor="t">
             <a:spAutoFit/>
           </a:bodyPr>
           <a:lstStyle/>
@@ -18709,6 +19814,7 @@
           <a:lstStyle/>
           <a:p>
             <a:pPr algn="ctr"/>
+            <a:endParaRPr/>
           </a:p>
         </p:txBody>
       </p:sp>
@@ -18753,6 +19859,7 @@
           <a:lstStyle/>
           <a:p>
             <a:pPr algn="ctr"/>
+            <a:endParaRPr/>
           </a:p>
         </p:txBody>
       </p:sp>
@@ -18773,7 +19880,7 @@
           <a:noFill/>
         </p:spPr>
         <p:txBody>
-          <a:bodyPr wrap="square" anchor="t" lIns="27432" rIns="27432" tIns="18288" bIns="18288">
+          <a:bodyPr wrap="square" lIns="27432" tIns="18288" rIns="27432" bIns="18288" anchor="t">
             <a:spAutoFit/>
           </a:bodyPr>
           <a:lstStyle/>
@@ -18812,7 +19919,7 @@
           <a:noFill/>
         </p:spPr>
         <p:txBody>
-          <a:bodyPr wrap="square" anchor="t" lIns="27432" rIns="27432" tIns="18288" bIns="18288">
+          <a:bodyPr wrap="square" lIns="27432" tIns="18288" rIns="27432" bIns="18288" anchor="t">
             <a:spAutoFit/>
           </a:bodyPr>
           <a:lstStyle/>
@@ -18899,7 +20006,7 @@
           <a:noFill/>
         </p:spPr>
         <p:txBody>
-          <a:bodyPr wrap="square" anchor="t" lIns="27432" rIns="27432" tIns="18288" bIns="18288">
+          <a:bodyPr wrap="square" lIns="27432" tIns="18288" rIns="27432" bIns="18288" anchor="t">
             <a:spAutoFit/>
           </a:bodyPr>
           <a:lstStyle/>
@@ -18938,7 +20045,7 @@
           <a:noFill/>
         </p:spPr>
         <p:txBody>
-          <a:bodyPr wrap="square" anchor="t" lIns="27432" rIns="27432" tIns="18288" bIns="18288">
+          <a:bodyPr wrap="square" lIns="27432" tIns="18288" rIns="27432" bIns="18288" anchor="t">
             <a:spAutoFit/>
           </a:bodyPr>
           <a:lstStyle/>
@@ -18969,7 +20076,7 @@
 </file>
 
 <file path=ppt/slides/slide5.xml><?xml version="1.0" encoding="utf-8"?>
-<p:sld xmlns:a="http://schemas.openxmlformats.org/drawingml/2006/main" xmlns:p="http://schemas.openxmlformats.org/presentationml/2006/main" xmlns:r="http://schemas.openxmlformats.org/officeDocument/2006/relationships">
+<p:sld xmlns:a="http://schemas.openxmlformats.org/drawingml/2006/main" xmlns:r="http://schemas.openxmlformats.org/officeDocument/2006/relationships" xmlns:p="http://schemas.openxmlformats.org/presentationml/2006/main">
   <p:cSld>
     <p:bg>
       <p:bgPr>
@@ -18985,7 +20092,14 @@
         <p:cNvGrpSpPr/>
         <p:nvPr/>
       </p:nvGrpSpPr>
-      <p:grpSpPr/>
+      <p:grpSpPr>
+        <a:xfrm>
+          <a:off x="0" y="0"/>
+          <a:ext cx="0" cy="0"/>
+          <a:chOff x="0" y="0"/>
+          <a:chExt cx="0" cy="0"/>
+        </a:xfrm>
+      </p:grpSpPr>
       <p:sp>
         <p:nvSpPr>
           <p:cNvPr id="2" name="Rectangle 1"/>
@@ -19027,6 +20141,7 @@
           <a:lstStyle/>
           <a:p>
             <a:pPr algn="ctr"/>
+            <a:endParaRPr/>
           </a:p>
         </p:txBody>
       </p:sp>
@@ -19071,6 +20186,7 @@
           <a:lstStyle/>
           <a:p>
             <a:pPr algn="ctr"/>
+            <a:endParaRPr/>
           </a:p>
         </p:txBody>
       </p:sp>
@@ -19091,7 +20207,7 @@
           <a:noFill/>
         </p:spPr>
         <p:txBody>
-          <a:bodyPr wrap="square" anchor="t" lIns="27432" rIns="27432" tIns="18288" bIns="18288">
+          <a:bodyPr wrap="square" lIns="27432" tIns="18288" rIns="27432" bIns="18288" anchor="t">
             <a:spAutoFit/>
           </a:bodyPr>
           <a:lstStyle/>
@@ -19130,7 +20246,7 @@
           <a:noFill/>
         </p:spPr>
         <p:txBody>
-          <a:bodyPr wrap="square" anchor="t" lIns="27432" rIns="27432" tIns="18288" bIns="18288">
+          <a:bodyPr wrap="square" lIns="27432" tIns="18288" rIns="27432" bIns="18288" anchor="t">
             <a:spAutoFit/>
           </a:bodyPr>
           <a:lstStyle/>
@@ -19193,6 +20309,7 @@
           <a:lstStyle/>
           <a:p>
             <a:pPr algn="ctr"/>
+            <a:endParaRPr/>
           </a:p>
         </p:txBody>
       </p:sp>
@@ -19237,6 +20354,7 @@
           <a:lstStyle/>
           <a:p>
             <a:pPr algn="ctr"/>
+            <a:endParaRPr/>
           </a:p>
         </p:txBody>
       </p:sp>
@@ -19257,7 +20375,7 @@
           <a:noFill/>
         </p:spPr>
         <p:txBody>
-          <a:bodyPr wrap="square" anchor="t" lIns="27432" rIns="27432" tIns="18288" bIns="18288">
+          <a:bodyPr wrap="square" lIns="27432" tIns="18288" rIns="27432" bIns="18288" anchor="t">
             <a:spAutoFit/>
           </a:bodyPr>
           <a:lstStyle/>
@@ -19296,7 +20414,7 @@
           <a:noFill/>
         </p:spPr>
         <p:txBody>
-          <a:bodyPr wrap="square" anchor="t" lIns="27432" rIns="27432" tIns="18288" bIns="18288">
+          <a:bodyPr wrap="square" lIns="27432" tIns="18288" rIns="27432" bIns="18288" anchor="t">
             <a:spAutoFit/>
           </a:bodyPr>
           <a:lstStyle/>
@@ -19335,7 +20453,7 @@
           <a:noFill/>
         </p:spPr>
         <p:txBody>
-          <a:bodyPr wrap="square" anchor="t" lIns="27432" rIns="27432" tIns="18288" bIns="18288">
+          <a:bodyPr wrap="square" lIns="27432" tIns="18288" rIns="27432" bIns="18288" anchor="t">
             <a:spAutoFit/>
           </a:bodyPr>
           <a:lstStyle/>
@@ -19446,6 +20564,7 @@
           <a:lstStyle/>
           <a:p>
             <a:pPr algn="ctr"/>
+            <a:endParaRPr/>
           </a:p>
         </p:txBody>
       </p:sp>
@@ -19490,6 +20609,7 @@
           <a:lstStyle/>
           <a:p>
             <a:pPr algn="ctr"/>
+            <a:endParaRPr/>
           </a:p>
         </p:txBody>
       </p:sp>
@@ -19510,7 +20630,7 @@
           <a:noFill/>
         </p:spPr>
         <p:txBody>
-          <a:bodyPr wrap="square" anchor="t" lIns="27432" rIns="27432" tIns="18288" bIns="18288">
+          <a:bodyPr wrap="square" lIns="27432" tIns="18288" rIns="27432" bIns="18288" anchor="t">
             <a:spAutoFit/>
           </a:bodyPr>
           <a:lstStyle/>
@@ -19549,7 +20669,7 @@
           <a:noFill/>
         </p:spPr>
         <p:txBody>
-          <a:bodyPr wrap="square" anchor="t" lIns="27432" rIns="27432" tIns="18288" bIns="18288">
+          <a:bodyPr wrap="square" lIns="27432" tIns="18288" rIns="27432" bIns="18288" anchor="t">
             <a:spAutoFit/>
           </a:bodyPr>
           <a:lstStyle/>
@@ -19644,6 +20764,7 @@
           <a:lstStyle/>
           <a:p>
             <a:pPr algn="ctr"/>
+            <a:endParaRPr/>
           </a:p>
         </p:txBody>
       </p:sp>
@@ -19688,6 +20809,7 @@
           <a:lstStyle/>
           <a:p>
             <a:pPr algn="ctr"/>
+            <a:endParaRPr/>
           </a:p>
         </p:txBody>
       </p:sp>
@@ -19708,7 +20830,7 @@
           <a:noFill/>
         </p:spPr>
         <p:txBody>
-          <a:bodyPr wrap="square" anchor="t" lIns="27432" rIns="27432" tIns="18288" bIns="18288">
+          <a:bodyPr wrap="square" lIns="27432" tIns="18288" rIns="27432" bIns="18288" anchor="t">
             <a:spAutoFit/>
           </a:bodyPr>
           <a:lstStyle/>
@@ -19747,7 +20869,7 @@
           <a:noFill/>
         </p:spPr>
         <p:txBody>
-          <a:bodyPr wrap="square" anchor="t" lIns="27432" rIns="27432" tIns="18288" bIns="18288">
+          <a:bodyPr wrap="square" lIns="27432" tIns="18288" rIns="27432" bIns="18288" anchor="t">
             <a:spAutoFit/>
           </a:bodyPr>
           <a:lstStyle/>
@@ -19818,7 +20940,7 @@
           <a:noFill/>
         </p:spPr>
         <p:txBody>
-          <a:bodyPr wrap="square" anchor="t" lIns="27432" rIns="27432" tIns="18288" bIns="18288">
+          <a:bodyPr wrap="square" lIns="27432" tIns="18288" rIns="27432" bIns="18288" anchor="t">
             <a:spAutoFit/>
           </a:bodyPr>
           <a:lstStyle/>
@@ -19857,7 +20979,7 @@
           <a:noFill/>
         </p:spPr>
         <p:txBody>
-          <a:bodyPr wrap="square" anchor="t" lIns="27432" rIns="27432" tIns="18288" bIns="18288">
+          <a:bodyPr wrap="square" lIns="27432" tIns="18288" rIns="27432" bIns="18288" anchor="t">
             <a:spAutoFit/>
           </a:bodyPr>
           <a:lstStyle/>
@@ -19888,7 +21010,7 @@
 </file>
 
 <file path=ppt/slides/slide6.xml><?xml version="1.0" encoding="utf-8"?>
-<p:sld xmlns:a="http://schemas.openxmlformats.org/drawingml/2006/main" xmlns:p="http://schemas.openxmlformats.org/presentationml/2006/main" xmlns:r="http://schemas.openxmlformats.org/officeDocument/2006/relationships">
+<p:sld xmlns:a="http://schemas.openxmlformats.org/drawingml/2006/main" xmlns:r="http://schemas.openxmlformats.org/officeDocument/2006/relationships" xmlns:p="http://schemas.openxmlformats.org/presentationml/2006/main">
   <p:cSld>
     <p:bg>
       <p:bgPr>
@@ -19904,7 +21026,14 @@
         <p:cNvGrpSpPr/>
         <p:nvPr/>
       </p:nvGrpSpPr>
-      <p:grpSpPr/>
+      <p:grpSpPr>
+        <a:xfrm>
+          <a:off x="0" y="0"/>
+          <a:ext cx="0" cy="0"/>
+          <a:chOff x="0" y="0"/>
+          <a:chExt cx="0" cy="0"/>
+        </a:xfrm>
+      </p:grpSpPr>
       <p:sp>
         <p:nvSpPr>
           <p:cNvPr id="2" name="Rectangle 1"/>
@@ -19946,6 +21075,7 @@
           <a:lstStyle/>
           <a:p>
             <a:pPr algn="ctr"/>
+            <a:endParaRPr/>
           </a:p>
         </p:txBody>
       </p:sp>
@@ -19990,6 +21120,7 @@
           <a:lstStyle/>
           <a:p>
             <a:pPr algn="ctr"/>
+            <a:endParaRPr/>
           </a:p>
         </p:txBody>
       </p:sp>
@@ -20010,7 +21141,7 @@
           <a:noFill/>
         </p:spPr>
         <p:txBody>
-          <a:bodyPr wrap="square" anchor="t" lIns="27432" rIns="27432" tIns="18288" bIns="18288">
+          <a:bodyPr wrap="square" lIns="27432" tIns="18288" rIns="27432" bIns="18288" anchor="t">
             <a:spAutoFit/>
           </a:bodyPr>
           <a:lstStyle/>
@@ -20049,7 +21180,7 @@
           <a:noFill/>
         </p:spPr>
         <p:txBody>
-          <a:bodyPr wrap="square" anchor="t" lIns="27432" rIns="27432" tIns="18288" bIns="18288">
+          <a:bodyPr wrap="square" lIns="27432" tIns="18288" rIns="27432" bIns="18288" anchor="t">
             <a:spAutoFit/>
           </a:bodyPr>
           <a:lstStyle/>
@@ -20090,9 +21221,27 @@
                 <a:tableStyleId>{5C22544A-7EE6-4342-B048-85BDC9FD1C3A}</a:tableStyleId>
               </a:tblPr>
               <a:tblGrid>
-                <a:gridCol w="2286000"/>
-                <a:gridCol w="4572000"/>
-                <a:gridCol w="4206240"/>
+                <a:gridCol w="2286000">
+                  <a:extLst>
+                    <a:ext uri="{9D8B030D-6E8A-4147-A177-3AD203B41FA5}">
+                      <a16:colId xmlns:a16="http://schemas.microsoft.com/office/drawing/2014/main" val="20000"/>
+                    </a:ext>
+                  </a:extLst>
+                </a:gridCol>
+                <a:gridCol w="4572000">
+                  <a:extLst>
+                    <a:ext uri="{9D8B030D-6E8A-4147-A177-3AD203B41FA5}">
+                      <a16:colId xmlns:a16="http://schemas.microsoft.com/office/drawing/2014/main" val="20001"/>
+                    </a:ext>
+                  </a:extLst>
+                </a:gridCol>
+                <a:gridCol w="4206240">
+                  <a:extLst>
+                    <a:ext uri="{9D8B030D-6E8A-4147-A177-3AD203B41FA5}">
+                      <a16:colId xmlns:a16="http://schemas.microsoft.com/office/drawing/2014/main" val="20002"/>
+                    </a:ext>
+                  </a:extLst>
+                </a:gridCol>
               </a:tblGrid>
               <a:tr h="384048">
                 <a:tc>
@@ -20164,6 +21313,11 @@
                     </a:solidFill>
                   </a:tcPr>
                 </a:tc>
+                <a:extLst>
+                  <a:ext uri="{0D108BD9-81ED-4DB2-BD59-A6C34878D82A}">
+                    <a16:rowId xmlns:a16="http://schemas.microsoft.com/office/drawing/2014/main" val="10000"/>
+                  </a:ext>
+                </a:extLst>
               </a:tr>
               <a:tr h="384048">
                 <a:tc>
@@ -20235,6 +21389,11 @@
                     </a:solidFill>
                   </a:tcPr>
                 </a:tc>
+                <a:extLst>
+                  <a:ext uri="{0D108BD9-81ED-4DB2-BD59-A6C34878D82A}">
+                    <a16:rowId xmlns:a16="http://schemas.microsoft.com/office/drawing/2014/main" val="10001"/>
+                  </a:ext>
+                </a:extLst>
               </a:tr>
               <a:tr h="384048">
                 <a:tc>
@@ -20306,6 +21465,11 @@
                     </a:solidFill>
                   </a:tcPr>
                 </a:tc>
+                <a:extLst>
+                  <a:ext uri="{0D108BD9-81ED-4DB2-BD59-A6C34878D82A}">
+                    <a16:rowId xmlns:a16="http://schemas.microsoft.com/office/drawing/2014/main" val="10002"/>
+                  </a:ext>
+                </a:extLst>
               </a:tr>
               <a:tr h="384048">
                 <a:tc>
@@ -20377,6 +21541,11 @@
                     </a:solidFill>
                   </a:tcPr>
                 </a:tc>
+                <a:extLst>
+                  <a:ext uri="{0D108BD9-81ED-4DB2-BD59-A6C34878D82A}">
+                    <a16:rowId xmlns:a16="http://schemas.microsoft.com/office/drawing/2014/main" val="10003"/>
+                  </a:ext>
+                </a:extLst>
               </a:tr>
               <a:tr h="384048">
                 <a:tc>
@@ -20448,6 +21617,11 @@
                     </a:solidFill>
                   </a:tcPr>
                 </a:tc>
+                <a:extLst>
+                  <a:ext uri="{0D108BD9-81ED-4DB2-BD59-A6C34878D82A}">
+                    <a16:rowId xmlns:a16="http://schemas.microsoft.com/office/drawing/2014/main" val="10004"/>
+                  </a:ext>
+                </a:extLst>
               </a:tr>
               <a:tr h="384048">
                 <a:tc>
@@ -20519,6 +21693,11 @@
                     </a:solidFill>
                   </a:tcPr>
                 </a:tc>
+                <a:extLst>
+                  <a:ext uri="{0D108BD9-81ED-4DB2-BD59-A6C34878D82A}">
+                    <a16:rowId xmlns:a16="http://schemas.microsoft.com/office/drawing/2014/main" val="10005"/>
+                  </a:ext>
+                </a:extLst>
               </a:tr>
               <a:tr h="384048">
                 <a:tc>
@@ -20590,6 +21769,11 @@
                     </a:solidFill>
                   </a:tcPr>
                 </a:tc>
+                <a:extLst>
+                  <a:ext uri="{0D108BD9-81ED-4DB2-BD59-A6C34878D82A}">
+                    <a16:rowId xmlns:a16="http://schemas.microsoft.com/office/drawing/2014/main" val="10006"/>
+                  </a:ext>
+                </a:extLst>
               </a:tr>
               <a:tr h="384048">
                 <a:tc>
@@ -20661,6 +21845,11 @@
                     </a:solidFill>
                   </a:tcPr>
                 </a:tc>
+                <a:extLst>
+                  <a:ext uri="{0D108BD9-81ED-4DB2-BD59-A6C34878D82A}">
+                    <a16:rowId xmlns:a16="http://schemas.microsoft.com/office/drawing/2014/main" val="10007"/>
+                  </a:ext>
+                </a:extLst>
               </a:tr>
               <a:tr h="384048">
                 <a:tc>
@@ -20732,6 +21921,11 @@
                     </a:solidFill>
                   </a:tcPr>
                 </a:tc>
+                <a:extLst>
+                  <a:ext uri="{0D108BD9-81ED-4DB2-BD59-A6C34878D82A}">
+                    <a16:rowId xmlns:a16="http://schemas.microsoft.com/office/drawing/2014/main" val="10008"/>
+                  </a:ext>
+                </a:extLst>
               </a:tr>
               <a:tr h="384048">
                 <a:tc>
@@ -20803,6 +21997,11 @@
                     </a:solidFill>
                   </a:tcPr>
                 </a:tc>
+                <a:extLst>
+                  <a:ext uri="{0D108BD9-81ED-4DB2-BD59-A6C34878D82A}">
+                    <a16:rowId xmlns:a16="http://schemas.microsoft.com/office/drawing/2014/main" val="10009"/>
+                  </a:ext>
+                </a:extLst>
               </a:tr>
             </a:tbl>
           </a:graphicData>
@@ -20825,7 +22024,7 @@
           <a:noFill/>
         </p:spPr>
         <p:txBody>
-          <a:bodyPr wrap="square" anchor="t" lIns="27432" rIns="27432" tIns="18288" bIns="18288">
+          <a:bodyPr wrap="square" lIns="27432" tIns="18288" rIns="27432" bIns="18288" anchor="t">
             <a:spAutoFit/>
           </a:bodyPr>
           <a:lstStyle/>
@@ -20873,7 +22072,7 @@
           <a:noFill/>
         </p:spPr>
         <p:txBody>
-          <a:bodyPr wrap="square" anchor="t" lIns="27432" rIns="27432" tIns="18288" bIns="18288">
+          <a:bodyPr wrap="square" lIns="27432" tIns="18288" rIns="27432" bIns="18288" anchor="t">
             <a:spAutoFit/>
           </a:bodyPr>
           <a:lstStyle/>
@@ -20912,7 +22111,7 @@
           <a:noFill/>
         </p:spPr>
         <p:txBody>
-          <a:bodyPr wrap="square" anchor="t" lIns="27432" rIns="27432" tIns="18288" bIns="18288">
+          <a:bodyPr wrap="square" lIns="27432" tIns="18288" rIns="27432" bIns="18288" anchor="t">
             <a:spAutoFit/>
           </a:bodyPr>
           <a:lstStyle/>
@@ -20943,7 +22142,7 @@
 </file>
 
 <file path=ppt/slides/slide7.xml><?xml version="1.0" encoding="utf-8"?>
-<p:sld xmlns:a="http://schemas.openxmlformats.org/drawingml/2006/main" xmlns:p="http://schemas.openxmlformats.org/presentationml/2006/main" xmlns:r="http://schemas.openxmlformats.org/officeDocument/2006/relationships">
+<p:sld xmlns:a="http://schemas.openxmlformats.org/drawingml/2006/main" xmlns:r="http://schemas.openxmlformats.org/officeDocument/2006/relationships" xmlns:p="http://schemas.openxmlformats.org/presentationml/2006/main">
   <p:cSld>
     <p:bg>
       <p:bgPr>
@@ -20959,7 +22158,14 @@
         <p:cNvGrpSpPr/>
         <p:nvPr/>
       </p:nvGrpSpPr>
-      <p:grpSpPr/>
+      <p:grpSpPr>
+        <a:xfrm>
+          <a:off x="0" y="0"/>
+          <a:ext cx="0" cy="0"/>
+          <a:chOff x="0" y="0"/>
+          <a:chExt cx="0" cy="0"/>
+        </a:xfrm>
+      </p:grpSpPr>
       <p:sp>
         <p:nvSpPr>
           <p:cNvPr id="2" name="Rectangle 1"/>
@@ -21001,6 +22207,7 @@
           <a:lstStyle/>
           <a:p>
             <a:pPr algn="ctr"/>
+            <a:endParaRPr/>
           </a:p>
         </p:txBody>
       </p:sp>
@@ -21045,6 +22252,7 @@
           <a:lstStyle/>
           <a:p>
             <a:pPr algn="ctr"/>
+            <a:endParaRPr/>
           </a:p>
         </p:txBody>
       </p:sp>
@@ -21065,7 +22273,7 @@
           <a:noFill/>
         </p:spPr>
         <p:txBody>
-          <a:bodyPr wrap="square" anchor="t" lIns="27432" rIns="27432" tIns="18288" bIns="18288">
+          <a:bodyPr wrap="square" lIns="27432" tIns="18288" rIns="27432" bIns="18288" anchor="t">
             <a:spAutoFit/>
           </a:bodyPr>
           <a:lstStyle/>
@@ -21128,6 +22336,7 @@
           <a:lstStyle/>
           <a:p>
             <a:pPr algn="ctr"/>
+            <a:endParaRPr/>
           </a:p>
         </p:txBody>
       </p:sp>
@@ -21148,7 +22357,7 @@
           <a:noFill/>
         </p:spPr>
         <p:txBody>
-          <a:bodyPr wrap="square" anchor="t" lIns="27432" rIns="27432" tIns="18288" bIns="18288">
+          <a:bodyPr wrap="square" lIns="27432" tIns="18288" rIns="27432" bIns="18288" anchor="t">
             <a:spAutoFit/>
           </a:bodyPr>
           <a:lstStyle/>
@@ -21187,7 +22396,7 @@
           <a:noFill/>
         </p:spPr>
         <p:txBody>
-          <a:bodyPr wrap="square" anchor="t" lIns="27432" rIns="27432" tIns="18288" bIns="18288">
+          <a:bodyPr wrap="square" lIns="27432" tIns="18288" rIns="27432" bIns="18288" anchor="t">
             <a:spAutoFit/>
           </a:bodyPr>
           <a:lstStyle/>
@@ -21226,7 +22435,7 @@
           <a:noFill/>
         </p:spPr>
         <p:txBody>
-          <a:bodyPr wrap="square" anchor="t" lIns="27432" rIns="27432" tIns="18288" bIns="18288">
+          <a:bodyPr wrap="square" lIns="27432" tIns="18288" rIns="27432" bIns="18288" anchor="t">
             <a:spAutoFit/>
           </a:bodyPr>
           <a:lstStyle/>
@@ -21289,6 +22498,7 @@
           <a:lstStyle/>
           <a:p>
             <a:pPr algn="ctr"/>
+            <a:endParaRPr/>
           </a:p>
         </p:txBody>
       </p:sp>
@@ -21309,7 +22519,7 @@
           <a:noFill/>
         </p:spPr>
         <p:txBody>
-          <a:bodyPr wrap="square" anchor="t" lIns="27432" rIns="27432" tIns="18288" bIns="18288">
+          <a:bodyPr wrap="square" lIns="27432" tIns="18288" rIns="27432" bIns="18288" anchor="t">
             <a:spAutoFit/>
           </a:bodyPr>
           <a:lstStyle/>
@@ -21372,6 +22582,7 @@
           <a:lstStyle/>
           <a:p>
             <a:pPr algn="ctr"/>
+            <a:endParaRPr/>
           </a:p>
         </p:txBody>
       </p:sp>
@@ -21392,7 +22603,7 @@
           <a:noFill/>
         </p:spPr>
         <p:txBody>
-          <a:bodyPr wrap="square" anchor="t" lIns="27432" rIns="27432" tIns="18288" bIns="18288">
+          <a:bodyPr wrap="square" lIns="27432" tIns="18288" rIns="27432" bIns="18288" anchor="t">
             <a:spAutoFit/>
           </a:bodyPr>
           <a:lstStyle/>
@@ -21455,6 +22666,7 @@
           <a:lstStyle/>
           <a:p>
             <a:pPr algn="ctr"/>
+            <a:endParaRPr/>
           </a:p>
         </p:txBody>
       </p:sp>
@@ -21475,7 +22687,7 @@
           <a:noFill/>
         </p:spPr>
         <p:txBody>
-          <a:bodyPr wrap="square" anchor="t" lIns="27432" rIns="27432" tIns="18288" bIns="18288">
+          <a:bodyPr wrap="square" lIns="27432" tIns="18288" rIns="27432" bIns="18288" anchor="t">
             <a:spAutoFit/>
           </a:bodyPr>
           <a:lstStyle/>
@@ -21514,7 +22726,7 @@
           <a:noFill/>
         </p:spPr>
         <p:txBody>
-          <a:bodyPr wrap="square" anchor="t" lIns="27432" rIns="27432" tIns="18288" bIns="18288">
+          <a:bodyPr wrap="square" lIns="27432" tIns="18288" rIns="27432" bIns="18288" anchor="t">
             <a:spAutoFit/>
           </a:bodyPr>
           <a:lstStyle/>
@@ -21553,7 +22765,7 @@
           <a:noFill/>
         </p:spPr>
         <p:txBody>
-          <a:bodyPr wrap="square" anchor="t" lIns="27432" rIns="27432" tIns="18288" bIns="18288">
+          <a:bodyPr wrap="square" lIns="27432" tIns="18288" rIns="27432" bIns="18288" anchor="t">
             <a:spAutoFit/>
           </a:bodyPr>
           <a:lstStyle/>
@@ -21584,7 +22796,7 @@
 </file>
 
 <file path=ppt/slides/slide8.xml><?xml version="1.0" encoding="utf-8"?>
-<p:sld xmlns:a="http://schemas.openxmlformats.org/drawingml/2006/main" xmlns:p="http://schemas.openxmlformats.org/presentationml/2006/main" xmlns:r="http://schemas.openxmlformats.org/officeDocument/2006/relationships">
+<p:sld xmlns:a="http://schemas.openxmlformats.org/drawingml/2006/main" xmlns:r="http://schemas.openxmlformats.org/officeDocument/2006/relationships" xmlns:p="http://schemas.openxmlformats.org/presentationml/2006/main">
   <p:cSld>
     <p:bg>
       <p:bgPr>
@@ -21600,7 +22812,14 @@
         <p:cNvGrpSpPr/>
         <p:nvPr/>
       </p:nvGrpSpPr>
-      <p:grpSpPr/>
+      <p:grpSpPr>
+        <a:xfrm>
+          <a:off x="0" y="0"/>
+          <a:ext cx="0" cy="0"/>
+          <a:chOff x="0" y="0"/>
+          <a:chExt cx="0" cy="0"/>
+        </a:xfrm>
+      </p:grpSpPr>
       <p:sp>
         <p:nvSpPr>
           <p:cNvPr id="2" name="Rectangle 1"/>
@@ -21642,6 +22861,7 @@
           <a:lstStyle/>
           <a:p>
             <a:pPr algn="ctr"/>
+            <a:endParaRPr/>
           </a:p>
         </p:txBody>
       </p:sp>
@@ -21686,6 +22906,7 @@
           <a:lstStyle/>
           <a:p>
             <a:pPr algn="ctr"/>
+            <a:endParaRPr/>
           </a:p>
         </p:txBody>
       </p:sp>
@@ -21706,7 +22927,7 @@
           <a:noFill/>
         </p:spPr>
         <p:txBody>
-          <a:bodyPr wrap="square" anchor="t" lIns="27432" rIns="27432" tIns="18288" bIns="18288">
+          <a:bodyPr wrap="square" lIns="27432" tIns="18288" rIns="27432" bIns="18288" anchor="t">
             <a:spAutoFit/>
           </a:bodyPr>
           <a:lstStyle/>
@@ -21745,7 +22966,7 @@
           <a:noFill/>
         </p:spPr>
         <p:txBody>
-          <a:bodyPr wrap="square" anchor="t" lIns="27432" rIns="27432" tIns="18288" bIns="18288">
+          <a:bodyPr wrap="square" lIns="27432" tIns="18288" rIns="27432" bIns="18288" anchor="t">
             <a:spAutoFit/>
           </a:bodyPr>
           <a:lstStyle/>
@@ -21786,10 +23007,34 @@
                 <a:tableStyleId>{5C22544A-7EE6-4342-B048-85BDC9FD1C3A}</a:tableStyleId>
               </a:tblPr>
               <a:tblGrid>
-                <a:gridCol w="1554480"/>
-                <a:gridCol w="3566160"/>
-                <a:gridCol w="3383280"/>
-                <a:gridCol w="2560320"/>
+                <a:gridCol w="1554480">
+                  <a:extLst>
+                    <a:ext uri="{9D8B030D-6E8A-4147-A177-3AD203B41FA5}">
+                      <a16:colId xmlns:a16="http://schemas.microsoft.com/office/drawing/2014/main" val="20000"/>
+                    </a:ext>
+                  </a:extLst>
+                </a:gridCol>
+                <a:gridCol w="3566160">
+                  <a:extLst>
+                    <a:ext uri="{9D8B030D-6E8A-4147-A177-3AD203B41FA5}">
+                      <a16:colId xmlns:a16="http://schemas.microsoft.com/office/drawing/2014/main" val="20001"/>
+                    </a:ext>
+                  </a:extLst>
+                </a:gridCol>
+                <a:gridCol w="3383280">
+                  <a:extLst>
+                    <a:ext uri="{9D8B030D-6E8A-4147-A177-3AD203B41FA5}">
+                      <a16:colId xmlns:a16="http://schemas.microsoft.com/office/drawing/2014/main" val="20002"/>
+                    </a:ext>
+                  </a:extLst>
+                </a:gridCol>
+                <a:gridCol w="2560320">
+                  <a:extLst>
+                    <a:ext uri="{9D8B030D-6E8A-4147-A177-3AD203B41FA5}">
+                      <a16:colId xmlns:a16="http://schemas.microsoft.com/office/drawing/2014/main" val="20003"/>
+                    </a:ext>
+                  </a:extLst>
+                </a:gridCol>
               </a:tblGrid>
               <a:tr h="475488">
                 <a:tc>
@@ -21884,6 +23129,11 @@
                     </a:solidFill>
                   </a:tcPr>
                 </a:tc>
+                <a:extLst>
+                  <a:ext uri="{0D108BD9-81ED-4DB2-BD59-A6C34878D82A}">
+                    <a16:rowId xmlns:a16="http://schemas.microsoft.com/office/drawing/2014/main" val="10000"/>
+                  </a:ext>
+                </a:extLst>
               </a:tr>
               <a:tr h="475488">
                 <a:tc>
@@ -21978,6 +23228,11 @@
                     </a:solidFill>
                   </a:tcPr>
                 </a:tc>
+                <a:extLst>
+                  <a:ext uri="{0D108BD9-81ED-4DB2-BD59-A6C34878D82A}">
+                    <a16:rowId xmlns:a16="http://schemas.microsoft.com/office/drawing/2014/main" val="10001"/>
+                  </a:ext>
+                </a:extLst>
               </a:tr>
               <a:tr h="475488">
                 <a:tc>
@@ -22072,6 +23327,11 @@
                     </a:solidFill>
                   </a:tcPr>
                 </a:tc>
+                <a:extLst>
+                  <a:ext uri="{0D108BD9-81ED-4DB2-BD59-A6C34878D82A}">
+                    <a16:rowId xmlns:a16="http://schemas.microsoft.com/office/drawing/2014/main" val="10002"/>
+                  </a:ext>
+                </a:extLst>
               </a:tr>
               <a:tr h="475488">
                 <a:tc>
@@ -22166,6 +23426,11 @@
                     </a:solidFill>
                   </a:tcPr>
                 </a:tc>
+                <a:extLst>
+                  <a:ext uri="{0D108BD9-81ED-4DB2-BD59-A6C34878D82A}">
+                    <a16:rowId xmlns:a16="http://schemas.microsoft.com/office/drawing/2014/main" val="10003"/>
+                  </a:ext>
+                </a:extLst>
               </a:tr>
               <a:tr h="475488">
                 <a:tc>
@@ -22260,6 +23525,11 @@
                     </a:solidFill>
                   </a:tcPr>
                 </a:tc>
+                <a:extLst>
+                  <a:ext uri="{0D108BD9-81ED-4DB2-BD59-A6C34878D82A}">
+                    <a16:rowId xmlns:a16="http://schemas.microsoft.com/office/drawing/2014/main" val="10004"/>
+                  </a:ext>
+                </a:extLst>
               </a:tr>
               <a:tr h="475488">
                 <a:tc>
@@ -22354,6 +23624,11 @@
                     </a:solidFill>
                   </a:tcPr>
                 </a:tc>
+                <a:extLst>
+                  <a:ext uri="{0D108BD9-81ED-4DB2-BD59-A6C34878D82A}">
+                    <a16:rowId xmlns:a16="http://schemas.microsoft.com/office/drawing/2014/main" val="10005"/>
+                  </a:ext>
+                </a:extLst>
               </a:tr>
             </a:tbl>
           </a:graphicData>
@@ -22400,6 +23675,7 @@
           <a:lstStyle/>
           <a:p>
             <a:pPr algn="ctr"/>
+            <a:endParaRPr/>
           </a:p>
         </p:txBody>
       </p:sp>
@@ -22444,6 +23720,7 @@
           <a:lstStyle/>
           <a:p>
             <a:pPr algn="ctr"/>
+            <a:endParaRPr/>
           </a:p>
         </p:txBody>
       </p:sp>
@@ -22464,7 +23741,7 @@
           <a:noFill/>
         </p:spPr>
         <p:txBody>
-          <a:bodyPr wrap="square" anchor="t" lIns="27432" rIns="27432" tIns="18288" bIns="18288">
+          <a:bodyPr wrap="square" lIns="27432" tIns="18288" rIns="27432" bIns="18288" anchor="t">
             <a:spAutoFit/>
           </a:bodyPr>
           <a:lstStyle/>
@@ -22503,7 +23780,7 @@
           <a:noFill/>
         </p:spPr>
         <p:txBody>
-          <a:bodyPr wrap="square" anchor="t" lIns="27432" rIns="27432" tIns="18288" bIns="18288">
+          <a:bodyPr wrap="square" lIns="27432" tIns="18288" rIns="27432" bIns="18288" anchor="t">
             <a:spAutoFit/>
           </a:bodyPr>
           <a:lstStyle/>
@@ -22558,7 +23835,7 @@
           <a:noFill/>
         </p:spPr>
         <p:txBody>
-          <a:bodyPr wrap="square" anchor="t" lIns="27432" rIns="27432" tIns="18288" bIns="18288">
+          <a:bodyPr wrap="square" lIns="27432" tIns="18288" rIns="27432" bIns="18288" anchor="t">
             <a:spAutoFit/>
           </a:bodyPr>
           <a:lstStyle/>
@@ -22597,7 +23874,7 @@
           <a:noFill/>
         </p:spPr>
         <p:txBody>
-          <a:bodyPr wrap="square" anchor="t" lIns="27432" rIns="27432" tIns="18288" bIns="18288">
+          <a:bodyPr wrap="square" lIns="27432" tIns="18288" rIns="27432" bIns="18288" anchor="t">
             <a:spAutoFit/>
           </a:bodyPr>
           <a:lstStyle/>
@@ -22628,7 +23905,7 @@
 </file>
 
 <file path=ppt/slides/slide9.xml><?xml version="1.0" encoding="utf-8"?>
-<p:sld xmlns:a="http://schemas.openxmlformats.org/drawingml/2006/main" xmlns:p="http://schemas.openxmlformats.org/presentationml/2006/main" xmlns:r="http://schemas.openxmlformats.org/officeDocument/2006/relationships">
+<p:sld xmlns:a="http://schemas.openxmlformats.org/drawingml/2006/main" xmlns:r="http://schemas.openxmlformats.org/officeDocument/2006/relationships" xmlns:p="http://schemas.openxmlformats.org/presentationml/2006/main">
   <p:cSld>
     <p:bg>
       <p:bgPr>
@@ -22644,7 +23921,14 @@
         <p:cNvGrpSpPr/>
         <p:nvPr/>
       </p:nvGrpSpPr>
-      <p:grpSpPr/>
+      <p:grpSpPr>
+        <a:xfrm>
+          <a:off x="0" y="0"/>
+          <a:ext cx="0" cy="0"/>
+          <a:chOff x="0" y="0"/>
+          <a:chExt cx="0" cy="0"/>
+        </a:xfrm>
+      </p:grpSpPr>
       <p:sp>
         <p:nvSpPr>
           <p:cNvPr id="2" name="Rectangle 1"/>
@@ -22686,6 +23970,7 @@
           <a:lstStyle/>
           <a:p>
             <a:pPr algn="ctr"/>
+            <a:endParaRPr/>
           </a:p>
         </p:txBody>
       </p:sp>
@@ -22730,6 +24015,7 @@
           <a:lstStyle/>
           <a:p>
             <a:pPr algn="ctr"/>
+            <a:endParaRPr/>
           </a:p>
         </p:txBody>
       </p:sp>
@@ -22750,7 +24036,7 @@
           <a:noFill/>
         </p:spPr>
         <p:txBody>
-          <a:bodyPr wrap="square" anchor="t" lIns="27432" rIns="27432" tIns="18288" bIns="18288">
+          <a:bodyPr wrap="square" lIns="27432" tIns="18288" rIns="27432" bIns="18288" anchor="t">
             <a:spAutoFit/>
           </a:bodyPr>
           <a:lstStyle/>
@@ -22789,7 +24075,7 @@
           <a:noFill/>
         </p:spPr>
         <p:txBody>
-          <a:bodyPr wrap="square" anchor="t" lIns="27432" rIns="27432" tIns="18288" bIns="18288">
+          <a:bodyPr wrap="square" lIns="27432" tIns="18288" rIns="27432" bIns="18288" anchor="t">
             <a:spAutoFit/>
           </a:bodyPr>
           <a:lstStyle/>
@@ -22830,12 +24116,48 @@
                 <a:tableStyleId>{5C22544A-7EE6-4342-B048-85BDC9FD1C3A}</a:tableStyleId>
               </a:tblPr>
               <a:tblGrid>
-                <a:gridCol w="3108960"/>
-                <a:gridCol w="1371600"/>
-                <a:gridCol w="822960"/>
-                <a:gridCol w="2194560"/>
-                <a:gridCol w="2468880"/>
-                <a:gridCol w="1097280"/>
+                <a:gridCol w="3108960">
+                  <a:extLst>
+                    <a:ext uri="{9D8B030D-6E8A-4147-A177-3AD203B41FA5}">
+                      <a16:colId xmlns:a16="http://schemas.microsoft.com/office/drawing/2014/main" val="20000"/>
+                    </a:ext>
+                  </a:extLst>
+                </a:gridCol>
+                <a:gridCol w="1371600">
+                  <a:extLst>
+                    <a:ext uri="{9D8B030D-6E8A-4147-A177-3AD203B41FA5}">
+                      <a16:colId xmlns:a16="http://schemas.microsoft.com/office/drawing/2014/main" val="20001"/>
+                    </a:ext>
+                  </a:extLst>
+                </a:gridCol>
+                <a:gridCol w="822960">
+                  <a:extLst>
+                    <a:ext uri="{9D8B030D-6E8A-4147-A177-3AD203B41FA5}">
+                      <a16:colId xmlns:a16="http://schemas.microsoft.com/office/drawing/2014/main" val="20002"/>
+                    </a:ext>
+                  </a:extLst>
+                </a:gridCol>
+                <a:gridCol w="2194560">
+                  <a:extLst>
+                    <a:ext uri="{9D8B030D-6E8A-4147-A177-3AD203B41FA5}">
+                      <a16:colId xmlns:a16="http://schemas.microsoft.com/office/drawing/2014/main" val="20003"/>
+                    </a:ext>
+                  </a:extLst>
+                </a:gridCol>
+                <a:gridCol w="2468880">
+                  <a:extLst>
+                    <a:ext uri="{9D8B030D-6E8A-4147-A177-3AD203B41FA5}">
+                      <a16:colId xmlns:a16="http://schemas.microsoft.com/office/drawing/2014/main" val="20004"/>
+                    </a:ext>
+                  </a:extLst>
+                </a:gridCol>
+                <a:gridCol w="1097280">
+                  <a:extLst>
+                    <a:ext uri="{9D8B030D-6E8A-4147-A177-3AD203B41FA5}">
+                      <a16:colId xmlns:a16="http://schemas.microsoft.com/office/drawing/2014/main" val="20005"/>
+                    </a:ext>
+                  </a:extLst>
+                </a:gridCol>
               </a:tblGrid>
               <a:tr h="457200">
                 <a:tc>
@@ -22976,6 +24298,11 @@
                     </a:solidFill>
                   </a:tcPr>
                 </a:tc>
+                <a:extLst>
+                  <a:ext uri="{0D108BD9-81ED-4DB2-BD59-A6C34878D82A}">
+                    <a16:rowId xmlns:a16="http://schemas.microsoft.com/office/drawing/2014/main" val="10000"/>
+                  </a:ext>
+                </a:extLst>
               </a:tr>
               <a:tr h="457200">
                 <a:tc>
@@ -23116,6 +24443,11 @@
                     </a:solidFill>
                   </a:tcPr>
                 </a:tc>
+                <a:extLst>
+                  <a:ext uri="{0D108BD9-81ED-4DB2-BD59-A6C34878D82A}">
+                    <a16:rowId xmlns:a16="http://schemas.microsoft.com/office/drawing/2014/main" val="10001"/>
+                  </a:ext>
+                </a:extLst>
               </a:tr>
               <a:tr h="457200">
                 <a:tc>
@@ -23256,6 +24588,11 @@
                     </a:solidFill>
                   </a:tcPr>
                 </a:tc>
+                <a:extLst>
+                  <a:ext uri="{0D108BD9-81ED-4DB2-BD59-A6C34878D82A}">
+                    <a16:rowId xmlns:a16="http://schemas.microsoft.com/office/drawing/2014/main" val="10002"/>
+                  </a:ext>
+                </a:extLst>
               </a:tr>
               <a:tr h="457200">
                 <a:tc>
@@ -23396,6 +24733,11 @@
                     </a:solidFill>
                   </a:tcPr>
                 </a:tc>
+                <a:extLst>
+                  <a:ext uri="{0D108BD9-81ED-4DB2-BD59-A6C34878D82A}">
+                    <a16:rowId xmlns:a16="http://schemas.microsoft.com/office/drawing/2014/main" val="10003"/>
+                  </a:ext>
+                </a:extLst>
               </a:tr>
               <a:tr h="457200">
                 <a:tc>
@@ -23536,6 +24878,11 @@
                     </a:solidFill>
                   </a:tcPr>
                 </a:tc>
+                <a:extLst>
+                  <a:ext uri="{0D108BD9-81ED-4DB2-BD59-A6C34878D82A}">
+                    <a16:rowId xmlns:a16="http://schemas.microsoft.com/office/drawing/2014/main" val="10004"/>
+                  </a:ext>
+                </a:extLst>
               </a:tr>
               <a:tr h="457200">
                 <a:tc>
@@ -23676,6 +25023,11 @@
                     </a:solidFill>
                   </a:tcPr>
                 </a:tc>
+                <a:extLst>
+                  <a:ext uri="{0D108BD9-81ED-4DB2-BD59-A6C34878D82A}">
+                    <a16:rowId xmlns:a16="http://schemas.microsoft.com/office/drawing/2014/main" val="10005"/>
+                  </a:ext>
+                </a:extLst>
               </a:tr>
               <a:tr h="457200">
                 <a:tc>
@@ -23816,6 +25168,11 @@
                     </a:solidFill>
                   </a:tcPr>
                 </a:tc>
+                <a:extLst>
+                  <a:ext uri="{0D108BD9-81ED-4DB2-BD59-A6C34878D82A}">
+                    <a16:rowId xmlns:a16="http://schemas.microsoft.com/office/drawing/2014/main" val="10006"/>
+                  </a:ext>
+                </a:extLst>
               </a:tr>
             </a:tbl>
           </a:graphicData>
@@ -23838,7 +25195,7 @@
           <a:noFill/>
         </p:spPr>
         <p:txBody>
-          <a:bodyPr wrap="square" anchor="t" lIns="27432" rIns="27432" tIns="18288" bIns="18288">
+          <a:bodyPr wrap="square" lIns="27432" tIns="18288" rIns="27432" bIns="18288" anchor="t">
             <a:spAutoFit/>
           </a:bodyPr>
           <a:lstStyle/>
@@ -23911,7 +25268,7 @@
           <a:noFill/>
         </p:spPr>
         <p:txBody>
-          <a:bodyPr wrap="square" anchor="t" lIns="27432" rIns="27432" tIns="18288" bIns="18288">
+          <a:bodyPr wrap="square" lIns="27432" tIns="18288" rIns="27432" bIns="18288" anchor="t">
             <a:spAutoFit/>
           </a:bodyPr>
           <a:lstStyle/>
@@ -23950,7 +25307,7 @@
           <a:noFill/>
         </p:spPr>
         <p:txBody>
-          <a:bodyPr wrap="square" anchor="t" lIns="27432" rIns="27432" tIns="18288" bIns="18288">
+          <a:bodyPr wrap="square" lIns="27432" tIns="18288" rIns="27432" bIns="18288" anchor="t">
             <a:spAutoFit/>
           </a:bodyPr>
           <a:lstStyle/>
@@ -24298,4 +25655,10 @@
   </a:objectDefaults>
   <a:extraClrSchemeLst/>
 </a:theme>
+</file>
+
+<file path=docMetadata/LabelInfo.xml><?xml version="1.0" encoding="utf-8"?>
+<clbl:labelList xmlns:clbl="http://schemas.microsoft.com/office/2020/mipLabelMetadata">
+  <clbl:label id="{f42aa342-8706-4288-bd11-ebb85995028c}" enabled="1" method="Standard" siteId="{72f988bf-86f1-41af-91ab-2d7cd011db47}" contentBits="0" removed="0"/>
+</clbl:labelList>
 </file>
--- a/report/20260826_KRAFTON_DB_Benchmark_v2.pptx
+++ b/report/20260826_KRAFTON_DB_Benchmark_v2.pptx
@@ -3797,7 +3797,7 @@
         </p:blipFill>
         <p:spPr>
           <a:xfrm>
-            <a:off x="3352647" y="1481328"/>
+            <a:off x="2933547" y="1920240"/>
             <a:ext cx="5486400" cy="4389120"/>
           </a:xfrm>
           <a:prstGeom prst="rect">
@@ -3813,7 +3813,7 @@
         </p:nvSpPr>
         <p:spPr>
           <a:xfrm>
-            <a:off x="548640" y="6035040"/>
+            <a:off x="487680" y="6231128"/>
             <a:ext cx="11064240" cy="457200"/>
           </a:xfrm>
           <a:prstGeom prst="rect">
@@ -3833,13 +3833,310 @@
               </a:spcAft>
             </a:pPr>
             <a:r>
-              <a:rPr sz="1100" b="0">
-                <a:solidFill>
-                  <a:srgbClr val="34465C"/>
-                </a:solidFill>
-                <a:latin typeface="Malgun Gothic"/>
-              </a:rPr>
-              <a:t>세로축은 로그 스케일 — 낮을수록 좋음. p50(평균적 사용자 체감)은 전 구간에서 v2(빨강)가 낮고, p99 이상의 꼬리는 시나리오에 따라 우열이 갈립니다.</a:t>
+              <a:rPr sz="1100" b="0" dirty="0" err="1">
+                <a:solidFill>
+                  <a:srgbClr val="34465C"/>
+                </a:solidFill>
+                <a:latin typeface="Malgun Gothic"/>
+              </a:rPr>
+              <a:t>세로축은</a:t>
+            </a:r>
+            <a:r>
+              <a:rPr sz="1100" b="0" dirty="0">
+                <a:solidFill>
+                  <a:srgbClr val="34465C"/>
+                </a:solidFill>
+                <a:latin typeface="Malgun Gothic"/>
+              </a:rPr>
+              <a:t> </a:t>
+            </a:r>
+            <a:r>
+              <a:rPr sz="1100" b="0" dirty="0" err="1">
+                <a:solidFill>
+                  <a:srgbClr val="34465C"/>
+                </a:solidFill>
+                <a:latin typeface="Malgun Gothic"/>
+              </a:rPr>
+              <a:t>로그</a:t>
+            </a:r>
+            <a:r>
+              <a:rPr sz="1100" b="0" dirty="0">
+                <a:solidFill>
+                  <a:srgbClr val="34465C"/>
+                </a:solidFill>
+                <a:latin typeface="Malgun Gothic"/>
+              </a:rPr>
+              <a:t> </a:t>
+            </a:r>
+            <a:r>
+              <a:rPr sz="1100" b="0" dirty="0" err="1">
+                <a:solidFill>
+                  <a:srgbClr val="34465C"/>
+                </a:solidFill>
+                <a:latin typeface="Malgun Gothic"/>
+              </a:rPr>
+              <a:t>스케일</a:t>
+            </a:r>
+            <a:r>
+              <a:rPr sz="1100" b="0" dirty="0">
+                <a:solidFill>
+                  <a:srgbClr val="34465C"/>
+                </a:solidFill>
+                <a:latin typeface="Malgun Gothic"/>
+              </a:rPr>
+              <a:t> — </a:t>
+            </a:r>
+            <a:r>
+              <a:rPr sz="1100" b="0" dirty="0" err="1">
+                <a:solidFill>
+                  <a:srgbClr val="34465C"/>
+                </a:solidFill>
+                <a:latin typeface="Malgun Gothic"/>
+              </a:rPr>
+              <a:t>낮을수록</a:t>
+            </a:r>
+            <a:r>
+              <a:rPr sz="1100" b="0" dirty="0">
+                <a:solidFill>
+                  <a:srgbClr val="34465C"/>
+                </a:solidFill>
+                <a:latin typeface="Malgun Gothic"/>
+              </a:rPr>
+              <a:t> </a:t>
+            </a:r>
+            <a:r>
+              <a:rPr sz="1100" b="0" dirty="0" err="1">
+                <a:solidFill>
+                  <a:srgbClr val="34465C"/>
+                </a:solidFill>
+                <a:latin typeface="Malgun Gothic"/>
+              </a:rPr>
+              <a:t>좋음</a:t>
+            </a:r>
+            <a:r>
+              <a:rPr sz="1100" b="0" dirty="0">
+                <a:solidFill>
+                  <a:srgbClr val="34465C"/>
+                </a:solidFill>
+                <a:latin typeface="Malgun Gothic"/>
+              </a:rPr>
+              <a:t>. p50(</a:t>
+            </a:r>
+            <a:r>
+              <a:rPr sz="1100" b="0" dirty="0" err="1">
+                <a:solidFill>
+                  <a:srgbClr val="34465C"/>
+                </a:solidFill>
+                <a:latin typeface="Malgun Gothic"/>
+              </a:rPr>
+              <a:t>평균적</a:t>
+            </a:r>
+            <a:r>
+              <a:rPr sz="1100" b="0" dirty="0">
+                <a:solidFill>
+                  <a:srgbClr val="34465C"/>
+                </a:solidFill>
+                <a:latin typeface="Malgun Gothic"/>
+              </a:rPr>
+              <a:t> </a:t>
+            </a:r>
+            <a:r>
+              <a:rPr sz="1100" b="0" dirty="0" err="1">
+                <a:solidFill>
+                  <a:srgbClr val="34465C"/>
+                </a:solidFill>
+                <a:latin typeface="Malgun Gothic"/>
+              </a:rPr>
+              <a:t>사용자</a:t>
+            </a:r>
+            <a:r>
+              <a:rPr sz="1100" b="0" dirty="0">
+                <a:solidFill>
+                  <a:srgbClr val="34465C"/>
+                </a:solidFill>
+                <a:latin typeface="Malgun Gothic"/>
+              </a:rPr>
+              <a:t> </a:t>
+            </a:r>
+            <a:r>
+              <a:rPr sz="1100" b="0" dirty="0" err="1">
+                <a:solidFill>
+                  <a:srgbClr val="34465C"/>
+                </a:solidFill>
+                <a:latin typeface="Malgun Gothic"/>
+              </a:rPr>
+              <a:t>체감</a:t>
+            </a:r>
+            <a:r>
+              <a:rPr sz="1100" b="0" dirty="0">
+                <a:solidFill>
+                  <a:srgbClr val="34465C"/>
+                </a:solidFill>
+                <a:latin typeface="Malgun Gothic"/>
+              </a:rPr>
+              <a:t>)은 전 </a:t>
+            </a:r>
+            <a:r>
+              <a:rPr sz="1100" b="0" dirty="0" err="1">
+                <a:solidFill>
+                  <a:srgbClr val="34465C"/>
+                </a:solidFill>
+                <a:latin typeface="Malgun Gothic"/>
+              </a:rPr>
+              <a:t>구간에서</a:t>
+            </a:r>
+            <a:r>
+              <a:rPr sz="1100" b="0" dirty="0">
+                <a:solidFill>
+                  <a:srgbClr val="34465C"/>
+                </a:solidFill>
+                <a:latin typeface="Malgun Gothic"/>
+              </a:rPr>
+              <a:t> v2(</a:t>
+            </a:r>
+            <a:r>
+              <a:rPr sz="1100" b="0" dirty="0" err="1">
+                <a:solidFill>
+                  <a:srgbClr val="34465C"/>
+                </a:solidFill>
+                <a:latin typeface="Malgun Gothic"/>
+              </a:rPr>
+              <a:t>빨강</a:t>
+            </a:r>
+            <a:r>
+              <a:rPr sz="1100" b="0" dirty="0">
+                <a:solidFill>
+                  <a:srgbClr val="34465C"/>
+                </a:solidFill>
+                <a:latin typeface="Malgun Gothic"/>
+              </a:rPr>
+              <a:t>)가 </a:t>
+            </a:r>
+            <a:r>
+              <a:rPr sz="1100" b="0" dirty="0" err="1">
+                <a:solidFill>
+                  <a:srgbClr val="34465C"/>
+                </a:solidFill>
+                <a:latin typeface="Malgun Gothic"/>
+              </a:rPr>
+              <a:t>낮고</a:t>
+            </a:r>
+            <a:r>
+              <a:rPr sz="1100" b="0" dirty="0">
+                <a:solidFill>
+                  <a:srgbClr val="34465C"/>
+                </a:solidFill>
+                <a:latin typeface="Malgun Gothic"/>
+              </a:rPr>
+              <a:t>, p99 </a:t>
+            </a:r>
+            <a:r>
+              <a:rPr sz="1100" b="0" dirty="0" err="1">
+                <a:solidFill>
+                  <a:srgbClr val="34465C"/>
+                </a:solidFill>
+                <a:latin typeface="Malgun Gothic"/>
+              </a:rPr>
+              <a:t>이상의</a:t>
+            </a:r>
+            <a:r>
+              <a:rPr sz="1100" b="0" dirty="0">
+                <a:solidFill>
+                  <a:srgbClr val="34465C"/>
+                </a:solidFill>
+                <a:latin typeface="Malgun Gothic"/>
+              </a:rPr>
+              <a:t> </a:t>
+            </a:r>
+            <a:r>
+              <a:rPr sz="1100" b="0" dirty="0" err="1">
+                <a:solidFill>
+                  <a:srgbClr val="34465C"/>
+                </a:solidFill>
+                <a:latin typeface="Malgun Gothic"/>
+              </a:rPr>
+              <a:t>꼬리는</a:t>
+            </a:r>
+            <a:r>
+              <a:rPr sz="1100" b="0" dirty="0">
+                <a:solidFill>
+                  <a:srgbClr val="34465C"/>
+                </a:solidFill>
+                <a:latin typeface="Malgun Gothic"/>
+              </a:rPr>
+              <a:t> </a:t>
+            </a:r>
+            <a:r>
+              <a:rPr sz="1100" b="0" dirty="0" err="1">
+                <a:solidFill>
+                  <a:srgbClr val="34465C"/>
+                </a:solidFill>
+                <a:latin typeface="Malgun Gothic"/>
+              </a:rPr>
+              <a:t>시나리오에</a:t>
+            </a:r>
+            <a:r>
+              <a:rPr sz="1100" b="0" dirty="0">
+                <a:solidFill>
+                  <a:srgbClr val="34465C"/>
+                </a:solidFill>
+                <a:latin typeface="Malgun Gothic"/>
+              </a:rPr>
+              <a:t> </a:t>
+            </a:r>
+            <a:r>
+              <a:rPr sz="1100" b="0" dirty="0" err="1">
+                <a:solidFill>
+                  <a:srgbClr val="34465C"/>
+                </a:solidFill>
+                <a:latin typeface="Malgun Gothic"/>
+              </a:rPr>
+              <a:t>따라</a:t>
+            </a:r>
+            <a:r>
+              <a:rPr sz="1100" b="0" dirty="0">
+                <a:solidFill>
+                  <a:srgbClr val="34465C"/>
+                </a:solidFill>
+                <a:latin typeface="Malgun Gothic"/>
+              </a:rPr>
+              <a:t> </a:t>
+            </a:r>
+            <a:r>
+              <a:rPr sz="1100" b="0" dirty="0" err="1">
+                <a:solidFill>
+                  <a:srgbClr val="34465C"/>
+                </a:solidFill>
+                <a:latin typeface="Malgun Gothic"/>
+              </a:rPr>
+              <a:t>우열이</a:t>
+            </a:r>
+            <a:r>
+              <a:rPr sz="1100" b="0" dirty="0">
+                <a:solidFill>
+                  <a:srgbClr val="34465C"/>
+                </a:solidFill>
+                <a:latin typeface="Malgun Gothic"/>
+              </a:rPr>
+              <a:t> </a:t>
+            </a:r>
+            <a:r>
+              <a:rPr sz="1100" b="0" dirty="0" err="1">
+                <a:solidFill>
+                  <a:srgbClr val="34465C"/>
+                </a:solidFill>
+                <a:latin typeface="Malgun Gothic"/>
+              </a:rPr>
+              <a:t>갈립니다</a:t>
+            </a:r>
+            <a:r>
+              <a:rPr sz="1100" b="0" dirty="0">
+                <a:solidFill>
+                  <a:srgbClr val="34465C"/>
+                </a:solidFill>
+                <a:latin typeface="Malgun Gothic"/>
+              </a:rPr>
+              <a:t>.</a:t>
             </a:r>
           </a:p>
         </p:txBody>
@@ -7270,14 +7567,47 @@
                     <a:p>
                       <a:pPr algn="l"/>
                       <a:r>
-                        <a:rPr sz="1050">
+                        <a:rPr sz="1050" dirty="0">
                           <a:solidFill>
                             <a:srgbClr val="12233A"/>
                           </a:solidFill>
                           <a:latin typeface="Malgun Gothic"/>
                         </a:rPr>
-                        <a:t>16vCore+HA · 쓰기 집중</a:t>
+                        <a:t>16vCore+HA · </a:t>
                       </a:r>
+                      <a:r>
+                        <a:rPr sz="1050" dirty="0" err="1">
+                          <a:solidFill>
+                            <a:srgbClr val="12233A"/>
+                          </a:solidFill>
+                          <a:latin typeface="Malgun Gothic"/>
+                        </a:rPr>
+                        <a:t>쓰기</a:t>
+                      </a:r>
+                      <a:r>
+                        <a:rPr sz="1050" dirty="0">
+                          <a:solidFill>
+                            <a:srgbClr val="12233A"/>
+                          </a:solidFill>
+                          <a:latin typeface="Malgun Gothic"/>
+                        </a:rPr>
+                        <a:t> </a:t>
+                      </a:r>
+                      <a:r>
+                        <a:rPr sz="1050" dirty="0" err="1">
+                          <a:solidFill>
+                            <a:srgbClr val="12233A"/>
+                          </a:solidFill>
+                          <a:latin typeface="Malgun Gothic"/>
+                        </a:rPr>
+                        <a:t>집중</a:t>
+                      </a:r>
+                      <a:endParaRPr sz="1050" dirty="0">
+                        <a:solidFill>
+                          <a:srgbClr val="12233A"/>
+                        </a:solidFill>
+                        <a:latin typeface="Malgun Gothic"/>
+                      </a:endParaRPr>
                     </a:p>
                   </a:txBody>
                   <a:tcPr marL="54864" marR="54864" marT="18288" marB="18288" anchor="ctr">
@@ -7293,7 +7623,7 @@
                     <a:p>
                       <a:pPr algn="ctr"/>
                       <a:r>
-                        <a:rPr sz="1050">
+                        <a:rPr sz="1050" dirty="0">
                           <a:solidFill>
                             <a:srgbClr val="12233A"/>
                           </a:solidFill>
@@ -7316,7 +7646,7 @@
                     <a:p>
                       <a:pPr algn="ctr"/>
                       <a:r>
-                        <a:rPr sz="1050">
+                        <a:rPr sz="1050" dirty="0">
                           <a:solidFill>
                             <a:srgbClr val="12233A"/>
                           </a:solidFill>
@@ -7339,7 +7669,7 @@
                     <a:p>
                       <a:pPr algn="ctr"/>
                       <a:r>
-                        <a:rPr sz="1050">
+                        <a:rPr sz="1050" dirty="0">
                           <a:solidFill>
                             <a:srgbClr val="12233A"/>
                           </a:solidFill>
@@ -7362,14 +7692,65 @@
                     <a:p>
                       <a:pPr algn="ctr"/>
                       <a:r>
-                        <a:rPr sz="1050">
+                        <a:rPr sz="1050" dirty="0">
                           <a:solidFill>
                             <a:srgbClr val="12233A"/>
                           </a:solidFill>
                           <a:latin typeface="Malgun Gothic"/>
                         </a:rPr>
-                        <a:t>PG 전 회차 수 초 멈춤 발생</a:t>
+                        <a:t>PG 전 </a:t>
                       </a:r>
+                      <a:r>
+                        <a:rPr sz="1050" dirty="0" err="1">
+                          <a:solidFill>
+                            <a:srgbClr val="12233A"/>
+                          </a:solidFill>
+                          <a:latin typeface="Malgun Gothic"/>
+                        </a:rPr>
+                        <a:t>회차</a:t>
+                      </a:r>
+                      <a:r>
+                        <a:rPr sz="1050" dirty="0">
+                          <a:solidFill>
+                            <a:srgbClr val="12233A"/>
+                          </a:solidFill>
+                          <a:latin typeface="Malgun Gothic"/>
+                        </a:rPr>
+                        <a:t> 수 초 </a:t>
+                      </a:r>
+                      <a:r>
+                        <a:rPr sz="1050" dirty="0" err="1">
+                          <a:solidFill>
+                            <a:srgbClr val="12233A"/>
+                          </a:solidFill>
+                          <a:latin typeface="Malgun Gothic"/>
+                        </a:rPr>
+                        <a:t>멈춤</a:t>
+                      </a:r>
+                      <a:r>
+                        <a:rPr sz="1050" dirty="0">
+                          <a:solidFill>
+                            <a:srgbClr val="12233A"/>
+                          </a:solidFill>
+                          <a:latin typeface="Malgun Gothic"/>
+                        </a:rPr>
+                        <a:t> </a:t>
+                      </a:r>
+                      <a:r>
+                        <a:rPr sz="1050" dirty="0" err="1">
+                          <a:solidFill>
+                            <a:srgbClr val="12233A"/>
+                          </a:solidFill>
+                          <a:latin typeface="Malgun Gothic"/>
+                        </a:rPr>
+                        <a:t>발생</a:t>
+                      </a:r>
+                      <a:endParaRPr sz="1050" dirty="0">
+                        <a:solidFill>
+                          <a:srgbClr val="12233A"/>
+                        </a:solidFill>
+                        <a:latin typeface="Malgun Gothic"/>
+                      </a:endParaRPr>
                     </a:p>
                   </a:txBody>
                   <a:tcPr marL="54864" marR="54864" marT="18288" marB="18288" anchor="ctr">
@@ -7820,14 +8201,29 @@
                     <a:p>
                       <a:pPr algn="ctr"/>
                       <a:r>
-                        <a:rPr sz="1050">
+                        <a:rPr sz="1050" dirty="0">
                           <a:solidFill>
                             <a:srgbClr val="12233A"/>
                           </a:solidFill>
                           <a:latin typeface="Malgun Gothic"/>
                         </a:rPr>
-                        <a:t>HZ 우세</a:t>
+                        <a:t>HZ </a:t>
                       </a:r>
+                      <a:r>
+                        <a:rPr sz="1050" dirty="0" err="1">
+                          <a:solidFill>
+                            <a:srgbClr val="12233A"/>
+                          </a:solidFill>
+                          <a:latin typeface="Malgun Gothic"/>
+                        </a:rPr>
+                        <a:t>우세</a:t>
+                      </a:r>
+                      <a:endParaRPr sz="1050" dirty="0">
+                        <a:solidFill>
+                          <a:srgbClr val="12233A"/>
+                        </a:solidFill>
+                        <a:latin typeface="Malgun Gothic"/>
+                      </a:endParaRPr>
                     </a:p>
                   </a:txBody>
                   <a:tcPr marL="54864" marR="54864" marT="18288" marB="18288" anchor="ctr">
@@ -7874,22 +8270,409 @@
               </a:spcAft>
             </a:pPr>
             <a:r>
-              <a:rPr sz="1100" b="1">
+              <a:rPr sz="1100" b="1" dirty="0">
                 <a:solidFill>
                   <a:srgbClr val="0078D4"/>
                 </a:solidFill>
                 <a:latin typeface="Malgun Gothic"/>
               </a:rPr>
-              <a:t>* 유효 반복이 준 이유  </a:t>
-            </a:r>
-            <a:r>
-              <a:rPr sz="1100" b="0">
-                <a:solidFill>
-                  <a:srgbClr val="34465C"/>
-                </a:solidFill>
-                <a:latin typeface="Malgun Gothic"/>
-              </a:rPr>
-              <a:t>PostgreSQL이 측정 중 수 초간 멈추는(stall) 구간을 보인 반복은 검증 기준에서 탈락했습니다. 디스크 IOPS 소진(100%)과 체크포인트가 겹친 정황이며, 이 “탈락” 자체가 중요한 발견입니다.</a:t>
+              <a:t>* </a:t>
+            </a:r>
+            <a:r>
+              <a:rPr sz="1100" b="1" dirty="0" err="1">
+                <a:solidFill>
+                  <a:srgbClr val="0078D4"/>
+                </a:solidFill>
+                <a:latin typeface="Malgun Gothic"/>
+              </a:rPr>
+              <a:t>유효</a:t>
+            </a:r>
+            <a:r>
+              <a:rPr sz="1100" b="1" dirty="0">
+                <a:solidFill>
+                  <a:srgbClr val="0078D4"/>
+                </a:solidFill>
+                <a:latin typeface="Malgun Gothic"/>
+              </a:rPr>
+              <a:t> </a:t>
+            </a:r>
+            <a:r>
+              <a:rPr sz="1100" b="1" dirty="0" err="1">
+                <a:solidFill>
+                  <a:srgbClr val="0078D4"/>
+                </a:solidFill>
+                <a:latin typeface="Malgun Gothic"/>
+              </a:rPr>
+              <a:t>반복이</a:t>
+            </a:r>
+            <a:r>
+              <a:rPr sz="1100" b="1" dirty="0">
+                <a:solidFill>
+                  <a:srgbClr val="0078D4"/>
+                </a:solidFill>
+                <a:latin typeface="Malgun Gothic"/>
+              </a:rPr>
+              <a:t> 준 </a:t>
+            </a:r>
+            <a:r>
+              <a:rPr sz="1100" b="1" dirty="0" err="1">
+                <a:solidFill>
+                  <a:srgbClr val="0078D4"/>
+                </a:solidFill>
+                <a:latin typeface="Malgun Gothic"/>
+              </a:rPr>
+              <a:t>이유</a:t>
+            </a:r>
+            <a:r>
+              <a:rPr sz="1100" b="1" dirty="0">
+                <a:solidFill>
+                  <a:srgbClr val="0078D4"/>
+                </a:solidFill>
+                <a:latin typeface="Malgun Gothic"/>
+              </a:rPr>
+              <a:t>  </a:t>
+            </a:r>
+            <a:r>
+              <a:rPr sz="1100" b="0" dirty="0" err="1">
+                <a:solidFill>
+                  <a:srgbClr val="34465C"/>
+                </a:solidFill>
+                <a:latin typeface="Malgun Gothic"/>
+              </a:rPr>
+              <a:t>PostgreSQL이</a:t>
+            </a:r>
+            <a:r>
+              <a:rPr sz="1100" b="0" dirty="0">
+                <a:solidFill>
+                  <a:srgbClr val="34465C"/>
+                </a:solidFill>
+                <a:latin typeface="Malgun Gothic"/>
+              </a:rPr>
+              <a:t> </a:t>
+            </a:r>
+            <a:r>
+              <a:rPr sz="1100" b="0" dirty="0" err="1">
+                <a:solidFill>
+                  <a:srgbClr val="34465C"/>
+                </a:solidFill>
+                <a:latin typeface="Malgun Gothic"/>
+              </a:rPr>
+              <a:t>측정</a:t>
+            </a:r>
+            <a:r>
+              <a:rPr sz="1100" b="0" dirty="0">
+                <a:solidFill>
+                  <a:srgbClr val="34465C"/>
+                </a:solidFill>
+                <a:latin typeface="Malgun Gothic"/>
+              </a:rPr>
+              <a:t> 중 수 </a:t>
+            </a:r>
+            <a:r>
+              <a:rPr sz="1100" b="0" dirty="0" err="1">
+                <a:solidFill>
+                  <a:srgbClr val="34465C"/>
+                </a:solidFill>
+                <a:latin typeface="Malgun Gothic"/>
+              </a:rPr>
+              <a:t>초간</a:t>
+            </a:r>
+            <a:r>
+              <a:rPr sz="1100" b="0" dirty="0">
+                <a:solidFill>
+                  <a:srgbClr val="34465C"/>
+                </a:solidFill>
+                <a:latin typeface="Malgun Gothic"/>
+              </a:rPr>
+              <a:t> </a:t>
+            </a:r>
+            <a:r>
+              <a:rPr sz="1100" b="0" dirty="0" err="1">
+                <a:solidFill>
+                  <a:srgbClr val="34465C"/>
+                </a:solidFill>
+                <a:latin typeface="Malgun Gothic"/>
+              </a:rPr>
+              <a:t>멈추는</a:t>
+            </a:r>
+            <a:r>
+              <a:rPr sz="1100" b="0" dirty="0">
+                <a:solidFill>
+                  <a:srgbClr val="34465C"/>
+                </a:solidFill>
+                <a:latin typeface="Malgun Gothic"/>
+              </a:rPr>
+              <a:t>(stall) </a:t>
+            </a:r>
+            <a:r>
+              <a:rPr sz="1100" b="0" dirty="0" err="1">
+                <a:solidFill>
+                  <a:srgbClr val="34465C"/>
+                </a:solidFill>
+                <a:latin typeface="Malgun Gothic"/>
+              </a:rPr>
+              <a:t>구간을</a:t>
+            </a:r>
+            <a:r>
+              <a:rPr sz="1100" b="0" dirty="0">
+                <a:solidFill>
+                  <a:srgbClr val="34465C"/>
+                </a:solidFill>
+                <a:latin typeface="Malgun Gothic"/>
+              </a:rPr>
+              <a:t> </a:t>
+            </a:r>
+            <a:r>
+              <a:rPr sz="1100" b="0" dirty="0" err="1">
+                <a:solidFill>
+                  <a:srgbClr val="34465C"/>
+                </a:solidFill>
+                <a:latin typeface="Malgun Gothic"/>
+              </a:rPr>
+              <a:t>보인</a:t>
+            </a:r>
+            <a:r>
+              <a:rPr sz="1100" b="0" dirty="0">
+                <a:solidFill>
+                  <a:srgbClr val="34465C"/>
+                </a:solidFill>
+                <a:latin typeface="Malgun Gothic"/>
+              </a:rPr>
+              <a:t> </a:t>
+            </a:r>
+            <a:r>
+              <a:rPr sz="1100" b="0" dirty="0" err="1">
+                <a:solidFill>
+                  <a:srgbClr val="34465C"/>
+                </a:solidFill>
+                <a:latin typeface="Malgun Gothic"/>
+              </a:rPr>
+              <a:t>반복은</a:t>
+            </a:r>
+            <a:r>
+              <a:rPr sz="1100" b="0" dirty="0">
+                <a:solidFill>
+                  <a:srgbClr val="34465C"/>
+                </a:solidFill>
+                <a:latin typeface="Malgun Gothic"/>
+              </a:rPr>
+              <a:t> </a:t>
+            </a:r>
+            <a:r>
+              <a:rPr sz="1100" b="0" dirty="0" err="1">
+                <a:solidFill>
+                  <a:srgbClr val="34465C"/>
+                </a:solidFill>
+                <a:latin typeface="Malgun Gothic"/>
+              </a:rPr>
+              <a:t>검증</a:t>
+            </a:r>
+            <a:r>
+              <a:rPr sz="1100" b="0" dirty="0">
+                <a:solidFill>
+                  <a:srgbClr val="34465C"/>
+                </a:solidFill>
+                <a:latin typeface="Malgun Gothic"/>
+              </a:rPr>
+              <a:t> </a:t>
+            </a:r>
+            <a:r>
+              <a:rPr sz="1100" b="0" dirty="0" err="1">
+                <a:solidFill>
+                  <a:srgbClr val="34465C"/>
+                </a:solidFill>
+                <a:latin typeface="Malgun Gothic"/>
+              </a:rPr>
+              <a:t>기준에서</a:t>
+            </a:r>
+            <a:r>
+              <a:rPr sz="1100" b="0" dirty="0">
+                <a:solidFill>
+                  <a:srgbClr val="34465C"/>
+                </a:solidFill>
+                <a:latin typeface="Malgun Gothic"/>
+              </a:rPr>
+              <a:t> </a:t>
+            </a:r>
+            <a:r>
+              <a:rPr sz="1100" b="0" dirty="0" err="1">
+                <a:solidFill>
+                  <a:srgbClr val="34465C"/>
+                </a:solidFill>
+                <a:latin typeface="Malgun Gothic"/>
+              </a:rPr>
+              <a:t>탈락했습니다</a:t>
+            </a:r>
+            <a:r>
+              <a:rPr sz="1100" b="0" dirty="0">
+                <a:solidFill>
+                  <a:srgbClr val="34465C"/>
+                </a:solidFill>
+                <a:latin typeface="Malgun Gothic"/>
+              </a:rPr>
+              <a:t>. </a:t>
+            </a:r>
+            <a:r>
+              <a:rPr sz="1100" b="0" dirty="0" err="1">
+                <a:solidFill>
+                  <a:srgbClr val="34465C"/>
+                </a:solidFill>
+                <a:latin typeface="Malgun Gothic"/>
+              </a:rPr>
+              <a:t>디스크</a:t>
+            </a:r>
+            <a:r>
+              <a:rPr sz="1100" b="0" dirty="0">
+                <a:solidFill>
+                  <a:srgbClr val="34465C"/>
+                </a:solidFill>
+                <a:latin typeface="Malgun Gothic"/>
+              </a:rPr>
+              <a:t> IOPS </a:t>
+            </a:r>
+            <a:r>
+              <a:rPr sz="1100" b="0" dirty="0" err="1">
+                <a:solidFill>
+                  <a:srgbClr val="34465C"/>
+                </a:solidFill>
+                <a:latin typeface="Malgun Gothic"/>
+              </a:rPr>
+              <a:t>소진</a:t>
+            </a:r>
+            <a:r>
+              <a:rPr sz="1100" b="0" dirty="0">
+                <a:solidFill>
+                  <a:srgbClr val="34465C"/>
+                </a:solidFill>
+                <a:latin typeface="Malgun Gothic"/>
+              </a:rPr>
+              <a:t>(100%)과 </a:t>
+            </a:r>
+            <a:r>
+              <a:rPr sz="1100" b="0" dirty="0" err="1">
+                <a:solidFill>
+                  <a:srgbClr val="34465C"/>
+                </a:solidFill>
+                <a:latin typeface="Malgun Gothic"/>
+              </a:rPr>
+              <a:t>체크포인트가</a:t>
+            </a:r>
+            <a:r>
+              <a:rPr sz="1100" b="0" dirty="0">
+                <a:solidFill>
+                  <a:srgbClr val="34465C"/>
+                </a:solidFill>
+                <a:latin typeface="Malgun Gothic"/>
+              </a:rPr>
+              <a:t> </a:t>
+            </a:r>
+            <a:r>
+              <a:rPr sz="1100" b="0" dirty="0" err="1">
+                <a:solidFill>
+                  <a:srgbClr val="34465C"/>
+                </a:solidFill>
+                <a:latin typeface="Malgun Gothic"/>
+              </a:rPr>
+              <a:t>겹친</a:t>
+            </a:r>
+            <a:r>
+              <a:rPr sz="1100" b="0" dirty="0">
+                <a:solidFill>
+                  <a:srgbClr val="34465C"/>
+                </a:solidFill>
+                <a:latin typeface="Malgun Gothic"/>
+              </a:rPr>
+              <a:t> </a:t>
+            </a:r>
+            <a:r>
+              <a:rPr sz="1100" b="0" dirty="0" err="1">
+                <a:solidFill>
+                  <a:srgbClr val="34465C"/>
+                </a:solidFill>
+                <a:latin typeface="Malgun Gothic"/>
+              </a:rPr>
+              <a:t>정황이며</a:t>
+            </a:r>
+            <a:r>
+              <a:rPr sz="1100" b="0" dirty="0">
+                <a:solidFill>
+                  <a:srgbClr val="34465C"/>
+                </a:solidFill>
+                <a:latin typeface="Malgun Gothic"/>
+              </a:rPr>
+              <a:t>, 이 “</a:t>
+            </a:r>
+            <a:r>
+              <a:rPr sz="1100" b="0" dirty="0" err="1">
+                <a:solidFill>
+                  <a:srgbClr val="34465C"/>
+                </a:solidFill>
+                <a:latin typeface="Malgun Gothic"/>
+              </a:rPr>
+              <a:t>탈락</a:t>
+            </a:r>
+            <a:r>
+              <a:rPr sz="1100" b="0" dirty="0">
+                <a:solidFill>
+                  <a:srgbClr val="34465C"/>
+                </a:solidFill>
+                <a:latin typeface="Malgun Gothic"/>
+              </a:rPr>
+              <a:t>” </a:t>
+            </a:r>
+            <a:r>
+              <a:rPr sz="1100" b="0" dirty="0" err="1">
+                <a:solidFill>
+                  <a:srgbClr val="34465C"/>
+                </a:solidFill>
+                <a:latin typeface="Malgun Gothic"/>
+              </a:rPr>
+              <a:t>자체가</a:t>
+            </a:r>
+            <a:r>
+              <a:rPr sz="1100" b="0" dirty="0">
+                <a:solidFill>
+                  <a:srgbClr val="34465C"/>
+                </a:solidFill>
+                <a:latin typeface="Malgun Gothic"/>
+              </a:rPr>
+              <a:t> </a:t>
+            </a:r>
+            <a:r>
+              <a:rPr sz="1100" b="0" dirty="0" err="1">
+                <a:solidFill>
+                  <a:srgbClr val="34465C"/>
+                </a:solidFill>
+                <a:latin typeface="Malgun Gothic"/>
+              </a:rPr>
+              <a:t>중요한</a:t>
+            </a:r>
+            <a:r>
+              <a:rPr sz="1100" b="0" dirty="0">
+                <a:solidFill>
+                  <a:srgbClr val="34465C"/>
+                </a:solidFill>
+                <a:latin typeface="Malgun Gothic"/>
+              </a:rPr>
+              <a:t> </a:t>
+            </a:r>
+            <a:r>
+              <a:rPr sz="1100" b="0" dirty="0" err="1">
+                <a:solidFill>
+                  <a:srgbClr val="34465C"/>
+                </a:solidFill>
+                <a:latin typeface="Malgun Gothic"/>
+              </a:rPr>
+              <a:t>발견입니다</a:t>
+            </a:r>
+            <a:r>
+              <a:rPr sz="1100" b="0" dirty="0">
+                <a:solidFill>
+                  <a:srgbClr val="34465C"/>
+                </a:solidFill>
+                <a:latin typeface="Malgun Gothic"/>
+              </a:rPr>
+              <a:t>.</a:t>
             </a:r>
           </a:p>
           <a:p>
@@ -7899,22 +8682,229 @@
               </a:spcAft>
             </a:pPr>
             <a:r>
-              <a:rPr sz="1100" b="1">
+              <a:rPr sz="1100" b="1" dirty="0" err="1">
                 <a:solidFill>
                   <a:srgbClr val="12233A"/>
                 </a:solidFill>
                 <a:latin typeface="Malgun Gothic"/>
               </a:rPr>
-              <a:t>HorizonDB는 전 시나리오에서 p99 4ms 안팎을 유지 </a:t>
-            </a:r>
-            <a:r>
-              <a:rPr sz="1100" b="0">
-                <a:solidFill>
-                  <a:srgbClr val="34465C"/>
-                </a:solidFill>
-                <a:latin typeface="Malgun Gothic"/>
-              </a:rPr>
-              <a:t>— 부하를 3배로 튀겨도 흔들리지 않았습니다. 단, 캐시 상주 조건임을 함께 볼 것.</a:t>
+              <a:t>HorizonDB는</a:t>
+            </a:r>
+            <a:r>
+              <a:rPr sz="1100" b="1" dirty="0">
+                <a:solidFill>
+                  <a:srgbClr val="12233A"/>
+                </a:solidFill>
+                <a:latin typeface="Malgun Gothic"/>
+              </a:rPr>
+              <a:t> 전 </a:t>
+            </a:r>
+            <a:r>
+              <a:rPr sz="1100" b="1" dirty="0" err="1">
+                <a:solidFill>
+                  <a:srgbClr val="12233A"/>
+                </a:solidFill>
+                <a:latin typeface="Malgun Gothic"/>
+              </a:rPr>
+              <a:t>시나리오에서</a:t>
+            </a:r>
+            <a:r>
+              <a:rPr sz="1100" b="1" dirty="0">
+                <a:solidFill>
+                  <a:srgbClr val="12233A"/>
+                </a:solidFill>
+                <a:latin typeface="Malgun Gothic"/>
+              </a:rPr>
+              <a:t> p99 4ms </a:t>
+            </a:r>
+            <a:r>
+              <a:rPr sz="1100" b="1" dirty="0" err="1">
+                <a:solidFill>
+                  <a:srgbClr val="12233A"/>
+                </a:solidFill>
+                <a:latin typeface="Malgun Gothic"/>
+              </a:rPr>
+              <a:t>안팎을</a:t>
+            </a:r>
+            <a:r>
+              <a:rPr sz="1100" b="1" dirty="0">
+                <a:solidFill>
+                  <a:srgbClr val="12233A"/>
+                </a:solidFill>
+                <a:latin typeface="Malgun Gothic"/>
+              </a:rPr>
+              <a:t> </a:t>
+            </a:r>
+            <a:r>
+              <a:rPr sz="1100" b="1" dirty="0" err="1">
+                <a:solidFill>
+                  <a:srgbClr val="12233A"/>
+                </a:solidFill>
+                <a:latin typeface="Malgun Gothic"/>
+              </a:rPr>
+              <a:t>유지</a:t>
+            </a:r>
+            <a:r>
+              <a:rPr sz="1100" b="1" dirty="0">
+                <a:solidFill>
+                  <a:srgbClr val="12233A"/>
+                </a:solidFill>
+                <a:latin typeface="Malgun Gothic"/>
+              </a:rPr>
+              <a:t> </a:t>
+            </a:r>
+            <a:r>
+              <a:rPr sz="1100" b="0" dirty="0">
+                <a:solidFill>
+                  <a:srgbClr val="34465C"/>
+                </a:solidFill>
+                <a:latin typeface="Malgun Gothic"/>
+              </a:rPr>
+              <a:t>— </a:t>
+            </a:r>
+            <a:r>
+              <a:rPr sz="1100" b="0" dirty="0" err="1">
+                <a:solidFill>
+                  <a:srgbClr val="34465C"/>
+                </a:solidFill>
+                <a:latin typeface="Malgun Gothic"/>
+              </a:rPr>
+              <a:t>부하를</a:t>
+            </a:r>
+            <a:r>
+              <a:rPr sz="1100" b="0" dirty="0">
+                <a:solidFill>
+                  <a:srgbClr val="34465C"/>
+                </a:solidFill>
+                <a:latin typeface="Malgun Gothic"/>
+              </a:rPr>
+              <a:t> 3배로 </a:t>
+            </a:r>
+            <a:r>
+              <a:rPr sz="1100" b="0" dirty="0" err="1">
+                <a:solidFill>
+                  <a:srgbClr val="34465C"/>
+                </a:solidFill>
+                <a:latin typeface="Malgun Gothic"/>
+              </a:rPr>
+              <a:t>튀겨도</a:t>
+            </a:r>
+            <a:r>
+              <a:rPr sz="1100" b="0" dirty="0">
+                <a:solidFill>
+                  <a:srgbClr val="34465C"/>
+                </a:solidFill>
+                <a:latin typeface="Malgun Gothic"/>
+              </a:rPr>
+              <a:t> </a:t>
+            </a:r>
+            <a:r>
+              <a:rPr sz="1100" b="0" dirty="0" err="1">
+                <a:solidFill>
+                  <a:srgbClr val="34465C"/>
+                </a:solidFill>
+                <a:latin typeface="Malgun Gothic"/>
+              </a:rPr>
+              <a:t>흔들리지</a:t>
+            </a:r>
+            <a:r>
+              <a:rPr sz="1100" b="0" dirty="0">
+                <a:solidFill>
+                  <a:srgbClr val="34465C"/>
+                </a:solidFill>
+                <a:latin typeface="Malgun Gothic"/>
+              </a:rPr>
+              <a:t> </a:t>
+            </a:r>
+            <a:r>
+              <a:rPr sz="1100" b="0" dirty="0" err="1">
+                <a:solidFill>
+                  <a:srgbClr val="34465C"/>
+                </a:solidFill>
+                <a:latin typeface="Malgun Gothic"/>
+              </a:rPr>
+              <a:t>않았습니다</a:t>
+            </a:r>
+            <a:r>
+              <a:rPr sz="1100" b="0" dirty="0">
+                <a:solidFill>
+                  <a:srgbClr val="34465C"/>
+                </a:solidFill>
+                <a:latin typeface="Malgun Gothic"/>
+              </a:rPr>
+              <a:t>. 단, </a:t>
+            </a:r>
+            <a:r>
+              <a:rPr sz="1100" b="0" dirty="0" err="1">
+                <a:solidFill>
+                  <a:srgbClr val="34465C"/>
+                </a:solidFill>
+                <a:latin typeface="Malgun Gothic"/>
+              </a:rPr>
+              <a:t>캐시</a:t>
+            </a:r>
+            <a:r>
+              <a:rPr sz="1100" b="0" dirty="0">
+                <a:solidFill>
+                  <a:srgbClr val="34465C"/>
+                </a:solidFill>
+                <a:latin typeface="Malgun Gothic"/>
+              </a:rPr>
+              <a:t> </a:t>
+            </a:r>
+            <a:r>
+              <a:rPr sz="1100" b="0" dirty="0" err="1">
+                <a:solidFill>
+                  <a:srgbClr val="34465C"/>
+                </a:solidFill>
+                <a:latin typeface="Malgun Gothic"/>
+              </a:rPr>
+              <a:t>상주</a:t>
+            </a:r>
+            <a:r>
+              <a:rPr sz="1100" b="0" dirty="0">
+                <a:solidFill>
+                  <a:srgbClr val="34465C"/>
+                </a:solidFill>
+                <a:latin typeface="Malgun Gothic"/>
+              </a:rPr>
+              <a:t> </a:t>
+            </a:r>
+            <a:r>
+              <a:rPr sz="1100" b="0" dirty="0" err="1">
+                <a:solidFill>
+                  <a:srgbClr val="34465C"/>
+                </a:solidFill>
+                <a:latin typeface="Malgun Gothic"/>
+              </a:rPr>
+              <a:t>조건임을</a:t>
+            </a:r>
+            <a:r>
+              <a:rPr sz="1100" b="0" dirty="0">
+                <a:solidFill>
+                  <a:srgbClr val="34465C"/>
+                </a:solidFill>
+                <a:latin typeface="Malgun Gothic"/>
+              </a:rPr>
+              <a:t> </a:t>
+            </a:r>
+            <a:r>
+              <a:rPr sz="1100" b="0" dirty="0" err="1">
+                <a:solidFill>
+                  <a:srgbClr val="34465C"/>
+                </a:solidFill>
+                <a:latin typeface="Malgun Gothic"/>
+              </a:rPr>
+              <a:t>함께</a:t>
+            </a:r>
+            <a:r>
+              <a:rPr sz="1100" b="0" dirty="0">
+                <a:solidFill>
+                  <a:srgbClr val="34465C"/>
+                </a:solidFill>
+                <a:latin typeface="Malgun Gothic"/>
+              </a:rPr>
+              <a:t> 볼 것.</a:t>
             </a:r>
           </a:p>
         </p:txBody>
@@ -10860,14 +11850,371 @@
               </a:spcAft>
             </a:pPr>
             <a:r>
-              <a:rPr sz="1100" b="0">
-                <a:solidFill>
-                  <a:srgbClr val="34465C"/>
-                </a:solidFill>
-                <a:latin typeface="Malgun Gothic"/>
-              </a:rPr>
-              <a:t>· 14시간 동안 쓰기가 누적되며 데이터가 계속 커져(매치 기록·구매 원장 증가) 두 제품 모두 점진적으로 느려짐 — 짧은 측정으로는 보이지 않는 운영 현실</a:t>
-            </a:r>
+              <a:rPr sz="1100" b="0" dirty="0">
+                <a:solidFill>
+                  <a:srgbClr val="34465C"/>
+                </a:solidFill>
+                <a:latin typeface="Malgun Gothic"/>
+              </a:rPr>
+              <a:t>· 14시간 </a:t>
+            </a:r>
+            <a:r>
+              <a:rPr sz="1100" b="0" dirty="0" err="1">
+                <a:solidFill>
+                  <a:srgbClr val="34465C"/>
+                </a:solidFill>
+                <a:latin typeface="Malgun Gothic"/>
+              </a:rPr>
+              <a:t>동안</a:t>
+            </a:r>
+            <a:r>
+              <a:rPr sz="1100" b="0" dirty="0">
+                <a:solidFill>
+                  <a:srgbClr val="34465C"/>
+                </a:solidFill>
+                <a:latin typeface="Malgun Gothic"/>
+              </a:rPr>
+              <a:t> </a:t>
+            </a:r>
+            <a:r>
+              <a:rPr sz="1100" b="0" dirty="0" err="1">
+                <a:solidFill>
+                  <a:srgbClr val="34465C"/>
+                </a:solidFill>
+                <a:latin typeface="Malgun Gothic"/>
+              </a:rPr>
+              <a:t>쓰기가</a:t>
+            </a:r>
+            <a:r>
+              <a:rPr sz="1100" b="0" dirty="0">
+                <a:solidFill>
+                  <a:srgbClr val="34465C"/>
+                </a:solidFill>
+                <a:latin typeface="Malgun Gothic"/>
+              </a:rPr>
+              <a:t> </a:t>
+            </a:r>
+            <a:r>
+              <a:rPr sz="1100" b="0" dirty="0" err="1">
+                <a:solidFill>
+                  <a:srgbClr val="34465C"/>
+                </a:solidFill>
+                <a:latin typeface="Malgun Gothic"/>
+              </a:rPr>
+              <a:t>누적되며</a:t>
+            </a:r>
+            <a:r>
+              <a:rPr sz="1100" b="0" dirty="0">
+                <a:solidFill>
+                  <a:srgbClr val="34465C"/>
+                </a:solidFill>
+                <a:latin typeface="Malgun Gothic"/>
+              </a:rPr>
+              <a:t> </a:t>
+            </a:r>
+            <a:r>
+              <a:rPr sz="1100" b="0" dirty="0" err="1">
+                <a:solidFill>
+                  <a:srgbClr val="34465C"/>
+                </a:solidFill>
+                <a:latin typeface="Malgun Gothic"/>
+              </a:rPr>
+              <a:t>데이터가</a:t>
+            </a:r>
+            <a:r>
+              <a:rPr sz="1100" b="0" dirty="0">
+                <a:solidFill>
+                  <a:srgbClr val="34465C"/>
+                </a:solidFill>
+                <a:latin typeface="Malgun Gothic"/>
+              </a:rPr>
+              <a:t> </a:t>
+            </a:r>
+            <a:r>
+              <a:rPr sz="1100" b="0" dirty="0" err="1">
+                <a:solidFill>
+                  <a:srgbClr val="34465C"/>
+                </a:solidFill>
+                <a:latin typeface="Malgun Gothic"/>
+              </a:rPr>
+              <a:t>계속</a:t>
+            </a:r>
+            <a:r>
+              <a:rPr sz="1100" b="0" dirty="0">
+                <a:solidFill>
+                  <a:srgbClr val="34465C"/>
+                </a:solidFill>
+                <a:latin typeface="Malgun Gothic"/>
+              </a:rPr>
+              <a:t> </a:t>
+            </a:r>
+            <a:r>
+              <a:rPr sz="1100" b="0" dirty="0" err="1">
+                <a:solidFill>
+                  <a:srgbClr val="34465C"/>
+                </a:solidFill>
+                <a:latin typeface="Malgun Gothic"/>
+              </a:rPr>
+              <a:t>커져</a:t>
+            </a:r>
+            <a:r>
+              <a:rPr sz="1100" b="0" dirty="0">
+                <a:solidFill>
+                  <a:srgbClr val="34465C"/>
+                </a:solidFill>
+                <a:latin typeface="Malgun Gothic"/>
+              </a:rPr>
+              <a:t>(</a:t>
+            </a:r>
+            <a:r>
+              <a:rPr sz="1100" b="0" dirty="0" err="1">
+                <a:solidFill>
+                  <a:srgbClr val="34465C"/>
+                </a:solidFill>
+                <a:latin typeface="Malgun Gothic"/>
+              </a:rPr>
+              <a:t>매치</a:t>
+            </a:r>
+            <a:r>
+              <a:rPr sz="1100" b="0" dirty="0">
+                <a:solidFill>
+                  <a:srgbClr val="34465C"/>
+                </a:solidFill>
+                <a:latin typeface="Malgun Gothic"/>
+              </a:rPr>
+              <a:t> </a:t>
+            </a:r>
+            <a:r>
+              <a:rPr sz="1100" b="0" dirty="0" err="1">
+                <a:solidFill>
+                  <a:srgbClr val="34465C"/>
+                </a:solidFill>
+                <a:latin typeface="Malgun Gothic"/>
+              </a:rPr>
+              <a:t>기록·구매</a:t>
+            </a:r>
+            <a:r>
+              <a:rPr sz="1100" b="0" dirty="0">
+                <a:solidFill>
+                  <a:srgbClr val="34465C"/>
+                </a:solidFill>
+                <a:latin typeface="Malgun Gothic"/>
+              </a:rPr>
+              <a:t> </a:t>
+            </a:r>
+            <a:r>
+              <a:rPr sz="1100" b="0" dirty="0" err="1">
+                <a:solidFill>
+                  <a:srgbClr val="34465C"/>
+                </a:solidFill>
+                <a:latin typeface="Malgun Gothic"/>
+              </a:rPr>
+              <a:t>원장</a:t>
+            </a:r>
+            <a:r>
+              <a:rPr sz="1100" b="0" dirty="0">
+                <a:solidFill>
+                  <a:srgbClr val="34465C"/>
+                </a:solidFill>
+                <a:latin typeface="Malgun Gothic"/>
+              </a:rPr>
+              <a:t> </a:t>
+            </a:r>
+            <a:r>
+              <a:rPr sz="1100" b="0" dirty="0" err="1">
+                <a:solidFill>
+                  <a:srgbClr val="34465C"/>
+                </a:solidFill>
+                <a:latin typeface="Malgun Gothic"/>
+              </a:rPr>
+              <a:t>증가</a:t>
+            </a:r>
+            <a:r>
+              <a:rPr sz="1100" b="0" dirty="0">
+                <a:solidFill>
+                  <a:srgbClr val="34465C"/>
+                </a:solidFill>
+                <a:latin typeface="Malgun Gothic"/>
+              </a:rPr>
+              <a:t>) 두 </a:t>
+            </a:r>
+            <a:r>
+              <a:rPr sz="1100" b="0" dirty="0" err="1">
+                <a:solidFill>
+                  <a:srgbClr val="34465C"/>
+                </a:solidFill>
+                <a:latin typeface="Malgun Gothic"/>
+              </a:rPr>
+              <a:t>제품</a:t>
+            </a:r>
+            <a:r>
+              <a:rPr sz="1100" b="0" dirty="0">
+                <a:solidFill>
+                  <a:srgbClr val="34465C"/>
+                </a:solidFill>
+                <a:latin typeface="Malgun Gothic"/>
+              </a:rPr>
+              <a:t> </a:t>
+            </a:r>
+            <a:r>
+              <a:rPr sz="1100" b="0" dirty="0" err="1">
+                <a:solidFill>
+                  <a:srgbClr val="34465C"/>
+                </a:solidFill>
+                <a:latin typeface="Malgun Gothic"/>
+              </a:rPr>
+              <a:t>모두</a:t>
+            </a:r>
+            <a:r>
+              <a:rPr sz="1100" b="0" dirty="0">
+                <a:solidFill>
+                  <a:srgbClr val="34465C"/>
+                </a:solidFill>
+                <a:latin typeface="Malgun Gothic"/>
+              </a:rPr>
+              <a:t> </a:t>
+            </a:r>
+            <a:r>
+              <a:rPr sz="1100" b="0" dirty="0" err="1">
+                <a:solidFill>
+                  <a:srgbClr val="34465C"/>
+                </a:solidFill>
+                <a:latin typeface="Malgun Gothic"/>
+              </a:rPr>
+              <a:t>점진적으로</a:t>
+            </a:r>
+            <a:r>
+              <a:rPr sz="1100" b="0" dirty="0">
+                <a:solidFill>
+                  <a:srgbClr val="34465C"/>
+                </a:solidFill>
+                <a:latin typeface="Malgun Gothic"/>
+              </a:rPr>
+              <a:t> </a:t>
+            </a:r>
+            <a:r>
+              <a:rPr sz="1100" b="0" dirty="0" err="1">
+                <a:solidFill>
+                  <a:srgbClr val="34465C"/>
+                </a:solidFill>
+                <a:latin typeface="Malgun Gothic"/>
+              </a:rPr>
+              <a:t>느려짐</a:t>
+            </a:r>
+            <a:r>
+              <a:rPr sz="1100" b="0" dirty="0">
+                <a:solidFill>
+                  <a:srgbClr val="34465C"/>
+                </a:solidFill>
+                <a:latin typeface="Malgun Gothic"/>
+              </a:rPr>
+              <a:t> — </a:t>
+            </a:r>
+            <a:r>
+              <a:rPr sz="1100" b="0" dirty="0" err="1">
+                <a:solidFill>
+                  <a:srgbClr val="34465C"/>
+                </a:solidFill>
+                <a:latin typeface="Malgun Gothic"/>
+              </a:rPr>
+              <a:t>짧은</a:t>
+            </a:r>
+            <a:r>
+              <a:rPr sz="1100" b="0" dirty="0">
+                <a:solidFill>
+                  <a:srgbClr val="34465C"/>
+                </a:solidFill>
+                <a:latin typeface="Malgun Gothic"/>
+              </a:rPr>
+              <a:t> </a:t>
+            </a:r>
+            <a:r>
+              <a:rPr sz="1100" b="0" dirty="0" err="1">
+                <a:solidFill>
+                  <a:srgbClr val="34465C"/>
+                </a:solidFill>
+                <a:latin typeface="Malgun Gothic"/>
+              </a:rPr>
+              <a:t>측정으로는</a:t>
+            </a:r>
+            <a:r>
+              <a:rPr sz="1100" b="0" dirty="0">
+                <a:solidFill>
+                  <a:srgbClr val="34465C"/>
+                </a:solidFill>
+                <a:latin typeface="Malgun Gothic"/>
+              </a:rPr>
+              <a:t> </a:t>
+            </a:r>
+            <a:r>
+              <a:rPr sz="1100" b="0" dirty="0" err="1">
+                <a:solidFill>
+                  <a:srgbClr val="34465C"/>
+                </a:solidFill>
+                <a:latin typeface="Malgun Gothic"/>
+              </a:rPr>
+              <a:t>보이지</a:t>
+            </a:r>
+            <a:r>
+              <a:rPr sz="1100" b="0" dirty="0">
+                <a:solidFill>
+                  <a:srgbClr val="34465C"/>
+                </a:solidFill>
+                <a:latin typeface="Malgun Gothic"/>
+              </a:rPr>
+              <a:t> </a:t>
+            </a:r>
+            <a:r>
+              <a:rPr sz="1100" b="0" dirty="0" err="1">
+                <a:solidFill>
+                  <a:srgbClr val="34465C"/>
+                </a:solidFill>
+                <a:latin typeface="Malgun Gothic"/>
+              </a:rPr>
+              <a:t>않는</a:t>
+            </a:r>
+            <a:r>
+              <a:rPr sz="1100" b="0" dirty="0">
+                <a:solidFill>
+                  <a:srgbClr val="34465C"/>
+                </a:solidFill>
+                <a:latin typeface="Malgun Gothic"/>
+              </a:rPr>
+              <a:t> </a:t>
+            </a:r>
+            <a:r>
+              <a:rPr sz="1100" b="0" dirty="0" err="1">
+                <a:solidFill>
+                  <a:srgbClr val="34465C"/>
+                </a:solidFill>
+                <a:latin typeface="Malgun Gothic"/>
+              </a:rPr>
+              <a:t>운영</a:t>
+            </a:r>
+            <a:r>
+              <a:rPr sz="1100" b="0" dirty="0">
+                <a:solidFill>
+                  <a:srgbClr val="34465C"/>
+                </a:solidFill>
+                <a:latin typeface="Malgun Gothic"/>
+              </a:rPr>
+              <a:t> </a:t>
+            </a:r>
+            <a:r>
+              <a:rPr sz="1100" b="0" dirty="0" err="1">
+                <a:solidFill>
+                  <a:srgbClr val="34465C"/>
+                </a:solidFill>
+                <a:latin typeface="Malgun Gothic"/>
+              </a:rPr>
+              <a:t>현실</a:t>
+            </a:r>
+            <a:endParaRPr sz="1100" b="0" dirty="0">
+              <a:solidFill>
+                <a:srgbClr val="34465C"/>
+              </a:solidFill>
+              <a:latin typeface="Malgun Gothic"/>
+            </a:endParaRPr>
           </a:p>
           <a:p>
             <a:pPr algn="l">
@@ -10876,13 +12223,391 @@
               </a:spcAft>
             </a:pPr>
             <a:r>
-              <a:rPr sz="1100" b="0">
-                <a:solidFill>
-                  <a:srgbClr val="34465C"/>
-                </a:solidFill>
-                <a:latin typeface="Malgun Gothic"/>
-              </a:rPr>
-              <a:t>· 단기 측정에서 관찰된 "v2 간헐 급증"과 반대로, 지속 부하에서는 v1의 꼬리·최악 구간이 더 나쁨 → v2 전환 판단에 유리한 증거. 단, 야간 자동 종료로 24h 중 14.5h만 측정됨(체크포인트로 보존)</a:t>
+              <a:rPr sz="1100" b="0" dirty="0">
+                <a:solidFill>
+                  <a:srgbClr val="34465C"/>
+                </a:solidFill>
+                <a:latin typeface="Malgun Gothic"/>
+              </a:rPr>
+              <a:t>· </a:t>
+            </a:r>
+            <a:r>
+              <a:rPr sz="1100" b="0" dirty="0" err="1">
+                <a:solidFill>
+                  <a:srgbClr val="34465C"/>
+                </a:solidFill>
+                <a:latin typeface="Malgun Gothic"/>
+              </a:rPr>
+              <a:t>단기</a:t>
+            </a:r>
+            <a:r>
+              <a:rPr sz="1100" b="0" dirty="0">
+                <a:solidFill>
+                  <a:srgbClr val="34465C"/>
+                </a:solidFill>
+                <a:latin typeface="Malgun Gothic"/>
+              </a:rPr>
+              <a:t> </a:t>
+            </a:r>
+            <a:r>
+              <a:rPr sz="1100" b="0" dirty="0" err="1">
+                <a:solidFill>
+                  <a:srgbClr val="34465C"/>
+                </a:solidFill>
+                <a:latin typeface="Malgun Gothic"/>
+              </a:rPr>
+              <a:t>측정에서</a:t>
+            </a:r>
+            <a:r>
+              <a:rPr sz="1100" b="0" dirty="0">
+                <a:solidFill>
+                  <a:srgbClr val="34465C"/>
+                </a:solidFill>
+                <a:latin typeface="Malgun Gothic"/>
+              </a:rPr>
+              <a:t> </a:t>
+            </a:r>
+            <a:r>
+              <a:rPr sz="1100" b="0" dirty="0" err="1">
+                <a:solidFill>
+                  <a:srgbClr val="34465C"/>
+                </a:solidFill>
+                <a:latin typeface="Malgun Gothic"/>
+              </a:rPr>
+              <a:t>관찰된</a:t>
+            </a:r>
+            <a:r>
+              <a:rPr sz="1100" b="0" dirty="0">
+                <a:solidFill>
+                  <a:srgbClr val="34465C"/>
+                </a:solidFill>
+                <a:latin typeface="Malgun Gothic"/>
+              </a:rPr>
+              <a:t> "v2 </a:t>
+            </a:r>
+            <a:r>
+              <a:rPr sz="1100" b="0" dirty="0" err="1">
+                <a:solidFill>
+                  <a:srgbClr val="34465C"/>
+                </a:solidFill>
+                <a:latin typeface="Malgun Gothic"/>
+              </a:rPr>
+              <a:t>간헐</a:t>
+            </a:r>
+            <a:r>
+              <a:rPr sz="1100" b="0" dirty="0">
+                <a:solidFill>
+                  <a:srgbClr val="34465C"/>
+                </a:solidFill>
+                <a:latin typeface="Malgun Gothic"/>
+              </a:rPr>
+              <a:t> </a:t>
+            </a:r>
+            <a:r>
+              <a:rPr sz="1100" b="0" dirty="0" err="1">
+                <a:solidFill>
+                  <a:srgbClr val="34465C"/>
+                </a:solidFill>
+                <a:latin typeface="Malgun Gothic"/>
+              </a:rPr>
+              <a:t>급증"과</a:t>
+            </a:r>
+            <a:r>
+              <a:rPr sz="1100" b="0" dirty="0">
+                <a:solidFill>
+                  <a:srgbClr val="34465C"/>
+                </a:solidFill>
+                <a:latin typeface="Malgun Gothic"/>
+              </a:rPr>
+              <a:t> </a:t>
+            </a:r>
+            <a:r>
+              <a:rPr sz="1100" b="0" dirty="0" err="1">
+                <a:solidFill>
+                  <a:srgbClr val="34465C"/>
+                </a:solidFill>
+                <a:latin typeface="Malgun Gothic"/>
+              </a:rPr>
+              <a:t>반대로</a:t>
+            </a:r>
+            <a:r>
+              <a:rPr sz="1100" b="0" dirty="0">
+                <a:solidFill>
+                  <a:srgbClr val="34465C"/>
+                </a:solidFill>
+                <a:latin typeface="Malgun Gothic"/>
+              </a:rPr>
+              <a:t>, </a:t>
+            </a:r>
+            <a:r>
+              <a:rPr sz="1100" b="0" dirty="0" err="1">
+                <a:solidFill>
+                  <a:srgbClr val="34465C"/>
+                </a:solidFill>
+                <a:latin typeface="Malgun Gothic"/>
+              </a:rPr>
+              <a:t>지속</a:t>
+            </a:r>
+            <a:r>
+              <a:rPr sz="1100" b="0" dirty="0">
+                <a:solidFill>
+                  <a:srgbClr val="34465C"/>
+                </a:solidFill>
+                <a:latin typeface="Malgun Gothic"/>
+              </a:rPr>
+              <a:t> </a:t>
+            </a:r>
+            <a:r>
+              <a:rPr sz="1100" b="0" dirty="0" err="1">
+                <a:solidFill>
+                  <a:srgbClr val="34465C"/>
+                </a:solidFill>
+                <a:latin typeface="Malgun Gothic"/>
+              </a:rPr>
+              <a:t>부하에서는</a:t>
+            </a:r>
+            <a:r>
+              <a:rPr sz="1100" b="0" dirty="0">
+                <a:solidFill>
+                  <a:srgbClr val="34465C"/>
+                </a:solidFill>
+                <a:latin typeface="Malgun Gothic"/>
+              </a:rPr>
+              <a:t> v1의 </a:t>
+            </a:r>
+            <a:r>
+              <a:rPr sz="1100" b="0" dirty="0" err="1">
+                <a:solidFill>
+                  <a:srgbClr val="34465C"/>
+                </a:solidFill>
+                <a:latin typeface="Malgun Gothic"/>
+              </a:rPr>
+              <a:t>꼬리·최악</a:t>
+            </a:r>
+            <a:r>
+              <a:rPr sz="1100" b="0" dirty="0">
+                <a:solidFill>
+                  <a:srgbClr val="34465C"/>
+                </a:solidFill>
+                <a:latin typeface="Malgun Gothic"/>
+              </a:rPr>
+              <a:t> </a:t>
+            </a:r>
+            <a:r>
+              <a:rPr sz="1100" b="0" dirty="0" err="1">
+                <a:solidFill>
+                  <a:srgbClr val="34465C"/>
+                </a:solidFill>
+                <a:latin typeface="Malgun Gothic"/>
+              </a:rPr>
+              <a:t>구간이</a:t>
+            </a:r>
+            <a:r>
+              <a:rPr sz="1100" b="0" dirty="0">
+                <a:solidFill>
+                  <a:srgbClr val="34465C"/>
+                </a:solidFill>
+                <a:latin typeface="Malgun Gothic"/>
+              </a:rPr>
+              <a:t> 더 </a:t>
+            </a:r>
+            <a:r>
+              <a:rPr sz="1100" b="0" dirty="0" err="1">
+                <a:solidFill>
+                  <a:srgbClr val="34465C"/>
+                </a:solidFill>
+                <a:latin typeface="Malgun Gothic"/>
+              </a:rPr>
+              <a:t>나쁨</a:t>
+            </a:r>
+            <a:r>
+              <a:rPr sz="1100" b="0" dirty="0">
+                <a:solidFill>
+                  <a:srgbClr val="34465C"/>
+                </a:solidFill>
+                <a:latin typeface="Malgun Gothic"/>
+              </a:rPr>
+              <a:t> → v2 </a:t>
+            </a:r>
+            <a:r>
+              <a:rPr sz="1100" b="0" dirty="0" err="1">
+                <a:solidFill>
+                  <a:srgbClr val="34465C"/>
+                </a:solidFill>
+                <a:latin typeface="Malgun Gothic"/>
+              </a:rPr>
+              <a:t>전환</a:t>
+            </a:r>
+            <a:r>
+              <a:rPr sz="1100" b="0" dirty="0">
+                <a:solidFill>
+                  <a:srgbClr val="34465C"/>
+                </a:solidFill>
+                <a:latin typeface="Malgun Gothic"/>
+              </a:rPr>
+              <a:t> </a:t>
+            </a:r>
+            <a:r>
+              <a:rPr sz="1100" b="0" dirty="0" err="1">
+                <a:solidFill>
+                  <a:srgbClr val="34465C"/>
+                </a:solidFill>
+                <a:latin typeface="Malgun Gothic"/>
+              </a:rPr>
+              <a:t>판단에</a:t>
+            </a:r>
+            <a:r>
+              <a:rPr sz="1100" b="0" dirty="0">
+                <a:solidFill>
+                  <a:srgbClr val="34465C"/>
+                </a:solidFill>
+                <a:latin typeface="Malgun Gothic"/>
+              </a:rPr>
+              <a:t> </a:t>
+            </a:r>
+            <a:r>
+              <a:rPr sz="1100" b="0" dirty="0" err="1">
+                <a:solidFill>
+                  <a:srgbClr val="34465C"/>
+                </a:solidFill>
+                <a:latin typeface="Malgun Gothic"/>
+              </a:rPr>
+              <a:t>유리한</a:t>
+            </a:r>
+            <a:r>
+              <a:rPr sz="1100" b="0" dirty="0">
+                <a:solidFill>
+                  <a:srgbClr val="34465C"/>
+                </a:solidFill>
+                <a:latin typeface="Malgun Gothic"/>
+              </a:rPr>
+              <a:t> </a:t>
+            </a:r>
+            <a:r>
+              <a:rPr sz="1100" b="0" dirty="0" err="1">
+                <a:solidFill>
+                  <a:srgbClr val="34465C"/>
+                </a:solidFill>
+                <a:latin typeface="Malgun Gothic"/>
+              </a:rPr>
+              <a:t>증거</a:t>
+            </a:r>
+            <a:r>
+              <a:rPr sz="1100" b="0" dirty="0">
+                <a:solidFill>
+                  <a:srgbClr val="34465C"/>
+                </a:solidFill>
+                <a:latin typeface="Malgun Gothic"/>
+              </a:rPr>
+              <a:t>. 단, </a:t>
+            </a:r>
+            <a:r>
+              <a:rPr sz="1100" b="0" dirty="0" err="1">
+                <a:solidFill>
+                  <a:srgbClr val="34465C"/>
+                </a:solidFill>
+                <a:latin typeface="Malgun Gothic"/>
+              </a:rPr>
+              <a:t>야간</a:t>
+            </a:r>
+            <a:r>
+              <a:rPr sz="1100" b="0" dirty="0">
+                <a:solidFill>
+                  <a:srgbClr val="34465C"/>
+                </a:solidFill>
+                <a:latin typeface="Malgun Gothic"/>
+              </a:rPr>
+              <a:t> </a:t>
+            </a:r>
+            <a:r>
+              <a:rPr sz="1100" b="0" dirty="0" err="1">
+                <a:solidFill>
+                  <a:srgbClr val="34465C"/>
+                </a:solidFill>
+                <a:latin typeface="Malgun Gothic"/>
+              </a:rPr>
+              <a:t>자동</a:t>
+            </a:r>
+            <a:r>
+              <a:rPr sz="1100" b="0" dirty="0">
+                <a:solidFill>
+                  <a:srgbClr val="34465C"/>
+                </a:solidFill>
+                <a:latin typeface="Malgun Gothic"/>
+              </a:rPr>
+              <a:t> </a:t>
+            </a:r>
+            <a:r>
+              <a:rPr sz="1100" b="0" dirty="0" err="1">
+                <a:solidFill>
+                  <a:srgbClr val="34465C"/>
+                </a:solidFill>
+                <a:latin typeface="Malgun Gothic"/>
+              </a:rPr>
+              <a:t>종료로</a:t>
+            </a:r>
+            <a:r>
+              <a:rPr sz="1100" b="0" dirty="0">
+                <a:solidFill>
+                  <a:srgbClr val="34465C"/>
+                </a:solidFill>
+                <a:latin typeface="Malgun Gothic"/>
+              </a:rPr>
+              <a:t> 24h 중 14.5h만 </a:t>
+            </a:r>
+            <a:r>
+              <a:rPr sz="1100" b="0" dirty="0" err="1">
+                <a:solidFill>
+                  <a:srgbClr val="34465C"/>
+                </a:solidFill>
+                <a:latin typeface="Malgun Gothic"/>
+              </a:rPr>
+              <a:t>측정됨</a:t>
+            </a:r>
+            <a:r>
+              <a:rPr sz="1100" b="0" dirty="0">
+                <a:solidFill>
+                  <a:srgbClr val="34465C"/>
+                </a:solidFill>
+                <a:latin typeface="Malgun Gothic"/>
+              </a:rPr>
+              <a:t>(</a:t>
+            </a:r>
+            <a:r>
+              <a:rPr sz="1100" b="0" dirty="0" err="1">
+                <a:solidFill>
+                  <a:srgbClr val="34465C"/>
+                </a:solidFill>
+                <a:latin typeface="Malgun Gothic"/>
+              </a:rPr>
+              <a:t>체크포인트로</a:t>
+            </a:r>
+            <a:r>
+              <a:rPr sz="1100" b="0" dirty="0">
+                <a:solidFill>
+                  <a:srgbClr val="34465C"/>
+                </a:solidFill>
+                <a:latin typeface="Malgun Gothic"/>
+              </a:rPr>
+              <a:t> </a:t>
+            </a:r>
+            <a:r>
+              <a:rPr sz="1100" b="0" dirty="0" err="1">
+                <a:solidFill>
+                  <a:srgbClr val="34465C"/>
+                </a:solidFill>
+                <a:latin typeface="Malgun Gothic"/>
+              </a:rPr>
+              <a:t>보존</a:t>
+            </a:r>
+            <a:r>
+              <a:rPr sz="1100" b="0" dirty="0">
+                <a:solidFill>
+                  <a:srgbClr val="34465C"/>
+                </a:solidFill>
+                <a:latin typeface="Malgun Gothic"/>
+              </a:rPr>
+              <a:t>)</a:t>
             </a:r>
           </a:p>
         </p:txBody>
@@ -14064,14 +15789,335 @@
               </a:spcAft>
             </a:pPr>
             <a:r>
-              <a:rPr sz="1100" b="0">
-                <a:solidFill>
-                  <a:srgbClr val="34465C"/>
-                </a:solidFill>
-                <a:latin typeface="Malgun Gothic"/>
-              </a:rPr>
-              <a:t>· 응답시간 개선은 작지만(스토리지가 이미 여유), primary 디스크 읽기가 1/3로 줄어 "쓰기 여력 확보" 효과가 분명 — 쓰기가 몰리는 서비스에서 가치</a:t>
-            </a:r>
+              <a:rPr sz="1100" b="0" dirty="0">
+                <a:solidFill>
+                  <a:srgbClr val="34465C"/>
+                </a:solidFill>
+                <a:latin typeface="Malgun Gothic"/>
+              </a:rPr>
+              <a:t>· </a:t>
+            </a:r>
+            <a:r>
+              <a:rPr sz="1100" b="0" dirty="0" err="1">
+                <a:solidFill>
+                  <a:srgbClr val="34465C"/>
+                </a:solidFill>
+                <a:latin typeface="Malgun Gothic"/>
+              </a:rPr>
+              <a:t>응답시간</a:t>
+            </a:r>
+            <a:r>
+              <a:rPr sz="1100" b="0" dirty="0">
+                <a:solidFill>
+                  <a:srgbClr val="34465C"/>
+                </a:solidFill>
+                <a:latin typeface="Malgun Gothic"/>
+              </a:rPr>
+              <a:t> </a:t>
+            </a:r>
+            <a:r>
+              <a:rPr sz="1100" b="0" dirty="0" err="1">
+                <a:solidFill>
+                  <a:srgbClr val="34465C"/>
+                </a:solidFill>
+                <a:latin typeface="Malgun Gothic"/>
+              </a:rPr>
+              <a:t>개선은</a:t>
+            </a:r>
+            <a:r>
+              <a:rPr sz="1100" b="0" dirty="0">
+                <a:solidFill>
+                  <a:srgbClr val="34465C"/>
+                </a:solidFill>
+                <a:latin typeface="Malgun Gothic"/>
+              </a:rPr>
+              <a:t> </a:t>
+            </a:r>
+            <a:r>
+              <a:rPr sz="1100" b="0" dirty="0" err="1">
+                <a:solidFill>
+                  <a:srgbClr val="34465C"/>
+                </a:solidFill>
+                <a:latin typeface="Malgun Gothic"/>
+              </a:rPr>
+              <a:t>작지만</a:t>
+            </a:r>
+            <a:r>
+              <a:rPr sz="1100" b="0" dirty="0">
+                <a:solidFill>
+                  <a:srgbClr val="34465C"/>
+                </a:solidFill>
+                <a:latin typeface="Malgun Gothic"/>
+              </a:rPr>
+              <a:t>(</a:t>
+            </a:r>
+            <a:r>
+              <a:rPr sz="1100" b="0" dirty="0" err="1">
+                <a:solidFill>
+                  <a:srgbClr val="34465C"/>
+                </a:solidFill>
+                <a:latin typeface="Malgun Gothic"/>
+              </a:rPr>
+              <a:t>스토리지가</a:t>
+            </a:r>
+            <a:r>
+              <a:rPr sz="1100" b="0" dirty="0">
+                <a:solidFill>
+                  <a:srgbClr val="34465C"/>
+                </a:solidFill>
+                <a:latin typeface="Malgun Gothic"/>
+              </a:rPr>
+              <a:t> </a:t>
+            </a:r>
+            <a:r>
+              <a:rPr sz="1100" b="0" dirty="0" err="1">
+                <a:solidFill>
+                  <a:srgbClr val="34465C"/>
+                </a:solidFill>
+                <a:latin typeface="Malgun Gothic"/>
+              </a:rPr>
+              <a:t>이미</a:t>
+            </a:r>
+            <a:r>
+              <a:rPr sz="1100" b="0" dirty="0">
+                <a:solidFill>
+                  <a:srgbClr val="34465C"/>
+                </a:solidFill>
+                <a:latin typeface="Malgun Gothic"/>
+              </a:rPr>
+              <a:t> </a:t>
+            </a:r>
+            <a:r>
+              <a:rPr sz="1100" b="0" dirty="0" err="1">
+                <a:solidFill>
+                  <a:srgbClr val="34465C"/>
+                </a:solidFill>
+                <a:latin typeface="Malgun Gothic"/>
+              </a:rPr>
+              <a:t>여유</a:t>
+            </a:r>
+            <a:r>
+              <a:rPr sz="1100" b="0" dirty="0">
+                <a:solidFill>
+                  <a:srgbClr val="34465C"/>
+                </a:solidFill>
+                <a:latin typeface="Malgun Gothic"/>
+              </a:rPr>
+              <a:t>), primary </a:t>
+            </a:r>
+            <a:r>
+              <a:rPr sz="1100" b="0" dirty="0" err="1">
+                <a:solidFill>
+                  <a:srgbClr val="34465C"/>
+                </a:solidFill>
+                <a:latin typeface="Malgun Gothic"/>
+              </a:rPr>
+              <a:t>디스크</a:t>
+            </a:r>
+            <a:r>
+              <a:rPr sz="1100" b="0" dirty="0">
+                <a:solidFill>
+                  <a:srgbClr val="34465C"/>
+                </a:solidFill>
+                <a:latin typeface="Malgun Gothic"/>
+              </a:rPr>
+              <a:t> </a:t>
+            </a:r>
+            <a:r>
+              <a:rPr sz="1100" b="0" dirty="0" err="1">
+                <a:solidFill>
+                  <a:srgbClr val="34465C"/>
+                </a:solidFill>
+                <a:latin typeface="Malgun Gothic"/>
+              </a:rPr>
+              <a:t>읽기가</a:t>
+            </a:r>
+            <a:r>
+              <a:rPr sz="1100" b="0" dirty="0">
+                <a:solidFill>
+                  <a:srgbClr val="34465C"/>
+                </a:solidFill>
+                <a:latin typeface="Malgun Gothic"/>
+              </a:rPr>
+              <a:t> 1/3로 </a:t>
+            </a:r>
+            <a:r>
+              <a:rPr sz="1100" b="0" dirty="0" err="1">
+                <a:solidFill>
+                  <a:srgbClr val="34465C"/>
+                </a:solidFill>
+                <a:latin typeface="Malgun Gothic"/>
+              </a:rPr>
+              <a:t>줄어</a:t>
+            </a:r>
+            <a:r>
+              <a:rPr sz="1100" b="0" dirty="0">
+                <a:solidFill>
+                  <a:srgbClr val="34465C"/>
+                </a:solidFill>
+                <a:latin typeface="Malgun Gothic"/>
+              </a:rPr>
+              <a:t> "</a:t>
+            </a:r>
+            <a:r>
+              <a:rPr sz="1100" b="0" dirty="0" err="1">
+                <a:solidFill>
+                  <a:srgbClr val="34465C"/>
+                </a:solidFill>
+                <a:latin typeface="Malgun Gothic"/>
+              </a:rPr>
+              <a:t>쓰기</a:t>
+            </a:r>
+            <a:r>
+              <a:rPr sz="1100" b="0" dirty="0">
+                <a:solidFill>
+                  <a:srgbClr val="34465C"/>
+                </a:solidFill>
+                <a:latin typeface="Malgun Gothic"/>
+              </a:rPr>
+              <a:t> </a:t>
+            </a:r>
+            <a:r>
+              <a:rPr sz="1100" b="0" dirty="0" err="1">
+                <a:solidFill>
+                  <a:srgbClr val="34465C"/>
+                </a:solidFill>
+                <a:latin typeface="Malgun Gothic"/>
+              </a:rPr>
+              <a:t>여력</a:t>
+            </a:r>
+            <a:r>
+              <a:rPr sz="1100" b="0" dirty="0">
+                <a:solidFill>
+                  <a:srgbClr val="34465C"/>
+                </a:solidFill>
+                <a:latin typeface="Malgun Gothic"/>
+              </a:rPr>
+              <a:t> </a:t>
+            </a:r>
+            <a:r>
+              <a:rPr sz="1100" b="0" dirty="0" err="1">
+                <a:solidFill>
+                  <a:srgbClr val="34465C"/>
+                </a:solidFill>
+                <a:latin typeface="Malgun Gothic"/>
+              </a:rPr>
+              <a:t>확보</a:t>
+            </a:r>
+            <a:r>
+              <a:rPr sz="1100" b="0" dirty="0">
+                <a:solidFill>
+                  <a:srgbClr val="34465C"/>
+                </a:solidFill>
+                <a:latin typeface="Malgun Gothic"/>
+              </a:rPr>
+              <a:t>" </a:t>
+            </a:r>
+            <a:r>
+              <a:rPr sz="1100" b="0" dirty="0" err="1">
+                <a:solidFill>
+                  <a:srgbClr val="34465C"/>
+                </a:solidFill>
+                <a:latin typeface="Malgun Gothic"/>
+              </a:rPr>
+              <a:t>효과가</a:t>
+            </a:r>
+            <a:r>
+              <a:rPr sz="1100" b="0" dirty="0">
+                <a:solidFill>
+                  <a:srgbClr val="34465C"/>
+                </a:solidFill>
+                <a:latin typeface="Malgun Gothic"/>
+              </a:rPr>
+              <a:t> </a:t>
+            </a:r>
+            <a:r>
+              <a:rPr sz="1100" b="0" dirty="0" err="1">
+                <a:solidFill>
+                  <a:srgbClr val="34465C"/>
+                </a:solidFill>
+                <a:latin typeface="Malgun Gothic"/>
+              </a:rPr>
+              <a:t>분명</a:t>
+            </a:r>
+            <a:r>
+              <a:rPr sz="1100" b="0" dirty="0">
+                <a:solidFill>
+                  <a:srgbClr val="34465C"/>
+                </a:solidFill>
+                <a:latin typeface="Malgun Gothic"/>
+              </a:rPr>
+              <a:t> — </a:t>
+            </a:r>
+            <a:r>
+              <a:rPr sz="1100" b="0" dirty="0" err="1">
+                <a:solidFill>
+                  <a:srgbClr val="34465C"/>
+                </a:solidFill>
+                <a:latin typeface="Malgun Gothic"/>
+              </a:rPr>
+              <a:t>쓰기가</a:t>
+            </a:r>
+            <a:r>
+              <a:rPr sz="1100" b="0" dirty="0">
+                <a:solidFill>
+                  <a:srgbClr val="34465C"/>
+                </a:solidFill>
+                <a:latin typeface="Malgun Gothic"/>
+              </a:rPr>
+              <a:t> </a:t>
+            </a:r>
+            <a:r>
+              <a:rPr sz="1100" b="0" dirty="0" err="1">
+                <a:solidFill>
+                  <a:srgbClr val="34465C"/>
+                </a:solidFill>
+                <a:latin typeface="Malgun Gothic"/>
+              </a:rPr>
+              <a:t>몰리는</a:t>
+            </a:r>
+            <a:r>
+              <a:rPr sz="1100" b="0" dirty="0">
+                <a:solidFill>
+                  <a:srgbClr val="34465C"/>
+                </a:solidFill>
+                <a:latin typeface="Malgun Gothic"/>
+              </a:rPr>
+              <a:t> </a:t>
+            </a:r>
+            <a:r>
+              <a:rPr sz="1100" b="0" dirty="0" err="1">
+                <a:solidFill>
+                  <a:srgbClr val="34465C"/>
+                </a:solidFill>
+                <a:latin typeface="Malgun Gothic"/>
+              </a:rPr>
+              <a:t>서비스에서</a:t>
+            </a:r>
+            <a:r>
+              <a:rPr sz="1100" b="0" dirty="0">
+                <a:solidFill>
+                  <a:srgbClr val="34465C"/>
+                </a:solidFill>
+                <a:latin typeface="Malgun Gothic"/>
+              </a:rPr>
+              <a:t> </a:t>
+            </a:r>
+            <a:r>
+              <a:rPr sz="1100" b="0" dirty="0" err="1">
+                <a:solidFill>
+                  <a:srgbClr val="34465C"/>
+                </a:solidFill>
+                <a:latin typeface="Malgun Gothic"/>
+              </a:rPr>
+              <a:t>가치</a:t>
+            </a:r>
+            <a:endParaRPr sz="1100" b="0" dirty="0">
+              <a:solidFill>
+                <a:srgbClr val="34465C"/>
+              </a:solidFill>
+              <a:latin typeface="Malgun Gothic"/>
+            </a:endParaRPr>
           </a:p>
           <a:p>
             <a:pPr algn="l">
@@ -14080,14 +16126,371 @@
               </a:spcAft>
             </a:pPr>
             <a:r>
-              <a:rPr sz="1100" b="0">
-                <a:solidFill>
-                  <a:srgbClr val="34465C"/>
-                </a:solidFill>
-                <a:latin typeface="Malgun Gothic"/>
-              </a:rPr>
-              <a:t>· 중요 제약: Premium SSD v2(프리뷰) 서버는 읽기 복제본 생성이 현재 불가(InternalServerError 반복, 지원 티켓용 Tracking ID 확보) → v2 전환 시 복제본 전략은 GA 시점 재확인 필요</a:t>
-            </a:r>
+              <a:rPr sz="1100" dirty="0">
+                <a:solidFill>
+                  <a:srgbClr val="34465C"/>
+                </a:solidFill>
+                <a:latin typeface="Malgun Gothic"/>
+              </a:rPr>
+              <a:t>· </a:t>
+            </a:r>
+            <a:r>
+              <a:rPr sz="1100" dirty="0" err="1">
+                <a:solidFill>
+                  <a:srgbClr val="34465C"/>
+                </a:solidFill>
+                <a:latin typeface="Malgun Gothic"/>
+              </a:rPr>
+              <a:t>중요</a:t>
+            </a:r>
+            <a:r>
+              <a:rPr sz="1100" dirty="0">
+                <a:solidFill>
+                  <a:srgbClr val="34465C"/>
+                </a:solidFill>
+                <a:latin typeface="Malgun Gothic"/>
+              </a:rPr>
+              <a:t> </a:t>
+            </a:r>
+            <a:r>
+              <a:rPr sz="1100" dirty="0" err="1">
+                <a:solidFill>
+                  <a:srgbClr val="34465C"/>
+                </a:solidFill>
+                <a:latin typeface="Malgun Gothic"/>
+              </a:rPr>
+              <a:t>제약</a:t>
+            </a:r>
+            <a:r>
+              <a:rPr sz="1100" dirty="0">
+                <a:solidFill>
+                  <a:srgbClr val="34465C"/>
+                </a:solidFill>
+                <a:latin typeface="Malgun Gothic"/>
+              </a:rPr>
+              <a:t>: Premium SSD v2(</a:t>
+            </a:r>
+            <a:r>
+              <a:rPr sz="1100" dirty="0" err="1">
+                <a:solidFill>
+                  <a:srgbClr val="34465C"/>
+                </a:solidFill>
+                <a:latin typeface="Malgun Gothic"/>
+              </a:rPr>
+              <a:t>프리뷰</a:t>
+            </a:r>
+            <a:r>
+              <a:rPr sz="1100" dirty="0">
+                <a:solidFill>
+                  <a:srgbClr val="34465C"/>
+                </a:solidFill>
+                <a:latin typeface="Malgun Gothic"/>
+              </a:rPr>
+              <a:t>) </a:t>
+            </a:r>
+            <a:r>
+              <a:rPr sz="1100" dirty="0" err="1">
+                <a:solidFill>
+                  <a:srgbClr val="34465C"/>
+                </a:solidFill>
+                <a:latin typeface="Malgun Gothic"/>
+              </a:rPr>
+              <a:t>서버는</a:t>
+            </a:r>
+            <a:r>
+              <a:rPr sz="1100" dirty="0">
+                <a:solidFill>
+                  <a:srgbClr val="34465C"/>
+                </a:solidFill>
+                <a:latin typeface="Malgun Gothic"/>
+              </a:rPr>
+              <a:t> </a:t>
+            </a:r>
+            <a:r>
+              <a:rPr sz="1100" dirty="0" err="1">
+                <a:solidFill>
+                  <a:srgbClr val="34465C"/>
+                </a:solidFill>
+                <a:latin typeface="Malgun Gothic"/>
+              </a:rPr>
+              <a:t>읽기</a:t>
+            </a:r>
+            <a:r>
+              <a:rPr sz="1100" dirty="0">
+                <a:solidFill>
+                  <a:srgbClr val="34465C"/>
+                </a:solidFill>
+                <a:latin typeface="Malgun Gothic"/>
+              </a:rPr>
+              <a:t> </a:t>
+            </a:r>
+            <a:r>
+              <a:rPr sz="1100" dirty="0" err="1">
+                <a:solidFill>
+                  <a:srgbClr val="34465C"/>
+                </a:solidFill>
+                <a:latin typeface="Malgun Gothic"/>
+              </a:rPr>
+              <a:t>복제본</a:t>
+            </a:r>
+            <a:r>
+              <a:rPr sz="1100" dirty="0">
+                <a:solidFill>
+                  <a:srgbClr val="34465C"/>
+                </a:solidFill>
+                <a:latin typeface="Malgun Gothic"/>
+              </a:rPr>
+              <a:t> </a:t>
+            </a:r>
+            <a:r>
+              <a:rPr sz="1100" dirty="0" err="1">
+                <a:solidFill>
+                  <a:srgbClr val="34465C"/>
+                </a:solidFill>
+                <a:latin typeface="Malgun Gothic"/>
+              </a:rPr>
+              <a:t>생성이</a:t>
+            </a:r>
+            <a:r>
+              <a:rPr sz="1100" dirty="0">
+                <a:solidFill>
+                  <a:srgbClr val="34465C"/>
+                </a:solidFill>
+                <a:latin typeface="Malgun Gothic"/>
+              </a:rPr>
+              <a:t> </a:t>
+            </a:r>
+            <a:r>
+              <a:rPr sz="1100" dirty="0" err="1">
+                <a:solidFill>
+                  <a:srgbClr val="34465C"/>
+                </a:solidFill>
+                <a:latin typeface="Malgun Gothic"/>
+              </a:rPr>
+              <a:t>현재</a:t>
+            </a:r>
+            <a:r>
+              <a:rPr sz="1100" dirty="0">
+                <a:solidFill>
+                  <a:srgbClr val="34465C"/>
+                </a:solidFill>
+                <a:latin typeface="Malgun Gothic"/>
+              </a:rPr>
+              <a:t> </a:t>
+            </a:r>
+            <a:r>
+              <a:rPr sz="1100" dirty="0" err="1">
+                <a:solidFill>
+                  <a:srgbClr val="34465C"/>
+                </a:solidFill>
+                <a:latin typeface="Malgun Gothic"/>
+              </a:rPr>
+              <a:t>불가</a:t>
+            </a:r>
+            <a:r>
+              <a:rPr sz="1100" dirty="0">
+                <a:solidFill>
+                  <a:srgbClr val="34465C"/>
+                </a:solidFill>
+                <a:latin typeface="Malgun Gothic"/>
+              </a:rPr>
+              <a:t>(</a:t>
+            </a:r>
+            <a:r>
+              <a:rPr sz="1100" dirty="0" err="1">
+                <a:solidFill>
+                  <a:srgbClr val="34465C"/>
+                </a:solidFill>
+                <a:latin typeface="Malgun Gothic"/>
+              </a:rPr>
+              <a:t>InternalServerError</a:t>
+            </a:r>
+            <a:r>
+              <a:rPr sz="1100" dirty="0">
+                <a:solidFill>
+                  <a:srgbClr val="34465C"/>
+                </a:solidFill>
+                <a:latin typeface="Malgun Gothic"/>
+              </a:rPr>
+              <a:t> </a:t>
+            </a:r>
+            <a:r>
+              <a:rPr sz="1100" dirty="0" err="1">
+                <a:solidFill>
+                  <a:srgbClr val="34465C"/>
+                </a:solidFill>
+                <a:latin typeface="Malgun Gothic"/>
+              </a:rPr>
+              <a:t>반복</a:t>
+            </a:r>
+            <a:r>
+              <a:rPr sz="1100" dirty="0">
+                <a:solidFill>
+                  <a:srgbClr val="34465C"/>
+                </a:solidFill>
+                <a:latin typeface="Malgun Gothic"/>
+              </a:rPr>
+              <a:t>, </a:t>
+            </a:r>
+            <a:r>
+              <a:rPr sz="1100" dirty="0" err="1">
+                <a:solidFill>
+                  <a:srgbClr val="34465C"/>
+                </a:solidFill>
+                <a:latin typeface="Malgun Gothic"/>
+              </a:rPr>
+              <a:t>지원</a:t>
+            </a:r>
+            <a:r>
+              <a:rPr sz="1100" dirty="0">
+                <a:solidFill>
+                  <a:srgbClr val="34465C"/>
+                </a:solidFill>
+                <a:latin typeface="Malgun Gothic"/>
+              </a:rPr>
+              <a:t> </a:t>
+            </a:r>
+            <a:r>
+              <a:rPr sz="1100" dirty="0" err="1">
+                <a:solidFill>
+                  <a:srgbClr val="34465C"/>
+                </a:solidFill>
+                <a:latin typeface="Malgun Gothic"/>
+              </a:rPr>
+              <a:t>티켓용</a:t>
+            </a:r>
+            <a:r>
+              <a:rPr sz="1100" dirty="0">
+                <a:solidFill>
+                  <a:srgbClr val="34465C"/>
+                </a:solidFill>
+                <a:latin typeface="Malgun Gothic"/>
+              </a:rPr>
+              <a:t> Tracking ID </a:t>
+            </a:r>
+            <a:r>
+              <a:rPr sz="1100" dirty="0" err="1">
+                <a:solidFill>
+                  <a:srgbClr val="34465C"/>
+                </a:solidFill>
+                <a:latin typeface="Malgun Gothic"/>
+              </a:rPr>
+              <a:t>확보</a:t>
+            </a:r>
+            <a:r>
+              <a:rPr sz="1100" dirty="0">
+                <a:solidFill>
+                  <a:srgbClr val="34465C"/>
+                </a:solidFill>
+                <a:latin typeface="Malgun Gothic"/>
+              </a:rPr>
+              <a:t>) → v2 </a:t>
+            </a:r>
+            <a:r>
+              <a:rPr sz="1100" dirty="0" err="1">
+                <a:solidFill>
+                  <a:srgbClr val="34465C"/>
+                </a:solidFill>
+                <a:latin typeface="Malgun Gothic"/>
+              </a:rPr>
+              <a:t>전환</a:t>
+            </a:r>
+            <a:r>
+              <a:rPr sz="1100" dirty="0">
+                <a:solidFill>
+                  <a:srgbClr val="34465C"/>
+                </a:solidFill>
+                <a:latin typeface="Malgun Gothic"/>
+              </a:rPr>
+              <a:t> 시 </a:t>
+            </a:r>
+            <a:r>
+              <a:rPr sz="1100" dirty="0" err="1">
+                <a:solidFill>
+                  <a:srgbClr val="34465C"/>
+                </a:solidFill>
+                <a:latin typeface="Malgun Gothic"/>
+              </a:rPr>
+              <a:t>복제본</a:t>
+            </a:r>
+            <a:r>
+              <a:rPr sz="1100" dirty="0">
+                <a:solidFill>
+                  <a:srgbClr val="34465C"/>
+                </a:solidFill>
+                <a:latin typeface="Malgun Gothic"/>
+              </a:rPr>
+              <a:t> </a:t>
+            </a:r>
+            <a:r>
+              <a:rPr sz="1100" dirty="0" err="1">
+                <a:solidFill>
+                  <a:srgbClr val="34465C"/>
+                </a:solidFill>
+                <a:latin typeface="Malgun Gothic"/>
+              </a:rPr>
+              <a:t>전략은</a:t>
+            </a:r>
+            <a:r>
+              <a:rPr sz="1100" dirty="0">
+                <a:solidFill>
+                  <a:srgbClr val="34465C"/>
+                </a:solidFill>
+                <a:latin typeface="Malgun Gothic"/>
+              </a:rPr>
+              <a:t> GA </a:t>
+            </a:r>
+            <a:r>
+              <a:rPr sz="1100" dirty="0" err="1">
+                <a:solidFill>
+                  <a:srgbClr val="34465C"/>
+                </a:solidFill>
+                <a:latin typeface="Malgun Gothic"/>
+              </a:rPr>
+              <a:t>시점</a:t>
+            </a:r>
+            <a:r>
+              <a:rPr sz="1100" dirty="0">
+                <a:solidFill>
+                  <a:srgbClr val="34465C"/>
+                </a:solidFill>
+                <a:latin typeface="Malgun Gothic"/>
+              </a:rPr>
+              <a:t> </a:t>
+            </a:r>
+            <a:r>
+              <a:rPr sz="1100" dirty="0" err="1">
+                <a:solidFill>
+                  <a:srgbClr val="34465C"/>
+                </a:solidFill>
+                <a:latin typeface="Malgun Gothic"/>
+              </a:rPr>
+              <a:t>재확인</a:t>
+            </a:r>
+            <a:r>
+              <a:rPr sz="1100" dirty="0">
+                <a:solidFill>
+                  <a:srgbClr val="34465C"/>
+                </a:solidFill>
+                <a:latin typeface="Malgun Gothic"/>
+              </a:rPr>
+              <a:t> </a:t>
+            </a:r>
+            <a:r>
+              <a:rPr sz="1100" dirty="0" err="1">
+                <a:solidFill>
+                  <a:srgbClr val="34465C"/>
+                </a:solidFill>
+                <a:latin typeface="Malgun Gothic"/>
+              </a:rPr>
+              <a:t>필요</a:t>
+            </a:r>
+            <a:endParaRPr sz="1100" dirty="0">
+              <a:solidFill>
+                <a:srgbClr val="34465C"/>
+              </a:solidFill>
+              <a:latin typeface="Malgun Gothic"/>
+            </a:endParaRPr>
           </a:p>
           <a:p>
             <a:pPr algn="l">
@@ -14096,14 +16499,119 @@
               </a:spcAft>
             </a:pPr>
             <a:r>
-              <a:rPr sz="1100" b="0">
-                <a:solidFill>
-                  <a:srgbClr val="34465C"/>
-                </a:solidFill>
-                <a:latin typeface="Malgun Gothic"/>
-              </a:rPr>
-              <a:t>· 복제본을 늘린 HA 구성 비교(C2·C6)는 이 제약으로 미실행</a:t>
-            </a:r>
+              <a:rPr sz="1100" b="0" dirty="0">
+                <a:solidFill>
+                  <a:srgbClr val="34465C"/>
+                </a:solidFill>
+                <a:latin typeface="Malgun Gothic"/>
+              </a:rPr>
+              <a:t>· </a:t>
+            </a:r>
+            <a:r>
+              <a:rPr sz="1100" b="0" dirty="0" err="1">
+                <a:solidFill>
+                  <a:srgbClr val="34465C"/>
+                </a:solidFill>
+                <a:latin typeface="Malgun Gothic"/>
+              </a:rPr>
+              <a:t>복제본을</a:t>
+            </a:r>
+            <a:r>
+              <a:rPr sz="1100" b="0" dirty="0">
+                <a:solidFill>
+                  <a:srgbClr val="34465C"/>
+                </a:solidFill>
+                <a:latin typeface="Malgun Gothic"/>
+              </a:rPr>
+              <a:t> </a:t>
+            </a:r>
+            <a:r>
+              <a:rPr sz="1100" b="0" dirty="0" err="1">
+                <a:solidFill>
+                  <a:srgbClr val="34465C"/>
+                </a:solidFill>
+                <a:latin typeface="Malgun Gothic"/>
+              </a:rPr>
+              <a:t>늘린</a:t>
+            </a:r>
+            <a:r>
+              <a:rPr sz="1100" b="0" dirty="0">
+                <a:solidFill>
+                  <a:srgbClr val="34465C"/>
+                </a:solidFill>
+                <a:latin typeface="Malgun Gothic"/>
+              </a:rPr>
+              <a:t> HA </a:t>
+            </a:r>
+            <a:r>
+              <a:rPr sz="1100" b="0" dirty="0" err="1">
+                <a:solidFill>
+                  <a:srgbClr val="34465C"/>
+                </a:solidFill>
+                <a:latin typeface="Malgun Gothic"/>
+              </a:rPr>
+              <a:t>구성</a:t>
+            </a:r>
+            <a:r>
+              <a:rPr sz="1100" b="0" dirty="0">
+                <a:solidFill>
+                  <a:srgbClr val="34465C"/>
+                </a:solidFill>
+                <a:latin typeface="Malgun Gothic"/>
+              </a:rPr>
+              <a:t> </a:t>
+            </a:r>
+            <a:r>
+              <a:rPr sz="1100" b="0" dirty="0" err="1">
+                <a:solidFill>
+                  <a:srgbClr val="34465C"/>
+                </a:solidFill>
+                <a:latin typeface="Malgun Gothic"/>
+              </a:rPr>
+              <a:t>비교</a:t>
+            </a:r>
+            <a:r>
+              <a:rPr sz="1100" b="0" dirty="0">
+                <a:solidFill>
+                  <a:srgbClr val="34465C"/>
+                </a:solidFill>
+                <a:latin typeface="Malgun Gothic"/>
+              </a:rPr>
+              <a:t>(C2·C6)는 이 </a:t>
+            </a:r>
+            <a:r>
+              <a:rPr sz="1100" b="0" dirty="0" err="1">
+                <a:solidFill>
+                  <a:srgbClr val="34465C"/>
+                </a:solidFill>
+                <a:latin typeface="Malgun Gothic"/>
+              </a:rPr>
+              <a:t>제약으로</a:t>
+            </a:r>
+            <a:r>
+              <a:rPr sz="1100" b="0" dirty="0">
+                <a:solidFill>
+                  <a:srgbClr val="34465C"/>
+                </a:solidFill>
+                <a:latin typeface="Malgun Gothic"/>
+              </a:rPr>
+              <a:t> </a:t>
+            </a:r>
+            <a:r>
+              <a:rPr sz="1100" b="0" dirty="0" err="1">
+                <a:solidFill>
+                  <a:srgbClr val="34465C"/>
+                </a:solidFill>
+                <a:latin typeface="Malgun Gothic"/>
+              </a:rPr>
+              <a:t>미실행</a:t>
+            </a:r>
+            <a:endParaRPr sz="1100" b="0" dirty="0">
+              <a:solidFill>
+                <a:srgbClr val="34465C"/>
+              </a:solidFill>
+              <a:latin typeface="Malgun Gothic"/>
+            </a:endParaRPr>
           </a:p>
         </p:txBody>
       </p:sp>
@@ -18469,13 +20977,157 @@
               </a:spcAft>
             </a:pPr>
             <a:r>
-              <a:rPr sz="1100" b="0">
-                <a:solidFill>
-                  <a:srgbClr val="34465C"/>
-                </a:solidFill>
-                <a:latin typeface="Malgun Gothic"/>
-              </a:rPr>
-              <a:t>· 일반 플레이 부하 3회 중 1회꼴로 p99가 3~4배 튀는 구간 발생 (원인 미확정)</a:t>
+              <a:rPr sz="1100" b="0" dirty="0">
+                <a:solidFill>
+                  <a:srgbClr val="34465C"/>
+                </a:solidFill>
+                <a:latin typeface="Malgun Gothic"/>
+              </a:rPr>
+              <a:t>· </a:t>
+            </a:r>
+            <a:r>
+              <a:rPr sz="1100" b="0" dirty="0" err="1">
+                <a:solidFill>
+                  <a:srgbClr val="34465C"/>
+                </a:solidFill>
+                <a:latin typeface="Malgun Gothic"/>
+              </a:rPr>
+              <a:t>일반</a:t>
+            </a:r>
+            <a:r>
+              <a:rPr sz="1100" b="0" dirty="0">
+                <a:solidFill>
+                  <a:srgbClr val="34465C"/>
+                </a:solidFill>
+                <a:latin typeface="Malgun Gothic"/>
+              </a:rPr>
+              <a:t> </a:t>
+            </a:r>
+            <a:r>
+              <a:rPr sz="1100" b="0" dirty="0" err="1">
+                <a:solidFill>
+                  <a:srgbClr val="34465C"/>
+                </a:solidFill>
+                <a:latin typeface="Malgun Gothic"/>
+              </a:rPr>
+              <a:t>플레이</a:t>
+            </a:r>
+            <a:r>
+              <a:rPr sz="1100" b="0" dirty="0">
+                <a:solidFill>
+                  <a:srgbClr val="34465C"/>
+                </a:solidFill>
+                <a:latin typeface="Malgun Gothic"/>
+              </a:rPr>
+              <a:t> </a:t>
+            </a:r>
+            <a:r>
+              <a:rPr sz="1100" b="0" dirty="0" err="1">
+                <a:solidFill>
+                  <a:srgbClr val="34465C"/>
+                </a:solidFill>
+                <a:latin typeface="Malgun Gothic"/>
+              </a:rPr>
+              <a:t>부하</a:t>
+            </a:r>
+            <a:r>
+              <a:rPr sz="1100" b="0" dirty="0">
+                <a:solidFill>
+                  <a:srgbClr val="34465C"/>
+                </a:solidFill>
+                <a:latin typeface="Malgun Gothic"/>
+              </a:rPr>
+              <a:t> 3회 중 1회꼴로 p99가 3~4배 </a:t>
+            </a:r>
+            <a:r>
+              <a:rPr sz="1100" b="0" dirty="0" err="1">
+                <a:solidFill>
+                  <a:srgbClr val="34465C"/>
+                </a:solidFill>
+                <a:latin typeface="Malgun Gothic"/>
+              </a:rPr>
+              <a:t>튀는</a:t>
+            </a:r>
+            <a:r>
+              <a:rPr sz="1100" b="0" dirty="0">
+                <a:solidFill>
+                  <a:srgbClr val="34465C"/>
+                </a:solidFill>
+                <a:latin typeface="Malgun Gothic"/>
+              </a:rPr>
+              <a:t> </a:t>
+            </a:r>
+            <a:r>
+              <a:rPr sz="1100" b="0" dirty="0" err="1">
+                <a:solidFill>
+                  <a:srgbClr val="34465C"/>
+                </a:solidFill>
+                <a:latin typeface="Malgun Gothic"/>
+              </a:rPr>
+              <a:t>구간</a:t>
+            </a:r>
+            <a:r>
+              <a:rPr sz="1100" b="0" dirty="0">
+                <a:solidFill>
+                  <a:srgbClr val="34465C"/>
+                </a:solidFill>
+                <a:latin typeface="Malgun Gothic"/>
+              </a:rPr>
+              <a:t> </a:t>
+            </a:r>
+            <a:r>
+              <a:rPr sz="1100" b="0" dirty="0" err="1">
+                <a:solidFill>
+                  <a:srgbClr val="34465C"/>
+                </a:solidFill>
+                <a:latin typeface="Malgun Gothic"/>
+              </a:rPr>
+              <a:t>발생</a:t>
+            </a:r>
+            <a:r>
+              <a:rPr sz="1100" b="0" dirty="0">
+                <a:solidFill>
+                  <a:srgbClr val="34465C"/>
+                </a:solidFill>
+                <a:latin typeface="Malgun Gothic"/>
+              </a:rPr>
+              <a:t> (</a:t>
+            </a:r>
+            <a:r>
+              <a:rPr sz="1100" b="0" dirty="0" err="1">
+                <a:solidFill>
+                  <a:srgbClr val="34465C"/>
+                </a:solidFill>
+                <a:latin typeface="Malgun Gothic"/>
+              </a:rPr>
+              <a:t>원인</a:t>
+            </a:r>
+            <a:r>
+              <a:rPr sz="1100" b="0" dirty="0">
+                <a:solidFill>
+                  <a:srgbClr val="34465C"/>
+                </a:solidFill>
+                <a:latin typeface="Malgun Gothic"/>
+              </a:rPr>
+              <a:t> </a:t>
+            </a:r>
+            <a:r>
+              <a:rPr sz="1100" b="0" dirty="0" err="1">
+                <a:solidFill>
+                  <a:srgbClr val="34465C"/>
+                </a:solidFill>
+                <a:latin typeface="Malgun Gothic"/>
+              </a:rPr>
+              <a:t>미확정</a:t>
+            </a:r>
+            <a:r>
+              <a:rPr sz="1100" b="0" dirty="0">
+                <a:solidFill>
+                  <a:srgbClr val="34465C"/>
+                </a:solidFill>
+                <a:latin typeface="Malgun Gothic"/>
+              </a:rPr>
+              <a:t>)</a:t>
             </a:r>
           </a:p>
           <a:p>
@@ -18485,14 +21137,173 @@
               </a:spcAft>
             </a:pPr>
             <a:r>
-              <a:rPr sz="1100" b="0">
-                <a:solidFill>
-                  <a:srgbClr val="34465C"/>
-                </a:solidFill>
-                <a:latin typeface="Malgun Gothic"/>
-              </a:rPr>
-              <a:t>· HA 해제 상태에서는 v2의 p99가 오히려 30% 높게 측정 — 장시간 검증 후 전환 권고</a:t>
-            </a:r>
+              <a:rPr sz="1100" b="0" dirty="0">
+                <a:solidFill>
+                  <a:srgbClr val="34465C"/>
+                </a:solidFill>
+                <a:latin typeface="Malgun Gothic"/>
+              </a:rPr>
+              <a:t>· HA </a:t>
+            </a:r>
+            <a:r>
+              <a:rPr sz="1100" b="0" dirty="0" err="1">
+                <a:solidFill>
+                  <a:srgbClr val="34465C"/>
+                </a:solidFill>
+                <a:latin typeface="Malgun Gothic"/>
+              </a:rPr>
+              <a:t>해제</a:t>
+            </a:r>
+            <a:r>
+              <a:rPr sz="1100" b="0" dirty="0">
+                <a:solidFill>
+                  <a:srgbClr val="34465C"/>
+                </a:solidFill>
+                <a:latin typeface="Malgun Gothic"/>
+              </a:rPr>
+              <a:t> </a:t>
+            </a:r>
+            <a:r>
+              <a:rPr sz="1100" b="0" dirty="0" err="1">
+                <a:solidFill>
+                  <a:srgbClr val="34465C"/>
+                </a:solidFill>
+                <a:latin typeface="Malgun Gothic"/>
+              </a:rPr>
+              <a:t>상태에서는</a:t>
+            </a:r>
+            <a:r>
+              <a:rPr sz="1100" b="0" dirty="0">
+                <a:solidFill>
+                  <a:srgbClr val="34465C"/>
+                </a:solidFill>
+                <a:latin typeface="Malgun Gothic"/>
+              </a:rPr>
+              <a:t> v2의 p99가 </a:t>
+            </a:r>
+            <a:r>
+              <a:rPr sz="1100" b="0" dirty="0" err="1">
+                <a:solidFill>
+                  <a:srgbClr val="34465C"/>
+                </a:solidFill>
+                <a:latin typeface="Malgun Gothic"/>
+              </a:rPr>
+              <a:t>오히려</a:t>
+            </a:r>
+            <a:r>
+              <a:rPr sz="1100" b="0" dirty="0">
+                <a:solidFill>
+                  <a:srgbClr val="34465C"/>
+                </a:solidFill>
+                <a:latin typeface="Malgun Gothic"/>
+              </a:rPr>
+              <a:t> 30% </a:t>
+            </a:r>
+            <a:r>
+              <a:rPr sz="1100" b="0" dirty="0" err="1">
+                <a:solidFill>
+                  <a:srgbClr val="34465C"/>
+                </a:solidFill>
+                <a:latin typeface="Malgun Gothic"/>
+              </a:rPr>
+              <a:t>높게</a:t>
+            </a:r>
+            <a:r>
+              <a:rPr sz="1100" b="0" dirty="0">
+                <a:solidFill>
+                  <a:srgbClr val="34465C"/>
+                </a:solidFill>
+                <a:latin typeface="Malgun Gothic"/>
+              </a:rPr>
+              <a:t> </a:t>
+            </a:r>
+            <a:r>
+              <a:rPr sz="1100" b="0" dirty="0" err="1">
+                <a:solidFill>
+                  <a:srgbClr val="34465C"/>
+                </a:solidFill>
+                <a:latin typeface="Malgun Gothic"/>
+              </a:rPr>
+              <a:t>측정</a:t>
+            </a:r>
+            <a:r>
+              <a:rPr sz="1100" b="0" dirty="0">
+                <a:solidFill>
+                  <a:srgbClr val="34465C"/>
+                </a:solidFill>
+                <a:latin typeface="Malgun Gothic"/>
+              </a:rPr>
+              <a:t> — </a:t>
+            </a:r>
+            <a:r>
+              <a:rPr sz="1100" b="0" dirty="0" err="1">
+                <a:solidFill>
+                  <a:srgbClr val="34465C"/>
+                </a:solidFill>
+                <a:latin typeface="Malgun Gothic"/>
+              </a:rPr>
+              <a:t>장시간</a:t>
+            </a:r>
+            <a:r>
+              <a:rPr sz="1100" b="0" dirty="0">
+                <a:solidFill>
+                  <a:srgbClr val="34465C"/>
+                </a:solidFill>
+                <a:latin typeface="Malgun Gothic"/>
+              </a:rPr>
+              <a:t> </a:t>
+            </a:r>
+            <a:r>
+              <a:rPr sz="1100" b="0" dirty="0" err="1">
+                <a:solidFill>
+                  <a:srgbClr val="34465C"/>
+                </a:solidFill>
+                <a:latin typeface="Malgun Gothic"/>
+              </a:rPr>
+              <a:t>검증</a:t>
+            </a:r>
+            <a:r>
+              <a:rPr sz="1100" b="0" dirty="0">
+                <a:solidFill>
+                  <a:srgbClr val="34465C"/>
+                </a:solidFill>
+                <a:latin typeface="Malgun Gothic"/>
+              </a:rPr>
+              <a:t> 후 </a:t>
+            </a:r>
+            <a:r>
+              <a:rPr sz="1100" b="0" dirty="0" err="1">
+                <a:solidFill>
+                  <a:srgbClr val="34465C"/>
+                </a:solidFill>
+                <a:latin typeface="Malgun Gothic"/>
+              </a:rPr>
+              <a:t>전환</a:t>
+            </a:r>
+            <a:r>
+              <a:rPr sz="1100" b="0" dirty="0">
+                <a:solidFill>
+                  <a:srgbClr val="34465C"/>
+                </a:solidFill>
+                <a:latin typeface="Malgun Gothic"/>
+              </a:rPr>
+              <a:t> </a:t>
+            </a:r>
+            <a:r>
+              <a:rPr sz="1100" b="0" dirty="0" err="1">
+                <a:solidFill>
+                  <a:srgbClr val="34465C"/>
+                </a:solidFill>
+                <a:latin typeface="Malgun Gothic"/>
+              </a:rPr>
+              <a:t>권고</a:t>
+            </a:r>
+            <a:endParaRPr sz="1100" b="0" dirty="0">
+              <a:solidFill>
+                <a:srgbClr val="34465C"/>
+              </a:solidFill>
+              <a:latin typeface="Malgun Gothic"/>
+            </a:endParaRPr>
           </a:p>
         </p:txBody>
       </p:sp>
@@ -18653,13 +21464,67 @@
               </a:spcAft>
             </a:pPr>
             <a:r>
-              <a:rPr sz="1100" b="0">
-                <a:solidFill>
-                  <a:srgbClr val="34465C"/>
-                </a:solidFill>
-                <a:latin typeface="Malgun Gothic"/>
-              </a:rPr>
-              <a:t>· 초당 5,500건 부하에서 p99가 PostgreSQL 32ms vs HorizonDB 4.4ms</a:t>
+              <a:rPr sz="1100" b="0" dirty="0">
+                <a:solidFill>
+                  <a:srgbClr val="34465C"/>
+                </a:solidFill>
+                <a:latin typeface="Malgun Gothic"/>
+              </a:rPr>
+              <a:t>· </a:t>
+            </a:r>
+            <a:r>
+              <a:rPr sz="1100" b="0" dirty="0" err="1">
+                <a:solidFill>
+                  <a:srgbClr val="34465C"/>
+                </a:solidFill>
+                <a:latin typeface="Malgun Gothic"/>
+              </a:rPr>
+              <a:t>초당</a:t>
+            </a:r>
+            <a:r>
+              <a:rPr sz="1100" b="0" dirty="0">
+                <a:solidFill>
+                  <a:srgbClr val="34465C"/>
+                </a:solidFill>
+                <a:latin typeface="Malgun Gothic"/>
+              </a:rPr>
+              <a:t> 5,500건 </a:t>
+            </a:r>
+            <a:r>
+              <a:rPr sz="1100" b="0" dirty="0" err="1">
+                <a:solidFill>
+                  <a:srgbClr val="34465C"/>
+                </a:solidFill>
+                <a:latin typeface="Malgun Gothic"/>
+              </a:rPr>
+              <a:t>부하에서</a:t>
+            </a:r>
+            <a:r>
+              <a:rPr sz="1100" b="0" dirty="0">
+                <a:solidFill>
+                  <a:srgbClr val="34465C"/>
+                </a:solidFill>
+                <a:latin typeface="Malgun Gothic"/>
+              </a:rPr>
+              <a:t> p99가 PostgreSQL 32ms vs </a:t>
+            </a:r>
+            <a:r>
+              <a:rPr sz="1100" b="0" dirty="0" err="1">
+                <a:solidFill>
+                  <a:srgbClr val="34465C"/>
+                </a:solidFill>
+                <a:latin typeface="Malgun Gothic"/>
+              </a:rPr>
+              <a:t>HorizonDB</a:t>
+            </a:r>
+            <a:r>
+              <a:rPr sz="1100" b="0" dirty="0">
+                <a:solidFill>
+                  <a:srgbClr val="34465C"/>
+                </a:solidFill>
+                <a:latin typeface="Malgun Gothic"/>
+              </a:rPr>
+              <a:t> 4.4ms</a:t>
             </a:r>
           </a:p>
           <a:p>
@@ -18669,14 +21534,155 @@
               </a:spcAft>
             </a:pPr>
             <a:r>
-              <a:rPr sz="1100" b="0">
-                <a:solidFill>
-                  <a:srgbClr val="34465C"/>
-                </a:solidFill>
-                <a:latin typeface="Malgun Gothic"/>
-              </a:rPr>
-              <a:t>· 부하를 3배로 튀겨도(로그인 러시) 지연이 거의 흔들리지 않음</a:t>
-            </a:r>
+              <a:rPr sz="1100" b="0" dirty="0">
+                <a:solidFill>
+                  <a:srgbClr val="34465C"/>
+                </a:solidFill>
+                <a:latin typeface="Malgun Gothic"/>
+              </a:rPr>
+              <a:t>· </a:t>
+            </a:r>
+            <a:r>
+              <a:rPr sz="1100" b="0" dirty="0" err="1">
+                <a:solidFill>
+                  <a:srgbClr val="34465C"/>
+                </a:solidFill>
+                <a:latin typeface="Malgun Gothic"/>
+              </a:rPr>
+              <a:t>부하를</a:t>
+            </a:r>
+            <a:r>
+              <a:rPr sz="1100" b="0" dirty="0">
+                <a:solidFill>
+                  <a:srgbClr val="34465C"/>
+                </a:solidFill>
+                <a:latin typeface="Malgun Gothic"/>
+              </a:rPr>
+              <a:t> 3배로 </a:t>
+            </a:r>
+            <a:r>
+              <a:rPr sz="1100" b="0" dirty="0" err="1">
+                <a:solidFill>
+                  <a:srgbClr val="34465C"/>
+                </a:solidFill>
+                <a:latin typeface="Malgun Gothic"/>
+              </a:rPr>
+              <a:t>튀겨도</a:t>
+            </a:r>
+            <a:r>
+              <a:rPr sz="1100" b="0" dirty="0">
+                <a:solidFill>
+                  <a:srgbClr val="34465C"/>
+                </a:solidFill>
+                <a:latin typeface="Malgun Gothic"/>
+              </a:rPr>
+              <a:t>(</a:t>
+            </a:r>
+            <a:r>
+              <a:rPr sz="1100" b="0" dirty="0" err="1">
+                <a:solidFill>
+                  <a:srgbClr val="34465C"/>
+                </a:solidFill>
+                <a:latin typeface="Malgun Gothic"/>
+              </a:rPr>
+              <a:t>로그인</a:t>
+            </a:r>
+            <a:r>
+              <a:rPr sz="1100" b="0" dirty="0">
+                <a:solidFill>
+                  <a:srgbClr val="34465C"/>
+                </a:solidFill>
+                <a:latin typeface="Malgun Gothic"/>
+              </a:rPr>
+              <a:t> </a:t>
+            </a:r>
+            <a:r>
+              <a:rPr sz="1100" b="0" dirty="0" err="1">
+                <a:solidFill>
+                  <a:srgbClr val="34465C"/>
+                </a:solidFill>
+                <a:latin typeface="Malgun Gothic"/>
+              </a:rPr>
+              <a:t>러시</a:t>
+            </a:r>
+            <a:r>
+              <a:rPr sz="1100" b="0" dirty="0">
+                <a:solidFill>
+                  <a:srgbClr val="34465C"/>
+                </a:solidFill>
+                <a:latin typeface="Malgun Gothic"/>
+              </a:rPr>
+              <a:t>) </a:t>
+            </a:r>
+            <a:r>
+              <a:rPr sz="1100" b="0" dirty="0" err="1">
+                <a:solidFill>
+                  <a:srgbClr val="34465C"/>
+                </a:solidFill>
+                <a:latin typeface="Malgun Gothic"/>
+              </a:rPr>
+              <a:t>지연이</a:t>
+            </a:r>
+            <a:r>
+              <a:rPr sz="1100" b="0" dirty="0">
+                <a:solidFill>
+                  <a:srgbClr val="34465C"/>
+                </a:solidFill>
+                <a:latin typeface="Malgun Gothic"/>
+              </a:rPr>
+              <a:t> </a:t>
+            </a:r>
+            <a:r>
+              <a:rPr sz="1100" b="0" dirty="0" err="1">
+                <a:solidFill>
+                  <a:srgbClr val="34465C"/>
+                </a:solidFill>
+                <a:latin typeface="Malgun Gothic"/>
+              </a:rPr>
+              <a:t>거의</a:t>
+            </a:r>
+            <a:r>
+              <a:rPr sz="1100" b="0" dirty="0">
+                <a:solidFill>
+                  <a:srgbClr val="34465C"/>
+                </a:solidFill>
+                <a:latin typeface="Malgun Gothic"/>
+              </a:rPr>
+              <a:t> </a:t>
+            </a:r>
+            <a:r>
+              <a:rPr sz="1100" b="0" dirty="0" err="1">
+                <a:solidFill>
+                  <a:srgbClr val="34465C"/>
+                </a:solidFill>
+                <a:latin typeface="Malgun Gothic"/>
+              </a:rPr>
+              <a:t>흔들리지</a:t>
+            </a:r>
+            <a:r>
+              <a:rPr sz="1100" b="0" dirty="0">
+                <a:solidFill>
+                  <a:srgbClr val="34465C"/>
+                </a:solidFill>
+                <a:latin typeface="Malgun Gothic"/>
+              </a:rPr>
+              <a:t> </a:t>
+            </a:r>
+            <a:r>
+              <a:rPr sz="1100" b="0" dirty="0" err="1">
+                <a:solidFill>
+                  <a:srgbClr val="34465C"/>
+                </a:solidFill>
+                <a:latin typeface="Malgun Gothic"/>
+              </a:rPr>
+              <a:t>않음</a:t>
+            </a:r>
+            <a:endParaRPr sz="1100" b="0" dirty="0">
+              <a:solidFill>
+                <a:srgbClr val="34465C"/>
+              </a:solidFill>
+              <a:latin typeface="Malgun Gothic"/>
+            </a:endParaRPr>
           </a:p>
         </p:txBody>
       </p:sp>
@@ -19930,14 +22936,191 @@
               </a:spcAft>
             </a:pPr>
             <a:r>
-              <a:rPr sz="1150" b="0">
-                <a:solidFill>
-                  <a:srgbClr val="34465C"/>
-                </a:solidFill>
-                <a:latin typeface="Malgun Gothic"/>
-              </a:rPr>
-              <a:t>· 측정 전 10가지 검증 기준(게이트)을 정하고, 하나라도 어기면 그 측정은 폐기 후 재실행</a:t>
-            </a:r>
+              <a:rPr sz="1150" b="0" dirty="0">
+                <a:solidFill>
+                  <a:srgbClr val="34465C"/>
+                </a:solidFill>
+                <a:latin typeface="Malgun Gothic"/>
+              </a:rPr>
+              <a:t>· </a:t>
+            </a:r>
+            <a:r>
+              <a:rPr sz="1150" b="0" dirty="0" err="1">
+                <a:solidFill>
+                  <a:srgbClr val="34465C"/>
+                </a:solidFill>
+                <a:latin typeface="Malgun Gothic"/>
+              </a:rPr>
+              <a:t>측정</a:t>
+            </a:r>
+            <a:r>
+              <a:rPr sz="1150" b="0" dirty="0">
+                <a:solidFill>
+                  <a:srgbClr val="34465C"/>
+                </a:solidFill>
+                <a:latin typeface="Malgun Gothic"/>
+              </a:rPr>
+              <a:t> 전 10가지 </a:t>
+            </a:r>
+            <a:r>
+              <a:rPr sz="1150" b="0" dirty="0" err="1">
+                <a:solidFill>
+                  <a:srgbClr val="34465C"/>
+                </a:solidFill>
+                <a:latin typeface="Malgun Gothic"/>
+              </a:rPr>
+              <a:t>검증</a:t>
+            </a:r>
+            <a:r>
+              <a:rPr sz="1150" b="0" dirty="0">
+                <a:solidFill>
+                  <a:srgbClr val="34465C"/>
+                </a:solidFill>
+                <a:latin typeface="Malgun Gothic"/>
+              </a:rPr>
+              <a:t> </a:t>
+            </a:r>
+            <a:r>
+              <a:rPr sz="1150" b="0" dirty="0" err="1">
+                <a:solidFill>
+                  <a:srgbClr val="34465C"/>
+                </a:solidFill>
+                <a:latin typeface="Malgun Gothic"/>
+              </a:rPr>
+              <a:t>기준</a:t>
+            </a:r>
+            <a:r>
+              <a:rPr sz="1150" b="0" dirty="0">
+                <a:solidFill>
+                  <a:srgbClr val="34465C"/>
+                </a:solidFill>
+                <a:latin typeface="Malgun Gothic"/>
+              </a:rPr>
+              <a:t>(</a:t>
+            </a:r>
+            <a:r>
+              <a:rPr sz="1150" b="0" dirty="0" err="1">
+                <a:solidFill>
+                  <a:srgbClr val="34465C"/>
+                </a:solidFill>
+                <a:latin typeface="Malgun Gothic"/>
+              </a:rPr>
+              <a:t>게이트</a:t>
+            </a:r>
+            <a:r>
+              <a:rPr sz="1150" b="0" dirty="0">
+                <a:solidFill>
+                  <a:srgbClr val="34465C"/>
+                </a:solidFill>
+                <a:latin typeface="Malgun Gothic"/>
+              </a:rPr>
+              <a:t>)을 </a:t>
+            </a:r>
+            <a:r>
+              <a:rPr sz="1150" b="0" dirty="0" err="1">
+                <a:solidFill>
+                  <a:srgbClr val="34465C"/>
+                </a:solidFill>
+                <a:latin typeface="Malgun Gothic"/>
+              </a:rPr>
+              <a:t>정하고</a:t>
+            </a:r>
+            <a:r>
+              <a:rPr sz="1150" b="0" dirty="0">
+                <a:solidFill>
+                  <a:srgbClr val="34465C"/>
+                </a:solidFill>
+                <a:latin typeface="Malgun Gothic"/>
+              </a:rPr>
+              <a:t>, </a:t>
+            </a:r>
+            <a:r>
+              <a:rPr sz="1150" b="0" dirty="0" err="1">
+                <a:solidFill>
+                  <a:srgbClr val="34465C"/>
+                </a:solidFill>
+                <a:latin typeface="Malgun Gothic"/>
+              </a:rPr>
+              <a:t>하나라도</a:t>
+            </a:r>
+            <a:r>
+              <a:rPr sz="1150" b="0" dirty="0">
+                <a:solidFill>
+                  <a:srgbClr val="34465C"/>
+                </a:solidFill>
+                <a:latin typeface="Malgun Gothic"/>
+              </a:rPr>
+              <a:t> </a:t>
+            </a:r>
+            <a:r>
+              <a:rPr sz="1150" b="0" dirty="0" err="1">
+                <a:solidFill>
+                  <a:srgbClr val="34465C"/>
+                </a:solidFill>
+                <a:latin typeface="Malgun Gothic"/>
+              </a:rPr>
+              <a:t>어기면</a:t>
+            </a:r>
+            <a:r>
+              <a:rPr sz="1150" b="0" dirty="0">
+                <a:solidFill>
+                  <a:srgbClr val="34465C"/>
+                </a:solidFill>
+                <a:latin typeface="Malgun Gothic"/>
+              </a:rPr>
+              <a:t> 그 </a:t>
+            </a:r>
+            <a:r>
+              <a:rPr sz="1150" b="0" dirty="0" err="1">
+                <a:solidFill>
+                  <a:srgbClr val="34465C"/>
+                </a:solidFill>
+                <a:latin typeface="Malgun Gothic"/>
+              </a:rPr>
+              <a:t>측정은</a:t>
+            </a:r>
+            <a:r>
+              <a:rPr sz="1150" b="0" dirty="0">
+                <a:solidFill>
+                  <a:srgbClr val="34465C"/>
+                </a:solidFill>
+                <a:latin typeface="Malgun Gothic"/>
+              </a:rPr>
+              <a:t> </a:t>
+            </a:r>
+            <a:r>
+              <a:rPr sz="1150" b="0" dirty="0" err="1">
+                <a:solidFill>
+                  <a:srgbClr val="34465C"/>
+                </a:solidFill>
+                <a:latin typeface="Malgun Gothic"/>
+              </a:rPr>
+              <a:t>폐기</a:t>
+            </a:r>
+            <a:r>
+              <a:rPr sz="1150" b="0" dirty="0">
+                <a:solidFill>
+                  <a:srgbClr val="34465C"/>
+                </a:solidFill>
+                <a:latin typeface="Malgun Gothic"/>
+              </a:rPr>
+              <a:t> 후 </a:t>
+            </a:r>
+            <a:r>
+              <a:rPr sz="1150" b="0" dirty="0" err="1">
+                <a:solidFill>
+                  <a:srgbClr val="34465C"/>
+                </a:solidFill>
+                <a:latin typeface="Malgun Gothic"/>
+              </a:rPr>
+              <a:t>재실행</a:t>
+            </a:r>
+            <a:endParaRPr sz="1150" b="0" dirty="0">
+              <a:solidFill>
+                <a:srgbClr val="34465C"/>
+              </a:solidFill>
+              <a:latin typeface="Malgun Gothic"/>
+            </a:endParaRPr>
           </a:p>
           <a:p>
             <a:pPr algn="l">
@@ -19946,14 +23129,173 @@
               </a:spcAft>
             </a:pPr>
             <a:r>
-              <a:rPr sz="1150" b="0">
-                <a:solidFill>
-                  <a:srgbClr val="34465C"/>
-                </a:solidFill>
-                <a:latin typeface="Malgun Gothic"/>
-              </a:rPr>
-              <a:t>· 데이터 크기를 메모리의 3배(약 24GiB)로 키워 디스크가 실제로 일하는 상태에서 측정</a:t>
-            </a:r>
+              <a:rPr sz="1150" b="0" dirty="0">
+                <a:solidFill>
+                  <a:srgbClr val="34465C"/>
+                </a:solidFill>
+                <a:latin typeface="Malgun Gothic"/>
+              </a:rPr>
+              <a:t>· </a:t>
+            </a:r>
+            <a:r>
+              <a:rPr sz="1150" b="0" dirty="0" err="1">
+                <a:solidFill>
+                  <a:srgbClr val="34465C"/>
+                </a:solidFill>
+                <a:latin typeface="Malgun Gothic"/>
+              </a:rPr>
+              <a:t>데이터</a:t>
+            </a:r>
+            <a:r>
+              <a:rPr sz="1150" b="0" dirty="0">
+                <a:solidFill>
+                  <a:srgbClr val="34465C"/>
+                </a:solidFill>
+                <a:latin typeface="Malgun Gothic"/>
+              </a:rPr>
+              <a:t> </a:t>
+            </a:r>
+            <a:r>
+              <a:rPr sz="1150" b="0" dirty="0" err="1">
+                <a:solidFill>
+                  <a:srgbClr val="34465C"/>
+                </a:solidFill>
+                <a:latin typeface="Malgun Gothic"/>
+              </a:rPr>
+              <a:t>크기를</a:t>
+            </a:r>
+            <a:r>
+              <a:rPr sz="1150" b="0" dirty="0">
+                <a:solidFill>
+                  <a:srgbClr val="34465C"/>
+                </a:solidFill>
+                <a:latin typeface="Malgun Gothic"/>
+              </a:rPr>
+              <a:t> </a:t>
+            </a:r>
+            <a:r>
+              <a:rPr sz="1150" b="0" dirty="0" err="1">
+                <a:solidFill>
+                  <a:srgbClr val="34465C"/>
+                </a:solidFill>
+                <a:latin typeface="Malgun Gothic"/>
+              </a:rPr>
+              <a:t>메모리의</a:t>
+            </a:r>
+            <a:r>
+              <a:rPr sz="1150" b="0" dirty="0">
+                <a:solidFill>
+                  <a:srgbClr val="34465C"/>
+                </a:solidFill>
+                <a:latin typeface="Malgun Gothic"/>
+              </a:rPr>
+              <a:t> 3배(약 24GiB)로 </a:t>
+            </a:r>
+            <a:r>
+              <a:rPr sz="1150" b="0" dirty="0" err="1">
+                <a:solidFill>
+                  <a:srgbClr val="34465C"/>
+                </a:solidFill>
+                <a:latin typeface="Malgun Gothic"/>
+              </a:rPr>
+              <a:t>키워</a:t>
+            </a:r>
+            <a:r>
+              <a:rPr sz="1150" b="0" dirty="0">
+                <a:solidFill>
+                  <a:srgbClr val="34465C"/>
+                </a:solidFill>
+                <a:latin typeface="Malgun Gothic"/>
+              </a:rPr>
+              <a:t> </a:t>
+            </a:r>
+            <a:r>
+              <a:rPr sz="1150" b="0" dirty="0" err="1">
+                <a:solidFill>
+                  <a:srgbClr val="34465C"/>
+                </a:solidFill>
+                <a:latin typeface="Malgun Gothic"/>
+              </a:rPr>
+              <a:t>디스크가</a:t>
+            </a:r>
+            <a:r>
+              <a:rPr sz="1150" b="0" dirty="0">
+                <a:solidFill>
+                  <a:srgbClr val="34465C"/>
+                </a:solidFill>
+                <a:latin typeface="Malgun Gothic"/>
+              </a:rPr>
+              <a:t> </a:t>
+            </a:r>
+            <a:r>
+              <a:rPr sz="1150" b="0" dirty="0" err="1">
+                <a:solidFill>
+                  <a:srgbClr val="34465C"/>
+                </a:solidFill>
+                <a:latin typeface="Malgun Gothic"/>
+              </a:rPr>
+              <a:t>실제로</a:t>
+            </a:r>
+            <a:r>
+              <a:rPr sz="1150" b="0" dirty="0">
+                <a:solidFill>
+                  <a:srgbClr val="34465C"/>
+                </a:solidFill>
+                <a:latin typeface="Malgun Gothic"/>
+              </a:rPr>
+              <a:t> </a:t>
+            </a:r>
+            <a:r>
+              <a:rPr sz="1150" b="0" dirty="0" err="1">
+                <a:solidFill>
+                  <a:srgbClr val="34465C"/>
+                </a:solidFill>
+                <a:latin typeface="Malgun Gothic"/>
+              </a:rPr>
+              <a:t>일하는</a:t>
+            </a:r>
+            <a:r>
+              <a:rPr sz="1150" b="0" dirty="0">
+                <a:solidFill>
+                  <a:srgbClr val="34465C"/>
+                </a:solidFill>
+                <a:latin typeface="Malgun Gothic"/>
+              </a:rPr>
+              <a:t> </a:t>
+            </a:r>
+            <a:r>
+              <a:rPr sz="1150" b="0" dirty="0" err="1">
+                <a:solidFill>
+                  <a:srgbClr val="34465C"/>
+                </a:solidFill>
+                <a:latin typeface="Malgun Gothic"/>
+              </a:rPr>
+              <a:t>상태에서</a:t>
+            </a:r>
+            <a:r>
+              <a:rPr sz="1150" b="0" dirty="0">
+                <a:solidFill>
+                  <a:srgbClr val="34465C"/>
+                </a:solidFill>
+                <a:latin typeface="Malgun Gothic"/>
+              </a:rPr>
+              <a:t> </a:t>
+            </a:r>
+            <a:r>
+              <a:rPr sz="1150" b="0" dirty="0" err="1">
+                <a:solidFill>
+                  <a:srgbClr val="34465C"/>
+                </a:solidFill>
+                <a:latin typeface="Malgun Gothic"/>
+              </a:rPr>
+              <a:t>측정</a:t>
+            </a:r>
+            <a:endParaRPr sz="1150" b="0" dirty="0">
+              <a:solidFill>
+                <a:srgbClr val="34465C"/>
+              </a:solidFill>
+              <a:latin typeface="Malgun Gothic"/>
+            </a:endParaRPr>
           </a:p>
           <a:p>
             <a:pPr algn="l">
@@ -19962,14 +23304,191 @@
               </a:spcAft>
             </a:pPr>
             <a:r>
-              <a:rPr sz="1150" b="0">
-                <a:solidFill>
-                  <a:srgbClr val="34465C"/>
-                </a:solidFill>
-                <a:latin typeface="Malgun Gothic"/>
-              </a:rPr>
-              <a:t>· 클라이언트 자원(CPU·연결·큐)을 함께 기록해 “측정 도구가 병목이 아니었다”를 증명</a:t>
-            </a:r>
+              <a:rPr sz="1150" b="0" dirty="0">
+                <a:solidFill>
+                  <a:srgbClr val="34465C"/>
+                </a:solidFill>
+                <a:latin typeface="Malgun Gothic"/>
+              </a:rPr>
+              <a:t>· </a:t>
+            </a:r>
+            <a:r>
+              <a:rPr sz="1150" b="0" dirty="0" err="1">
+                <a:solidFill>
+                  <a:srgbClr val="34465C"/>
+                </a:solidFill>
+                <a:latin typeface="Malgun Gothic"/>
+              </a:rPr>
+              <a:t>클라이언트</a:t>
+            </a:r>
+            <a:r>
+              <a:rPr sz="1150" b="0" dirty="0">
+                <a:solidFill>
+                  <a:srgbClr val="34465C"/>
+                </a:solidFill>
+                <a:latin typeface="Malgun Gothic"/>
+              </a:rPr>
+              <a:t> </a:t>
+            </a:r>
+            <a:r>
+              <a:rPr sz="1150" b="0" dirty="0" err="1">
+                <a:solidFill>
+                  <a:srgbClr val="34465C"/>
+                </a:solidFill>
+                <a:latin typeface="Malgun Gothic"/>
+              </a:rPr>
+              <a:t>자원</a:t>
+            </a:r>
+            <a:r>
+              <a:rPr sz="1150" b="0" dirty="0">
+                <a:solidFill>
+                  <a:srgbClr val="34465C"/>
+                </a:solidFill>
+                <a:latin typeface="Malgun Gothic"/>
+              </a:rPr>
+              <a:t>(</a:t>
+            </a:r>
+            <a:r>
+              <a:rPr sz="1150" b="0" dirty="0" err="1">
+                <a:solidFill>
+                  <a:srgbClr val="34465C"/>
+                </a:solidFill>
+                <a:latin typeface="Malgun Gothic"/>
+              </a:rPr>
+              <a:t>CPU·연결·큐</a:t>
+            </a:r>
+            <a:r>
+              <a:rPr sz="1150" b="0" dirty="0">
+                <a:solidFill>
+                  <a:srgbClr val="34465C"/>
+                </a:solidFill>
+                <a:latin typeface="Malgun Gothic"/>
+              </a:rPr>
+              <a:t>)을 </a:t>
+            </a:r>
+            <a:r>
+              <a:rPr sz="1150" b="0" dirty="0" err="1">
+                <a:solidFill>
+                  <a:srgbClr val="34465C"/>
+                </a:solidFill>
+                <a:latin typeface="Malgun Gothic"/>
+              </a:rPr>
+              <a:t>함께</a:t>
+            </a:r>
+            <a:r>
+              <a:rPr sz="1150" b="0" dirty="0">
+                <a:solidFill>
+                  <a:srgbClr val="34465C"/>
+                </a:solidFill>
+                <a:latin typeface="Malgun Gothic"/>
+              </a:rPr>
+              <a:t> </a:t>
+            </a:r>
+            <a:r>
+              <a:rPr sz="1150" b="0" dirty="0" err="1">
+                <a:solidFill>
+                  <a:srgbClr val="34465C"/>
+                </a:solidFill>
+                <a:latin typeface="Malgun Gothic"/>
+              </a:rPr>
+              <a:t>기록해</a:t>
+            </a:r>
+            <a:r>
+              <a:rPr sz="1150" b="0" dirty="0">
+                <a:solidFill>
+                  <a:srgbClr val="34465C"/>
+                </a:solidFill>
+                <a:latin typeface="Malgun Gothic"/>
+              </a:rPr>
+              <a:t> “</a:t>
+            </a:r>
+            <a:r>
+              <a:rPr sz="1150" b="0" dirty="0" err="1">
+                <a:solidFill>
+                  <a:srgbClr val="34465C"/>
+                </a:solidFill>
+                <a:latin typeface="Malgun Gothic"/>
+              </a:rPr>
+              <a:t>측정</a:t>
+            </a:r>
+            <a:r>
+              <a:rPr sz="1150" b="0" dirty="0">
+                <a:solidFill>
+                  <a:srgbClr val="34465C"/>
+                </a:solidFill>
+                <a:latin typeface="Malgun Gothic"/>
+              </a:rPr>
+              <a:t> </a:t>
+            </a:r>
+            <a:r>
+              <a:rPr sz="1150" b="0" dirty="0" err="1">
+                <a:solidFill>
+                  <a:srgbClr val="34465C"/>
+                </a:solidFill>
+                <a:latin typeface="Malgun Gothic"/>
+              </a:rPr>
+              <a:t>도구가</a:t>
+            </a:r>
+            <a:r>
+              <a:rPr sz="1150" b="0" dirty="0">
+                <a:solidFill>
+                  <a:srgbClr val="34465C"/>
+                </a:solidFill>
+                <a:latin typeface="Malgun Gothic"/>
+              </a:rPr>
+              <a:t> </a:t>
+            </a:r>
+            <a:r>
+              <a:rPr sz="1150" b="0" dirty="0" err="1">
+                <a:solidFill>
+                  <a:srgbClr val="34465C"/>
+                </a:solidFill>
+                <a:latin typeface="Malgun Gothic"/>
+              </a:rPr>
+              <a:t>병목이</a:t>
+            </a:r>
+            <a:r>
+              <a:rPr sz="1150" b="0" dirty="0">
+                <a:solidFill>
+                  <a:srgbClr val="34465C"/>
+                </a:solidFill>
+                <a:latin typeface="Malgun Gothic"/>
+              </a:rPr>
+              <a:t> </a:t>
+            </a:r>
+            <a:r>
+              <a:rPr sz="1150" b="0" dirty="0" err="1">
+                <a:solidFill>
+                  <a:srgbClr val="34465C"/>
+                </a:solidFill>
+                <a:latin typeface="Malgun Gothic"/>
+              </a:rPr>
+              <a:t>아니었다”를</a:t>
+            </a:r>
+            <a:r>
+              <a:rPr sz="1150" b="0" dirty="0">
+                <a:solidFill>
+                  <a:srgbClr val="34465C"/>
+                </a:solidFill>
+                <a:latin typeface="Malgun Gothic"/>
+              </a:rPr>
+              <a:t> </a:t>
+            </a:r>
+            <a:r>
+              <a:rPr sz="1150" b="0" dirty="0" err="1">
+                <a:solidFill>
+                  <a:srgbClr val="34465C"/>
+                </a:solidFill>
+                <a:latin typeface="Malgun Gothic"/>
+              </a:rPr>
+              <a:t>증명</a:t>
+            </a:r>
+            <a:endParaRPr sz="1150" b="0" dirty="0">
+              <a:solidFill>
+                <a:srgbClr val="34465C"/>
+              </a:solidFill>
+              <a:latin typeface="Malgun Gothic"/>
+            </a:endParaRPr>
           </a:p>
           <a:p>
             <a:pPr algn="l">
@@ -19978,14 +23497,191 @@
               </a:spcAft>
             </a:pPr>
             <a:r>
-              <a:rPr sz="1150" b="0">
-                <a:solidFill>
-                  <a:srgbClr val="34465C"/>
-                </a:solidFill>
-                <a:latin typeface="Malgun Gothic"/>
-              </a:rPr>
-              <a:t>· 서버 지표는 UTC 기준으로 측정 구간에 정확히 잘라 결과 파일에 첨부</a:t>
-            </a:r>
+              <a:rPr sz="1150" b="0" dirty="0">
+                <a:solidFill>
+                  <a:srgbClr val="34465C"/>
+                </a:solidFill>
+                <a:latin typeface="Malgun Gothic"/>
+              </a:rPr>
+              <a:t>· </a:t>
+            </a:r>
+            <a:r>
+              <a:rPr sz="1150" b="0" dirty="0" err="1">
+                <a:solidFill>
+                  <a:srgbClr val="34465C"/>
+                </a:solidFill>
+                <a:latin typeface="Malgun Gothic"/>
+              </a:rPr>
+              <a:t>서버</a:t>
+            </a:r>
+            <a:r>
+              <a:rPr sz="1150" b="0" dirty="0">
+                <a:solidFill>
+                  <a:srgbClr val="34465C"/>
+                </a:solidFill>
+                <a:latin typeface="Malgun Gothic"/>
+              </a:rPr>
+              <a:t> </a:t>
+            </a:r>
+            <a:r>
+              <a:rPr sz="1150" b="0" dirty="0" err="1">
+                <a:solidFill>
+                  <a:srgbClr val="34465C"/>
+                </a:solidFill>
+                <a:latin typeface="Malgun Gothic"/>
+              </a:rPr>
+              <a:t>지표는</a:t>
+            </a:r>
+            <a:r>
+              <a:rPr sz="1150" b="0" dirty="0">
+                <a:solidFill>
+                  <a:srgbClr val="34465C"/>
+                </a:solidFill>
+                <a:latin typeface="Malgun Gothic"/>
+              </a:rPr>
+              <a:t> UTC </a:t>
+            </a:r>
+            <a:r>
+              <a:rPr sz="1150" b="0" dirty="0" err="1">
+                <a:solidFill>
+                  <a:srgbClr val="34465C"/>
+                </a:solidFill>
+                <a:latin typeface="Malgun Gothic"/>
+              </a:rPr>
+              <a:t>기준으로</a:t>
+            </a:r>
+            <a:r>
+              <a:rPr sz="1150" b="0" dirty="0">
+                <a:solidFill>
+                  <a:srgbClr val="34465C"/>
+                </a:solidFill>
+                <a:latin typeface="Malgun Gothic"/>
+              </a:rPr>
+              <a:t> </a:t>
+            </a:r>
+            <a:r>
+              <a:rPr sz="1150" b="0" dirty="0" err="1">
+                <a:solidFill>
+                  <a:srgbClr val="34465C"/>
+                </a:solidFill>
+                <a:latin typeface="Malgun Gothic"/>
+              </a:rPr>
+              <a:t>측정</a:t>
+            </a:r>
+            <a:r>
+              <a:rPr sz="1150" b="0" dirty="0">
+                <a:solidFill>
+                  <a:srgbClr val="34465C"/>
+                </a:solidFill>
+                <a:latin typeface="Malgun Gothic"/>
+              </a:rPr>
+              <a:t> </a:t>
+            </a:r>
+            <a:r>
+              <a:rPr sz="1150" b="0" dirty="0" err="1">
+                <a:solidFill>
+                  <a:srgbClr val="34465C"/>
+                </a:solidFill>
+                <a:latin typeface="Malgun Gothic"/>
+              </a:rPr>
+              <a:t>구간에</a:t>
+            </a:r>
+            <a:r>
+              <a:rPr sz="1150" b="0" dirty="0">
+                <a:solidFill>
+                  <a:srgbClr val="34465C"/>
+                </a:solidFill>
+                <a:latin typeface="Malgun Gothic"/>
+              </a:rPr>
+              <a:t> </a:t>
+            </a:r>
+            <a:r>
+              <a:rPr sz="1150" b="0" dirty="0" err="1">
+                <a:solidFill>
+                  <a:srgbClr val="34465C"/>
+                </a:solidFill>
+                <a:latin typeface="Malgun Gothic"/>
+              </a:rPr>
+              <a:t>정확히</a:t>
+            </a:r>
+            <a:r>
+              <a:rPr sz="1150" b="0" dirty="0">
+                <a:solidFill>
+                  <a:srgbClr val="34465C"/>
+                </a:solidFill>
+                <a:latin typeface="Malgun Gothic"/>
+              </a:rPr>
+              <a:t> </a:t>
+            </a:r>
+            <a:r>
+              <a:rPr sz="1150" b="0" dirty="0" err="1">
+                <a:solidFill>
+                  <a:srgbClr val="34465C"/>
+                </a:solidFill>
+                <a:latin typeface="Malgun Gothic"/>
+              </a:rPr>
+              <a:t>잘라</a:t>
+            </a:r>
+            <a:r>
+              <a:rPr sz="1150" b="0" dirty="0">
+                <a:solidFill>
+                  <a:srgbClr val="34465C"/>
+                </a:solidFill>
+                <a:latin typeface="Malgun Gothic"/>
+              </a:rPr>
+              <a:t> </a:t>
+            </a:r>
+            <a:r>
+              <a:rPr sz="1150" b="0" dirty="0" err="1">
+                <a:solidFill>
+                  <a:srgbClr val="34465C"/>
+                </a:solidFill>
+                <a:latin typeface="Malgun Gothic"/>
+              </a:rPr>
+              <a:t>결과</a:t>
+            </a:r>
+            <a:r>
+              <a:rPr sz="1150" b="0" dirty="0">
+                <a:solidFill>
+                  <a:srgbClr val="34465C"/>
+                </a:solidFill>
+                <a:latin typeface="Malgun Gothic"/>
+              </a:rPr>
+              <a:t> </a:t>
+            </a:r>
+            <a:r>
+              <a:rPr sz="1150" b="0" dirty="0" err="1">
+                <a:solidFill>
+                  <a:srgbClr val="34465C"/>
+                </a:solidFill>
+                <a:latin typeface="Malgun Gothic"/>
+              </a:rPr>
+              <a:t>파일에</a:t>
+            </a:r>
+            <a:r>
+              <a:rPr sz="1150" b="0" dirty="0">
+                <a:solidFill>
+                  <a:srgbClr val="34465C"/>
+                </a:solidFill>
+                <a:latin typeface="Malgun Gothic"/>
+              </a:rPr>
+              <a:t> </a:t>
+            </a:r>
+            <a:r>
+              <a:rPr sz="1150" b="0" dirty="0" err="1">
+                <a:solidFill>
+                  <a:srgbClr val="34465C"/>
+                </a:solidFill>
+                <a:latin typeface="Malgun Gothic"/>
+              </a:rPr>
+              <a:t>첨부</a:t>
+            </a:r>
+            <a:endParaRPr sz="1150" b="0" dirty="0">
+              <a:solidFill>
+                <a:srgbClr val="34465C"/>
+              </a:solidFill>
+              <a:latin typeface="Malgun Gothic"/>
+            </a:endParaRPr>
           </a:p>
         </p:txBody>
       </p:sp>
@@ -20464,14 +24160,83 @@
               </a:spcAft>
             </a:pPr>
             <a:r>
-              <a:rPr sz="1150" b="0">
+              <a:rPr sz="1150" b="0" dirty="0">
                 <a:solidFill>
                   <a:srgbClr val="D6E4F2"/>
                 </a:solidFill>
                 <a:latin typeface="Malgun Gothic"/>
               </a:rPr>
-              <a:t>· 계정·인벤토리·세션·구매 원장·매치 결과·랭킹·길드 8개 테이블</a:t>
-            </a:r>
+              <a:t>· </a:t>
+            </a:r>
+            <a:r>
+              <a:rPr sz="1150" b="0" dirty="0" err="1">
+                <a:solidFill>
+                  <a:srgbClr val="D6E4F2"/>
+                </a:solidFill>
+                <a:latin typeface="Malgun Gothic"/>
+              </a:rPr>
+              <a:t>계정·인벤토리·세션·구매</a:t>
+            </a:r>
+            <a:r>
+              <a:rPr sz="1150" b="0" dirty="0">
+                <a:solidFill>
+                  <a:srgbClr val="D6E4F2"/>
+                </a:solidFill>
+                <a:latin typeface="Malgun Gothic"/>
+              </a:rPr>
+              <a:t> </a:t>
+            </a:r>
+            <a:r>
+              <a:rPr sz="1150" b="0" dirty="0" err="1">
+                <a:solidFill>
+                  <a:srgbClr val="D6E4F2"/>
+                </a:solidFill>
+                <a:latin typeface="Malgun Gothic"/>
+              </a:rPr>
+              <a:t>원장·매치</a:t>
+            </a:r>
+            <a:r>
+              <a:rPr sz="1150" b="0" dirty="0">
+                <a:solidFill>
+                  <a:srgbClr val="D6E4F2"/>
+                </a:solidFill>
+                <a:latin typeface="Malgun Gothic"/>
+              </a:rPr>
+              <a:t> </a:t>
+            </a:r>
+            <a:r>
+              <a:rPr sz="1150" b="0" dirty="0" err="1">
+                <a:solidFill>
+                  <a:srgbClr val="D6E4F2"/>
+                </a:solidFill>
+                <a:latin typeface="Malgun Gothic"/>
+              </a:rPr>
+              <a:t>결과·랭킹·길드</a:t>
+            </a:r>
+            <a:r>
+              <a:rPr sz="1150" b="0" dirty="0">
+                <a:solidFill>
+                  <a:srgbClr val="D6E4F2"/>
+                </a:solidFill>
+                <a:latin typeface="Malgun Gothic"/>
+              </a:rPr>
+              <a:t> 8개 </a:t>
+            </a:r>
+            <a:r>
+              <a:rPr sz="1150" b="0" dirty="0" err="1">
+                <a:solidFill>
+                  <a:srgbClr val="D6E4F2"/>
+                </a:solidFill>
+                <a:latin typeface="Malgun Gothic"/>
+              </a:rPr>
+              <a:t>테이블</a:t>
+            </a:r>
+            <a:endParaRPr sz="1150" b="0" dirty="0">
+              <a:solidFill>
+                <a:srgbClr val="D6E4F2"/>
+              </a:solidFill>
+              <a:latin typeface="Malgun Gothic"/>
+            </a:endParaRPr>
           </a:p>
           <a:p>
             <a:pPr algn="l">
@@ -20480,13 +24245,121 @@
               </a:spcAft>
             </a:pPr>
             <a:r>
-              <a:rPr sz="1150" b="0">
+              <a:rPr sz="1150" b="0" dirty="0">
                 <a:solidFill>
                   <a:srgbClr val="D6E4F2"/>
                 </a:solidFill>
                 <a:latin typeface="Malgun Gothic"/>
               </a:rPr>
-              <a:t>· 압축이 안 되는 랜덤 데이터로 약 24GiB 구성 (DB 캐시 8GiB의 3배)</a:t>
+              <a:t>· </a:t>
+            </a:r>
+            <a:r>
+              <a:rPr sz="1150" b="0" dirty="0" err="1">
+                <a:solidFill>
+                  <a:srgbClr val="D6E4F2"/>
+                </a:solidFill>
+                <a:latin typeface="Malgun Gothic"/>
+              </a:rPr>
+              <a:t>압축이</a:t>
+            </a:r>
+            <a:r>
+              <a:rPr sz="1150" b="0" dirty="0">
+                <a:solidFill>
+                  <a:srgbClr val="D6E4F2"/>
+                </a:solidFill>
+                <a:latin typeface="Malgun Gothic"/>
+              </a:rPr>
+              <a:t> 안 </a:t>
+            </a:r>
+            <a:r>
+              <a:rPr sz="1150" b="0" dirty="0" err="1">
+                <a:solidFill>
+                  <a:srgbClr val="D6E4F2"/>
+                </a:solidFill>
+                <a:latin typeface="Malgun Gothic"/>
+              </a:rPr>
+              <a:t>되는</a:t>
+            </a:r>
+            <a:r>
+              <a:rPr sz="1150" b="0" dirty="0">
+                <a:solidFill>
+                  <a:srgbClr val="D6E4F2"/>
+                </a:solidFill>
+                <a:latin typeface="Malgun Gothic"/>
+              </a:rPr>
+              <a:t> </a:t>
+            </a:r>
+            <a:r>
+              <a:rPr sz="1150" b="0" dirty="0" err="1">
+                <a:solidFill>
+                  <a:srgbClr val="D6E4F2"/>
+                </a:solidFill>
+                <a:latin typeface="Malgun Gothic"/>
+              </a:rPr>
+              <a:t>랜덤</a:t>
+            </a:r>
+            <a:r>
+              <a:rPr sz="1150" b="0" dirty="0">
+                <a:solidFill>
+                  <a:srgbClr val="D6E4F2"/>
+                </a:solidFill>
+                <a:latin typeface="Malgun Gothic"/>
+              </a:rPr>
+              <a:t> </a:t>
+            </a:r>
+            <a:r>
+              <a:rPr sz="1150" b="0" dirty="0" err="1">
+                <a:solidFill>
+                  <a:srgbClr val="D6E4F2"/>
+                </a:solidFill>
+                <a:latin typeface="Malgun Gothic"/>
+              </a:rPr>
+              <a:t>데이터로</a:t>
+            </a:r>
+            <a:r>
+              <a:rPr sz="1150" b="0" dirty="0">
+                <a:solidFill>
+                  <a:srgbClr val="D6E4F2"/>
+                </a:solidFill>
+                <a:latin typeface="Malgun Gothic"/>
+              </a:rPr>
+              <a:t> 약 24GiB </a:t>
+            </a:r>
+            <a:r>
+              <a:rPr sz="1150" b="0" dirty="0" err="1">
+                <a:solidFill>
+                  <a:srgbClr val="D6E4F2"/>
+                </a:solidFill>
+                <a:latin typeface="Malgun Gothic"/>
+              </a:rPr>
+              <a:t>구성</a:t>
+            </a:r>
+            <a:r>
+              <a:rPr sz="1150" b="0" dirty="0">
+                <a:solidFill>
+                  <a:srgbClr val="D6E4F2"/>
+                </a:solidFill>
+                <a:latin typeface="Malgun Gothic"/>
+              </a:rPr>
+              <a:t> (DB </a:t>
+            </a:r>
+            <a:r>
+              <a:rPr sz="1150" b="0" dirty="0" err="1">
+                <a:solidFill>
+                  <a:srgbClr val="D6E4F2"/>
+                </a:solidFill>
+                <a:latin typeface="Malgun Gothic"/>
+              </a:rPr>
+              <a:t>캐시</a:t>
+            </a:r>
+            <a:r>
+              <a:rPr sz="1150" b="0" dirty="0">
+                <a:solidFill>
+                  <a:srgbClr val="D6E4F2"/>
+                </a:solidFill>
+                <a:latin typeface="Malgun Gothic"/>
+              </a:rPr>
+              <a:t> 8GiB의 3배)</a:t>
             </a:r>
           </a:p>
           <a:p>
@@ -20496,14 +24369,191 @@
               </a:spcAft>
             </a:pPr>
             <a:r>
-              <a:rPr sz="1150" b="0">
+              <a:rPr sz="1150" b="0" dirty="0">
                 <a:solidFill>
                   <a:srgbClr val="D6E4F2"/>
                 </a:solidFill>
                 <a:latin typeface="Malgun Gothic"/>
               </a:rPr>
-              <a:t>· 읽기 65% / 쓰기 35%의 일반 플레이 믹스 외에 쓰기 집중·로그인 러시·핫스팟 시나리오</a:t>
-            </a:r>
+              <a:t>· </a:t>
+            </a:r>
+            <a:r>
+              <a:rPr sz="1150" b="0" dirty="0" err="1">
+                <a:solidFill>
+                  <a:srgbClr val="D6E4F2"/>
+                </a:solidFill>
+                <a:latin typeface="Malgun Gothic"/>
+              </a:rPr>
+              <a:t>읽기</a:t>
+            </a:r>
+            <a:r>
+              <a:rPr sz="1150" b="0" dirty="0">
+                <a:solidFill>
+                  <a:srgbClr val="D6E4F2"/>
+                </a:solidFill>
+                <a:latin typeface="Malgun Gothic"/>
+              </a:rPr>
+              <a:t> 65% / </a:t>
+            </a:r>
+            <a:r>
+              <a:rPr sz="1150" b="0" dirty="0" err="1">
+                <a:solidFill>
+                  <a:srgbClr val="D6E4F2"/>
+                </a:solidFill>
+                <a:latin typeface="Malgun Gothic"/>
+              </a:rPr>
+              <a:t>쓰기</a:t>
+            </a:r>
+            <a:r>
+              <a:rPr sz="1150" b="0" dirty="0">
+                <a:solidFill>
+                  <a:srgbClr val="D6E4F2"/>
+                </a:solidFill>
+                <a:latin typeface="Malgun Gothic"/>
+              </a:rPr>
+              <a:t> 35%의 </a:t>
+            </a:r>
+            <a:r>
+              <a:rPr sz="1150" b="0" dirty="0" err="1">
+                <a:solidFill>
+                  <a:srgbClr val="D6E4F2"/>
+                </a:solidFill>
+                <a:latin typeface="Malgun Gothic"/>
+              </a:rPr>
+              <a:t>일반</a:t>
+            </a:r>
+            <a:r>
+              <a:rPr sz="1150" b="0" dirty="0">
+                <a:solidFill>
+                  <a:srgbClr val="D6E4F2"/>
+                </a:solidFill>
+                <a:latin typeface="Malgun Gothic"/>
+              </a:rPr>
+              <a:t> </a:t>
+            </a:r>
+            <a:r>
+              <a:rPr sz="1150" b="0" dirty="0" err="1">
+                <a:solidFill>
+                  <a:srgbClr val="D6E4F2"/>
+                </a:solidFill>
+                <a:latin typeface="Malgun Gothic"/>
+              </a:rPr>
+              <a:t>플레이</a:t>
+            </a:r>
+            <a:r>
+              <a:rPr sz="1150" b="0" dirty="0">
+                <a:solidFill>
+                  <a:srgbClr val="D6E4F2"/>
+                </a:solidFill>
+                <a:latin typeface="Malgun Gothic"/>
+              </a:rPr>
+              <a:t> </a:t>
+            </a:r>
+            <a:r>
+              <a:rPr sz="1150" b="0" dirty="0" err="1">
+                <a:solidFill>
+                  <a:srgbClr val="D6E4F2"/>
+                </a:solidFill>
+                <a:latin typeface="Malgun Gothic"/>
+              </a:rPr>
+              <a:t>믹스</a:t>
+            </a:r>
+            <a:r>
+              <a:rPr sz="1150" b="0" dirty="0">
+                <a:solidFill>
+                  <a:srgbClr val="D6E4F2"/>
+                </a:solidFill>
+                <a:latin typeface="Malgun Gothic"/>
+              </a:rPr>
+              <a:t> </a:t>
+            </a:r>
+            <a:r>
+              <a:rPr sz="1150" b="0" dirty="0" err="1">
+                <a:solidFill>
+                  <a:srgbClr val="D6E4F2"/>
+                </a:solidFill>
+                <a:latin typeface="Malgun Gothic"/>
+              </a:rPr>
+              <a:t>외에</a:t>
+            </a:r>
+            <a:r>
+              <a:rPr sz="1150" b="0" dirty="0">
+                <a:solidFill>
+                  <a:srgbClr val="D6E4F2"/>
+                </a:solidFill>
+                <a:latin typeface="Malgun Gothic"/>
+              </a:rPr>
+              <a:t> </a:t>
+            </a:r>
+            <a:r>
+              <a:rPr sz="1150" b="0" dirty="0" err="1">
+                <a:solidFill>
+                  <a:srgbClr val="D6E4F2"/>
+                </a:solidFill>
+                <a:latin typeface="Malgun Gothic"/>
+              </a:rPr>
+              <a:t>쓰기</a:t>
+            </a:r>
+            <a:r>
+              <a:rPr sz="1150" b="0" dirty="0">
+                <a:solidFill>
+                  <a:srgbClr val="D6E4F2"/>
+                </a:solidFill>
+                <a:latin typeface="Malgun Gothic"/>
+              </a:rPr>
+              <a:t> </a:t>
+            </a:r>
+            <a:r>
+              <a:rPr sz="1150" b="0" dirty="0" err="1">
+                <a:solidFill>
+                  <a:srgbClr val="D6E4F2"/>
+                </a:solidFill>
+                <a:latin typeface="Malgun Gothic"/>
+              </a:rPr>
+              <a:t>집중·로그인</a:t>
+            </a:r>
+            <a:r>
+              <a:rPr sz="1150" b="0" dirty="0">
+                <a:solidFill>
+                  <a:srgbClr val="D6E4F2"/>
+                </a:solidFill>
+                <a:latin typeface="Malgun Gothic"/>
+              </a:rPr>
+              <a:t> </a:t>
+            </a:r>
+            <a:r>
+              <a:rPr sz="1150" b="0" dirty="0" err="1">
+                <a:solidFill>
+                  <a:srgbClr val="D6E4F2"/>
+                </a:solidFill>
+                <a:latin typeface="Malgun Gothic"/>
+              </a:rPr>
+              <a:t>러시·핫스팟</a:t>
+            </a:r>
+            <a:r>
+              <a:rPr sz="1150" b="0" dirty="0">
+                <a:solidFill>
+                  <a:srgbClr val="D6E4F2"/>
+                </a:solidFill>
+                <a:latin typeface="Malgun Gothic"/>
+              </a:rPr>
+              <a:t> </a:t>
+            </a:r>
+            <a:r>
+              <a:rPr sz="1150" b="0" dirty="0" err="1">
+                <a:solidFill>
+                  <a:srgbClr val="D6E4F2"/>
+                </a:solidFill>
+                <a:latin typeface="Malgun Gothic"/>
+              </a:rPr>
+              <a:t>시나리오</a:t>
+            </a:r>
+            <a:endParaRPr sz="1150" b="0" dirty="0">
+              <a:solidFill>
+                <a:srgbClr val="D6E4F2"/>
+              </a:solidFill>
+              <a:latin typeface="Malgun Gothic"/>
+            </a:endParaRPr>
           </a:p>
           <a:p>
             <a:pPr algn="l">
@@ -20512,14 +24562,281 @@
               </a:spcAft>
             </a:pPr>
             <a:r>
-              <a:rPr sz="1150" b="0">
+              <a:rPr sz="1150" b="0" dirty="0">
                 <a:solidFill>
                   <a:srgbClr val="D6E4F2"/>
                 </a:solidFill>
                 <a:latin typeface="Malgun Gothic"/>
               </a:rPr>
-              <a:t>· 구매는 원장 기록과 잔액 차감이 함께 묶인 트랜잭션 — 측정 후 장부 대조로 데이터 훼손 여부 확인</a:t>
-            </a:r>
+              <a:t>· </a:t>
+            </a:r>
+            <a:r>
+              <a:rPr sz="1150" b="0" dirty="0" err="1">
+                <a:solidFill>
+                  <a:srgbClr val="D6E4F2"/>
+                </a:solidFill>
+                <a:latin typeface="Malgun Gothic"/>
+              </a:rPr>
+              <a:t>구매는</a:t>
+            </a:r>
+            <a:r>
+              <a:rPr sz="1150" b="0" dirty="0">
+                <a:solidFill>
+                  <a:srgbClr val="D6E4F2"/>
+                </a:solidFill>
+                <a:latin typeface="Malgun Gothic"/>
+              </a:rPr>
+              <a:t> </a:t>
+            </a:r>
+            <a:r>
+              <a:rPr sz="1150" b="0" dirty="0" err="1">
+                <a:solidFill>
+                  <a:srgbClr val="D6E4F2"/>
+                </a:solidFill>
+                <a:latin typeface="Malgun Gothic"/>
+              </a:rPr>
+              <a:t>원장</a:t>
+            </a:r>
+            <a:r>
+              <a:rPr sz="1150" b="0" dirty="0">
+                <a:solidFill>
+                  <a:srgbClr val="D6E4F2"/>
+                </a:solidFill>
+                <a:latin typeface="Malgun Gothic"/>
+              </a:rPr>
+              <a:t> </a:t>
+            </a:r>
+            <a:r>
+              <a:rPr sz="1150" b="0" dirty="0" err="1">
+                <a:solidFill>
+                  <a:srgbClr val="D6E4F2"/>
+                </a:solidFill>
+                <a:latin typeface="Malgun Gothic"/>
+              </a:rPr>
+              <a:t>기록과</a:t>
+            </a:r>
+            <a:r>
+              <a:rPr sz="1150" b="0" dirty="0">
+                <a:solidFill>
+                  <a:srgbClr val="D6E4F2"/>
+                </a:solidFill>
+                <a:latin typeface="Malgun Gothic"/>
+              </a:rPr>
+              <a:t> </a:t>
+            </a:r>
+            <a:r>
+              <a:rPr sz="1150" b="0" dirty="0" err="1">
+                <a:solidFill>
+                  <a:srgbClr val="D6E4F2"/>
+                </a:solidFill>
+                <a:latin typeface="Malgun Gothic"/>
+              </a:rPr>
+              <a:t>잔액</a:t>
+            </a:r>
+            <a:r>
+              <a:rPr sz="1150" b="0" dirty="0">
+                <a:solidFill>
+                  <a:srgbClr val="D6E4F2"/>
+                </a:solidFill>
+                <a:latin typeface="Malgun Gothic"/>
+              </a:rPr>
+              <a:t> </a:t>
+            </a:r>
+            <a:r>
+              <a:rPr sz="1150" b="0" dirty="0" err="1">
+                <a:solidFill>
+                  <a:srgbClr val="D6E4F2"/>
+                </a:solidFill>
+                <a:latin typeface="Malgun Gothic"/>
+              </a:rPr>
+              <a:t>차감이</a:t>
+            </a:r>
+            <a:r>
+              <a:rPr sz="1150" b="0" dirty="0">
+                <a:solidFill>
+                  <a:srgbClr val="D6E4F2"/>
+                </a:solidFill>
+                <a:latin typeface="Malgun Gothic"/>
+              </a:rPr>
+              <a:t> </a:t>
+            </a:r>
+            <a:r>
+              <a:rPr sz="1150" b="0" dirty="0" err="1">
+                <a:solidFill>
+                  <a:srgbClr val="D6E4F2"/>
+                </a:solidFill>
+                <a:latin typeface="Malgun Gothic"/>
+              </a:rPr>
+              <a:t>함께</a:t>
+            </a:r>
+            <a:r>
+              <a:rPr sz="1150" b="0" dirty="0">
+                <a:solidFill>
+                  <a:srgbClr val="D6E4F2"/>
+                </a:solidFill>
+                <a:latin typeface="Malgun Gothic"/>
+              </a:rPr>
+              <a:t> </a:t>
+            </a:r>
+            <a:r>
+              <a:rPr sz="1150" b="0" dirty="0" err="1">
+                <a:solidFill>
+                  <a:srgbClr val="D6E4F2"/>
+                </a:solidFill>
+                <a:latin typeface="Malgun Gothic"/>
+              </a:rPr>
+              <a:t>묶인</a:t>
+            </a:r>
+            <a:r>
+              <a:rPr sz="1150" b="0" dirty="0">
+                <a:solidFill>
+                  <a:srgbClr val="D6E4F2"/>
+                </a:solidFill>
+                <a:latin typeface="Malgun Gothic"/>
+              </a:rPr>
+              <a:t> </a:t>
+            </a:r>
+            <a:r>
+              <a:rPr sz="1150" b="0" dirty="0" err="1">
+                <a:solidFill>
+                  <a:srgbClr val="D6E4F2"/>
+                </a:solidFill>
+                <a:latin typeface="Malgun Gothic"/>
+              </a:rPr>
+              <a:t>트랜잭션</a:t>
+            </a:r>
+            <a:r>
+              <a:rPr sz="1150" b="0" dirty="0">
+                <a:solidFill>
+                  <a:srgbClr val="D6E4F2"/>
+                </a:solidFill>
+                <a:latin typeface="Malgun Gothic"/>
+              </a:rPr>
+              <a:t> — </a:t>
+            </a:r>
+            <a:r>
+              <a:rPr sz="1150" b="0" dirty="0" err="1">
+                <a:solidFill>
+                  <a:srgbClr val="D6E4F2"/>
+                </a:solidFill>
+                <a:latin typeface="Malgun Gothic"/>
+              </a:rPr>
+              <a:t>측정</a:t>
+            </a:r>
+            <a:r>
+              <a:rPr sz="1150" b="0" dirty="0">
+                <a:solidFill>
+                  <a:srgbClr val="D6E4F2"/>
+                </a:solidFill>
+                <a:latin typeface="Malgun Gothic"/>
+              </a:rPr>
+              <a:t> 후 </a:t>
+            </a:r>
+            <a:r>
+              <a:rPr sz="1150" b="0" dirty="0" err="1">
+                <a:solidFill>
+                  <a:srgbClr val="D6E4F2"/>
+                </a:solidFill>
+                <a:latin typeface="Malgun Gothic"/>
+              </a:rPr>
+              <a:t>장부</a:t>
+            </a:r>
+            <a:r>
+              <a:rPr sz="1150" b="0" dirty="0">
+                <a:solidFill>
+                  <a:srgbClr val="D6E4F2"/>
+                </a:solidFill>
+                <a:latin typeface="Malgun Gothic"/>
+              </a:rPr>
+              <a:t> </a:t>
+            </a:r>
+            <a:r>
+              <a:rPr sz="1150" b="0" dirty="0" err="1">
+                <a:solidFill>
+                  <a:srgbClr val="D6E4F2"/>
+                </a:solidFill>
+                <a:latin typeface="Malgun Gothic"/>
+              </a:rPr>
+              <a:t>대조로</a:t>
+            </a:r>
+            <a:r>
+              <a:rPr sz="1150" b="0" dirty="0">
+                <a:solidFill>
+                  <a:srgbClr val="D6E4F2"/>
+                </a:solidFill>
+                <a:latin typeface="Malgun Gothic"/>
+              </a:rPr>
+              <a:t> </a:t>
+            </a:r>
+            <a:r>
+              <a:rPr sz="1150" b="0" dirty="0" err="1">
+                <a:solidFill>
+                  <a:srgbClr val="D6E4F2"/>
+                </a:solidFill>
+                <a:latin typeface="Malgun Gothic"/>
+              </a:rPr>
+              <a:t>데이터</a:t>
+            </a:r>
+            <a:r>
+              <a:rPr sz="1150" b="0" dirty="0">
+                <a:solidFill>
+                  <a:srgbClr val="D6E4F2"/>
+                </a:solidFill>
+                <a:latin typeface="Malgun Gothic"/>
+              </a:rPr>
+              <a:t> </a:t>
+            </a:r>
+            <a:r>
+              <a:rPr sz="1150" b="0" dirty="0" err="1">
+                <a:solidFill>
+                  <a:srgbClr val="D6E4F2"/>
+                </a:solidFill>
+                <a:latin typeface="Malgun Gothic"/>
+              </a:rPr>
+              <a:t>훼손</a:t>
+            </a:r>
+            <a:r>
+              <a:rPr sz="1150" b="0" dirty="0">
+                <a:solidFill>
+                  <a:srgbClr val="D6E4F2"/>
+                </a:solidFill>
+                <a:latin typeface="Malgun Gothic"/>
+              </a:rPr>
+              <a:t> </a:t>
+            </a:r>
+            <a:r>
+              <a:rPr sz="1150" b="0" dirty="0" err="1">
+                <a:solidFill>
+                  <a:srgbClr val="D6E4F2"/>
+                </a:solidFill>
+                <a:latin typeface="Malgun Gothic"/>
+              </a:rPr>
+              <a:t>여부</a:t>
+            </a:r>
+            <a:r>
+              <a:rPr sz="1150" b="0" dirty="0">
+                <a:solidFill>
+                  <a:srgbClr val="D6E4F2"/>
+                </a:solidFill>
+                <a:latin typeface="Malgun Gothic"/>
+              </a:rPr>
+              <a:t> </a:t>
+            </a:r>
+            <a:r>
+              <a:rPr sz="1150" b="0" dirty="0" err="1">
+                <a:solidFill>
+                  <a:srgbClr val="D6E4F2"/>
+                </a:solidFill>
+                <a:latin typeface="Malgun Gothic"/>
+              </a:rPr>
+              <a:t>확인</a:t>
+            </a:r>
+            <a:endParaRPr sz="1150" b="0" dirty="0">
+              <a:solidFill>
+                <a:srgbClr val="D6E4F2"/>
+              </a:solidFill>
+              <a:latin typeface="Malgun Gothic"/>
+            </a:endParaRPr>
           </a:p>
         </p:txBody>
       </p:sp>
@@ -21958,14 +26275,56 @@
                     <a:p>
                       <a:pPr algn="ctr"/>
                       <a:r>
-                        <a:rPr sz="1100">
+                        <a:rPr sz="1100" dirty="0" err="1">
                           <a:solidFill>
                             <a:srgbClr val="12233A"/>
                           </a:solidFill>
                           <a:latin typeface="Malgun Gothic"/>
                         </a:rPr>
-                        <a:t>계획한 만큼 측정했나</a:t>
+                        <a:t>계획한</a:t>
                       </a:r>
+                      <a:r>
+                        <a:rPr sz="1100" dirty="0">
+                          <a:solidFill>
+                            <a:srgbClr val="12233A"/>
+                          </a:solidFill>
+                          <a:latin typeface="Malgun Gothic"/>
+                        </a:rPr>
+                        <a:t> </a:t>
+                      </a:r>
+                      <a:r>
+                        <a:rPr sz="1100" dirty="0" err="1">
+                          <a:solidFill>
+                            <a:srgbClr val="12233A"/>
+                          </a:solidFill>
+                          <a:latin typeface="Malgun Gothic"/>
+                        </a:rPr>
+                        <a:t>만큼</a:t>
+                      </a:r>
+                      <a:r>
+                        <a:rPr sz="1100" dirty="0">
+                          <a:solidFill>
+                            <a:srgbClr val="12233A"/>
+                          </a:solidFill>
+                          <a:latin typeface="Malgun Gothic"/>
+                        </a:rPr>
+                        <a:t> </a:t>
+                      </a:r>
+                      <a:r>
+                        <a:rPr sz="1100" dirty="0" err="1">
+                          <a:solidFill>
+                            <a:srgbClr val="12233A"/>
+                          </a:solidFill>
+                          <a:latin typeface="Malgun Gothic"/>
+                        </a:rPr>
+                        <a:t>측정했나</a:t>
+                      </a:r>
+                      <a:endParaRPr sz="1100" dirty="0">
+                        <a:solidFill>
+                          <a:srgbClr val="12233A"/>
+                        </a:solidFill>
+                        <a:latin typeface="Malgun Gothic"/>
+                      </a:endParaRPr>
                     </a:p>
                   </a:txBody>
                   <a:tcPr marL="54864" marR="54864" marT="18288" marB="18288" anchor="ctr">
@@ -21981,14 +26340,74 @@
                     <a:p>
                       <a:pPr algn="ctr"/>
                       <a:r>
-                        <a:rPr sz="1100">
+                        <a:rPr sz="1100" dirty="0" err="1">
                           <a:solidFill>
                             <a:srgbClr val="12233A"/>
                           </a:solidFill>
                           <a:latin typeface="Malgun Gothic"/>
                         </a:rPr>
-                        <a:t>계획 시간의 95% 이상 실행</a:t>
+                        <a:t>계획</a:t>
                       </a:r>
+                      <a:r>
+                        <a:rPr sz="1100" dirty="0">
+                          <a:solidFill>
+                            <a:srgbClr val="12233A"/>
+                          </a:solidFill>
+                          <a:latin typeface="Malgun Gothic"/>
+                        </a:rPr>
+                        <a:t> </a:t>
+                      </a:r>
+                      <a:r>
+                        <a:rPr sz="1100" dirty="0" err="1">
+                          <a:solidFill>
+                            <a:srgbClr val="12233A"/>
+                          </a:solidFill>
+                          <a:latin typeface="Malgun Gothic"/>
+                        </a:rPr>
+                        <a:t>시간의</a:t>
+                      </a:r>
+                      <a:r>
+                        <a:rPr sz="1100" dirty="0">
+                          <a:solidFill>
+                            <a:srgbClr val="12233A"/>
+                          </a:solidFill>
+                          <a:latin typeface="Malgun Gothic"/>
+                        </a:rPr>
+                        <a:t> 95% </a:t>
+                      </a:r>
+                      <a:r>
+                        <a:rPr sz="1100" dirty="0" err="1">
+                          <a:solidFill>
+                            <a:srgbClr val="12233A"/>
+                          </a:solidFill>
+                          <a:latin typeface="Malgun Gothic"/>
+                        </a:rPr>
+                        <a:t>이상</a:t>
+                      </a:r>
+                      <a:r>
+                        <a:rPr sz="1100" dirty="0">
+                          <a:solidFill>
+                            <a:srgbClr val="12233A"/>
+                          </a:solidFill>
+                          <a:latin typeface="Malgun Gothic"/>
+                        </a:rPr>
+                        <a:t> </a:t>
+                      </a:r>
+                      <a:r>
+                        <a:rPr sz="1100" dirty="0" err="1">
+                          <a:solidFill>
+                            <a:srgbClr val="12233A"/>
+                          </a:solidFill>
+                          <a:latin typeface="Malgun Gothic"/>
+                        </a:rPr>
+                        <a:t>실행</a:t>
+                      </a:r>
+                      <a:endParaRPr sz="1100" dirty="0">
+                        <a:solidFill>
+                          <a:srgbClr val="12233A"/>
+                        </a:solidFill>
+                        <a:latin typeface="Malgun Gothic"/>
+                      </a:endParaRPr>
                     </a:p>
                   </a:txBody>
                   <a:tcPr marL="54864" marR="54864" marT="18288" marB="18288" anchor="ctr">
@@ -22016,7 +26435,7 @@
         <p:spPr>
           <a:xfrm>
             <a:off x="548640" y="5257800"/>
-            <a:ext cx="11064240" cy="731520"/>
+            <a:ext cx="11064240" cy="619144"/>
           </a:xfrm>
           <a:prstGeom prst="rect">
             <a:avLst/>
@@ -22034,23 +26453,432 @@
                 <a:spcPts val="400"/>
               </a:spcAft>
             </a:pPr>
-            <a:r>
-              <a:rPr sz="1150" b="1">
+            <a:endParaRPr lang="en-US" sz="1150" b="1" dirty="0">
+              <a:solidFill>
+                <a:srgbClr val="12233A"/>
+              </a:solidFill>
+              <a:latin typeface="Malgun Gothic"/>
+            </a:endParaRPr>
+          </a:p>
+          <a:p>
+            <a:pPr algn="l">
+              <a:spcAft>
+                <a:spcPts val="400"/>
+              </a:spcAft>
+            </a:pPr>
+            <a:r>
+              <a:rPr sz="1150" b="1" dirty="0" err="1">
                 <a:solidFill>
                   <a:srgbClr val="12233A"/>
                 </a:solidFill>
                 <a:latin typeface="Malgun Gothic"/>
               </a:rPr>
-              <a:t>하나라도 어기면 그 측정은 결과에서 제외하고, 원인을 고친 뒤 다시 측정했습니다. </a:t>
-            </a:r>
-            <a:r>
-              <a:rPr sz="1150" b="0">
-                <a:solidFill>
-                  <a:srgbClr val="34465C"/>
-                </a:solidFill>
-                <a:latin typeface="Malgun Gothic"/>
-              </a:rPr>
-              <a:t>제외 내역은 부록의 실행 로그에 모두 남아 있습니다. 최종 데이터 정합성 검사는 4개 DB 모두 위반 0건이었습니다.</a:t>
+              <a:t>하나라도</a:t>
+            </a:r>
+            <a:r>
+              <a:rPr sz="1150" b="1" dirty="0">
+                <a:solidFill>
+                  <a:srgbClr val="12233A"/>
+                </a:solidFill>
+                <a:latin typeface="Malgun Gothic"/>
+              </a:rPr>
+              <a:t> </a:t>
+            </a:r>
+            <a:r>
+              <a:rPr sz="1150" b="1" dirty="0" err="1">
+                <a:solidFill>
+                  <a:srgbClr val="12233A"/>
+                </a:solidFill>
+                <a:latin typeface="Malgun Gothic"/>
+              </a:rPr>
+              <a:t>어기면</a:t>
+            </a:r>
+            <a:r>
+              <a:rPr sz="1150" b="1" dirty="0">
+                <a:solidFill>
+                  <a:srgbClr val="12233A"/>
+                </a:solidFill>
+                <a:latin typeface="Malgun Gothic"/>
+              </a:rPr>
+              <a:t> 그 </a:t>
+            </a:r>
+            <a:r>
+              <a:rPr sz="1150" b="1" dirty="0" err="1">
+                <a:solidFill>
+                  <a:srgbClr val="12233A"/>
+                </a:solidFill>
+                <a:latin typeface="Malgun Gothic"/>
+              </a:rPr>
+              <a:t>측정은</a:t>
+            </a:r>
+            <a:r>
+              <a:rPr sz="1150" b="1" dirty="0">
+                <a:solidFill>
+                  <a:srgbClr val="12233A"/>
+                </a:solidFill>
+                <a:latin typeface="Malgun Gothic"/>
+              </a:rPr>
+              <a:t> </a:t>
+            </a:r>
+            <a:r>
+              <a:rPr sz="1150" b="1" dirty="0" err="1">
+                <a:solidFill>
+                  <a:srgbClr val="12233A"/>
+                </a:solidFill>
+                <a:latin typeface="Malgun Gothic"/>
+              </a:rPr>
+              <a:t>결과에서</a:t>
+            </a:r>
+            <a:r>
+              <a:rPr sz="1150" b="1" dirty="0">
+                <a:solidFill>
+                  <a:srgbClr val="12233A"/>
+                </a:solidFill>
+                <a:latin typeface="Malgun Gothic"/>
+              </a:rPr>
+              <a:t> </a:t>
+            </a:r>
+            <a:r>
+              <a:rPr sz="1150" b="1" dirty="0" err="1">
+                <a:solidFill>
+                  <a:srgbClr val="12233A"/>
+                </a:solidFill>
+                <a:latin typeface="Malgun Gothic"/>
+              </a:rPr>
+              <a:t>제외하고</a:t>
+            </a:r>
+            <a:r>
+              <a:rPr sz="1150" b="1" dirty="0">
+                <a:solidFill>
+                  <a:srgbClr val="12233A"/>
+                </a:solidFill>
+                <a:latin typeface="Malgun Gothic"/>
+              </a:rPr>
+              <a:t>, </a:t>
+            </a:r>
+            <a:r>
+              <a:rPr sz="1150" b="1" dirty="0" err="1">
+                <a:solidFill>
+                  <a:srgbClr val="12233A"/>
+                </a:solidFill>
+                <a:latin typeface="Malgun Gothic"/>
+              </a:rPr>
+              <a:t>원인을</a:t>
+            </a:r>
+            <a:r>
+              <a:rPr sz="1150" b="1" dirty="0">
+                <a:solidFill>
+                  <a:srgbClr val="12233A"/>
+                </a:solidFill>
+                <a:latin typeface="Malgun Gothic"/>
+              </a:rPr>
+              <a:t> </a:t>
+            </a:r>
+            <a:r>
+              <a:rPr sz="1150" b="1" dirty="0" err="1">
+                <a:solidFill>
+                  <a:srgbClr val="12233A"/>
+                </a:solidFill>
+                <a:latin typeface="Malgun Gothic"/>
+              </a:rPr>
+              <a:t>고친</a:t>
+            </a:r>
+            <a:r>
+              <a:rPr sz="1150" b="1" dirty="0">
+                <a:solidFill>
+                  <a:srgbClr val="12233A"/>
+                </a:solidFill>
+                <a:latin typeface="Malgun Gothic"/>
+              </a:rPr>
+              <a:t> 뒤 </a:t>
+            </a:r>
+            <a:r>
+              <a:rPr sz="1150" b="1" dirty="0" err="1">
+                <a:solidFill>
+                  <a:srgbClr val="12233A"/>
+                </a:solidFill>
+                <a:latin typeface="Malgun Gothic"/>
+              </a:rPr>
+              <a:t>다시</a:t>
+            </a:r>
+            <a:r>
+              <a:rPr sz="1150" b="1" dirty="0">
+                <a:solidFill>
+                  <a:srgbClr val="12233A"/>
+                </a:solidFill>
+                <a:latin typeface="Malgun Gothic"/>
+              </a:rPr>
+              <a:t> </a:t>
+            </a:r>
+            <a:r>
+              <a:rPr sz="1150" b="1" dirty="0" err="1">
+                <a:solidFill>
+                  <a:srgbClr val="12233A"/>
+                </a:solidFill>
+                <a:latin typeface="Malgun Gothic"/>
+              </a:rPr>
+              <a:t>측정했습니다</a:t>
+            </a:r>
+            <a:r>
+              <a:rPr sz="1150" b="1" dirty="0">
+                <a:solidFill>
+                  <a:srgbClr val="12233A"/>
+                </a:solidFill>
+                <a:latin typeface="Malgun Gothic"/>
+              </a:rPr>
+              <a:t>. </a:t>
+            </a:r>
+            <a:r>
+              <a:rPr sz="1150" b="0" dirty="0" err="1">
+                <a:solidFill>
+                  <a:srgbClr val="34465C"/>
+                </a:solidFill>
+                <a:latin typeface="Malgun Gothic"/>
+              </a:rPr>
+              <a:t>제외</a:t>
+            </a:r>
+            <a:r>
+              <a:rPr sz="1150" b="0" dirty="0">
+                <a:solidFill>
+                  <a:srgbClr val="34465C"/>
+                </a:solidFill>
+                <a:latin typeface="Malgun Gothic"/>
+              </a:rPr>
+              <a:t> </a:t>
+            </a:r>
+            <a:r>
+              <a:rPr sz="1150" b="0" dirty="0" err="1">
+                <a:solidFill>
+                  <a:srgbClr val="34465C"/>
+                </a:solidFill>
+                <a:latin typeface="Malgun Gothic"/>
+              </a:rPr>
+              <a:t>내역은</a:t>
+            </a:r>
+            <a:r>
+              <a:rPr sz="1150" b="0" dirty="0">
+                <a:solidFill>
+                  <a:srgbClr val="34465C"/>
+                </a:solidFill>
+                <a:latin typeface="Malgun Gothic"/>
+              </a:rPr>
+              <a:t> </a:t>
+            </a:r>
+            <a:r>
+              <a:rPr sz="1150" b="0" dirty="0" err="1">
+                <a:solidFill>
+                  <a:srgbClr val="34465C"/>
+                </a:solidFill>
+                <a:latin typeface="Malgun Gothic"/>
+              </a:rPr>
+              <a:t>부록의</a:t>
+            </a:r>
+            <a:r>
+              <a:rPr sz="1150" b="0" dirty="0">
+                <a:solidFill>
+                  <a:srgbClr val="34465C"/>
+                </a:solidFill>
+                <a:latin typeface="Malgun Gothic"/>
+              </a:rPr>
+              <a:t> </a:t>
+            </a:r>
+            <a:r>
+              <a:rPr sz="1150" b="0" dirty="0" err="1">
+                <a:solidFill>
+                  <a:srgbClr val="34465C"/>
+                </a:solidFill>
+                <a:latin typeface="Malgun Gothic"/>
+              </a:rPr>
+              <a:t>실행</a:t>
+            </a:r>
+            <a:r>
+              <a:rPr sz="1150" b="0" dirty="0">
+                <a:solidFill>
+                  <a:srgbClr val="34465C"/>
+                </a:solidFill>
+                <a:latin typeface="Malgun Gothic"/>
+              </a:rPr>
+              <a:t> </a:t>
+            </a:r>
+            <a:r>
+              <a:rPr sz="1150" b="0" dirty="0" err="1">
+                <a:solidFill>
+                  <a:srgbClr val="34465C"/>
+                </a:solidFill>
+                <a:latin typeface="Malgun Gothic"/>
+              </a:rPr>
+              <a:t>로그에</a:t>
+            </a:r>
+            <a:r>
+              <a:rPr sz="1150" b="0" dirty="0">
+                <a:solidFill>
+                  <a:srgbClr val="34465C"/>
+                </a:solidFill>
+                <a:latin typeface="Malgun Gothic"/>
+              </a:rPr>
+              <a:t> </a:t>
+            </a:r>
+            <a:r>
+              <a:rPr sz="1150" b="0" dirty="0" err="1">
+                <a:solidFill>
+                  <a:srgbClr val="34465C"/>
+                </a:solidFill>
+                <a:latin typeface="Malgun Gothic"/>
+              </a:rPr>
+              <a:t>모두</a:t>
+            </a:r>
+            <a:r>
+              <a:rPr sz="1150" b="0" dirty="0">
+                <a:solidFill>
+                  <a:srgbClr val="34465C"/>
+                </a:solidFill>
+                <a:latin typeface="Malgun Gothic"/>
+              </a:rPr>
+              <a:t> </a:t>
+            </a:r>
+            <a:r>
+              <a:rPr sz="1150" b="0" dirty="0" err="1">
+                <a:solidFill>
+                  <a:srgbClr val="34465C"/>
+                </a:solidFill>
+                <a:latin typeface="Malgun Gothic"/>
+              </a:rPr>
+              <a:t>남아</a:t>
+            </a:r>
+            <a:r>
+              <a:rPr sz="1150" b="0" dirty="0">
+                <a:solidFill>
+                  <a:srgbClr val="34465C"/>
+                </a:solidFill>
+                <a:latin typeface="Malgun Gothic"/>
+              </a:rPr>
+              <a:t> </a:t>
+            </a:r>
+            <a:r>
+              <a:rPr sz="1150" b="0" dirty="0" err="1">
+                <a:solidFill>
+                  <a:srgbClr val="34465C"/>
+                </a:solidFill>
+                <a:latin typeface="Malgun Gothic"/>
+              </a:rPr>
+              <a:t>있습니다</a:t>
+            </a:r>
+            <a:r>
+              <a:rPr sz="1150" b="0" dirty="0">
+                <a:solidFill>
+                  <a:srgbClr val="34465C"/>
+                </a:solidFill>
+                <a:latin typeface="Malgun Gothic"/>
+              </a:rPr>
+              <a:t>. </a:t>
+            </a:r>
+            <a:r>
+              <a:rPr sz="1150" b="0" dirty="0" err="1">
+                <a:solidFill>
+                  <a:srgbClr val="34465C"/>
+                </a:solidFill>
+                <a:latin typeface="Malgun Gothic"/>
+              </a:rPr>
+              <a:t>최종</a:t>
+            </a:r>
+            <a:r>
+              <a:rPr sz="1150" b="0" dirty="0">
+                <a:solidFill>
+                  <a:srgbClr val="34465C"/>
+                </a:solidFill>
+                <a:latin typeface="Malgun Gothic"/>
+              </a:rPr>
+              <a:t> </a:t>
+            </a:r>
+            <a:r>
+              <a:rPr sz="1150" b="0" dirty="0" err="1">
+                <a:solidFill>
+                  <a:srgbClr val="34465C"/>
+                </a:solidFill>
+                <a:latin typeface="Malgun Gothic"/>
+              </a:rPr>
+              <a:t>데이터</a:t>
+            </a:r>
+            <a:r>
+              <a:rPr sz="1150" b="0" dirty="0">
+                <a:solidFill>
+                  <a:srgbClr val="34465C"/>
+                </a:solidFill>
+                <a:latin typeface="Malgun Gothic"/>
+              </a:rPr>
+              <a:t> </a:t>
+            </a:r>
+            <a:r>
+              <a:rPr sz="1150" b="0" dirty="0" err="1">
+                <a:solidFill>
+                  <a:srgbClr val="34465C"/>
+                </a:solidFill>
+                <a:latin typeface="Malgun Gothic"/>
+              </a:rPr>
+              <a:t>정합성</a:t>
+            </a:r>
+            <a:r>
+              <a:rPr sz="1150" b="0" dirty="0">
+                <a:solidFill>
+                  <a:srgbClr val="34465C"/>
+                </a:solidFill>
+                <a:latin typeface="Malgun Gothic"/>
+              </a:rPr>
+              <a:t> </a:t>
+            </a:r>
+            <a:r>
+              <a:rPr sz="1150" b="0" dirty="0" err="1">
+                <a:solidFill>
+                  <a:srgbClr val="34465C"/>
+                </a:solidFill>
+                <a:latin typeface="Malgun Gothic"/>
+              </a:rPr>
+              <a:t>검사는</a:t>
+            </a:r>
+            <a:r>
+              <a:rPr sz="1150" b="0" dirty="0">
+                <a:solidFill>
+                  <a:srgbClr val="34465C"/>
+                </a:solidFill>
+                <a:latin typeface="Malgun Gothic"/>
+              </a:rPr>
+              <a:t> 4개 DB </a:t>
+            </a:r>
+            <a:r>
+              <a:rPr sz="1150" b="0" dirty="0" err="1">
+                <a:solidFill>
+                  <a:srgbClr val="34465C"/>
+                </a:solidFill>
+                <a:latin typeface="Malgun Gothic"/>
+              </a:rPr>
+              <a:t>모두</a:t>
+            </a:r>
+            <a:r>
+              <a:rPr sz="1150" b="0" dirty="0">
+                <a:solidFill>
+                  <a:srgbClr val="34465C"/>
+                </a:solidFill>
+                <a:latin typeface="Malgun Gothic"/>
+              </a:rPr>
+              <a:t> </a:t>
+            </a:r>
+            <a:r>
+              <a:rPr sz="1150" b="0" dirty="0" err="1">
+                <a:solidFill>
+                  <a:srgbClr val="34465C"/>
+                </a:solidFill>
+                <a:latin typeface="Malgun Gothic"/>
+              </a:rPr>
+              <a:t>위반</a:t>
+            </a:r>
+            <a:r>
+              <a:rPr sz="1150" b="0" dirty="0">
+                <a:solidFill>
+                  <a:srgbClr val="34465C"/>
+                </a:solidFill>
+                <a:latin typeface="Malgun Gothic"/>
+              </a:rPr>
+              <a:t> 0건이었습니다.</a:t>
             </a:r>
           </a:p>
         </p:txBody>
@@ -22388,7 +27216,7 @@
         <p:spPr>
           <a:xfrm>
             <a:off x="548640" y="3931920"/>
-            <a:ext cx="7680960" cy="914400"/>
+            <a:ext cx="7680960" cy="1134670"/>
           </a:xfrm>
           <a:prstGeom prst="rect">
             <a:avLst/>
@@ -22407,13 +27235,62 @@
               </a:spcAft>
             </a:pPr>
             <a:r>
-              <a:rPr sz="3400" b="1">
+              <a:rPr lang="en-US" sz="3400" b="1" dirty="0">
                 <a:solidFill>
                   <a:srgbClr val="FFFFFF"/>
                 </a:solidFill>
                 <a:latin typeface="Malgun Gothic"/>
               </a:rPr>
-              <a:t>MySQL — SSD v1 vs v2</a:t>
+              <a:t>Azure </a:t>
+            </a:r>
+            <a:r>
+              <a:rPr sz="3400" b="1" dirty="0">
+                <a:solidFill>
+                  <a:srgbClr val="FFFFFF"/>
+                </a:solidFill>
+                <a:latin typeface="Malgun Gothic"/>
+              </a:rPr>
+              <a:t>MySQL</a:t>
+            </a:r>
+            <a:r>
+              <a:rPr lang="en-US" sz="3400" b="1" dirty="0">
+                <a:solidFill>
+                  <a:srgbClr val="FFFFFF"/>
+                </a:solidFill>
+                <a:latin typeface="Malgun Gothic"/>
+              </a:rPr>
+              <a:t> Flexible</a:t>
+            </a:r>
+            <a:r>
+              <a:rPr sz="3400" b="1" dirty="0">
+                <a:solidFill>
+                  <a:srgbClr val="FFFFFF"/>
+                </a:solidFill>
+                <a:latin typeface="Malgun Gothic"/>
+              </a:rPr>
+              <a:t> </a:t>
+            </a:r>
+            <a:endParaRPr lang="en-US" sz="3400" b="1" dirty="0">
+              <a:solidFill>
+                <a:srgbClr val="FFFFFF"/>
+              </a:solidFill>
+              <a:latin typeface="Malgun Gothic"/>
+            </a:endParaRPr>
+          </a:p>
+          <a:p>
+            <a:pPr algn="l">
+              <a:spcAft>
+                <a:spcPts val="400"/>
+              </a:spcAft>
+            </a:pPr>
+            <a:r>
+              <a:rPr sz="3400" b="1" dirty="0">
+                <a:solidFill>
+                  <a:srgbClr val="FFFFFF"/>
+                </a:solidFill>
+                <a:latin typeface="Malgun Gothic"/>
+              </a:rPr>
+              <a:t>— SSD v1 vs v2</a:t>
             </a:r>
           </a:p>
         </p:txBody>
@@ -22426,7 +27303,7 @@
         </p:nvSpPr>
         <p:spPr>
           <a:xfrm>
-            <a:off x="548640" y="4754880"/>
+            <a:off x="548640" y="5133567"/>
             <a:ext cx="7498079" cy="457200"/>
           </a:xfrm>
           <a:prstGeom prst="rect">
@@ -23265,13 +28142,31 @@
                     <a:p>
                       <a:pPr algn="ctr"/>
                       <a:r>
-                        <a:rPr sz="1050">
+                        <a:rPr sz="1050" dirty="0">
                           <a:solidFill>
                             <a:srgbClr val="12233A"/>
                           </a:solidFill>
                           <a:latin typeface="Malgun Gothic"/>
                         </a:rPr>
-                        <a:t>E8ds_v5 → E16ds (8→16 vCore, 64GiB)</a:t>
+                        <a:t>E8ds_v5 → E16ds (8→16 </a:t>
+                      </a:r>
+                      <a:r>
+                        <a:rPr sz="1050" dirty="0" err="1">
+                          <a:solidFill>
+                            <a:srgbClr val="12233A"/>
+                          </a:solidFill>
+                          <a:latin typeface="Malgun Gothic"/>
+                        </a:rPr>
+                        <a:t>vCore</a:t>
+                      </a:r>
+                      <a:r>
+                        <a:rPr sz="1050" dirty="0">
+                          <a:solidFill>
+                            <a:srgbClr val="12233A"/>
+                          </a:solidFill>
+                          <a:latin typeface="Malgun Gothic"/>
+                        </a:rPr>
+                        <a:t>, 64GiB)</a:t>
                       </a:r>
                     </a:p>
                   </a:txBody>
@@ -23364,14 +28259,29 @@
                     <a:p>
                       <a:pPr algn="ctr"/>
                       <a:r>
-                        <a:rPr sz="1050">
+                        <a:rPr sz="1050" dirty="0">
                           <a:solidFill>
                             <a:srgbClr val="12233A"/>
                           </a:solidFill>
                           <a:latin typeface="Malgun Gothic"/>
                         </a:rPr>
-                        <a:t>8GiB로 고정</a:t>
+                        <a:t>8GiB로 </a:t>
                       </a:r>
+                      <a:r>
+                        <a:rPr sz="1050" dirty="0" err="1">
+                          <a:solidFill>
+                            <a:srgbClr val="12233A"/>
+                          </a:solidFill>
+                          <a:latin typeface="Malgun Gothic"/>
+                        </a:rPr>
+                        <a:t>고정</a:t>
+                      </a:r>
+                      <a:endParaRPr sz="1050" dirty="0">
+                        <a:solidFill>
+                          <a:srgbClr val="12233A"/>
+                        </a:solidFill>
+                        <a:latin typeface="Malgun Gothic"/>
+                      </a:endParaRPr>
                     </a:p>
                   </a:txBody>
                   <a:tcPr marL="54864" marR="54864" marT="18288" marB="18288" anchor="ctr">
@@ -23608,14 +28518,56 @@
                     <a:p>
                       <a:pPr algn="ctr"/>
                       <a:r>
-                        <a:rPr sz="1050">
+                        <a:rPr sz="1050" dirty="0" err="1">
                           <a:solidFill>
                             <a:srgbClr val="12233A"/>
                           </a:solidFill>
                           <a:latin typeface="Malgun Gothic"/>
                         </a:rPr>
-                        <a:t>구성 케이스: 8vCore+HA / 16vCore+HA / 16vCore 단독</a:t>
+                        <a:t>구성</a:t>
                       </a:r>
+                      <a:r>
+                        <a:rPr sz="1050" dirty="0">
+                          <a:solidFill>
+                            <a:srgbClr val="12233A"/>
+                          </a:solidFill>
+                          <a:latin typeface="Malgun Gothic"/>
+                        </a:rPr>
+                        <a:t> </a:t>
+                      </a:r>
+                      <a:r>
+                        <a:rPr sz="1050" dirty="0" err="1">
+                          <a:solidFill>
+                            <a:srgbClr val="12233A"/>
+                          </a:solidFill>
+                          <a:latin typeface="Malgun Gothic"/>
+                        </a:rPr>
+                        <a:t>케이스</a:t>
+                      </a:r>
+                      <a:r>
+                        <a:rPr sz="1050" dirty="0">
+                          <a:solidFill>
+                            <a:srgbClr val="12233A"/>
+                          </a:solidFill>
+                          <a:latin typeface="Malgun Gothic"/>
+                        </a:rPr>
+                        <a:t>: 8vCore+HA / 16vCore+HA / 16vCore </a:t>
+                      </a:r>
+                      <a:r>
+                        <a:rPr sz="1050" dirty="0" err="1">
+                          <a:solidFill>
+                            <a:srgbClr val="12233A"/>
+                          </a:solidFill>
+                          <a:latin typeface="Malgun Gothic"/>
+                        </a:rPr>
+                        <a:t>단독</a:t>
+                      </a:r>
+                      <a:endParaRPr sz="1050" dirty="0">
+                        <a:solidFill>
+                          <a:srgbClr val="12233A"/>
+                        </a:solidFill>
+                        <a:latin typeface="Malgun Gothic"/>
+                      </a:endParaRPr>
                     </a:p>
                   </a:txBody>
                   <a:tcPr marL="54864" marR="54864" marT="18288" marB="18288" anchor="ctr">
@@ -25037,14 +29989,47 @@
                     <a:p>
                       <a:pPr algn="l"/>
                       <a:r>
-                        <a:rPr sz="1050">
+                        <a:rPr sz="1050" dirty="0">
                           <a:solidFill>
                             <a:srgbClr val="12233A"/>
                           </a:solidFill>
                           <a:latin typeface="Malgun Gothic"/>
                         </a:rPr>
-                        <a:t>16vCore 단독 · 핫스팟</a:t>
+                        <a:t>16vCore </a:t>
                       </a:r>
+                      <a:r>
+                        <a:rPr sz="1050" dirty="0" err="1">
+                          <a:solidFill>
+                            <a:srgbClr val="12233A"/>
+                          </a:solidFill>
+                          <a:latin typeface="Malgun Gothic"/>
+                        </a:rPr>
+                        <a:t>단독</a:t>
+                      </a:r>
+                      <a:r>
+                        <a:rPr sz="1050" dirty="0">
+                          <a:solidFill>
+                            <a:srgbClr val="12233A"/>
+                          </a:solidFill>
+                          <a:latin typeface="Malgun Gothic"/>
+                        </a:rPr>
+                        <a:t> · </a:t>
+                      </a:r>
+                      <a:r>
+                        <a:rPr sz="1050" dirty="0" err="1">
+                          <a:solidFill>
+                            <a:srgbClr val="12233A"/>
+                          </a:solidFill>
+                          <a:latin typeface="Malgun Gothic"/>
+                        </a:rPr>
+                        <a:t>핫스팟</a:t>
+                      </a:r>
+                      <a:endParaRPr sz="1050" dirty="0">
+                        <a:solidFill>
+                          <a:srgbClr val="12233A"/>
+                        </a:solidFill>
+                        <a:latin typeface="Malgun Gothic"/>
+                      </a:endParaRPr>
                     </a:p>
                   </a:txBody>
                   <a:tcPr marL="54864" marR="54864" marT="18288" marB="18288" anchor="ctr">
@@ -25152,14 +30137,29 @@
                     <a:p>
                       <a:pPr algn="ctr"/>
                       <a:r>
-                        <a:rPr sz="1050">
+                        <a:rPr sz="1050" dirty="0">
                           <a:solidFill>
                             <a:srgbClr val="12233A"/>
                           </a:solidFill>
                           <a:latin typeface="Malgun Gothic"/>
                         </a:rPr>
-                        <a:t>v2 우세</a:t>
+                        <a:t>v2 </a:t>
                       </a:r>
+                      <a:r>
+                        <a:rPr sz="1050" dirty="0" err="1">
+                          <a:solidFill>
+                            <a:srgbClr val="12233A"/>
+                          </a:solidFill>
+                          <a:latin typeface="Malgun Gothic"/>
+                        </a:rPr>
+                        <a:t>우세</a:t>
+                      </a:r>
+                      <a:endParaRPr sz="1050" dirty="0">
+                        <a:solidFill>
+                          <a:srgbClr val="12233A"/>
+                        </a:solidFill>
+                        <a:latin typeface="Malgun Gothic"/>
+                      </a:endParaRPr>
                     </a:p>
                   </a:txBody>
                   <a:tcPr marL="54864" marR="54864" marT="18288" marB="18288" anchor="ctr">
